--- a/christine-brown-sports-law/Christine Brown Sports Law_October 22, 2026_Proposal.pptx
+++ b/christine-brown-sports-law/Christine Brown Sports Law_October 22, 2026_Proposal.pptx
@@ -6277,33 +6277,9 @@
           </a:p>
         </p:txBody>
       </p:sp>
-      <p:pic>
-        <p:nvPicPr>
-          <p:cNvPr id="83" name="Picture 82" descr="smb_team_logo.png"/>
-          <p:cNvPicPr>
-            <a:picLocks noChangeAspect="1"/>
-          </p:cNvPicPr>
-          <p:nvPr/>
-        </p:nvPicPr>
-        <p:blipFill>
-          <a:blip r:embed="rId2"/>
-          <a:stretch>
-            <a:fillRect/>
-          </a:stretch>
-        </p:blipFill>
-        <p:spPr>
-          <a:xfrm>
-            <a:off x="274320" y="4873752"/>
-            <a:ext cx="941832" cy="192024"/>
-          </a:xfrm>
-          <a:prstGeom prst="rect">
-            <a:avLst/>
-          </a:prstGeom>
-        </p:spPr>
-      </p:pic>
-      <p:sp>
-        <p:nvSpPr>
-          <p:cNvPr id="84" name="TextBox 83"/>
+      <p:sp>
+        <p:nvSpPr>
+          <p:cNvPr id="83" name="TextBox 82"/>
           <p:cNvSpPr txBox="1"/>
           <p:nvPr/>
         </p:nvSpPr>
@@ -6338,7 +6314,7 @@
       </p:sp>
       <p:sp>
         <p:nvSpPr>
-          <p:cNvPr id="85" name="TextBox 84"/>
+          <p:cNvPr id="84" name="TextBox 83"/>
           <p:cNvSpPr txBox="1"/>
           <p:nvPr/>
         </p:nvSpPr>
@@ -9239,33 +9215,9 @@
           </a:p>
         </p:txBody>
       </p:sp>
-      <p:pic>
-        <p:nvPicPr>
-          <p:cNvPr id="72" name="Picture 71" descr="smb_team_logo.png"/>
-          <p:cNvPicPr>
-            <a:picLocks noChangeAspect="1"/>
-          </p:cNvPicPr>
-          <p:nvPr/>
-        </p:nvPicPr>
-        <p:blipFill>
-          <a:blip r:embed="rId2"/>
-          <a:stretch>
-            <a:fillRect/>
-          </a:stretch>
-        </p:blipFill>
-        <p:spPr>
-          <a:xfrm>
-            <a:off x="274320" y="4873752"/>
-            <a:ext cx="941832" cy="192024"/>
-          </a:xfrm>
-          <a:prstGeom prst="rect">
-            <a:avLst/>
-          </a:prstGeom>
-        </p:spPr>
-      </p:pic>
-      <p:sp>
-        <p:nvSpPr>
-          <p:cNvPr id="73" name="TextBox 72"/>
+      <p:sp>
+        <p:nvSpPr>
+          <p:cNvPr id="72" name="TextBox 71"/>
           <p:cNvSpPr txBox="1"/>
           <p:nvPr/>
         </p:nvSpPr>
@@ -9300,7 +9252,7 @@
       </p:sp>
       <p:sp>
         <p:nvSpPr>
-          <p:cNvPr id="74" name="TextBox 73"/>
+          <p:cNvPr id="73" name="TextBox 72"/>
           <p:cNvSpPr txBox="1"/>
           <p:nvPr/>
         </p:nvSpPr>
@@ -10311,7 +10263,7 @@
                 </a:solidFill>
                 <a:latin typeface="Poppins"/>
               </a:rPr>
-              <a:t>WHAT YOU TOLD US</a:t>
+              <a:t>WHAT WE FOUND</a:t>
             </a:r>
           </a:p>
         </p:txBody>
@@ -10324,14 +10276,14 @@
         </p:nvSpPr>
         <p:spPr>
           <a:xfrm>
-            <a:off x="0" y="4261104"/>
-            <a:ext cx="9144000" cy="557784"/>
-          </a:xfrm>
-          <a:prstGeom prst="rect">
-            <a:avLst/>
-          </a:prstGeom>
-          <a:solidFill>
-            <a:srgbClr val="002A41"/>
+            <a:off x="4572000" y="1335024"/>
+            <a:ext cx="4297680" cy="265176"/>
+          </a:xfrm>
+          <a:prstGeom prst="rect">
+            <a:avLst/>
+          </a:prstGeom>
+          <a:solidFill>
+            <a:srgbClr val="EEF2F5"/>
           </a:solidFill>
           <a:ln>
             <a:solidFill>
@@ -10369,8 +10321,8 @@
         </p:nvSpPr>
         <p:spPr>
           <a:xfrm>
-            <a:off x="0" y="4261104"/>
-            <a:ext cx="9144000" cy="18288"/>
+            <a:off x="4700016" y="1417320"/>
+            <a:ext cx="91440" cy="91440"/>
           </a:xfrm>
           <a:prstGeom prst="rect">
             <a:avLst/>
@@ -10414,8 +10366,8 @@
         </p:nvSpPr>
         <p:spPr>
           <a:xfrm>
-            <a:off x="640080" y="4407408"/>
-            <a:ext cx="7863840" cy="310896"/>
+            <a:off x="4901184" y="1385316"/>
+            <a:ext cx="868680" cy="164592"/>
           </a:xfrm>
           <a:prstGeom prst="rect">
             <a:avLst/>
@@ -10428,35 +10380,70 @@
           </a:bodyPr>
           <a:lstStyle/>
           <a:p>
-            <a:pPr algn="ctr"/>
-            <a:r>
-              <a:rPr sz="950" b="0" i="0">
-                <a:solidFill>
-                  <a:srgbClr val="C2D8E6"/>
+            <a:pPr algn="l"/>
+            <a:r>
+              <a:rPr sz="800" b="1" i="0">
+                <a:solidFill>
+                  <a:srgbClr val="003A59"/>
                 </a:solidFill>
                 <a:latin typeface="Poppins"/>
               </a:rPr>
-              <a:t>"The credentials, the team, and the reputation are already in place — what is missing is the system that lets the firm run on them instead of on Christine alone."</a:t>
-            </a:r>
-          </a:p>
-        </p:txBody>
-      </p:sp>
-      <p:sp>
-        <p:nvSpPr>
-          <p:cNvPr id="30" name="Rectangle 29"/>
+              <a:t>Repetitive work</a:t>
+            </a:r>
+          </a:p>
+        </p:txBody>
+      </p:sp>
+      <p:sp>
+        <p:nvSpPr>
+          <p:cNvPr id="30" name="TextBox 29"/>
+          <p:cNvSpPr txBox="1"/>
+          <p:nvPr/>
+        </p:nvSpPr>
+        <p:spPr>
+          <a:xfrm>
+            <a:off x="5815584" y="1385316"/>
+            <a:ext cx="2926080" cy="164592"/>
+          </a:xfrm>
+          <a:prstGeom prst="rect">
+            <a:avLst/>
+          </a:prstGeom>
+          <a:noFill/>
+        </p:spPr>
+        <p:txBody>
+          <a:bodyPr wrap="square">
+            <a:normAutofit/>
+          </a:bodyPr>
+          <a:lstStyle/>
+          <a:p>
+            <a:pPr algn="l"/>
+            <a:r>
+              <a:rPr sz="800" b="0" i="0">
+                <a:solidFill>
+                  <a:srgbClr val="4A5C6B"/>
+                </a:solidFill>
+                <a:latin typeface="Poppins"/>
+              </a:rPr>
+              <a:t>Monthly AI skills, rolled out to all 12 users</a:t>
+            </a:r>
+          </a:p>
+        </p:txBody>
+      </p:sp>
+      <p:sp>
+        <p:nvSpPr>
+          <p:cNvPr id="31" name="Rectangle 30"/>
           <p:cNvSpPr/>
           <p:nvPr/>
         </p:nvSpPr>
         <p:spPr>
           <a:xfrm>
-            <a:off x="0" y="4818888"/>
-            <a:ext cx="9144000" cy="320040"/>
-          </a:xfrm>
-          <a:prstGeom prst="rect">
-            <a:avLst/>
-          </a:prstGeom>
-          <a:solidFill>
-            <a:srgbClr val="003A59"/>
+            <a:off x="4572000" y="1883664"/>
+            <a:ext cx="4297680" cy="265176"/>
+          </a:xfrm>
+          <a:prstGeom prst="rect">
+            <a:avLst/>
+          </a:prstGeom>
+          <a:solidFill>
+            <a:srgbClr val="FFFFFF"/>
           </a:solidFill>
           <a:ln>
             <a:solidFill>
@@ -10486,40 +10473,61 @@
           </a:p>
         </p:txBody>
       </p:sp>
-      <p:pic>
-        <p:nvPicPr>
-          <p:cNvPr id="31" name="Picture 30" descr="smb_team_logo.png"/>
-          <p:cNvPicPr>
-            <a:picLocks noChangeAspect="1"/>
-          </p:cNvPicPr>
-          <p:nvPr/>
-        </p:nvPicPr>
-        <p:blipFill>
-          <a:blip r:embed="rId2"/>
-          <a:stretch>
-            <a:fillRect/>
-          </a:stretch>
-        </p:blipFill>
-        <p:spPr>
-          <a:xfrm>
-            <a:off x="274320" y="4873752"/>
-            <a:ext cx="941832" cy="192024"/>
-          </a:xfrm>
-          <a:prstGeom prst="rect">
-            <a:avLst/>
-          </a:prstGeom>
-        </p:spPr>
-      </p:pic>
-      <p:sp>
-        <p:nvSpPr>
-          <p:cNvPr id="32" name="TextBox 31"/>
+      <p:sp>
+        <p:nvSpPr>
+          <p:cNvPr id="32" name="Rectangle 31"/>
+          <p:cNvSpPr/>
+          <p:nvPr/>
+        </p:nvSpPr>
+        <p:spPr>
+          <a:xfrm>
+            <a:off x="4700016" y="1965960"/>
+            <a:ext cx="91440" cy="91440"/>
+          </a:xfrm>
+          <a:prstGeom prst="rect">
+            <a:avLst/>
+          </a:prstGeom>
+          <a:solidFill>
+            <a:srgbClr val="0091C9"/>
+          </a:solidFill>
+          <a:ln>
+            <a:solidFill>
+              <a:srgbClr val="FFFFFF"/>
+            </a:solidFill>
+          </a:ln>
+        </p:spPr>
+        <p:style>
+          <a:lnRef idx="1">
+            <a:schemeClr val="accent1"/>
+          </a:lnRef>
+          <a:fillRef idx="3">
+            <a:schemeClr val="accent1"/>
+          </a:fillRef>
+          <a:effectRef idx="2">
+            <a:schemeClr val="accent1"/>
+          </a:effectRef>
+          <a:fontRef idx="minor">
+            <a:schemeClr val="lt1"/>
+          </a:fontRef>
+        </p:style>
+        <p:txBody>
+          <a:bodyPr rtlCol="0" anchor="ctr"/>
+          <a:lstStyle/>
+          <a:p>
+            <a:pPr algn="ctr"/>
+          </a:p>
+        </p:txBody>
+      </p:sp>
+      <p:sp>
+        <p:nvSpPr>
+          <p:cNvPr id="33" name="TextBox 32"/>
           <p:cNvSpPr txBox="1"/>
           <p:nvPr/>
         </p:nvSpPr>
         <p:spPr>
           <a:xfrm>
-            <a:off x="1417320" y="4892040"/>
-            <a:ext cx="4937760" cy="182880"/>
+            <a:off x="4901184" y="1933956"/>
+            <a:ext cx="868680" cy="164592"/>
           </a:xfrm>
           <a:prstGeom prst="rect">
             <a:avLst/>
@@ -10534,6 +10542,406 @@
           <a:p>
             <a:pPr algn="l"/>
             <a:r>
+              <a:rPr sz="800" b="1" i="0">
+                <a:solidFill>
+                  <a:srgbClr val="003A59"/>
+                </a:solidFill>
+                <a:latin typeface="Poppins"/>
+              </a:rPr>
+              <a:t>Escalations</a:t>
+            </a:r>
+          </a:p>
+        </p:txBody>
+      </p:sp>
+      <p:sp>
+        <p:nvSpPr>
+          <p:cNvPr id="34" name="TextBox 33"/>
+          <p:cNvSpPr txBox="1"/>
+          <p:nvPr/>
+        </p:nvSpPr>
+        <p:spPr>
+          <a:xfrm>
+            <a:off x="5815584" y="1933956"/>
+            <a:ext cx="2926080" cy="164592"/>
+          </a:xfrm>
+          <a:prstGeom prst="rect">
+            <a:avLst/>
+          </a:prstGeom>
+          <a:noFill/>
+        </p:spPr>
+        <p:txBody>
+          <a:bodyPr wrap="square">
+            <a:normAutofit/>
+          </a:bodyPr>
+          <a:lstStyle/>
+          <a:p>
+            <a:pPr algn="l"/>
+            <a:r>
+              <a:rPr sz="800" b="0" i="0">
+                <a:solidFill>
+                  <a:srgbClr val="4A5C6B"/>
+                </a:solidFill>
+                <a:latin typeface="Poppins"/>
+              </a:rPr>
+              <a:t>FCOO builds rhythm + role-level accountability</a:t>
+            </a:r>
+          </a:p>
+        </p:txBody>
+      </p:sp>
+      <p:sp>
+        <p:nvSpPr>
+          <p:cNvPr id="35" name="Rectangle 34"/>
+          <p:cNvSpPr/>
+          <p:nvPr/>
+        </p:nvSpPr>
+        <p:spPr>
+          <a:xfrm>
+            <a:off x="4572000" y="2432304"/>
+            <a:ext cx="4297680" cy="265176"/>
+          </a:xfrm>
+          <a:prstGeom prst="rect">
+            <a:avLst/>
+          </a:prstGeom>
+          <a:solidFill>
+            <a:srgbClr val="EEF2F5"/>
+          </a:solidFill>
+          <a:ln>
+            <a:solidFill>
+              <a:srgbClr val="FFFFFF"/>
+            </a:solidFill>
+          </a:ln>
+        </p:spPr>
+        <p:style>
+          <a:lnRef idx="1">
+            <a:schemeClr val="accent1"/>
+          </a:lnRef>
+          <a:fillRef idx="3">
+            <a:schemeClr val="accent1"/>
+          </a:fillRef>
+          <a:effectRef idx="2">
+            <a:schemeClr val="accent1"/>
+          </a:effectRef>
+          <a:fontRef idx="minor">
+            <a:schemeClr val="lt1"/>
+          </a:fontRef>
+        </p:style>
+        <p:txBody>
+          <a:bodyPr rtlCol="0" anchor="ctr"/>
+          <a:lstStyle/>
+          <a:p>
+            <a:pPr algn="ctr"/>
+          </a:p>
+        </p:txBody>
+      </p:sp>
+      <p:sp>
+        <p:nvSpPr>
+          <p:cNvPr id="36" name="Rectangle 35"/>
+          <p:cNvSpPr/>
+          <p:nvPr/>
+        </p:nvSpPr>
+        <p:spPr>
+          <a:xfrm>
+            <a:off x="4700016" y="2514600"/>
+            <a:ext cx="91440" cy="91440"/>
+          </a:xfrm>
+          <a:prstGeom prst="rect">
+            <a:avLst/>
+          </a:prstGeom>
+          <a:solidFill>
+            <a:srgbClr val="0091C9"/>
+          </a:solidFill>
+          <a:ln>
+            <a:solidFill>
+              <a:srgbClr val="FFFFFF"/>
+            </a:solidFill>
+          </a:ln>
+        </p:spPr>
+        <p:style>
+          <a:lnRef idx="1">
+            <a:schemeClr val="accent1"/>
+          </a:lnRef>
+          <a:fillRef idx="3">
+            <a:schemeClr val="accent1"/>
+          </a:fillRef>
+          <a:effectRef idx="2">
+            <a:schemeClr val="accent1"/>
+          </a:effectRef>
+          <a:fontRef idx="minor">
+            <a:schemeClr val="lt1"/>
+          </a:fontRef>
+        </p:style>
+        <p:txBody>
+          <a:bodyPr rtlCol="0" anchor="ctr"/>
+          <a:lstStyle/>
+          <a:p>
+            <a:pPr algn="ctr"/>
+          </a:p>
+        </p:txBody>
+      </p:sp>
+      <p:sp>
+        <p:nvSpPr>
+          <p:cNvPr id="37" name="TextBox 36"/>
+          <p:cNvSpPr txBox="1"/>
+          <p:nvPr/>
+        </p:nvSpPr>
+        <p:spPr>
+          <a:xfrm>
+            <a:off x="4901184" y="2482596"/>
+            <a:ext cx="868680" cy="164592"/>
+          </a:xfrm>
+          <a:prstGeom prst="rect">
+            <a:avLst/>
+          </a:prstGeom>
+          <a:noFill/>
+        </p:spPr>
+        <p:txBody>
+          <a:bodyPr wrap="square">
+            <a:normAutofit/>
+          </a:bodyPr>
+          <a:lstStyle/>
+          <a:p>
+            <a:pPr algn="l"/>
+            <a:r>
+              <a:rPr sz="800" b="1" i="0">
+                <a:solidFill>
+                  <a:srgbClr val="003A59"/>
+                </a:solidFill>
+                <a:latin typeface="Poppins"/>
+              </a:rPr>
+              <a:t>Follow-up gaps</a:t>
+            </a:r>
+          </a:p>
+        </p:txBody>
+      </p:sp>
+      <p:sp>
+        <p:nvSpPr>
+          <p:cNvPr id="38" name="TextBox 37"/>
+          <p:cNvSpPr txBox="1"/>
+          <p:nvPr/>
+        </p:nvSpPr>
+        <p:spPr>
+          <a:xfrm>
+            <a:off x="5815584" y="2482596"/>
+            <a:ext cx="2926080" cy="164592"/>
+          </a:xfrm>
+          <a:prstGeom prst="rect">
+            <a:avLst/>
+          </a:prstGeom>
+          <a:noFill/>
+        </p:spPr>
+        <p:txBody>
+          <a:bodyPr wrap="square">
+            <a:normAutofit/>
+          </a:bodyPr>
+          <a:lstStyle/>
+          <a:p>
+            <a:pPr algn="l"/>
+            <a:r>
+              <a:rPr sz="800" b="0" i="0">
+                <a:solidFill>
+                  <a:srgbClr val="4A5C6B"/>
+                </a:solidFill>
+                <a:latin typeface="Poppins"/>
+              </a:rPr>
+              <a:t>Defined inquiry process, built as an automation</a:t>
+            </a:r>
+          </a:p>
+        </p:txBody>
+      </p:sp>
+      <p:sp>
+        <p:nvSpPr>
+          <p:cNvPr id="39" name="Rectangle 38"/>
+          <p:cNvSpPr/>
+          <p:nvPr/>
+        </p:nvSpPr>
+        <p:spPr>
+          <a:xfrm>
+            <a:off x="0" y="4261104"/>
+            <a:ext cx="9144000" cy="557784"/>
+          </a:xfrm>
+          <a:prstGeom prst="rect">
+            <a:avLst/>
+          </a:prstGeom>
+          <a:solidFill>
+            <a:srgbClr val="002A41"/>
+          </a:solidFill>
+          <a:ln>
+            <a:solidFill>
+              <a:srgbClr val="FFFFFF"/>
+            </a:solidFill>
+          </a:ln>
+        </p:spPr>
+        <p:style>
+          <a:lnRef idx="1">
+            <a:schemeClr val="accent1"/>
+          </a:lnRef>
+          <a:fillRef idx="3">
+            <a:schemeClr val="accent1"/>
+          </a:fillRef>
+          <a:effectRef idx="2">
+            <a:schemeClr val="accent1"/>
+          </a:effectRef>
+          <a:fontRef idx="minor">
+            <a:schemeClr val="lt1"/>
+          </a:fontRef>
+        </p:style>
+        <p:txBody>
+          <a:bodyPr rtlCol="0" anchor="ctr"/>
+          <a:lstStyle/>
+          <a:p>
+            <a:pPr algn="ctr"/>
+          </a:p>
+        </p:txBody>
+      </p:sp>
+      <p:sp>
+        <p:nvSpPr>
+          <p:cNvPr id="40" name="Rectangle 39"/>
+          <p:cNvSpPr/>
+          <p:nvPr/>
+        </p:nvSpPr>
+        <p:spPr>
+          <a:xfrm>
+            <a:off x="0" y="4261104"/>
+            <a:ext cx="9144000" cy="18288"/>
+          </a:xfrm>
+          <a:prstGeom prst="rect">
+            <a:avLst/>
+          </a:prstGeom>
+          <a:solidFill>
+            <a:srgbClr val="69CD2B"/>
+          </a:solidFill>
+          <a:ln>
+            <a:solidFill>
+              <a:srgbClr val="FFFFFF"/>
+            </a:solidFill>
+          </a:ln>
+        </p:spPr>
+        <p:style>
+          <a:lnRef idx="1">
+            <a:schemeClr val="accent1"/>
+          </a:lnRef>
+          <a:fillRef idx="3">
+            <a:schemeClr val="accent1"/>
+          </a:fillRef>
+          <a:effectRef idx="2">
+            <a:schemeClr val="accent1"/>
+          </a:effectRef>
+          <a:fontRef idx="minor">
+            <a:schemeClr val="lt1"/>
+          </a:fontRef>
+        </p:style>
+        <p:txBody>
+          <a:bodyPr rtlCol="0" anchor="ctr"/>
+          <a:lstStyle/>
+          <a:p>
+            <a:pPr algn="ctr"/>
+          </a:p>
+        </p:txBody>
+      </p:sp>
+      <p:sp>
+        <p:nvSpPr>
+          <p:cNvPr id="41" name="TextBox 40"/>
+          <p:cNvSpPr txBox="1"/>
+          <p:nvPr/>
+        </p:nvSpPr>
+        <p:spPr>
+          <a:xfrm>
+            <a:off x="640080" y="4407408"/>
+            <a:ext cx="7863840" cy="310896"/>
+          </a:xfrm>
+          <a:prstGeom prst="rect">
+            <a:avLst/>
+          </a:prstGeom>
+          <a:noFill/>
+        </p:spPr>
+        <p:txBody>
+          <a:bodyPr wrap="square">
+            <a:normAutofit/>
+          </a:bodyPr>
+          <a:lstStyle/>
+          <a:p>
+            <a:pPr algn="ctr"/>
+            <a:r>
+              <a:rPr sz="950" b="0" i="0">
+                <a:solidFill>
+                  <a:srgbClr val="C2D8E6"/>
+                </a:solidFill>
+                <a:latin typeface="Poppins"/>
+              </a:rPr>
+              <a:t>"The credentials, the team, and the reputation are already in place — what is missing is the system that lets the firm run on them instead of on Christine alone."</a:t>
+            </a:r>
+          </a:p>
+        </p:txBody>
+      </p:sp>
+      <p:sp>
+        <p:nvSpPr>
+          <p:cNvPr id="42" name="Rectangle 41"/>
+          <p:cNvSpPr/>
+          <p:nvPr/>
+        </p:nvSpPr>
+        <p:spPr>
+          <a:xfrm>
+            <a:off x="0" y="4818888"/>
+            <a:ext cx="9144000" cy="320040"/>
+          </a:xfrm>
+          <a:prstGeom prst="rect">
+            <a:avLst/>
+          </a:prstGeom>
+          <a:solidFill>
+            <a:srgbClr val="003A59"/>
+          </a:solidFill>
+          <a:ln>
+            <a:solidFill>
+              <a:srgbClr val="FFFFFF"/>
+            </a:solidFill>
+          </a:ln>
+        </p:spPr>
+        <p:style>
+          <a:lnRef idx="1">
+            <a:schemeClr val="accent1"/>
+          </a:lnRef>
+          <a:fillRef idx="3">
+            <a:schemeClr val="accent1"/>
+          </a:fillRef>
+          <a:effectRef idx="2">
+            <a:schemeClr val="accent1"/>
+          </a:effectRef>
+          <a:fontRef idx="minor">
+            <a:schemeClr val="lt1"/>
+          </a:fontRef>
+        </p:style>
+        <p:txBody>
+          <a:bodyPr rtlCol="0" anchor="ctr"/>
+          <a:lstStyle/>
+          <a:p>
+            <a:pPr algn="ctr"/>
+          </a:p>
+        </p:txBody>
+      </p:sp>
+      <p:sp>
+        <p:nvSpPr>
+          <p:cNvPr id="43" name="TextBox 42"/>
+          <p:cNvSpPr txBox="1"/>
+          <p:nvPr/>
+        </p:nvSpPr>
+        <p:spPr>
+          <a:xfrm>
+            <a:off x="1417320" y="4892040"/>
+            <a:ext cx="4937760" cy="182880"/>
+          </a:xfrm>
+          <a:prstGeom prst="rect">
+            <a:avLst/>
+          </a:prstGeom>
+          <a:noFill/>
+        </p:spPr>
+        <p:txBody>
+          <a:bodyPr wrap="square">
+            <a:normAutofit/>
+          </a:bodyPr>
+          <a:lstStyle/>
+          <a:p>
+            <a:pPr algn="l"/>
+            <a:r>
               <a:rPr sz="700" b="0" i="0">
                 <a:solidFill>
                   <a:srgbClr val="8FB2C6"/>
@@ -10547,7 +10955,7 @@
       </p:sp>
       <p:sp>
         <p:nvSpPr>
-          <p:cNvPr id="33" name="TextBox 32"/>
+          <p:cNvPr id="44" name="TextBox 43"/>
           <p:cNvSpPr txBox="1"/>
           <p:nvPr/>
         </p:nvSpPr>

--- a/christine-brown-sports-law/Christine Brown Sports Law_October 22, 2026_Proposal.pptx
+++ b/christine-brown-sports-law/Christine Brown Sports Law_October 22, 2026_Proposal.pptx
@@ -3242,7 +3242,7 @@
         <p:spPr>
           <a:xfrm>
             <a:off x="292608" y="182880"/>
-            <a:ext cx="5486400" cy="164592"/>
+            <a:ext cx="6309360" cy="164592"/>
           </a:xfrm>
           <a:prstGeom prst="rect">
             <a:avLst/>
@@ -3251,7 +3251,7 @@
         </p:spPr>
         <p:txBody>
           <a:bodyPr wrap="square">
-            <a:normAutofit/>
+            <a:noAutofit/>
           </a:bodyPr>
           <a:lstStyle/>
           <a:p>
@@ -3276,8 +3276,8 @@
         </p:nvSpPr>
         <p:spPr>
           <a:xfrm>
-            <a:off x="292608" y="365760"/>
-            <a:ext cx="6309360" cy="365760"/>
+            <a:off x="292608" y="384048"/>
+            <a:ext cx="6309360" cy="402336"/>
           </a:xfrm>
           <a:prstGeom prst="rect">
             <a:avLst/>
@@ -3285,14 +3285,14 @@
           <a:noFill/>
         </p:spPr>
         <p:txBody>
-          <a:bodyPr wrap="square">
-            <a:normAutofit/>
+          <a:bodyPr wrap="square" anchor="ctr">
+            <a:noAutofit/>
           </a:bodyPr>
           <a:lstStyle/>
           <a:p>
             <a:pPr algn="l"/>
             <a:r>
-              <a:rPr sz="2000" b="1" i="0">
+              <a:rPr sz="1850" b="1" i="0">
                 <a:solidFill>
                   <a:srgbClr val="FFFFFF"/>
                 </a:solidFill>
@@ -3366,7 +3366,7 @@
         </p:spPr>
         <p:txBody>
           <a:bodyPr wrap="square">
-            <a:normAutofit/>
+            <a:noAutofit/>
           </a:bodyPr>
           <a:lstStyle/>
           <a:p>
@@ -3401,7 +3401,7 @@
         </p:spPr>
         <p:txBody>
           <a:bodyPr wrap="square">
-            <a:normAutofit/>
+            <a:noAutofit/>
           </a:bodyPr>
           <a:lstStyle/>
           <a:p>
@@ -3436,7 +3436,7 @@
         </p:spPr>
         <p:txBody>
           <a:bodyPr wrap="square">
-            <a:normAutofit/>
+            <a:noAutofit/>
           </a:bodyPr>
           <a:lstStyle/>
           <a:p>
@@ -3561,7 +3561,7 @@
         </p:spPr>
         <p:txBody>
           <a:bodyPr wrap="square">
-            <a:normAutofit/>
+            <a:noAutofit/>
           </a:bodyPr>
           <a:lstStyle/>
           <a:p>
@@ -3639,7 +3639,7 @@
         </p:spPr>
         <p:txBody>
           <a:bodyPr wrap="square">
-            <a:normAutofit/>
+            <a:noAutofit/>
           </a:bodyPr>
           <a:lstStyle/>
           <a:p>
@@ -3674,7 +3674,7 @@
         </p:spPr>
         <p:txBody>
           <a:bodyPr wrap="square">
-            <a:normAutofit/>
+            <a:noAutofit/>
           </a:bodyPr>
           <a:lstStyle/>
           <a:p>
@@ -3799,7 +3799,7 @@
         </p:spPr>
         <p:txBody>
           <a:bodyPr wrap="square">
-            <a:normAutofit/>
+            <a:noAutofit/>
           </a:bodyPr>
           <a:lstStyle/>
           <a:p>
@@ -3877,7 +3877,7 @@
         </p:spPr>
         <p:txBody>
           <a:bodyPr wrap="square">
-            <a:normAutofit/>
+            <a:noAutofit/>
           </a:bodyPr>
           <a:lstStyle/>
           <a:p>
@@ -3912,7 +3912,7 @@
         </p:spPr>
         <p:txBody>
           <a:bodyPr wrap="square">
-            <a:normAutofit/>
+            <a:noAutofit/>
           </a:bodyPr>
           <a:lstStyle/>
           <a:p>
@@ -4037,7 +4037,7 @@
         </p:spPr>
         <p:txBody>
           <a:bodyPr wrap="square">
-            <a:normAutofit/>
+            <a:noAutofit/>
           </a:bodyPr>
           <a:lstStyle/>
           <a:p>
@@ -4115,7 +4115,7 @@
         </p:spPr>
         <p:txBody>
           <a:bodyPr wrap="square">
-            <a:normAutofit/>
+            <a:noAutofit/>
           </a:bodyPr>
           <a:lstStyle/>
           <a:p>
@@ -4150,7 +4150,7 @@
         </p:spPr>
         <p:txBody>
           <a:bodyPr wrap="square">
-            <a:normAutofit/>
+            <a:noAutofit/>
           </a:bodyPr>
           <a:lstStyle/>
           <a:p>
@@ -4275,7 +4275,7 @@
         </p:spPr>
         <p:txBody>
           <a:bodyPr wrap="square">
-            <a:normAutofit/>
+            <a:noAutofit/>
           </a:bodyPr>
           <a:lstStyle/>
           <a:p>
@@ -4353,7 +4353,7 @@
         </p:spPr>
         <p:txBody>
           <a:bodyPr wrap="square">
-            <a:normAutofit/>
+            <a:noAutofit/>
           </a:bodyPr>
           <a:lstStyle/>
           <a:p>
@@ -4388,7 +4388,7 @@
         </p:spPr>
         <p:txBody>
           <a:bodyPr wrap="square">
-            <a:normAutofit/>
+            <a:noAutofit/>
           </a:bodyPr>
           <a:lstStyle/>
           <a:p>
@@ -4423,7 +4423,7 @@
         </p:spPr>
         <p:txBody>
           <a:bodyPr wrap="square">
-            <a:normAutofit/>
+            <a:noAutofit/>
           </a:bodyPr>
           <a:lstStyle/>
           <a:p>
@@ -4661,7 +4661,7 @@
         </p:spPr>
         <p:txBody>
           <a:bodyPr wrap="square">
-            <a:normAutofit/>
+            <a:noAutofit/>
           </a:bodyPr>
           <a:lstStyle/>
           <a:p>
@@ -4899,7 +4899,7 @@
         </p:spPr>
         <p:txBody>
           <a:bodyPr wrap="square">
-            <a:normAutofit/>
+            <a:noAutofit/>
           </a:bodyPr>
           <a:lstStyle/>
           <a:p>
@@ -5137,7 +5137,7 @@
         </p:spPr>
         <p:txBody>
           <a:bodyPr wrap="square">
-            <a:normAutofit/>
+            <a:noAutofit/>
           </a:bodyPr>
           <a:lstStyle/>
           <a:p>
@@ -5375,7 +5375,7 @@
         </p:spPr>
         <p:txBody>
           <a:bodyPr wrap="square">
-            <a:normAutofit/>
+            <a:noAutofit/>
           </a:bodyPr>
           <a:lstStyle/>
           <a:p>
@@ -5401,7 +5401,7 @@
         <p:spPr>
           <a:xfrm>
             <a:off x="4828032" y="2011680"/>
-            <a:ext cx="4041648" cy="676656"/>
+            <a:ext cx="4041648" cy="749808"/>
           </a:xfrm>
           <a:prstGeom prst="rect">
             <a:avLst/>
@@ -5446,7 +5446,7 @@
         <p:spPr>
           <a:xfrm>
             <a:off x="4828032" y="2011680"/>
-            <a:ext cx="36576" cy="676656"/>
+            <a:ext cx="36576" cy="749808"/>
           </a:xfrm>
           <a:prstGeom prst="rect">
             <a:avLst/>
@@ -5490,8 +5490,8 @@
         </p:nvSpPr>
         <p:spPr>
           <a:xfrm>
-            <a:off x="5010912" y="2130552"/>
-            <a:ext cx="3675887" cy="146304"/>
+            <a:off x="5010912" y="2103120"/>
+            <a:ext cx="2578607" cy="164592"/>
           </a:xfrm>
           <a:prstGeom prst="rect">
             <a:avLst/>
@@ -5500,7 +5500,7 @@
         </p:spPr>
         <p:txBody>
           <a:bodyPr wrap="square">
-            <a:normAutofit/>
+            <a:noAutofit/>
           </a:bodyPr>
           <a:lstStyle/>
           <a:p>
@@ -5525,8 +5525,8 @@
         </p:nvSpPr>
         <p:spPr>
           <a:xfrm>
-            <a:off x="5010912" y="2322576"/>
-            <a:ext cx="3675887" cy="310896"/>
+            <a:off x="5010912" y="2258568"/>
+            <a:ext cx="2578607" cy="274320"/>
           </a:xfrm>
           <a:prstGeom prst="rect">
             <a:avLst/>
@@ -5535,19 +5535,19 @@
         </p:spPr>
         <p:txBody>
           <a:bodyPr wrap="square">
-            <a:normAutofit/>
+            <a:noAutofit/>
           </a:bodyPr>
           <a:lstStyle/>
           <a:p>
             <a:pPr algn="l"/>
             <a:r>
-              <a:rPr sz="1000" b="1" i="0">
+              <a:rPr sz="1050" b="1" i="0">
                 <a:solidFill>
                   <a:srgbClr val="FFFFFF"/>
                 </a:solidFill>
                 <a:latin typeface="Poppins"/>
               </a:rPr>
-              <a:t>Stage 4: Small Business Manager  →  Goal: Stage 6, Law Firm Owner</a:t>
+              <a:t>Stage 4: Small Business Manager</a:t>
             </a:r>
           </a:p>
         </p:txBody>
@@ -5560,6 +5560,301 @@
         </p:nvSpPr>
         <p:spPr>
           <a:xfrm>
+            <a:off x="5010912" y="2496312"/>
+            <a:ext cx="2578607" cy="201168"/>
+          </a:xfrm>
+          <a:prstGeom prst="rect">
+            <a:avLst/>
+          </a:prstGeom>
+          <a:noFill/>
+        </p:spPr>
+        <p:txBody>
+          <a:bodyPr wrap="square">
+            <a:noAutofit/>
+          </a:bodyPr>
+          <a:lstStyle/>
+          <a:p>
+            <a:pPr algn="l"/>
+            <a:r>
+              <a:rPr sz="850" b="0" i="0">
+                <a:solidFill>
+                  <a:srgbClr val="B8CDDD"/>
+                </a:solidFill>
+                <a:latin typeface="Poppins"/>
+              </a:rPr>
+              <a:t>→  Goal: Stage 6, Law Firm Owner</a:t>
+            </a:r>
+          </a:p>
+        </p:txBody>
+      </p:sp>
+      <p:sp>
+        <p:nvSpPr>
+          <p:cNvPr id="65" name="Rectangle 64"/>
+          <p:cNvSpPr/>
+          <p:nvPr/>
+        </p:nvSpPr>
+        <p:spPr>
+          <a:xfrm>
+            <a:off x="7744968" y="2560320"/>
+            <a:ext cx="118872" cy="73152"/>
+          </a:xfrm>
+          <a:prstGeom prst="rect">
+            <a:avLst/>
+          </a:prstGeom>
+          <a:solidFill>
+            <a:srgbClr val="4F8F2A"/>
+          </a:solidFill>
+          <a:ln>
+            <a:noFill/>
+          </a:ln>
+        </p:spPr>
+        <p:style>
+          <a:lnRef idx="1">
+            <a:schemeClr val="accent1"/>
+          </a:lnRef>
+          <a:fillRef idx="3">
+            <a:schemeClr val="accent1"/>
+          </a:fillRef>
+          <a:effectRef idx="2">
+            <a:schemeClr val="accent1"/>
+          </a:effectRef>
+          <a:fontRef idx="minor">
+            <a:schemeClr val="lt1"/>
+          </a:fontRef>
+        </p:style>
+        <p:txBody>
+          <a:bodyPr rtlCol="0" anchor="ctr"/>
+          <a:lstStyle/>
+          <a:p>
+            <a:pPr algn="ctr"/>
+          </a:p>
+        </p:txBody>
+      </p:sp>
+      <p:sp>
+        <p:nvSpPr>
+          <p:cNvPr id="66" name="Rectangle 65"/>
+          <p:cNvSpPr/>
+          <p:nvPr/>
+        </p:nvSpPr>
+        <p:spPr>
+          <a:xfrm>
+            <a:off x="7909560" y="2487168"/>
+            <a:ext cx="118872" cy="146304"/>
+          </a:xfrm>
+          <a:prstGeom prst="rect">
+            <a:avLst/>
+          </a:prstGeom>
+          <a:solidFill>
+            <a:srgbClr val="4F8F2A"/>
+          </a:solidFill>
+          <a:ln>
+            <a:noFill/>
+          </a:ln>
+        </p:spPr>
+        <p:style>
+          <a:lnRef idx="1">
+            <a:schemeClr val="accent1"/>
+          </a:lnRef>
+          <a:fillRef idx="3">
+            <a:schemeClr val="accent1"/>
+          </a:fillRef>
+          <a:effectRef idx="2">
+            <a:schemeClr val="accent1"/>
+          </a:effectRef>
+          <a:fontRef idx="minor">
+            <a:schemeClr val="lt1"/>
+          </a:fontRef>
+        </p:style>
+        <p:txBody>
+          <a:bodyPr rtlCol="0" anchor="ctr"/>
+          <a:lstStyle/>
+          <a:p>
+            <a:pPr algn="ctr"/>
+          </a:p>
+        </p:txBody>
+      </p:sp>
+      <p:sp>
+        <p:nvSpPr>
+          <p:cNvPr id="67" name="Rectangle 66"/>
+          <p:cNvSpPr/>
+          <p:nvPr/>
+        </p:nvSpPr>
+        <p:spPr>
+          <a:xfrm>
+            <a:off x="8074152" y="2414015"/>
+            <a:ext cx="118872" cy="219456"/>
+          </a:xfrm>
+          <a:prstGeom prst="rect">
+            <a:avLst/>
+          </a:prstGeom>
+          <a:solidFill>
+            <a:srgbClr val="4F8F2A"/>
+          </a:solidFill>
+          <a:ln>
+            <a:noFill/>
+          </a:ln>
+        </p:spPr>
+        <p:style>
+          <a:lnRef idx="1">
+            <a:schemeClr val="accent1"/>
+          </a:lnRef>
+          <a:fillRef idx="3">
+            <a:schemeClr val="accent1"/>
+          </a:fillRef>
+          <a:effectRef idx="2">
+            <a:schemeClr val="accent1"/>
+          </a:effectRef>
+          <a:fontRef idx="minor">
+            <a:schemeClr val="lt1"/>
+          </a:fontRef>
+        </p:style>
+        <p:txBody>
+          <a:bodyPr rtlCol="0" anchor="ctr"/>
+          <a:lstStyle/>
+          <a:p>
+            <a:pPr algn="ctr"/>
+          </a:p>
+        </p:txBody>
+      </p:sp>
+      <p:sp>
+        <p:nvSpPr>
+          <p:cNvPr id="68" name="Rectangle 67"/>
+          <p:cNvSpPr/>
+          <p:nvPr/>
+        </p:nvSpPr>
+        <p:spPr>
+          <a:xfrm>
+            <a:off x="8238744" y="2340864"/>
+            <a:ext cx="118872" cy="292608"/>
+          </a:xfrm>
+          <a:prstGeom prst="rect">
+            <a:avLst/>
+          </a:prstGeom>
+          <a:solidFill>
+            <a:srgbClr val="69CD2B"/>
+          </a:solidFill>
+          <a:ln>
+            <a:noFill/>
+          </a:ln>
+        </p:spPr>
+        <p:style>
+          <a:lnRef idx="1">
+            <a:schemeClr val="accent1"/>
+          </a:lnRef>
+          <a:fillRef idx="3">
+            <a:schemeClr val="accent1"/>
+          </a:fillRef>
+          <a:effectRef idx="2">
+            <a:schemeClr val="accent1"/>
+          </a:effectRef>
+          <a:fontRef idx="minor">
+            <a:schemeClr val="lt1"/>
+          </a:fontRef>
+        </p:style>
+        <p:txBody>
+          <a:bodyPr rtlCol="0" anchor="ctr"/>
+          <a:lstStyle/>
+          <a:p>
+            <a:pPr algn="ctr"/>
+          </a:p>
+        </p:txBody>
+      </p:sp>
+      <p:sp>
+        <p:nvSpPr>
+          <p:cNvPr id="69" name="Rectangle 68"/>
+          <p:cNvSpPr/>
+          <p:nvPr/>
+        </p:nvSpPr>
+        <p:spPr>
+          <a:xfrm>
+            <a:off x="8403336" y="2267712"/>
+            <a:ext cx="118872" cy="365760"/>
+          </a:xfrm>
+          <a:prstGeom prst="rect">
+            <a:avLst/>
+          </a:prstGeom>
+          <a:solidFill>
+            <a:srgbClr val="0B4C6E"/>
+          </a:solidFill>
+          <a:ln>
+            <a:noFill/>
+          </a:ln>
+        </p:spPr>
+        <p:style>
+          <a:lnRef idx="1">
+            <a:schemeClr val="accent1"/>
+          </a:lnRef>
+          <a:fillRef idx="3">
+            <a:schemeClr val="accent1"/>
+          </a:fillRef>
+          <a:effectRef idx="2">
+            <a:schemeClr val="accent1"/>
+          </a:effectRef>
+          <a:fontRef idx="minor">
+            <a:schemeClr val="lt1"/>
+          </a:fontRef>
+        </p:style>
+        <p:txBody>
+          <a:bodyPr rtlCol="0" anchor="ctr"/>
+          <a:lstStyle/>
+          <a:p>
+            <a:pPr algn="ctr"/>
+          </a:p>
+        </p:txBody>
+      </p:sp>
+      <p:sp>
+        <p:nvSpPr>
+          <p:cNvPr id="70" name="Rectangle 69"/>
+          <p:cNvSpPr/>
+          <p:nvPr/>
+        </p:nvSpPr>
+        <p:spPr>
+          <a:xfrm>
+            <a:off x="8567928" y="2194560"/>
+            <a:ext cx="118872" cy="438912"/>
+          </a:xfrm>
+          <a:prstGeom prst="rect">
+            <a:avLst/>
+          </a:prstGeom>
+          <a:solidFill>
+            <a:srgbClr val="003A59"/>
+          </a:solidFill>
+          <a:ln w="12700">
+            <a:solidFill>
+              <a:srgbClr val="69CD2B"/>
+            </a:solidFill>
+          </a:ln>
+        </p:spPr>
+        <p:style>
+          <a:lnRef idx="1">
+            <a:schemeClr val="accent1"/>
+          </a:lnRef>
+          <a:fillRef idx="3">
+            <a:schemeClr val="accent1"/>
+          </a:fillRef>
+          <a:effectRef idx="2">
+            <a:schemeClr val="accent1"/>
+          </a:effectRef>
+          <a:fontRef idx="minor">
+            <a:schemeClr val="lt1"/>
+          </a:fontRef>
+        </p:style>
+        <p:txBody>
+          <a:bodyPr rtlCol="0" anchor="ctr"/>
+          <a:lstStyle/>
+          <a:p>
+            <a:pPr algn="ctr"/>
+          </a:p>
+        </p:txBody>
+      </p:sp>
+      <p:sp>
+        <p:nvSpPr>
+          <p:cNvPr id="71" name="TextBox 70"/>
+          <p:cNvSpPr txBox="1"/>
+          <p:nvPr/>
+        </p:nvSpPr>
+        <p:spPr>
+          <a:xfrm>
             <a:off x="4828032" y="2871216"/>
             <a:ext cx="4041648" cy="164592"/>
           </a:xfrm>
@@ -5570,7 +5865,7 @@
         </p:spPr>
         <p:txBody>
           <a:bodyPr wrap="square">
-            <a:normAutofit/>
+            <a:noAutofit/>
           </a:bodyPr>
           <a:lstStyle/>
           <a:p>
@@ -5589,7 +5884,7 @@
       </p:sp>
       <p:sp>
         <p:nvSpPr>
-          <p:cNvPr id="65" name="Rectangle 64"/>
+          <p:cNvPr id="72" name="Rectangle 71"/>
           <p:cNvSpPr/>
           <p:nvPr/>
         </p:nvSpPr>
@@ -5634,14 +5929,14 @@
       </p:sp>
       <p:sp>
         <p:nvSpPr>
-          <p:cNvPr id="66" name="TextBox 65"/>
+          <p:cNvPr id="73" name="TextBox 72"/>
           <p:cNvSpPr txBox="1"/>
           <p:nvPr/>
         </p:nvSpPr>
         <p:spPr>
           <a:xfrm>
-            <a:off x="4992624" y="3127248"/>
-            <a:ext cx="1627632" cy="356616"/>
+            <a:off x="4937760" y="3127248"/>
+            <a:ext cx="1645920" cy="356616"/>
           </a:xfrm>
           <a:prstGeom prst="rect">
             <a:avLst/>
@@ -5649,8 +5944,8 @@
           <a:noFill/>
         </p:spPr>
         <p:txBody>
-          <a:bodyPr wrap="square">
-            <a:normAutofit/>
+          <a:bodyPr wrap="square" anchor="ctr">
+            <a:noAutofit/>
           </a:bodyPr>
           <a:lstStyle/>
           <a:p>
@@ -5669,14 +5964,14 @@
       </p:sp>
       <p:sp>
         <p:nvSpPr>
-          <p:cNvPr id="67" name="TextBox 66"/>
+          <p:cNvPr id="74" name="TextBox 73"/>
           <p:cNvSpPr txBox="1"/>
           <p:nvPr/>
         </p:nvSpPr>
         <p:spPr>
           <a:xfrm>
-            <a:off x="6638544" y="3127248"/>
-            <a:ext cx="1353312" cy="356616"/>
+            <a:off x="6583680" y="3127248"/>
+            <a:ext cx="896112" cy="356616"/>
           </a:xfrm>
           <a:prstGeom prst="rect">
             <a:avLst/>
@@ -5684,8 +5979,8 @@
           <a:noFill/>
         </p:spPr>
         <p:txBody>
-          <a:bodyPr wrap="square">
-            <a:normAutofit/>
+          <a:bodyPr wrap="square" anchor="ctr">
+            <a:noAutofit/>
           </a:bodyPr>
           <a:lstStyle/>
           <a:p>
@@ -5704,14 +5999,14 @@
       </p:sp>
       <p:sp>
         <p:nvSpPr>
-          <p:cNvPr id="68" name="TextBox 67"/>
+          <p:cNvPr id="75" name="TextBox 74"/>
           <p:cNvSpPr txBox="1"/>
           <p:nvPr/>
         </p:nvSpPr>
         <p:spPr>
           <a:xfrm>
-            <a:off x="8028431" y="3127248"/>
-            <a:ext cx="731520" cy="356616"/>
+            <a:off x="7479792" y="3127248"/>
+            <a:ext cx="1335024" cy="356616"/>
           </a:xfrm>
           <a:prstGeom prst="rect">
             <a:avLst/>
@@ -5719,8 +6014,8 @@
           <a:noFill/>
         </p:spPr>
         <p:txBody>
-          <a:bodyPr wrap="square">
-            <a:normAutofit/>
+          <a:bodyPr wrap="square" anchor="ctr">
+            <a:noAutofit/>
           </a:bodyPr>
           <a:lstStyle/>
           <a:p>
@@ -5739,7 +6034,7 @@
       </p:sp>
       <p:sp>
         <p:nvSpPr>
-          <p:cNvPr id="69" name="Rectangle 68"/>
+          <p:cNvPr id="76" name="Rectangle 75"/>
           <p:cNvSpPr/>
           <p:nvPr/>
         </p:nvSpPr>
@@ -5784,14 +6079,14 @@
       </p:sp>
       <p:sp>
         <p:nvSpPr>
-          <p:cNvPr id="70" name="TextBox 69"/>
+          <p:cNvPr id="77" name="TextBox 76"/>
           <p:cNvSpPr txBox="1"/>
           <p:nvPr/>
         </p:nvSpPr>
         <p:spPr>
           <a:xfrm>
-            <a:off x="4992624" y="3529584"/>
-            <a:ext cx="1627632" cy="356616"/>
+            <a:off x="4937760" y="3529584"/>
+            <a:ext cx="1645920" cy="356616"/>
           </a:xfrm>
           <a:prstGeom prst="rect">
             <a:avLst/>
@@ -5799,8 +6094,8 @@
           <a:noFill/>
         </p:spPr>
         <p:txBody>
-          <a:bodyPr wrap="square">
-            <a:normAutofit/>
+          <a:bodyPr wrap="square" anchor="ctr">
+            <a:noAutofit/>
           </a:bodyPr>
           <a:lstStyle/>
           <a:p>
@@ -5819,14 +6114,14 @@
       </p:sp>
       <p:sp>
         <p:nvSpPr>
-          <p:cNvPr id="71" name="TextBox 70"/>
+          <p:cNvPr id="78" name="TextBox 77"/>
           <p:cNvSpPr txBox="1"/>
           <p:nvPr/>
         </p:nvSpPr>
         <p:spPr>
           <a:xfrm>
-            <a:off x="6638544" y="3529584"/>
-            <a:ext cx="1353312" cy="356616"/>
+            <a:off x="6583680" y="3529584"/>
+            <a:ext cx="896112" cy="356616"/>
           </a:xfrm>
           <a:prstGeom prst="rect">
             <a:avLst/>
@@ -5834,8 +6129,8 @@
           <a:noFill/>
         </p:spPr>
         <p:txBody>
-          <a:bodyPr wrap="square">
-            <a:normAutofit/>
+          <a:bodyPr wrap="square" anchor="ctr">
+            <a:noAutofit/>
           </a:bodyPr>
           <a:lstStyle/>
           <a:p>
@@ -5854,14 +6149,14 @@
       </p:sp>
       <p:sp>
         <p:nvSpPr>
-          <p:cNvPr id="72" name="TextBox 71"/>
+          <p:cNvPr id="79" name="TextBox 78"/>
           <p:cNvSpPr txBox="1"/>
           <p:nvPr/>
         </p:nvSpPr>
         <p:spPr>
           <a:xfrm>
-            <a:off x="8028431" y="3529584"/>
-            <a:ext cx="731520" cy="356616"/>
+            <a:off x="7479792" y="3529584"/>
+            <a:ext cx="1335024" cy="356616"/>
           </a:xfrm>
           <a:prstGeom prst="rect">
             <a:avLst/>
@@ -5869,8 +6164,8 @@
           <a:noFill/>
         </p:spPr>
         <p:txBody>
-          <a:bodyPr wrap="square">
-            <a:normAutofit/>
+          <a:bodyPr wrap="square" anchor="ctr">
+            <a:noAutofit/>
           </a:bodyPr>
           <a:lstStyle/>
           <a:p>
@@ -5889,7 +6184,7 @@
       </p:sp>
       <p:sp>
         <p:nvSpPr>
-          <p:cNvPr id="73" name="Rectangle 72"/>
+          <p:cNvPr id="80" name="Rectangle 79"/>
           <p:cNvSpPr/>
           <p:nvPr/>
         </p:nvSpPr>
@@ -5934,14 +6229,14 @@
       </p:sp>
       <p:sp>
         <p:nvSpPr>
-          <p:cNvPr id="74" name="TextBox 73"/>
+          <p:cNvPr id="81" name="TextBox 80"/>
           <p:cNvSpPr txBox="1"/>
           <p:nvPr/>
         </p:nvSpPr>
         <p:spPr>
           <a:xfrm>
-            <a:off x="4992624" y="3931920"/>
-            <a:ext cx="1627632" cy="356616"/>
+            <a:off x="4937760" y="3931920"/>
+            <a:ext cx="1645920" cy="356616"/>
           </a:xfrm>
           <a:prstGeom prst="rect">
             <a:avLst/>
@@ -5949,8 +6244,8 @@
           <a:noFill/>
         </p:spPr>
         <p:txBody>
-          <a:bodyPr wrap="square">
-            <a:normAutofit/>
+          <a:bodyPr wrap="square" anchor="ctr">
+            <a:noAutofit/>
           </a:bodyPr>
           <a:lstStyle/>
           <a:p>
@@ -5969,14 +6264,14 @@
       </p:sp>
       <p:sp>
         <p:nvSpPr>
-          <p:cNvPr id="75" name="TextBox 74"/>
+          <p:cNvPr id="82" name="TextBox 81"/>
           <p:cNvSpPr txBox="1"/>
           <p:nvPr/>
         </p:nvSpPr>
         <p:spPr>
           <a:xfrm>
-            <a:off x="6638544" y="3931920"/>
-            <a:ext cx="1353312" cy="356616"/>
+            <a:off x="6583680" y="3931920"/>
+            <a:ext cx="896112" cy="356616"/>
           </a:xfrm>
           <a:prstGeom prst="rect">
             <a:avLst/>
@@ -5984,8 +6279,8 @@
           <a:noFill/>
         </p:spPr>
         <p:txBody>
-          <a:bodyPr wrap="square">
-            <a:normAutofit/>
+          <a:bodyPr wrap="square" anchor="ctr">
+            <a:noAutofit/>
           </a:bodyPr>
           <a:lstStyle/>
           <a:p>
@@ -6004,14 +6299,14 @@
       </p:sp>
       <p:sp>
         <p:nvSpPr>
-          <p:cNvPr id="76" name="TextBox 75"/>
+          <p:cNvPr id="83" name="TextBox 82"/>
           <p:cNvSpPr txBox="1"/>
           <p:nvPr/>
         </p:nvSpPr>
         <p:spPr>
           <a:xfrm>
-            <a:off x="8028431" y="3931920"/>
-            <a:ext cx="731520" cy="356616"/>
+            <a:off x="7479792" y="3931920"/>
+            <a:ext cx="1335024" cy="356616"/>
           </a:xfrm>
           <a:prstGeom prst="rect">
             <a:avLst/>
@@ -6019,8 +6314,8 @@
           <a:noFill/>
         </p:spPr>
         <p:txBody>
-          <a:bodyPr wrap="square">
-            <a:normAutofit/>
+          <a:bodyPr wrap="square" anchor="ctr">
+            <a:noAutofit/>
           </a:bodyPr>
           <a:lstStyle/>
           <a:p>
@@ -6039,7 +6334,7 @@
       </p:sp>
       <p:sp>
         <p:nvSpPr>
-          <p:cNvPr id="77" name="Rectangle 76"/>
+          <p:cNvPr id="84" name="Rectangle 83"/>
           <p:cNvSpPr/>
           <p:nvPr/>
         </p:nvSpPr>
@@ -6084,7 +6379,7 @@
       </p:sp>
       <p:sp>
         <p:nvSpPr>
-          <p:cNvPr id="78" name="Rectangle 77"/>
+          <p:cNvPr id="85" name="Rectangle 84"/>
           <p:cNvSpPr/>
           <p:nvPr/>
         </p:nvSpPr>
@@ -6129,14 +6424,14 @@
       </p:sp>
       <p:sp>
         <p:nvSpPr>
-          <p:cNvPr id="79" name="TextBox 78"/>
+          <p:cNvPr id="86" name="TextBox 85"/>
           <p:cNvSpPr txBox="1"/>
           <p:nvPr/>
         </p:nvSpPr>
         <p:spPr>
           <a:xfrm>
-            <a:off x="4992624" y="4334256"/>
-            <a:ext cx="1627632" cy="356616"/>
+            <a:off x="4937760" y="4334256"/>
+            <a:ext cx="1645920" cy="356616"/>
           </a:xfrm>
           <a:prstGeom prst="rect">
             <a:avLst/>
@@ -6144,14 +6439,14 @@
           <a:noFill/>
         </p:spPr>
         <p:txBody>
-          <a:bodyPr wrap="square">
-            <a:normAutofit/>
+          <a:bodyPr wrap="square" anchor="ctr">
+            <a:noAutofit/>
           </a:bodyPr>
           <a:lstStyle/>
           <a:p>
             <a:pPr algn="l"/>
             <a:r>
-              <a:rPr sz="850" b="1" i="0">
+              <a:rPr sz="800" b="1" i="0">
                 <a:solidFill>
                   <a:srgbClr val="B32D2D"/>
                 </a:solidFill>
@@ -6164,14 +6459,14 @@
       </p:sp>
       <p:sp>
         <p:nvSpPr>
-          <p:cNvPr id="80" name="TextBox 79"/>
+          <p:cNvPr id="87" name="TextBox 86"/>
           <p:cNvSpPr txBox="1"/>
           <p:nvPr/>
         </p:nvSpPr>
         <p:spPr>
           <a:xfrm>
-            <a:off x="6638544" y="4334256"/>
-            <a:ext cx="1353312" cy="356616"/>
+            <a:off x="6583680" y="4334256"/>
+            <a:ext cx="896112" cy="356616"/>
           </a:xfrm>
           <a:prstGeom prst="rect">
             <a:avLst/>
@@ -6179,8 +6474,8 @@
           <a:noFill/>
         </p:spPr>
         <p:txBody>
-          <a:bodyPr wrap="square">
-            <a:normAutofit/>
+          <a:bodyPr wrap="square" anchor="ctr">
+            <a:noAutofit/>
           </a:bodyPr>
           <a:lstStyle/>
           <a:p>
@@ -6199,14 +6494,14 @@
       </p:sp>
       <p:sp>
         <p:nvSpPr>
-          <p:cNvPr id="81" name="TextBox 80"/>
+          <p:cNvPr id="88" name="TextBox 87"/>
           <p:cNvSpPr txBox="1"/>
           <p:nvPr/>
         </p:nvSpPr>
         <p:spPr>
           <a:xfrm>
-            <a:off x="8028431" y="4334256"/>
-            <a:ext cx="731520" cy="356616"/>
+            <a:off x="7479792" y="4334256"/>
+            <a:ext cx="1335024" cy="356616"/>
           </a:xfrm>
           <a:prstGeom prst="rect">
             <a:avLst/>
@@ -6214,8 +6509,8 @@
           <a:noFill/>
         </p:spPr>
         <p:txBody>
-          <a:bodyPr wrap="square">
-            <a:normAutofit/>
+          <a:bodyPr wrap="square" anchor="ctr">
+            <a:noAutofit/>
           </a:bodyPr>
           <a:lstStyle/>
           <a:p>
@@ -6234,7 +6529,7 @@
       </p:sp>
       <p:sp>
         <p:nvSpPr>
-          <p:cNvPr id="82" name="Rectangle 81"/>
+          <p:cNvPr id="89" name="Rectangle 88"/>
           <p:cNvSpPr/>
           <p:nvPr/>
         </p:nvSpPr>
@@ -6277,9 +6572,33 @@
           </a:p>
         </p:txBody>
       </p:sp>
-      <p:sp>
-        <p:nvSpPr>
-          <p:cNvPr id="83" name="TextBox 82"/>
+      <p:pic>
+        <p:nvPicPr>
+          <p:cNvPr id="90" name="Picture 89" descr="smb_team_logo.png"/>
+          <p:cNvPicPr>
+            <a:picLocks noChangeAspect="1"/>
+          </p:cNvPicPr>
+          <p:nvPr/>
+        </p:nvPicPr>
+        <p:blipFill>
+          <a:blip r:embed="rId2"/>
+          <a:stretch>
+            <a:fillRect/>
+          </a:stretch>
+        </p:blipFill>
+        <p:spPr>
+          <a:xfrm>
+            <a:off x="274320" y="4873752"/>
+            <a:ext cx="941832" cy="192024"/>
+          </a:xfrm>
+          <a:prstGeom prst="rect">
+            <a:avLst/>
+          </a:prstGeom>
+        </p:spPr>
+      </p:pic>
+      <p:sp>
+        <p:nvSpPr>
+          <p:cNvPr id="91" name="TextBox 90"/>
           <p:cNvSpPr txBox="1"/>
           <p:nvPr/>
         </p:nvSpPr>
@@ -6295,7 +6614,7 @@
         </p:spPr>
         <p:txBody>
           <a:bodyPr wrap="square">
-            <a:normAutofit/>
+            <a:noAutofit/>
           </a:bodyPr>
           <a:lstStyle/>
           <a:p>
@@ -6314,7 +6633,7 @@
       </p:sp>
       <p:sp>
         <p:nvSpPr>
-          <p:cNvPr id="84" name="TextBox 83"/>
+          <p:cNvPr id="92" name="TextBox 91"/>
           <p:cNvSpPr txBox="1"/>
           <p:nvPr/>
         </p:nvSpPr>
@@ -6330,7 +6649,7 @@
         </p:spPr>
         <p:txBody>
           <a:bodyPr wrap="square">
-            <a:normAutofit/>
+            <a:noAutofit/>
           </a:bodyPr>
           <a:lstStyle/>
           <a:p>
@@ -6509,7 +6828,7 @@
         <p:spPr>
           <a:xfrm>
             <a:off x="292608" y="182880"/>
-            <a:ext cx="5486400" cy="164592"/>
+            <a:ext cx="6309360" cy="164592"/>
           </a:xfrm>
           <a:prstGeom prst="rect">
             <a:avLst/>
@@ -6518,7 +6837,7 @@
         </p:spPr>
         <p:txBody>
           <a:bodyPr wrap="square">
-            <a:normAutofit/>
+            <a:noAutofit/>
           </a:bodyPr>
           <a:lstStyle/>
           <a:p>
@@ -6543,8 +6862,8 @@
         </p:nvSpPr>
         <p:spPr>
           <a:xfrm>
-            <a:off x="292608" y="365760"/>
-            <a:ext cx="8503920" cy="365760"/>
+            <a:off x="292608" y="384048"/>
+            <a:ext cx="8503920" cy="402336"/>
           </a:xfrm>
           <a:prstGeom prst="rect">
             <a:avLst/>
@@ -6552,8 +6871,8 @@
           <a:noFill/>
         </p:spPr>
         <p:txBody>
-          <a:bodyPr wrap="square">
-            <a:normAutofit/>
+          <a:bodyPr wrap="square" anchor="ctr">
+            <a:noAutofit/>
           </a:bodyPr>
           <a:lstStyle/>
           <a:p>
@@ -6678,7 +6997,7 @@
         </p:spPr>
         <p:txBody>
           <a:bodyPr wrap="square">
-            <a:normAutofit/>
+            <a:noAutofit/>
           </a:bodyPr>
           <a:lstStyle/>
           <a:p>
@@ -6713,7 +7032,7 @@
         </p:spPr>
         <p:txBody>
           <a:bodyPr wrap="square">
-            <a:normAutofit/>
+            <a:noAutofit/>
           </a:bodyPr>
           <a:lstStyle/>
           <a:p>
@@ -6793,13 +7112,13 @@
         </p:spPr>
         <p:txBody>
           <a:bodyPr wrap="square">
-            <a:normAutofit/>
+            <a:noAutofit/>
           </a:bodyPr>
           <a:lstStyle/>
           <a:p>
             <a:pPr algn="l"/>
             <a:r>
-              <a:rPr sz="1200" b="1" i="0">
+              <a:rPr sz="1150" b="1" i="0">
                 <a:solidFill>
                   <a:srgbClr val="143306"/>
                 </a:solidFill>
@@ -6818,8 +7137,8 @@
         </p:nvSpPr>
         <p:spPr>
           <a:xfrm>
-            <a:off x="457200" y="4133087"/>
-            <a:ext cx="1847088" cy="310896"/>
+            <a:off x="457200" y="4114800"/>
+            <a:ext cx="1847088" cy="420624"/>
           </a:xfrm>
           <a:prstGeom prst="rect">
             <a:avLst/>
@@ -6828,7 +7147,7 @@
         </p:spPr>
         <p:txBody>
           <a:bodyPr wrap="square">
-            <a:normAutofit/>
+            <a:noAutofit/>
           </a:bodyPr>
           <a:lstStyle/>
           <a:p>
@@ -6908,7 +7227,7 @@
         </p:spPr>
         <p:txBody>
           <a:bodyPr wrap="square">
-            <a:normAutofit/>
+            <a:noAutofit/>
           </a:bodyPr>
           <a:lstStyle/>
           <a:p>
@@ -6943,7 +7262,7 @@
         </p:spPr>
         <p:txBody>
           <a:bodyPr wrap="square">
-            <a:normAutofit/>
+            <a:noAutofit/>
           </a:bodyPr>
           <a:lstStyle/>
           <a:p>
@@ -6978,7 +7297,7 @@
         </p:spPr>
         <p:txBody>
           <a:bodyPr wrap="square">
-            <a:normAutofit/>
+            <a:noAutofit/>
           </a:bodyPr>
           <a:lstStyle/>
           <a:p>
@@ -7093,8 +7412,8 @@
         </p:nvSpPr>
         <p:spPr>
           <a:xfrm>
-            <a:off x="2971800" y="1965960"/>
-            <a:ext cx="1609344" cy="365760"/>
+            <a:off x="2971800" y="1883664"/>
+            <a:ext cx="1645920" cy="475488"/>
           </a:xfrm>
           <a:prstGeom prst="rect">
             <a:avLst/>
@@ -7102,8 +7421,8 @@
           <a:noFill/>
         </p:spPr>
         <p:txBody>
-          <a:bodyPr wrap="square">
-            <a:normAutofit/>
+          <a:bodyPr wrap="square" anchor="ctr">
+            <a:noAutofit/>
           </a:bodyPr>
           <a:lstStyle/>
           <a:p>
@@ -7218,8 +7537,8 @@
         </p:nvSpPr>
         <p:spPr>
           <a:xfrm>
-            <a:off x="2971800" y="2523744"/>
-            <a:ext cx="1609344" cy="365760"/>
+            <a:off x="2971800" y="2441448"/>
+            <a:ext cx="1645920" cy="475488"/>
           </a:xfrm>
           <a:prstGeom prst="rect">
             <a:avLst/>
@@ -7227,8 +7546,8 @@
           <a:noFill/>
         </p:spPr>
         <p:txBody>
-          <a:bodyPr wrap="square">
-            <a:normAutofit/>
+          <a:bodyPr wrap="square" anchor="ctr">
+            <a:noAutofit/>
           </a:bodyPr>
           <a:lstStyle/>
           <a:p>
@@ -7343,8 +7662,8 @@
         </p:nvSpPr>
         <p:spPr>
           <a:xfrm>
-            <a:off x="2971800" y="3072384"/>
-            <a:ext cx="1609344" cy="365760"/>
+            <a:off x="2971800" y="2990088"/>
+            <a:ext cx="1645920" cy="475488"/>
           </a:xfrm>
           <a:prstGeom prst="rect">
             <a:avLst/>
@@ -7352,8 +7671,8 @@
           <a:noFill/>
         </p:spPr>
         <p:txBody>
-          <a:bodyPr wrap="square">
-            <a:normAutofit/>
+          <a:bodyPr wrap="square" anchor="ctr">
+            <a:noAutofit/>
           </a:bodyPr>
           <a:lstStyle/>
           <a:p>
@@ -7468,8 +7787,8 @@
         </p:nvSpPr>
         <p:spPr>
           <a:xfrm>
-            <a:off x="2971800" y="3621024"/>
-            <a:ext cx="1609344" cy="365760"/>
+            <a:off x="2971800" y="3538728"/>
+            <a:ext cx="1645920" cy="475488"/>
           </a:xfrm>
           <a:prstGeom prst="rect">
             <a:avLst/>
@@ -7477,8 +7796,8 @@
           <a:noFill/>
         </p:spPr>
         <p:txBody>
-          <a:bodyPr wrap="square">
-            <a:normAutofit/>
+          <a:bodyPr wrap="square" anchor="ctr">
+            <a:noAutofit/>
           </a:bodyPr>
           <a:lstStyle/>
           <a:p>
@@ -7593,8 +7912,8 @@
         </p:nvSpPr>
         <p:spPr>
           <a:xfrm>
-            <a:off x="2971800" y="4178808"/>
-            <a:ext cx="1609344" cy="365760"/>
+            <a:off x="2971800" y="4096511"/>
+            <a:ext cx="1645920" cy="475488"/>
           </a:xfrm>
           <a:prstGeom prst="rect">
             <a:avLst/>
@@ -7602,14 +7921,14 @@
           <a:noFill/>
         </p:spPr>
         <p:txBody>
-          <a:bodyPr wrap="square">
-            <a:normAutofit/>
+          <a:bodyPr wrap="square" anchor="ctr">
+            <a:noAutofit/>
           </a:bodyPr>
           <a:lstStyle/>
           <a:p>
             <a:pPr algn="l"/>
             <a:r>
-              <a:rPr sz="800" b="0" i="0">
+              <a:rPr sz="750" b="0" i="0">
                 <a:solidFill>
                   <a:srgbClr val="1B2A38"/>
                 </a:solidFill>
@@ -7683,7 +8002,7 @@
         </p:spPr>
         <p:txBody>
           <a:bodyPr wrap="square">
-            <a:normAutofit/>
+            <a:noAutofit/>
           </a:bodyPr>
           <a:lstStyle/>
           <a:p>
@@ -7718,7 +8037,7 @@
         </p:spPr>
         <p:txBody>
           <a:bodyPr wrap="square">
-            <a:normAutofit/>
+            <a:noAutofit/>
           </a:bodyPr>
           <a:lstStyle/>
           <a:p>
@@ -7753,13 +8072,13 @@
         </p:spPr>
         <p:txBody>
           <a:bodyPr wrap="square">
-            <a:normAutofit/>
+            <a:noAutofit/>
           </a:bodyPr>
           <a:lstStyle/>
           <a:p>
             <a:pPr algn="l"/>
             <a:r>
-              <a:rPr sz="1400" b="1" i="0">
+              <a:rPr sz="1350" b="1" i="0">
                 <a:solidFill>
                   <a:srgbClr val="143306"/>
                 </a:solidFill>
@@ -7868,8 +8187,8 @@
         </p:nvSpPr>
         <p:spPr>
           <a:xfrm>
-            <a:off x="5148072" y="1965960"/>
-            <a:ext cx="1609344" cy="365760"/>
+            <a:off x="5148072" y="1883664"/>
+            <a:ext cx="1645920" cy="475488"/>
           </a:xfrm>
           <a:prstGeom prst="rect">
             <a:avLst/>
@@ -7877,8 +8196,8 @@
           <a:noFill/>
         </p:spPr>
         <p:txBody>
-          <a:bodyPr wrap="square">
-            <a:normAutofit/>
+          <a:bodyPr wrap="square" anchor="ctr">
+            <a:noAutofit/>
           </a:bodyPr>
           <a:lstStyle/>
           <a:p>
@@ -7993,8 +8312,8 @@
         </p:nvSpPr>
         <p:spPr>
           <a:xfrm>
-            <a:off x="5148072" y="2523744"/>
-            <a:ext cx="1609344" cy="365760"/>
+            <a:off x="5148072" y="2441448"/>
+            <a:ext cx="1645920" cy="475488"/>
           </a:xfrm>
           <a:prstGeom prst="rect">
             <a:avLst/>
@@ -8002,8 +8321,8 @@
           <a:noFill/>
         </p:spPr>
         <p:txBody>
-          <a:bodyPr wrap="square">
-            <a:normAutofit/>
+          <a:bodyPr wrap="square" anchor="ctr">
+            <a:noAutofit/>
           </a:bodyPr>
           <a:lstStyle/>
           <a:p>
@@ -8118,8 +8437,8 @@
         </p:nvSpPr>
         <p:spPr>
           <a:xfrm>
-            <a:off x="5148072" y="3072384"/>
-            <a:ext cx="1609344" cy="365760"/>
+            <a:off x="5148072" y="2990088"/>
+            <a:ext cx="1645920" cy="475488"/>
           </a:xfrm>
           <a:prstGeom prst="rect">
             <a:avLst/>
@@ -8127,8 +8446,8 @@
           <a:noFill/>
         </p:spPr>
         <p:txBody>
-          <a:bodyPr wrap="square">
-            <a:normAutofit/>
+          <a:bodyPr wrap="square" anchor="ctr">
+            <a:noAutofit/>
           </a:bodyPr>
           <a:lstStyle/>
           <a:p>
@@ -8243,8 +8562,8 @@
         </p:nvSpPr>
         <p:spPr>
           <a:xfrm>
-            <a:off x="5148072" y="3621024"/>
-            <a:ext cx="1609344" cy="365760"/>
+            <a:off x="5148072" y="3538728"/>
+            <a:ext cx="1645920" cy="475488"/>
           </a:xfrm>
           <a:prstGeom prst="rect">
             <a:avLst/>
@@ -8252,14 +8571,14 @@
           <a:noFill/>
         </p:spPr>
         <p:txBody>
-          <a:bodyPr wrap="square">
-            <a:normAutofit/>
+          <a:bodyPr wrap="square" anchor="ctr">
+            <a:noAutofit/>
           </a:bodyPr>
           <a:lstStyle/>
           <a:p>
             <a:pPr algn="l"/>
             <a:r>
-              <a:rPr sz="800" b="0" i="0">
+              <a:rPr sz="750" b="0" i="0">
                 <a:solidFill>
                   <a:srgbClr val="1B2A38"/>
                 </a:solidFill>
@@ -8368,8 +8687,8 @@
         </p:nvSpPr>
         <p:spPr>
           <a:xfrm>
-            <a:off x="5148072" y="4178808"/>
-            <a:ext cx="1609344" cy="365760"/>
+            <a:off x="5148072" y="4096511"/>
+            <a:ext cx="1645920" cy="475488"/>
           </a:xfrm>
           <a:prstGeom prst="rect">
             <a:avLst/>
@@ -8377,8 +8696,8 @@
           <a:noFill/>
         </p:spPr>
         <p:txBody>
-          <a:bodyPr wrap="square">
-            <a:normAutofit/>
+          <a:bodyPr wrap="square" anchor="ctr">
+            <a:noAutofit/>
           </a:bodyPr>
           <a:lstStyle/>
           <a:p>
@@ -8458,7 +8777,7 @@
         </p:spPr>
         <p:txBody>
           <a:bodyPr wrap="square">
-            <a:normAutofit/>
+            <a:noAutofit/>
           </a:bodyPr>
           <a:lstStyle/>
           <a:p>
@@ -8493,7 +8812,7 @@
         </p:spPr>
         <p:txBody>
           <a:bodyPr wrap="square">
-            <a:normAutofit/>
+            <a:noAutofit/>
           </a:bodyPr>
           <a:lstStyle/>
           <a:p>
@@ -8528,7 +8847,7 @@
         </p:spPr>
         <p:txBody>
           <a:bodyPr wrap="square">
-            <a:normAutofit/>
+            <a:noAutofit/>
           </a:bodyPr>
           <a:lstStyle/>
           <a:p>
@@ -8643,8 +8962,8 @@
         </p:nvSpPr>
         <p:spPr>
           <a:xfrm>
-            <a:off x="7324344" y="1965960"/>
-            <a:ext cx="1609344" cy="365760"/>
+            <a:off x="7324344" y="1883664"/>
+            <a:ext cx="1645920" cy="475488"/>
           </a:xfrm>
           <a:prstGeom prst="rect">
             <a:avLst/>
@@ -8652,8 +8971,8 @@
           <a:noFill/>
         </p:spPr>
         <p:txBody>
-          <a:bodyPr wrap="square">
-            <a:normAutofit/>
+          <a:bodyPr wrap="square" anchor="ctr">
+            <a:noAutofit/>
           </a:bodyPr>
           <a:lstStyle/>
           <a:p>
@@ -8768,8 +9087,8 @@
         </p:nvSpPr>
         <p:spPr>
           <a:xfrm>
-            <a:off x="7324344" y="2523744"/>
-            <a:ext cx="1609344" cy="365760"/>
+            <a:off x="7324344" y="2441448"/>
+            <a:ext cx="1645920" cy="475488"/>
           </a:xfrm>
           <a:prstGeom prst="rect">
             <a:avLst/>
@@ -8777,8 +9096,8 @@
           <a:noFill/>
         </p:spPr>
         <p:txBody>
-          <a:bodyPr wrap="square">
-            <a:normAutofit/>
+          <a:bodyPr wrap="square" anchor="ctr">
+            <a:noAutofit/>
           </a:bodyPr>
           <a:lstStyle/>
           <a:p>
@@ -8893,8 +9212,8 @@
         </p:nvSpPr>
         <p:spPr>
           <a:xfrm>
-            <a:off x="7324344" y="3072384"/>
-            <a:ext cx="1609344" cy="365760"/>
+            <a:off x="7324344" y="2990088"/>
+            <a:ext cx="1645920" cy="475488"/>
           </a:xfrm>
           <a:prstGeom prst="rect">
             <a:avLst/>
@@ -8902,8 +9221,8 @@
           <a:noFill/>
         </p:spPr>
         <p:txBody>
-          <a:bodyPr wrap="square">
-            <a:normAutofit/>
+          <a:bodyPr wrap="square" anchor="ctr">
+            <a:noAutofit/>
           </a:bodyPr>
           <a:lstStyle/>
           <a:p>
@@ -9018,8 +9337,8 @@
         </p:nvSpPr>
         <p:spPr>
           <a:xfrm>
-            <a:off x="7324344" y="3621024"/>
-            <a:ext cx="1609344" cy="365760"/>
+            <a:off x="7324344" y="3538728"/>
+            <a:ext cx="1645920" cy="475488"/>
           </a:xfrm>
           <a:prstGeom prst="rect">
             <a:avLst/>
@@ -9027,8 +9346,8 @@
           <a:noFill/>
         </p:spPr>
         <p:txBody>
-          <a:bodyPr wrap="square">
-            <a:normAutofit/>
+          <a:bodyPr wrap="square" anchor="ctr">
+            <a:noAutofit/>
           </a:bodyPr>
           <a:lstStyle/>
           <a:p>
@@ -9143,8 +9462,8 @@
         </p:nvSpPr>
         <p:spPr>
           <a:xfrm>
-            <a:off x="7324344" y="4178808"/>
-            <a:ext cx="1609344" cy="365760"/>
+            <a:off x="7324344" y="4096511"/>
+            <a:ext cx="1645920" cy="475488"/>
           </a:xfrm>
           <a:prstGeom prst="rect">
             <a:avLst/>
@@ -9152,8 +9471,8 @@
           <a:noFill/>
         </p:spPr>
         <p:txBody>
-          <a:bodyPr wrap="square">
-            <a:normAutofit/>
+          <a:bodyPr wrap="square" anchor="ctr">
+            <a:noAutofit/>
           </a:bodyPr>
           <a:lstStyle/>
           <a:p>
@@ -9215,9 +9534,33 @@
           </a:p>
         </p:txBody>
       </p:sp>
-      <p:sp>
-        <p:nvSpPr>
-          <p:cNvPr id="72" name="TextBox 71"/>
+      <p:pic>
+        <p:nvPicPr>
+          <p:cNvPr id="72" name="Picture 71" descr="smb_team_logo.png"/>
+          <p:cNvPicPr>
+            <a:picLocks noChangeAspect="1"/>
+          </p:cNvPicPr>
+          <p:nvPr/>
+        </p:nvPicPr>
+        <p:blipFill>
+          <a:blip r:embed="rId2"/>
+          <a:stretch>
+            <a:fillRect/>
+          </a:stretch>
+        </p:blipFill>
+        <p:spPr>
+          <a:xfrm>
+            <a:off x="274320" y="4873752"/>
+            <a:ext cx="941832" cy="192024"/>
+          </a:xfrm>
+          <a:prstGeom prst="rect">
+            <a:avLst/>
+          </a:prstGeom>
+        </p:spPr>
+      </p:pic>
+      <p:sp>
+        <p:nvSpPr>
+          <p:cNvPr id="73" name="TextBox 72"/>
           <p:cNvSpPr txBox="1"/>
           <p:nvPr/>
         </p:nvSpPr>
@@ -9233,7 +9576,7 @@
         </p:spPr>
         <p:txBody>
           <a:bodyPr wrap="square">
-            <a:normAutofit/>
+            <a:noAutofit/>
           </a:bodyPr>
           <a:lstStyle/>
           <a:p>
@@ -9252,7 +9595,7 @@
       </p:sp>
       <p:sp>
         <p:nvSpPr>
-          <p:cNvPr id="73" name="TextBox 72"/>
+          <p:cNvPr id="74" name="TextBox 73"/>
           <p:cNvSpPr txBox="1"/>
           <p:nvPr/>
         </p:nvSpPr>
@@ -9268,7 +9611,7 @@
         </p:spPr>
         <p:txBody>
           <a:bodyPr wrap="square">
-            <a:normAutofit/>
+            <a:noAutofit/>
           </a:bodyPr>
           <a:lstStyle/>
           <a:p>
@@ -9447,7 +9790,7 @@
         <p:spPr>
           <a:xfrm>
             <a:off x="292608" y="182880"/>
-            <a:ext cx="5486400" cy="164592"/>
+            <a:ext cx="6309360" cy="164592"/>
           </a:xfrm>
           <a:prstGeom prst="rect">
             <a:avLst/>
@@ -9456,7 +9799,7 @@
         </p:spPr>
         <p:txBody>
           <a:bodyPr wrap="square">
-            <a:normAutofit/>
+            <a:noAutofit/>
           </a:bodyPr>
           <a:lstStyle/>
           <a:p>
@@ -9481,8 +9824,8 @@
         </p:nvSpPr>
         <p:spPr>
           <a:xfrm>
-            <a:off x="292608" y="365760"/>
-            <a:ext cx="8503920" cy="365760"/>
+            <a:off x="292608" y="384048"/>
+            <a:ext cx="8503920" cy="402336"/>
           </a:xfrm>
           <a:prstGeom prst="rect">
             <a:avLst/>
@@ -9490,8 +9833,8 @@
           <a:noFill/>
         </p:spPr>
         <p:txBody>
-          <a:bodyPr wrap="square">
-            <a:normAutofit/>
+          <a:bodyPr wrap="square" anchor="ctr">
+            <a:noAutofit/>
           </a:bodyPr>
           <a:lstStyle/>
           <a:p>
@@ -9606,8 +9949,8 @@
         </p:nvSpPr>
         <p:spPr>
           <a:xfrm>
-            <a:off x="512064" y="1143000"/>
-            <a:ext cx="3584448" cy="146304"/>
+            <a:off x="512064" y="1115568"/>
+            <a:ext cx="3621024" cy="182880"/>
           </a:xfrm>
           <a:prstGeom prst="rect">
             <a:avLst/>
@@ -9616,7 +9959,7 @@
         </p:spPr>
         <p:txBody>
           <a:bodyPr wrap="square">
-            <a:normAutofit/>
+            <a:noAutofit/>
           </a:bodyPr>
           <a:lstStyle/>
           <a:p>
@@ -9641,8 +9984,8 @@
         </p:nvSpPr>
         <p:spPr>
           <a:xfrm>
-            <a:off x="512064" y="1335024"/>
-            <a:ext cx="1737360" cy="402336"/>
+            <a:off x="512064" y="1252728"/>
+            <a:ext cx="2377440" cy="530352"/>
           </a:xfrm>
           <a:prstGeom prst="rect">
             <a:avLst/>
@@ -9651,7 +9994,7 @@
         </p:spPr>
         <p:txBody>
           <a:bodyPr wrap="square">
-            <a:normAutofit/>
+            <a:noAutofit/>
           </a:bodyPr>
           <a:lstStyle/>
           <a:p>
@@ -9676,8 +10019,8 @@
         </p:nvSpPr>
         <p:spPr>
           <a:xfrm>
-            <a:off x="1920240" y="1536192"/>
-            <a:ext cx="365760" cy="182880"/>
+            <a:off x="1848611" y="1519428"/>
+            <a:ext cx="457200" cy="219456"/>
           </a:xfrm>
           <a:prstGeom prst="rect">
             <a:avLst/>
@@ -9685,8 +10028,8 @@
           <a:noFill/>
         </p:spPr>
         <p:txBody>
-          <a:bodyPr wrap="square">
-            <a:normAutofit/>
+          <a:bodyPr wrap="none">
+            <a:noAutofit/>
           </a:bodyPr>
           <a:lstStyle/>
           <a:p>
@@ -9711,8 +10054,8 @@
         </p:nvSpPr>
         <p:spPr>
           <a:xfrm>
-            <a:off x="2926080" y="1536192"/>
-            <a:ext cx="1005840" cy="182880"/>
+            <a:off x="2358898" y="1519428"/>
+            <a:ext cx="1865630" cy="219456"/>
           </a:xfrm>
           <a:prstGeom prst="rect">
             <a:avLst/>
@@ -9721,7 +10064,7 @@
         </p:spPr>
         <p:txBody>
           <a:bodyPr wrap="square">
-            <a:normAutofit/>
+            <a:noAutofit/>
           </a:bodyPr>
           <a:lstStyle/>
           <a:p>
@@ -9746,8 +10089,8 @@
         </p:nvSpPr>
         <p:spPr>
           <a:xfrm>
-            <a:off x="512064" y="1783080"/>
-            <a:ext cx="3584448" cy="164592"/>
+            <a:off x="512064" y="1737360"/>
+            <a:ext cx="3621024" cy="201168"/>
           </a:xfrm>
           <a:prstGeom prst="rect">
             <a:avLst/>
@@ -9756,7 +10099,7 @@
         </p:spPr>
         <p:txBody>
           <a:bodyPr wrap="square">
-            <a:normAutofit/>
+            <a:noAutofit/>
           </a:bodyPr>
           <a:lstStyle/>
           <a:p>
@@ -9871,8 +10214,8 @@
         </p:nvSpPr>
         <p:spPr>
           <a:xfrm>
-            <a:off x="512064" y="2194560"/>
-            <a:ext cx="3584448" cy="146304"/>
+            <a:off x="512064" y="2167128"/>
+            <a:ext cx="3621024" cy="182880"/>
           </a:xfrm>
           <a:prstGeom prst="rect">
             <a:avLst/>
@@ -9881,7 +10224,7 @@
         </p:spPr>
         <p:txBody>
           <a:bodyPr wrap="square">
-            <a:normAutofit/>
+            <a:noAutofit/>
           </a:bodyPr>
           <a:lstStyle/>
           <a:p>
@@ -9906,8 +10249,8 @@
         </p:nvSpPr>
         <p:spPr>
           <a:xfrm>
-            <a:off x="512064" y="2386584"/>
-            <a:ext cx="1737360" cy="402336"/>
+            <a:off x="512064" y="2304288"/>
+            <a:ext cx="2377440" cy="530352"/>
           </a:xfrm>
           <a:prstGeom prst="rect">
             <a:avLst/>
@@ -9916,7 +10259,7 @@
         </p:spPr>
         <p:txBody>
           <a:bodyPr wrap="square">
-            <a:normAutofit/>
+            <a:noAutofit/>
           </a:bodyPr>
           <a:lstStyle/>
           <a:p>
@@ -9941,8 +10284,8 @@
         </p:nvSpPr>
         <p:spPr>
           <a:xfrm>
-            <a:off x="1920240" y="2587752"/>
-            <a:ext cx="365760" cy="182880"/>
+            <a:off x="1794891" y="2570988"/>
+            <a:ext cx="457200" cy="219456"/>
           </a:xfrm>
           <a:prstGeom prst="rect">
             <a:avLst/>
@@ -9950,8 +10293,8 @@
           <a:noFill/>
         </p:spPr>
         <p:txBody>
-          <a:bodyPr wrap="square">
-            <a:normAutofit/>
+          <a:bodyPr wrap="none">
+            <a:noAutofit/>
           </a:bodyPr>
           <a:lstStyle/>
           <a:p>
@@ -9976,8 +10319,8 @@
         </p:nvSpPr>
         <p:spPr>
           <a:xfrm>
-            <a:off x="2926080" y="2587752"/>
-            <a:ext cx="1005840" cy="182880"/>
+            <a:off x="2305177" y="2570988"/>
+            <a:ext cx="1919351" cy="219456"/>
           </a:xfrm>
           <a:prstGeom prst="rect">
             <a:avLst/>
@@ -9986,7 +10329,7 @@
         </p:spPr>
         <p:txBody>
           <a:bodyPr wrap="square">
-            <a:normAutofit/>
+            <a:noAutofit/>
           </a:bodyPr>
           <a:lstStyle/>
           <a:p>
@@ -10011,8 +10354,8 @@
         </p:nvSpPr>
         <p:spPr>
           <a:xfrm>
-            <a:off x="512064" y="2834640"/>
-            <a:ext cx="3584448" cy="164592"/>
+            <a:off x="512064" y="2788920"/>
+            <a:ext cx="3621024" cy="201168"/>
           </a:xfrm>
           <a:prstGeom prst="rect">
             <a:avLst/>
@@ -10021,7 +10364,7 @@
         </p:spPr>
         <p:txBody>
           <a:bodyPr wrap="square">
-            <a:normAutofit/>
+            <a:noAutofit/>
           </a:bodyPr>
           <a:lstStyle/>
           <a:p>
@@ -10136,8 +10479,8 @@
         </p:nvSpPr>
         <p:spPr>
           <a:xfrm>
-            <a:off x="512064" y="3246120"/>
-            <a:ext cx="1554480" cy="146304"/>
+            <a:off x="512064" y="3200400"/>
+            <a:ext cx="1554480" cy="164592"/>
           </a:xfrm>
           <a:prstGeom prst="rect">
             <a:avLst/>
@@ -10146,7 +10489,7 @@
         </p:spPr>
         <p:txBody>
           <a:bodyPr wrap="square">
-            <a:normAutofit/>
+            <a:noAutofit/>
           </a:bodyPr>
           <a:lstStyle/>
           <a:p>
@@ -10171,8 +10514,8 @@
         </p:nvSpPr>
         <p:spPr>
           <a:xfrm>
-            <a:off x="512064" y="3429000"/>
-            <a:ext cx="2011680" cy="274320"/>
+            <a:off x="512064" y="3346704"/>
+            <a:ext cx="2194560" cy="365760"/>
           </a:xfrm>
           <a:prstGeom prst="rect">
             <a:avLst/>
@@ -10181,7 +10524,7 @@
         </p:spPr>
         <p:txBody>
           <a:bodyPr wrap="square">
-            <a:normAutofit/>
+            <a:noAutofit/>
           </a:bodyPr>
           <a:lstStyle/>
           <a:p>
@@ -10206,8 +10549,8 @@
         </p:nvSpPr>
         <p:spPr>
           <a:xfrm>
-            <a:off x="2651760" y="3493008"/>
-            <a:ext cx="1463040" cy="182880"/>
+            <a:off x="1939823" y="3460051"/>
+            <a:ext cx="2284704" cy="201168"/>
           </a:xfrm>
           <a:prstGeom prst="rect">
             <a:avLst/>
@@ -10216,7 +10559,7 @@
         </p:spPr>
         <p:txBody>
           <a:bodyPr wrap="square">
-            <a:normAutofit/>
+            <a:noAutofit/>
           </a:bodyPr>
           <a:lstStyle/>
           <a:p>
@@ -10251,7 +10594,7 @@
         </p:spPr>
         <p:txBody>
           <a:bodyPr wrap="square">
-            <a:normAutofit/>
+            <a:noAutofit/>
           </a:bodyPr>
           <a:lstStyle/>
           <a:p>
@@ -10366,8 +10709,8 @@
         </p:nvSpPr>
         <p:spPr>
           <a:xfrm>
-            <a:off x="4901184" y="1385316"/>
-            <a:ext cx="868680" cy="164592"/>
+            <a:off x="4846320" y="1335024"/>
+            <a:ext cx="1143000" cy="265176"/>
           </a:xfrm>
           <a:prstGeom prst="rect">
             <a:avLst/>
@@ -10375,8 +10718,8 @@
           <a:noFill/>
         </p:spPr>
         <p:txBody>
-          <a:bodyPr wrap="square">
-            <a:normAutofit/>
+          <a:bodyPr wrap="square" anchor="ctr">
+            <a:noAutofit/>
           </a:bodyPr>
           <a:lstStyle/>
           <a:p>
@@ -10401,8 +10744,8 @@
         </p:nvSpPr>
         <p:spPr>
           <a:xfrm>
-            <a:off x="5815584" y="1385316"/>
-            <a:ext cx="2926080" cy="164592"/>
+            <a:off x="5943600" y="1335024"/>
+            <a:ext cx="2926080" cy="265176"/>
           </a:xfrm>
           <a:prstGeom prst="rect">
             <a:avLst/>
@@ -10410,8 +10753,8 @@
           <a:noFill/>
         </p:spPr>
         <p:txBody>
-          <a:bodyPr wrap="square">
-            <a:normAutofit/>
+          <a:bodyPr wrap="square" anchor="ctr">
+            <a:noAutofit/>
           </a:bodyPr>
           <a:lstStyle/>
           <a:p>
@@ -10526,8 +10869,8 @@
         </p:nvSpPr>
         <p:spPr>
           <a:xfrm>
-            <a:off x="4901184" y="1933956"/>
-            <a:ext cx="868680" cy="164592"/>
+            <a:off x="4846320" y="1883664"/>
+            <a:ext cx="1143000" cy="265176"/>
           </a:xfrm>
           <a:prstGeom prst="rect">
             <a:avLst/>
@@ -10535,8 +10878,8 @@
           <a:noFill/>
         </p:spPr>
         <p:txBody>
-          <a:bodyPr wrap="square">
-            <a:normAutofit/>
+          <a:bodyPr wrap="square" anchor="ctr">
+            <a:noAutofit/>
           </a:bodyPr>
           <a:lstStyle/>
           <a:p>
@@ -10561,8 +10904,8 @@
         </p:nvSpPr>
         <p:spPr>
           <a:xfrm>
-            <a:off x="5815584" y="1933956"/>
-            <a:ext cx="2926080" cy="164592"/>
+            <a:off x="5943600" y="1883664"/>
+            <a:ext cx="2926080" cy="265176"/>
           </a:xfrm>
           <a:prstGeom prst="rect">
             <a:avLst/>
@@ -10570,8 +10913,8 @@
           <a:noFill/>
         </p:spPr>
         <p:txBody>
-          <a:bodyPr wrap="square">
-            <a:normAutofit/>
+          <a:bodyPr wrap="square" anchor="ctr">
+            <a:noAutofit/>
           </a:bodyPr>
           <a:lstStyle/>
           <a:p>
@@ -10686,8 +11029,8 @@
         </p:nvSpPr>
         <p:spPr>
           <a:xfrm>
-            <a:off x="4901184" y="2482596"/>
-            <a:ext cx="868680" cy="164592"/>
+            <a:off x="4846320" y="2432304"/>
+            <a:ext cx="1143000" cy="265176"/>
           </a:xfrm>
           <a:prstGeom prst="rect">
             <a:avLst/>
@@ -10695,8 +11038,8 @@
           <a:noFill/>
         </p:spPr>
         <p:txBody>
-          <a:bodyPr wrap="square">
-            <a:normAutofit/>
+          <a:bodyPr wrap="square" anchor="ctr">
+            <a:noAutofit/>
           </a:bodyPr>
           <a:lstStyle/>
           <a:p>
@@ -10721,8 +11064,8 @@
         </p:nvSpPr>
         <p:spPr>
           <a:xfrm>
-            <a:off x="5815584" y="2482596"/>
-            <a:ext cx="2926080" cy="164592"/>
+            <a:off x="5943600" y="2432304"/>
+            <a:ext cx="2926080" cy="265176"/>
           </a:xfrm>
           <a:prstGeom prst="rect">
             <a:avLst/>
@@ -10730,8 +11073,8 @@
           <a:noFill/>
         </p:spPr>
         <p:txBody>
-          <a:bodyPr wrap="square">
-            <a:normAutofit/>
+          <a:bodyPr wrap="square" anchor="ctr">
+            <a:noAutofit/>
           </a:bodyPr>
           <a:lstStyle/>
           <a:p>
@@ -10846,8 +11189,8 @@
         </p:nvSpPr>
         <p:spPr>
           <a:xfrm>
-            <a:off x="640080" y="4407408"/>
-            <a:ext cx="7863840" cy="310896"/>
+            <a:off x="640080" y="4297680"/>
+            <a:ext cx="7863840" cy="493776"/>
           </a:xfrm>
           <a:prstGeom prst="rect">
             <a:avLst/>
@@ -10855,8 +11198,8 @@
           <a:noFill/>
         </p:spPr>
         <p:txBody>
-          <a:bodyPr wrap="square">
-            <a:normAutofit/>
+          <a:bodyPr wrap="square" anchor="ctr">
+            <a:noAutofit/>
           </a:bodyPr>
           <a:lstStyle/>
           <a:p>
@@ -10918,9 +11261,33 @@
           </a:p>
         </p:txBody>
       </p:sp>
-      <p:sp>
-        <p:nvSpPr>
-          <p:cNvPr id="43" name="TextBox 42"/>
+      <p:pic>
+        <p:nvPicPr>
+          <p:cNvPr id="43" name="Picture 42" descr="smb_team_logo.png"/>
+          <p:cNvPicPr>
+            <a:picLocks noChangeAspect="1"/>
+          </p:cNvPicPr>
+          <p:nvPr/>
+        </p:nvPicPr>
+        <p:blipFill>
+          <a:blip r:embed="rId2"/>
+          <a:stretch>
+            <a:fillRect/>
+          </a:stretch>
+        </p:blipFill>
+        <p:spPr>
+          <a:xfrm>
+            <a:off x="274320" y="4873752"/>
+            <a:ext cx="941832" cy="192024"/>
+          </a:xfrm>
+          <a:prstGeom prst="rect">
+            <a:avLst/>
+          </a:prstGeom>
+        </p:spPr>
+      </p:pic>
+      <p:sp>
+        <p:nvSpPr>
+          <p:cNvPr id="44" name="TextBox 43"/>
           <p:cNvSpPr txBox="1"/>
           <p:nvPr/>
         </p:nvSpPr>
@@ -10936,7 +11303,7 @@
         </p:spPr>
         <p:txBody>
           <a:bodyPr wrap="square">
-            <a:normAutofit/>
+            <a:noAutofit/>
           </a:bodyPr>
           <a:lstStyle/>
           <a:p>
@@ -10955,7 +11322,7 @@
       </p:sp>
       <p:sp>
         <p:nvSpPr>
-          <p:cNvPr id="44" name="TextBox 43"/>
+          <p:cNvPr id="45" name="TextBox 44"/>
           <p:cNvSpPr txBox="1"/>
           <p:nvPr/>
         </p:nvSpPr>
@@ -10971,7 +11338,7 @@
         </p:spPr>
         <p:txBody>
           <a:bodyPr wrap="square">
-            <a:normAutofit/>
+            <a:noAutofit/>
           </a:bodyPr>
           <a:lstStyle/>
           <a:p>

--- a/christine-brown-sports-law/Christine Brown Sports Law_October 22, 2026_Proposal.pptx
+++ b/christine-brown-sports-law/Christine Brown Sports Law_October 22, 2026_Proposal.pptx
@@ -6776,14 +6776,404 @@
       </p:sp>
       <p:sp>
         <p:nvSpPr>
-          <p:cNvPr id="4" name="Rectangle 3"/>
+          <p:cNvPr id="4" name="TextBox 3"/>
+          <p:cNvSpPr txBox="1"/>
+          <p:nvPr/>
+        </p:nvSpPr>
+        <p:spPr>
+          <a:xfrm>
+            <a:off x="292608" y="182880"/>
+            <a:ext cx="6309360" cy="164592"/>
+          </a:xfrm>
+          <a:prstGeom prst="rect">
+            <a:avLst/>
+          </a:prstGeom>
+          <a:noFill/>
+        </p:spPr>
+        <p:txBody>
+          <a:bodyPr wrap="square">
+            <a:noAutofit/>
+          </a:bodyPr>
+          <a:lstStyle/>
+          <a:p>
+            <a:pPr algn="l"/>
+            <a:r>
+              <a:rPr sz="750" b="1" i="0">
+                <a:solidFill>
+                  <a:srgbClr val="69CD2B"/>
+                </a:solidFill>
+                <a:latin typeface="Poppins"/>
+              </a:rPr>
+              <a:t>LAW FIRM GROWTH AUDIT  ·  CHRISTINE BROWN SPORTS LAW</a:t>
+            </a:r>
+          </a:p>
+        </p:txBody>
+      </p:sp>
+      <p:sp>
+        <p:nvSpPr>
+          <p:cNvPr id="5" name="TextBox 4"/>
+          <p:cNvSpPr txBox="1"/>
+          <p:nvPr/>
+        </p:nvSpPr>
+        <p:spPr>
+          <a:xfrm>
+            <a:off x="292608" y="384048"/>
+            <a:ext cx="8503920" cy="402336"/>
+          </a:xfrm>
+          <a:prstGeom prst="rect">
+            <a:avLst/>
+          </a:prstGeom>
+          <a:noFill/>
+        </p:spPr>
+        <p:txBody>
+          <a:bodyPr wrap="square" anchor="ctr">
+            <a:noAutofit/>
+          </a:bodyPr>
+          <a:lstStyle/>
+          <a:p>
+            <a:pPr algn="l"/>
+            <a:r>
+              <a:rPr sz="2000" b="1" i="0">
+                <a:solidFill>
+                  <a:srgbClr val="FFFFFF"/>
+                </a:solidFill>
+                <a:latin typeface="Poppins"/>
+              </a:rPr>
+              <a:t>Your Growth Plan: 3 Priorities for a Firm That Scales</a:t>
+            </a:r>
+          </a:p>
+        </p:txBody>
+      </p:sp>
+      <p:sp>
+        <p:nvSpPr>
+          <p:cNvPr id="6" name="Rectangle 5"/>
           <p:cNvSpPr/>
           <p:nvPr/>
         </p:nvSpPr>
         <p:spPr>
           <a:xfrm>
-            <a:off x="0" y="841248"/>
-            <a:ext cx="9144000" cy="36576"/>
+            <a:off x="274320" y="1005840"/>
+            <a:ext cx="2724912" cy="877824"/>
+          </a:xfrm>
+          <a:prstGeom prst="rect">
+            <a:avLst/>
+          </a:prstGeom>
+          <a:solidFill>
+            <a:srgbClr val="003A59"/>
+          </a:solidFill>
+          <a:ln>
+            <a:solidFill>
+              <a:srgbClr val="FFFFFF"/>
+            </a:solidFill>
+          </a:ln>
+        </p:spPr>
+        <p:style>
+          <a:lnRef idx="1">
+            <a:schemeClr val="accent1"/>
+          </a:lnRef>
+          <a:fillRef idx="3">
+            <a:schemeClr val="accent1"/>
+          </a:fillRef>
+          <a:effectRef idx="2">
+            <a:schemeClr val="accent1"/>
+          </a:effectRef>
+          <a:fontRef idx="minor">
+            <a:schemeClr val="lt1"/>
+          </a:fontRef>
+        </p:style>
+        <p:txBody>
+          <a:bodyPr rtlCol="0" anchor="ctr"/>
+          <a:lstStyle/>
+          <a:p>
+            <a:pPr algn="ctr"/>
+          </a:p>
+        </p:txBody>
+      </p:sp>
+      <p:sp>
+        <p:nvSpPr>
+          <p:cNvPr id="7" name="TextBox 6"/>
+          <p:cNvSpPr txBox="1"/>
+          <p:nvPr/>
+        </p:nvSpPr>
+        <p:spPr>
+          <a:xfrm>
+            <a:off x="457200" y="1097280"/>
+            <a:ext cx="2359152" cy="182880"/>
+          </a:xfrm>
+          <a:prstGeom prst="rect">
+            <a:avLst/>
+          </a:prstGeom>
+          <a:noFill/>
+        </p:spPr>
+        <p:txBody>
+          <a:bodyPr wrap="square">
+            <a:noAutofit/>
+          </a:bodyPr>
+          <a:lstStyle/>
+          <a:p>
+            <a:pPr algn="l"/>
+            <a:r>
+              <a:rPr sz="800" b="1" i="0">
+                <a:solidFill>
+                  <a:srgbClr val="69CD2B"/>
+                </a:solidFill>
+                <a:latin typeface="Poppins"/>
+              </a:rPr>
+              <a:t>PRIORITY 1</a:t>
+            </a:r>
+          </a:p>
+        </p:txBody>
+      </p:sp>
+      <p:sp>
+        <p:nvSpPr>
+          <p:cNvPr id="8" name="TextBox 7"/>
+          <p:cNvSpPr txBox="1"/>
+          <p:nvPr/>
+        </p:nvSpPr>
+        <p:spPr>
+          <a:xfrm>
+            <a:off x="457200" y="1280160"/>
+            <a:ext cx="2359152" cy="274320"/>
+          </a:xfrm>
+          <a:prstGeom prst="rect">
+            <a:avLst/>
+          </a:prstGeom>
+          <a:noFill/>
+        </p:spPr>
+        <p:txBody>
+          <a:bodyPr wrap="square">
+            <a:noAutofit/>
+          </a:bodyPr>
+          <a:lstStyle/>
+          <a:p>
+            <a:pPr algn="l"/>
+            <a:r>
+              <a:rPr sz="1400" b="1" i="0">
+                <a:solidFill>
+                  <a:srgbClr val="FFFFFF"/>
+                </a:solidFill>
+                <a:latin typeface="Poppins"/>
+              </a:rPr>
+              <a:t>Put AI to Work</a:t>
+            </a:r>
+          </a:p>
+        </p:txBody>
+      </p:sp>
+      <p:sp>
+        <p:nvSpPr>
+          <p:cNvPr id="9" name="TextBox 8"/>
+          <p:cNvSpPr txBox="1"/>
+          <p:nvPr/>
+        </p:nvSpPr>
+        <p:spPr>
+          <a:xfrm>
+            <a:off x="457200" y="1527048"/>
+            <a:ext cx="2359152" cy="274320"/>
+          </a:xfrm>
+          <a:prstGeom prst="rect">
+            <a:avLst/>
+          </a:prstGeom>
+          <a:noFill/>
+        </p:spPr>
+        <p:txBody>
+          <a:bodyPr wrap="square">
+            <a:noAutofit/>
+          </a:bodyPr>
+          <a:lstStyle/>
+          <a:p>
+            <a:pPr algn="l"/>
+            <a:r>
+              <a:rPr sz="1400" b="1" i="0">
+                <a:solidFill>
+                  <a:srgbClr val="FFFFFF"/>
+                </a:solidFill>
+                <a:latin typeface="Poppins"/>
+              </a:rPr>
+              <a:t>for Your Team</a:t>
+            </a:r>
+          </a:p>
+        </p:txBody>
+      </p:sp>
+      <p:sp>
+        <p:nvSpPr>
+          <p:cNvPr id="10" name="Rectangle 9"/>
+          <p:cNvSpPr/>
+          <p:nvPr/>
+        </p:nvSpPr>
+        <p:spPr>
+          <a:xfrm>
+            <a:off x="274320" y="1883664"/>
+            <a:ext cx="2724912" cy="2743200"/>
+          </a:xfrm>
+          <a:prstGeom prst="rect">
+            <a:avLst/>
+          </a:prstGeom>
+          <a:solidFill>
+            <a:srgbClr val="FFFFFF"/>
+          </a:solidFill>
+          <a:ln>
+            <a:solidFill>
+              <a:srgbClr val="FFFFFF"/>
+            </a:solidFill>
+          </a:ln>
+        </p:spPr>
+        <p:style>
+          <a:lnRef idx="1">
+            <a:schemeClr val="accent1"/>
+          </a:lnRef>
+          <a:fillRef idx="3">
+            <a:schemeClr val="accent1"/>
+          </a:fillRef>
+          <a:effectRef idx="2">
+            <a:schemeClr val="accent1"/>
+          </a:effectRef>
+          <a:fontRef idx="minor">
+            <a:schemeClr val="lt1"/>
+          </a:fontRef>
+        </p:style>
+        <p:txBody>
+          <a:bodyPr rtlCol="0" anchor="ctr"/>
+          <a:lstStyle/>
+          <a:p>
+            <a:pPr algn="ctr"/>
+          </a:p>
+        </p:txBody>
+      </p:sp>
+      <p:sp>
+        <p:nvSpPr>
+          <p:cNvPr id="11" name="TextBox 10"/>
+          <p:cNvSpPr txBox="1"/>
+          <p:nvPr/>
+        </p:nvSpPr>
+        <p:spPr>
+          <a:xfrm>
+            <a:off x="402336" y="2029968"/>
+            <a:ext cx="2468880" cy="2505456"/>
+          </a:xfrm>
+          <a:prstGeom prst="rect">
+            <a:avLst/>
+          </a:prstGeom>
+          <a:noFill/>
+        </p:spPr>
+        <p:txBody>
+          <a:bodyPr wrap="square">
+            <a:noAutofit/>
+          </a:bodyPr>
+          <a:lstStyle/>
+          <a:p>
+            <a:pPr marL="146304" indent="-146304">
+              <a:buClr>
+                <a:srgbClr val="003A59"/>
+              </a:buClr>
+              <a:buFont typeface="Arial"/>
+              <a:buChar char="•"/>
+            </a:pPr>
+            <a:r>
+              <a:rPr sz="1100">
+                <a:solidFill>
+                  <a:srgbClr val="1B2A38"/>
+                </a:solidFill>
+                <a:latin typeface="Poppins"/>
+              </a:rPr>
+              <a:t>Kick off with your Fractional CTO and map repeat work</a:t>
+            </a:r>
+          </a:p>
+          <a:p>
+            <a:pPr marL="146304" indent="-146304">
+              <a:spcBef>
+                <a:spcPts val="600"/>
+              </a:spcBef>
+              <a:buClr>
+                <a:srgbClr val="003A59"/>
+              </a:buClr>
+              <a:buFont typeface="Arial"/>
+              <a:buChar char="•"/>
+            </a:pPr>
+            <a:r>
+              <a:rPr sz="1100">
+                <a:solidFill>
+                  <a:srgbClr val="1B2A38"/>
+                </a:solidFill>
+                <a:latin typeface="Poppins"/>
+              </a:rPr>
+              <a:t>Deploy the first AI skills for drafting and research</a:t>
+            </a:r>
+          </a:p>
+          <a:p>
+            <a:pPr marL="146304" indent="-146304">
+              <a:spcBef>
+                <a:spcPts val="600"/>
+              </a:spcBef>
+              <a:buClr>
+                <a:srgbClr val="003A59"/>
+              </a:buClr>
+              <a:buFont typeface="Arial"/>
+              <a:buChar char="•"/>
+            </a:pPr>
+            <a:r>
+              <a:rPr sz="1100">
+                <a:solidFill>
+                  <a:srgbClr val="1B2A38"/>
+                </a:solidFill>
+                <a:latin typeface="Poppins"/>
+              </a:rPr>
+              <a:t>Roll out AI Workforce Pro to all 12 seats</a:t>
+            </a:r>
+          </a:p>
+          <a:p>
+            <a:pPr marL="146304" indent="-146304">
+              <a:spcBef>
+                <a:spcPts val="600"/>
+              </a:spcBef>
+              <a:buClr>
+                <a:srgbClr val="003A59"/>
+              </a:buClr>
+              <a:buFont typeface="Arial"/>
+              <a:buChar char="•"/>
+            </a:pPr>
+            <a:r>
+              <a:rPr sz="1100">
+                <a:solidFill>
+                  <a:srgbClr val="1B2A38"/>
+                </a:solidFill>
+                <a:latin typeface="Poppins"/>
+              </a:rPr>
+              <a:t>Build one custom automation each month</a:t>
+            </a:r>
+          </a:p>
+          <a:p>
+            <a:pPr marL="146304" indent="-146304">
+              <a:spcBef>
+                <a:spcPts val="600"/>
+              </a:spcBef>
+              <a:buClr>
+                <a:srgbClr val="003A59"/>
+              </a:buClr>
+              <a:buFont typeface="Arial"/>
+              <a:buChar char="•"/>
+            </a:pPr>
+            <a:r>
+              <a:rPr sz="1100">
+                <a:solidFill>
+                  <a:srgbClr val="1B2A38"/>
+                </a:solidFill>
+                <a:latin typeface="Poppins"/>
+              </a:rPr>
+              <a:t>Free attorney hours for athletes, coaches, and teams</a:t>
+            </a:r>
+          </a:p>
+        </p:txBody>
+      </p:sp>
+      <p:sp>
+        <p:nvSpPr>
+          <p:cNvPr id="12" name="Rectangle 11"/>
+          <p:cNvSpPr/>
+          <p:nvPr/>
+        </p:nvSpPr>
+        <p:spPr>
+          <a:xfrm>
+            <a:off x="3209544" y="1005840"/>
+            <a:ext cx="2724912" cy="877824"/>
           </a:xfrm>
           <a:prstGeom prst="rect">
             <a:avLst/>
@@ -6821,14 +7211,14 @@
       </p:sp>
       <p:sp>
         <p:nvSpPr>
-          <p:cNvPr id="5" name="TextBox 4"/>
+          <p:cNvPr id="13" name="TextBox 12"/>
           <p:cNvSpPr txBox="1"/>
           <p:nvPr/>
         </p:nvSpPr>
         <p:spPr>
           <a:xfrm>
-            <a:off x="292608" y="182880"/>
-            <a:ext cx="6309360" cy="164592"/>
+            <a:off x="3392424" y="1097280"/>
+            <a:ext cx="2359152" cy="182880"/>
           </a:xfrm>
           <a:prstGeom prst="rect">
             <a:avLst/>
@@ -6843,27 +7233,27 @@
           <a:p>
             <a:pPr algn="l"/>
             <a:r>
-              <a:rPr sz="750" b="1" i="0">
-                <a:solidFill>
-                  <a:srgbClr val="69CD2B"/>
+              <a:rPr sz="800" b="1" i="0">
+                <a:solidFill>
+                  <a:srgbClr val="143306"/>
                 </a:solidFill>
                 <a:latin typeface="Poppins"/>
               </a:rPr>
-              <a:t>LAW FIRM GROWTH AUDIT  ·  CHRISTINE BROWN SPORTS LAW</a:t>
-            </a:r>
-          </a:p>
-        </p:txBody>
-      </p:sp>
-      <p:sp>
-        <p:nvSpPr>
-          <p:cNvPr id="6" name="TextBox 5"/>
+              <a:t>PRIORITY 2</a:t>
+            </a:r>
+          </a:p>
+        </p:txBody>
+      </p:sp>
+      <p:sp>
+        <p:nvSpPr>
+          <p:cNvPr id="14" name="TextBox 13"/>
           <p:cNvSpPr txBox="1"/>
           <p:nvPr/>
         </p:nvSpPr>
         <p:spPr>
           <a:xfrm>
-            <a:off x="292608" y="384048"/>
-            <a:ext cx="8503920" cy="402336"/>
+            <a:off x="3392424" y="1280160"/>
+            <a:ext cx="2359152" cy="274320"/>
           </a:xfrm>
           <a:prstGeom prst="rect">
             <a:avLst/>
@@ -6871,34 +7261,239 @@
           <a:noFill/>
         </p:spPr>
         <p:txBody>
-          <a:bodyPr wrap="square" anchor="ctr">
+          <a:bodyPr wrap="square">
             <a:noAutofit/>
           </a:bodyPr>
           <a:lstStyle/>
           <a:p>
             <a:pPr algn="l"/>
             <a:r>
-              <a:rPr sz="2000" b="1" i="0">
-                <a:solidFill>
-                  <a:srgbClr val="FFFFFF"/>
+              <a:rPr sz="1400" b="1" i="0">
+                <a:solidFill>
+                  <a:srgbClr val="143306"/>
                 </a:solidFill>
                 <a:latin typeface="Poppins"/>
               </a:rPr>
-              <a:t>Your Growth Plan: 3 Priorities for a Firm That Scales</a:t>
-            </a:r>
-          </a:p>
-        </p:txBody>
-      </p:sp>
-      <p:sp>
-        <p:nvSpPr>
-          <p:cNvPr id="7" name="Rectangle 6"/>
+              <a:t>Fix Intake &amp;</a:t>
+            </a:r>
+          </a:p>
+        </p:txBody>
+      </p:sp>
+      <p:sp>
+        <p:nvSpPr>
+          <p:cNvPr id="15" name="TextBox 14"/>
+          <p:cNvSpPr txBox="1"/>
+          <p:nvPr/>
+        </p:nvSpPr>
+        <p:spPr>
+          <a:xfrm>
+            <a:off x="3392424" y="1527048"/>
+            <a:ext cx="2359152" cy="274320"/>
+          </a:xfrm>
+          <a:prstGeom prst="rect">
+            <a:avLst/>
+          </a:prstGeom>
+          <a:noFill/>
+        </p:spPr>
+        <p:txBody>
+          <a:bodyPr wrap="square">
+            <a:noAutofit/>
+          </a:bodyPr>
+          <a:lstStyle/>
+          <a:p>
+            <a:pPr algn="l"/>
+            <a:r>
+              <a:rPr sz="1400" b="1" i="0">
+                <a:solidFill>
+                  <a:srgbClr val="143306"/>
+                </a:solidFill>
+                <a:latin typeface="Poppins"/>
+              </a:rPr>
+              <a:t>Stop Losing Cases</a:t>
+            </a:r>
+          </a:p>
+        </p:txBody>
+      </p:sp>
+      <p:sp>
+        <p:nvSpPr>
+          <p:cNvPr id="16" name="Rectangle 15"/>
           <p:cNvSpPr/>
           <p:nvPr/>
         </p:nvSpPr>
         <p:spPr>
           <a:xfrm>
-            <a:off x="274320" y="1005840"/>
-            <a:ext cx="2212848" cy="2286000"/>
+            <a:off x="3209544" y="1883664"/>
+            <a:ext cx="2724912" cy="2743200"/>
+          </a:xfrm>
+          <a:prstGeom prst="rect">
+            <a:avLst/>
+          </a:prstGeom>
+          <a:solidFill>
+            <a:srgbClr val="FFFFFF"/>
+          </a:solidFill>
+          <a:ln>
+            <a:solidFill>
+              <a:srgbClr val="FFFFFF"/>
+            </a:solidFill>
+          </a:ln>
+        </p:spPr>
+        <p:style>
+          <a:lnRef idx="1">
+            <a:schemeClr val="accent1"/>
+          </a:lnRef>
+          <a:fillRef idx="3">
+            <a:schemeClr val="accent1"/>
+          </a:fillRef>
+          <a:effectRef idx="2">
+            <a:schemeClr val="accent1"/>
+          </a:effectRef>
+          <a:fontRef idx="minor">
+            <a:schemeClr val="lt1"/>
+          </a:fontRef>
+        </p:style>
+        <p:txBody>
+          <a:bodyPr rtlCol="0" anchor="ctr"/>
+          <a:lstStyle/>
+          <a:p>
+            <a:pPr algn="ctr"/>
+          </a:p>
+        </p:txBody>
+      </p:sp>
+      <p:sp>
+        <p:nvSpPr>
+          <p:cNvPr id="17" name="TextBox 16"/>
+          <p:cNvSpPr txBox="1"/>
+          <p:nvPr/>
+        </p:nvSpPr>
+        <p:spPr>
+          <a:xfrm>
+            <a:off x="3337560" y="2029968"/>
+            <a:ext cx="2468880" cy="2505456"/>
+          </a:xfrm>
+          <a:prstGeom prst="rect">
+            <a:avLst/>
+          </a:prstGeom>
+          <a:noFill/>
+        </p:spPr>
+        <p:txBody>
+          <a:bodyPr wrap="square">
+            <a:noAutofit/>
+          </a:bodyPr>
+          <a:lstStyle/>
+          <a:p>
+            <a:pPr marL="146304" indent="-146304">
+              <a:buClr>
+                <a:srgbClr val="69CD2B"/>
+              </a:buClr>
+              <a:buFont typeface="Arial"/>
+              <a:buChar char="•"/>
+            </a:pPr>
+            <a:r>
+              <a:rPr sz="1100">
+                <a:solidFill>
+                  <a:srgbClr val="1B2A38"/>
+                </a:solidFill>
+                <a:latin typeface="Poppins"/>
+              </a:rPr>
+              <a:t>Add a clear consultation button above the fold</a:t>
+            </a:r>
+          </a:p>
+          <a:p>
+            <a:pPr marL="146304" indent="-146304">
+              <a:spcBef>
+                <a:spcPts val="600"/>
+              </a:spcBef>
+              <a:buClr>
+                <a:srgbClr val="69CD2B"/>
+              </a:buClr>
+              <a:buFont typeface="Arial"/>
+              <a:buChar char="•"/>
+            </a:pPr>
+            <a:r>
+              <a:rPr sz="1100">
+                <a:solidFill>
+                  <a:srgbClr val="1B2A38"/>
+                </a:solidFill>
+                <a:latin typeface="Poppins"/>
+              </a:rPr>
+              <a:t>Embed the intake form right on the homepage</a:t>
+            </a:r>
+          </a:p>
+          <a:p>
+            <a:pPr marL="146304" indent="-146304">
+              <a:spcBef>
+                <a:spcPts val="600"/>
+              </a:spcBef>
+              <a:buClr>
+                <a:srgbClr val="69CD2B"/>
+              </a:buClr>
+              <a:buFont typeface="Arial"/>
+              <a:buChar char="•"/>
+            </a:pPr>
+            <a:r>
+              <a:rPr sz="1100">
+                <a:solidFill>
+                  <a:srgbClr val="1B2A38"/>
+                </a:solidFill>
+                <a:latin typeface="Poppins"/>
+              </a:rPr>
+              <a:t>Speed up the mobile site from 28/100</a:t>
+            </a:r>
+          </a:p>
+          <a:p>
+            <a:pPr marL="146304" indent="-146304">
+              <a:spcBef>
+                <a:spcPts val="600"/>
+              </a:spcBef>
+              <a:buClr>
+                <a:srgbClr val="69CD2B"/>
+              </a:buClr>
+              <a:buFont typeface="Arial"/>
+              <a:buChar char="•"/>
+            </a:pPr>
+            <a:r>
+              <a:rPr sz="1100">
+                <a:solidFill>
+                  <a:srgbClr val="1B2A38"/>
+                </a:solidFill>
+                <a:latin typeface="Poppins"/>
+              </a:rPr>
+              <a:t>Set a response and follow-up standard for inquiries</a:t>
+            </a:r>
+          </a:p>
+          <a:p>
+            <a:pPr marL="146304" indent="-146304">
+              <a:spcBef>
+                <a:spcPts val="600"/>
+              </a:spcBef>
+              <a:buClr>
+                <a:srgbClr val="69CD2B"/>
+              </a:buClr>
+              <a:buFont typeface="Arial"/>
+              <a:buChar char="•"/>
+            </a:pPr>
+            <a:r>
+              <a:rPr sz="1100">
+                <a:solidFill>
+                  <a:srgbClr val="1B2A38"/>
+                </a:solidFill>
+                <a:latin typeface="Poppins"/>
+              </a:rPr>
+              <a:t>Turn more of the visitors you earn into clients</a:t>
+            </a:r>
+          </a:p>
+        </p:txBody>
+      </p:sp>
+      <p:sp>
+        <p:nvSpPr>
+          <p:cNvPr id="18" name="Rectangle 17"/>
+          <p:cNvSpPr/>
+          <p:nvPr/>
+        </p:nvSpPr>
+        <p:spPr>
+          <a:xfrm>
+            <a:off x="6144768" y="1005840"/>
+            <a:ext cx="2724912" cy="877824"/>
           </a:xfrm>
           <a:prstGeom prst="rect">
             <a:avLst/>
@@ -6936,59 +7531,14 @@
       </p:sp>
       <p:sp>
         <p:nvSpPr>
-          <p:cNvPr id="8" name="Rectangle 7"/>
-          <p:cNvSpPr/>
-          <p:nvPr/>
-        </p:nvSpPr>
-        <p:spPr>
-          <a:xfrm>
-            <a:off x="274320" y="1005840"/>
-            <a:ext cx="2212848" cy="36576"/>
-          </a:xfrm>
-          <a:prstGeom prst="rect">
-            <a:avLst/>
-          </a:prstGeom>
-          <a:solidFill>
-            <a:srgbClr val="69CD2B"/>
-          </a:solidFill>
-          <a:ln>
-            <a:solidFill>
-              <a:srgbClr val="FFFFFF"/>
-            </a:solidFill>
-          </a:ln>
-        </p:spPr>
-        <p:style>
-          <a:lnRef idx="1">
-            <a:schemeClr val="accent1"/>
-          </a:lnRef>
-          <a:fillRef idx="3">
-            <a:schemeClr val="accent1"/>
-          </a:fillRef>
-          <a:effectRef idx="2">
-            <a:schemeClr val="accent1"/>
-          </a:effectRef>
-          <a:fontRef idx="minor">
-            <a:schemeClr val="lt1"/>
-          </a:fontRef>
-        </p:style>
-        <p:txBody>
-          <a:bodyPr rtlCol="0" anchor="ctr"/>
-          <a:lstStyle/>
-          <a:p>
-            <a:pPr algn="ctr"/>
-          </a:p>
-        </p:txBody>
-      </p:sp>
-      <p:sp>
-        <p:nvSpPr>
-          <p:cNvPr id="9" name="TextBox 8"/>
+          <p:cNvPr id="19" name="TextBox 18"/>
           <p:cNvSpPr txBox="1"/>
           <p:nvPr/>
         </p:nvSpPr>
         <p:spPr>
           <a:xfrm>
-            <a:off x="457200" y="1170432"/>
-            <a:ext cx="1847088" cy="146304"/>
+            <a:off x="6327648" y="1097280"/>
+            <a:ext cx="2359152" cy="182880"/>
           </a:xfrm>
           <a:prstGeom prst="rect">
             <a:avLst/>
@@ -7003,27 +7553,27 @@
           <a:p>
             <a:pPr algn="l"/>
             <a:r>
-              <a:rPr sz="750" b="1" i="0">
+              <a:rPr sz="800" b="1" i="0">
                 <a:solidFill>
                   <a:srgbClr val="69CD2B"/>
                 </a:solidFill>
                 <a:latin typeface="Poppins"/>
               </a:rPr>
-              <a:t>THE SMB TEAM MODEL</a:t>
-            </a:r>
-          </a:p>
-        </p:txBody>
-      </p:sp>
-      <p:sp>
-        <p:nvSpPr>
-          <p:cNvPr id="10" name="TextBox 9"/>
+              <a:t>PRIORITY 3</a:t>
+            </a:r>
+          </a:p>
+        </p:txBody>
+      </p:sp>
+      <p:sp>
+        <p:nvSpPr>
+          <p:cNvPr id="20" name="TextBox 19"/>
           <p:cNvSpPr txBox="1"/>
           <p:nvPr/>
         </p:nvSpPr>
         <p:spPr>
           <a:xfrm>
-            <a:off x="457200" y="1426464"/>
-            <a:ext cx="1847088" cy="1737360"/>
+            <a:off x="6327648" y="1280160"/>
+            <a:ext cx="2359152" cy="274320"/>
           </a:xfrm>
           <a:prstGeom prst="rect">
             <a:avLst/>
@@ -7038,72 +7588,27 @@
           <a:p>
             <a:pPr algn="l"/>
             <a:r>
-              <a:rPr sz="850" b="0" i="0">
-                <a:solidFill>
-                  <a:srgbClr val="B8CDDD"/>
+              <a:rPr sz="1400" b="1" i="0">
+                <a:solidFill>
+                  <a:srgbClr val="FFFFFF"/>
                 </a:solidFill>
                 <a:latin typeface="Poppins"/>
               </a:rPr>
-              <a:t>Lead generation, intake, a self-managing team, and a profit plan all have to work together. When all four work, Christine can step back while the firm keeps growing.</a:t>
-            </a:r>
-          </a:p>
-        </p:txBody>
-      </p:sp>
-      <p:sp>
-        <p:nvSpPr>
-          <p:cNvPr id="11" name="Rectangle 10"/>
-          <p:cNvSpPr/>
-          <p:nvPr/>
-        </p:nvSpPr>
-        <p:spPr>
-          <a:xfrm>
-            <a:off x="274320" y="3456432"/>
-            <a:ext cx="2212848" cy="1124712"/>
-          </a:xfrm>
-          <a:prstGeom prst="rect">
-            <a:avLst/>
-          </a:prstGeom>
-          <a:solidFill>
-            <a:srgbClr val="69CD2B"/>
-          </a:solidFill>
-          <a:ln>
-            <a:solidFill>
-              <a:srgbClr val="FFFFFF"/>
-            </a:solidFill>
-          </a:ln>
-        </p:spPr>
-        <p:style>
-          <a:lnRef idx="1">
-            <a:schemeClr val="accent1"/>
-          </a:lnRef>
-          <a:fillRef idx="3">
-            <a:schemeClr val="accent1"/>
-          </a:fillRef>
-          <a:effectRef idx="2">
-            <a:schemeClr val="accent1"/>
-          </a:effectRef>
-          <a:fontRef idx="minor">
-            <a:schemeClr val="lt1"/>
-          </a:fontRef>
-        </p:style>
-        <p:txBody>
-          <a:bodyPr rtlCol="0" anchor="ctr"/>
-          <a:lstStyle/>
-          <a:p>
-            <a:pPr algn="ctr"/>
-          </a:p>
-        </p:txBody>
-      </p:sp>
-      <p:sp>
-        <p:nvSpPr>
-          <p:cNvPr id="12" name="TextBox 11"/>
+              <a:t>Install Team &amp;</a:t>
+            </a:r>
+          </a:p>
+        </p:txBody>
+      </p:sp>
+      <p:sp>
+        <p:nvSpPr>
+          <p:cNvPr id="21" name="TextBox 20"/>
           <p:cNvSpPr txBox="1"/>
           <p:nvPr/>
         </p:nvSpPr>
         <p:spPr>
           <a:xfrm>
-            <a:off x="457200" y="3621024"/>
-            <a:ext cx="1847088" cy="475488"/>
+            <a:off x="6327648" y="1527048"/>
+            <a:ext cx="2359152" cy="274320"/>
           </a:xfrm>
           <a:prstGeom prst="rect">
             <a:avLst/>
@@ -7118,337 +7623,27 @@
           <a:p>
             <a:pPr algn="l"/>
             <a:r>
-              <a:rPr sz="1150" b="1" i="0">
-                <a:solidFill>
-                  <a:srgbClr val="143306"/>
+              <a:rPr sz="1400" b="1" i="0">
+                <a:solidFill>
+                  <a:srgbClr val="FFFFFF"/>
                 </a:solidFill>
                 <a:latin typeface="Poppins"/>
               </a:rPr>
-              <a:t>A firm that scales beyond you</a:t>
-            </a:r>
-          </a:p>
-        </p:txBody>
-      </p:sp>
-      <p:sp>
-        <p:nvSpPr>
-          <p:cNvPr id="13" name="TextBox 12"/>
-          <p:cNvSpPr txBox="1"/>
-          <p:nvPr/>
-        </p:nvSpPr>
-        <p:spPr>
-          <a:xfrm>
-            <a:off x="457200" y="4114800"/>
-            <a:ext cx="1847088" cy="420624"/>
-          </a:xfrm>
-          <a:prstGeom prst="rect">
-            <a:avLst/>
-          </a:prstGeom>
-          <a:noFill/>
-        </p:spPr>
-        <p:txBody>
-          <a:bodyPr wrap="square">
-            <a:noAutofit/>
-          </a:bodyPr>
-          <a:lstStyle/>
-          <a:p>
-            <a:pPr algn="l"/>
-            <a:r>
-              <a:rPr sz="850" b="0" i="0">
-                <a:solidFill>
-                  <a:srgbClr val="1F470C"/>
-                </a:solidFill>
-                <a:latin typeface="Poppins"/>
-              </a:rPr>
-              <a:t>Step away and trust the firm runs</a:t>
-            </a:r>
-          </a:p>
-        </p:txBody>
-      </p:sp>
-      <p:sp>
-        <p:nvSpPr>
-          <p:cNvPr id="14" name="Rectangle 13"/>
+              <a:t>Profit Systems</a:t>
+            </a:r>
+          </a:p>
+        </p:txBody>
+      </p:sp>
+      <p:sp>
+        <p:nvSpPr>
+          <p:cNvPr id="22" name="Rectangle 21"/>
           <p:cNvSpPr/>
           <p:nvPr/>
         </p:nvSpPr>
         <p:spPr>
           <a:xfrm>
-            <a:off x="2670048" y="1005840"/>
-            <a:ext cx="2066543" cy="841248"/>
-          </a:xfrm>
-          <a:prstGeom prst="rect">
-            <a:avLst/>
-          </a:prstGeom>
-          <a:solidFill>
-            <a:srgbClr val="0091C9"/>
-          </a:solidFill>
-          <a:ln>
-            <a:solidFill>
-              <a:srgbClr val="FFFFFF"/>
-            </a:solidFill>
-          </a:ln>
-        </p:spPr>
-        <p:style>
-          <a:lnRef idx="1">
-            <a:schemeClr val="accent1"/>
-          </a:lnRef>
-          <a:fillRef idx="3">
-            <a:schemeClr val="accent1"/>
-          </a:fillRef>
-          <a:effectRef idx="2">
-            <a:schemeClr val="accent1"/>
-          </a:effectRef>
-          <a:fontRef idx="minor">
-            <a:schemeClr val="lt1"/>
-          </a:fontRef>
-        </p:style>
-        <p:txBody>
-          <a:bodyPr rtlCol="0" anchor="ctr"/>
-          <a:lstStyle/>
-          <a:p>
-            <a:pPr algn="ctr"/>
-          </a:p>
-        </p:txBody>
-      </p:sp>
-      <p:sp>
-        <p:nvSpPr>
-          <p:cNvPr id="15" name="TextBox 14"/>
-          <p:cNvSpPr txBox="1"/>
-          <p:nvPr/>
-        </p:nvSpPr>
-        <p:spPr>
-          <a:xfrm>
-            <a:off x="2834640" y="1097280"/>
-            <a:ext cx="457200" cy="219456"/>
-          </a:xfrm>
-          <a:prstGeom prst="rect">
-            <a:avLst/>
-          </a:prstGeom>
-          <a:noFill/>
-        </p:spPr>
-        <p:txBody>
-          <a:bodyPr wrap="square">
-            <a:noAutofit/>
-          </a:bodyPr>
-          <a:lstStyle/>
-          <a:p>
-            <a:pPr algn="l"/>
-            <a:r>
-              <a:rPr sz="1300" b="1" i="0">
-                <a:solidFill>
-                  <a:srgbClr val="FFFFFF"/>
-                </a:solidFill>
-                <a:latin typeface="Poppins"/>
-              </a:rPr>
-              <a:t>01</a:t>
-            </a:r>
-          </a:p>
-        </p:txBody>
-      </p:sp>
-      <p:sp>
-        <p:nvSpPr>
-          <p:cNvPr id="16" name="TextBox 15"/>
-          <p:cNvSpPr txBox="1"/>
-          <p:nvPr/>
-        </p:nvSpPr>
-        <p:spPr>
-          <a:xfrm>
-            <a:off x="2834640" y="1316736"/>
-            <a:ext cx="1828800" cy="219456"/>
-          </a:xfrm>
-          <a:prstGeom prst="rect">
-            <a:avLst/>
-          </a:prstGeom>
-          <a:noFill/>
-        </p:spPr>
-        <p:txBody>
-          <a:bodyPr wrap="square">
-            <a:noAutofit/>
-          </a:bodyPr>
-          <a:lstStyle/>
-          <a:p>
-            <a:pPr algn="l"/>
-            <a:r>
-              <a:rPr sz="1400" b="1" i="0">
-                <a:solidFill>
-                  <a:srgbClr val="FFFFFF"/>
-                </a:solidFill>
-                <a:latin typeface="Poppins"/>
-              </a:rPr>
-              <a:t>Put AI to Work</a:t>
-            </a:r>
-          </a:p>
-        </p:txBody>
-      </p:sp>
-      <p:sp>
-        <p:nvSpPr>
-          <p:cNvPr id="17" name="TextBox 16"/>
-          <p:cNvSpPr txBox="1"/>
-          <p:nvPr/>
-        </p:nvSpPr>
-        <p:spPr>
-          <a:xfrm>
-            <a:off x="2834640" y="1536192"/>
-            <a:ext cx="1828800" cy="219456"/>
-          </a:xfrm>
-          <a:prstGeom prst="rect">
-            <a:avLst/>
-          </a:prstGeom>
-          <a:noFill/>
-        </p:spPr>
-        <p:txBody>
-          <a:bodyPr wrap="square">
-            <a:noAutofit/>
-          </a:bodyPr>
-          <a:lstStyle/>
-          <a:p>
-            <a:pPr algn="l"/>
-            <a:r>
-              <a:rPr sz="1400" b="1" i="0">
-                <a:solidFill>
-                  <a:srgbClr val="FFFFFF"/>
-                </a:solidFill>
-                <a:latin typeface="Poppins"/>
-              </a:rPr>
-              <a:t>for Your Team</a:t>
-            </a:r>
-          </a:p>
-        </p:txBody>
-      </p:sp>
-      <p:sp>
-        <p:nvSpPr>
-          <p:cNvPr id="18" name="Rectangle 17"/>
-          <p:cNvSpPr/>
-          <p:nvPr/>
-        </p:nvSpPr>
-        <p:spPr>
-          <a:xfrm>
-            <a:off x="2670048" y="1865376"/>
-            <a:ext cx="2066543" cy="512064"/>
-          </a:xfrm>
-          <a:prstGeom prst="rect">
-            <a:avLst/>
-          </a:prstGeom>
-          <a:solidFill>
-            <a:srgbClr val="ECF5FA"/>
-          </a:solidFill>
-          <a:ln>
-            <a:solidFill>
-              <a:srgbClr val="FFFFFF"/>
-            </a:solidFill>
-          </a:ln>
-        </p:spPr>
-        <p:style>
-          <a:lnRef idx="1">
-            <a:schemeClr val="accent1"/>
-          </a:lnRef>
-          <a:fillRef idx="3">
-            <a:schemeClr val="accent1"/>
-          </a:fillRef>
-          <a:effectRef idx="2">
-            <a:schemeClr val="accent1"/>
-          </a:effectRef>
-          <a:fontRef idx="minor">
-            <a:schemeClr val="lt1"/>
-          </a:fontRef>
-        </p:style>
-        <p:txBody>
-          <a:bodyPr rtlCol="0" anchor="ctr"/>
-          <a:lstStyle/>
-          <a:p>
-            <a:pPr algn="ctr"/>
-          </a:p>
-        </p:txBody>
-      </p:sp>
-      <p:sp>
-        <p:nvSpPr>
-          <p:cNvPr id="19" name="Rectangle 18"/>
-          <p:cNvSpPr/>
-          <p:nvPr/>
-        </p:nvSpPr>
-        <p:spPr>
-          <a:xfrm>
-            <a:off x="2816352" y="2093976"/>
-            <a:ext cx="64008" cy="64008"/>
-          </a:xfrm>
-          <a:prstGeom prst="rect">
-            <a:avLst/>
-          </a:prstGeom>
-          <a:solidFill>
-            <a:srgbClr val="0091C9"/>
-          </a:solidFill>
-          <a:ln>
-            <a:solidFill>
-              <a:srgbClr val="FFFFFF"/>
-            </a:solidFill>
-          </a:ln>
-        </p:spPr>
-        <p:style>
-          <a:lnRef idx="1">
-            <a:schemeClr val="accent1"/>
-          </a:lnRef>
-          <a:fillRef idx="3">
-            <a:schemeClr val="accent1"/>
-          </a:fillRef>
-          <a:effectRef idx="2">
-            <a:schemeClr val="accent1"/>
-          </a:effectRef>
-          <a:fontRef idx="minor">
-            <a:schemeClr val="lt1"/>
-          </a:fontRef>
-        </p:style>
-        <p:txBody>
-          <a:bodyPr rtlCol="0" anchor="ctr"/>
-          <a:lstStyle/>
-          <a:p>
-            <a:pPr algn="ctr"/>
-          </a:p>
-        </p:txBody>
-      </p:sp>
-      <p:sp>
-        <p:nvSpPr>
-          <p:cNvPr id="20" name="TextBox 19"/>
-          <p:cNvSpPr txBox="1"/>
-          <p:nvPr/>
-        </p:nvSpPr>
-        <p:spPr>
-          <a:xfrm>
-            <a:off x="2971800" y="1883664"/>
-            <a:ext cx="1645920" cy="475488"/>
-          </a:xfrm>
-          <a:prstGeom prst="rect">
-            <a:avLst/>
-          </a:prstGeom>
-          <a:noFill/>
-        </p:spPr>
-        <p:txBody>
-          <a:bodyPr wrap="square" anchor="ctr">
-            <a:noAutofit/>
-          </a:bodyPr>
-          <a:lstStyle/>
-          <a:p>
-            <a:pPr algn="l"/>
-            <a:r>
-              <a:rPr sz="800" b="0" i="0">
-                <a:solidFill>
-                  <a:srgbClr val="1B2A38"/>
-                </a:solidFill>
-                <a:latin typeface="Poppins"/>
-              </a:rPr>
-              <a:t>Kick off with your Fractional CTO and map repeat work</a:t>
-            </a:r>
-          </a:p>
-        </p:txBody>
-      </p:sp>
-      <p:sp>
-        <p:nvSpPr>
-          <p:cNvPr id="21" name="Rectangle 20"/>
-          <p:cNvSpPr/>
-          <p:nvPr/>
-        </p:nvSpPr>
-        <p:spPr>
-          <a:xfrm>
-            <a:off x="2670048" y="2423160"/>
-            <a:ext cx="2066543" cy="512064"/>
+            <a:off x="6144768" y="1883664"/>
+            <a:ext cx="2724912" cy="2743200"/>
           </a:xfrm>
           <a:prstGeom prst="rect">
             <a:avLst/>
@@ -7486,514 +7681,14 @@
       </p:sp>
       <p:sp>
         <p:nvSpPr>
-          <p:cNvPr id="22" name="Rectangle 21"/>
-          <p:cNvSpPr/>
-          <p:nvPr/>
-        </p:nvSpPr>
-        <p:spPr>
-          <a:xfrm>
-            <a:off x="2816352" y="2651760"/>
-            <a:ext cx="64008" cy="64008"/>
-          </a:xfrm>
-          <a:prstGeom prst="rect">
-            <a:avLst/>
-          </a:prstGeom>
-          <a:solidFill>
-            <a:srgbClr val="0091C9"/>
-          </a:solidFill>
-          <a:ln>
-            <a:solidFill>
-              <a:srgbClr val="FFFFFF"/>
-            </a:solidFill>
-          </a:ln>
-        </p:spPr>
-        <p:style>
-          <a:lnRef idx="1">
-            <a:schemeClr val="accent1"/>
-          </a:lnRef>
-          <a:fillRef idx="3">
-            <a:schemeClr val="accent1"/>
-          </a:fillRef>
-          <a:effectRef idx="2">
-            <a:schemeClr val="accent1"/>
-          </a:effectRef>
-          <a:fontRef idx="minor">
-            <a:schemeClr val="lt1"/>
-          </a:fontRef>
-        </p:style>
-        <p:txBody>
-          <a:bodyPr rtlCol="0" anchor="ctr"/>
-          <a:lstStyle/>
-          <a:p>
-            <a:pPr algn="ctr"/>
-          </a:p>
-        </p:txBody>
-      </p:sp>
-      <p:sp>
-        <p:nvSpPr>
           <p:cNvPr id="23" name="TextBox 22"/>
           <p:cNvSpPr txBox="1"/>
           <p:nvPr/>
         </p:nvSpPr>
         <p:spPr>
           <a:xfrm>
-            <a:off x="2971800" y="2441448"/>
-            <a:ext cx="1645920" cy="475488"/>
-          </a:xfrm>
-          <a:prstGeom prst="rect">
-            <a:avLst/>
-          </a:prstGeom>
-          <a:noFill/>
-        </p:spPr>
-        <p:txBody>
-          <a:bodyPr wrap="square" anchor="ctr">
-            <a:noAutofit/>
-          </a:bodyPr>
-          <a:lstStyle/>
-          <a:p>
-            <a:pPr algn="l"/>
-            <a:r>
-              <a:rPr sz="800" b="0" i="0">
-                <a:solidFill>
-                  <a:srgbClr val="1B2A38"/>
-                </a:solidFill>
-                <a:latin typeface="Poppins"/>
-              </a:rPr>
-              <a:t>Deploy the first AI skills for drafting and research</a:t>
-            </a:r>
-          </a:p>
-        </p:txBody>
-      </p:sp>
-      <p:sp>
-        <p:nvSpPr>
-          <p:cNvPr id="24" name="Rectangle 23"/>
-          <p:cNvSpPr/>
-          <p:nvPr/>
-        </p:nvSpPr>
-        <p:spPr>
-          <a:xfrm>
-            <a:off x="2670048" y="2971800"/>
-            <a:ext cx="2066543" cy="512064"/>
-          </a:xfrm>
-          <a:prstGeom prst="rect">
-            <a:avLst/>
-          </a:prstGeom>
-          <a:solidFill>
-            <a:srgbClr val="ECF5FA"/>
-          </a:solidFill>
-          <a:ln>
-            <a:solidFill>
-              <a:srgbClr val="FFFFFF"/>
-            </a:solidFill>
-          </a:ln>
-        </p:spPr>
-        <p:style>
-          <a:lnRef idx="1">
-            <a:schemeClr val="accent1"/>
-          </a:lnRef>
-          <a:fillRef idx="3">
-            <a:schemeClr val="accent1"/>
-          </a:fillRef>
-          <a:effectRef idx="2">
-            <a:schemeClr val="accent1"/>
-          </a:effectRef>
-          <a:fontRef idx="minor">
-            <a:schemeClr val="lt1"/>
-          </a:fontRef>
-        </p:style>
-        <p:txBody>
-          <a:bodyPr rtlCol="0" anchor="ctr"/>
-          <a:lstStyle/>
-          <a:p>
-            <a:pPr algn="ctr"/>
-          </a:p>
-        </p:txBody>
-      </p:sp>
-      <p:sp>
-        <p:nvSpPr>
-          <p:cNvPr id="25" name="Rectangle 24"/>
-          <p:cNvSpPr/>
-          <p:nvPr/>
-        </p:nvSpPr>
-        <p:spPr>
-          <a:xfrm>
-            <a:off x="2816352" y="3200400"/>
-            <a:ext cx="64008" cy="64008"/>
-          </a:xfrm>
-          <a:prstGeom prst="rect">
-            <a:avLst/>
-          </a:prstGeom>
-          <a:solidFill>
-            <a:srgbClr val="0091C9"/>
-          </a:solidFill>
-          <a:ln>
-            <a:solidFill>
-              <a:srgbClr val="FFFFFF"/>
-            </a:solidFill>
-          </a:ln>
-        </p:spPr>
-        <p:style>
-          <a:lnRef idx="1">
-            <a:schemeClr val="accent1"/>
-          </a:lnRef>
-          <a:fillRef idx="3">
-            <a:schemeClr val="accent1"/>
-          </a:fillRef>
-          <a:effectRef idx="2">
-            <a:schemeClr val="accent1"/>
-          </a:effectRef>
-          <a:fontRef idx="minor">
-            <a:schemeClr val="lt1"/>
-          </a:fontRef>
-        </p:style>
-        <p:txBody>
-          <a:bodyPr rtlCol="0" anchor="ctr"/>
-          <a:lstStyle/>
-          <a:p>
-            <a:pPr algn="ctr"/>
-          </a:p>
-        </p:txBody>
-      </p:sp>
-      <p:sp>
-        <p:nvSpPr>
-          <p:cNvPr id="26" name="TextBox 25"/>
-          <p:cNvSpPr txBox="1"/>
-          <p:nvPr/>
-        </p:nvSpPr>
-        <p:spPr>
-          <a:xfrm>
-            <a:off x="2971800" y="2990088"/>
-            <a:ext cx="1645920" cy="475488"/>
-          </a:xfrm>
-          <a:prstGeom prst="rect">
-            <a:avLst/>
-          </a:prstGeom>
-          <a:noFill/>
-        </p:spPr>
-        <p:txBody>
-          <a:bodyPr wrap="square" anchor="ctr">
-            <a:noAutofit/>
-          </a:bodyPr>
-          <a:lstStyle/>
-          <a:p>
-            <a:pPr algn="l"/>
-            <a:r>
-              <a:rPr sz="800" b="0" i="0">
-                <a:solidFill>
-                  <a:srgbClr val="1B2A38"/>
-                </a:solidFill>
-                <a:latin typeface="Poppins"/>
-              </a:rPr>
-              <a:t>Roll out AI Workforce Pro to all 12 seats</a:t>
-            </a:r>
-          </a:p>
-        </p:txBody>
-      </p:sp>
-      <p:sp>
-        <p:nvSpPr>
-          <p:cNvPr id="27" name="Rectangle 26"/>
-          <p:cNvSpPr/>
-          <p:nvPr/>
-        </p:nvSpPr>
-        <p:spPr>
-          <a:xfrm>
-            <a:off x="2670048" y="3520440"/>
-            <a:ext cx="2066543" cy="512064"/>
-          </a:xfrm>
-          <a:prstGeom prst="rect">
-            <a:avLst/>
-          </a:prstGeom>
-          <a:solidFill>
-            <a:srgbClr val="FFFFFF"/>
-          </a:solidFill>
-          <a:ln>
-            <a:solidFill>
-              <a:srgbClr val="FFFFFF"/>
-            </a:solidFill>
-          </a:ln>
-        </p:spPr>
-        <p:style>
-          <a:lnRef idx="1">
-            <a:schemeClr val="accent1"/>
-          </a:lnRef>
-          <a:fillRef idx="3">
-            <a:schemeClr val="accent1"/>
-          </a:fillRef>
-          <a:effectRef idx="2">
-            <a:schemeClr val="accent1"/>
-          </a:effectRef>
-          <a:fontRef idx="minor">
-            <a:schemeClr val="lt1"/>
-          </a:fontRef>
-        </p:style>
-        <p:txBody>
-          <a:bodyPr rtlCol="0" anchor="ctr"/>
-          <a:lstStyle/>
-          <a:p>
-            <a:pPr algn="ctr"/>
-          </a:p>
-        </p:txBody>
-      </p:sp>
-      <p:sp>
-        <p:nvSpPr>
-          <p:cNvPr id="28" name="Rectangle 27"/>
-          <p:cNvSpPr/>
-          <p:nvPr/>
-        </p:nvSpPr>
-        <p:spPr>
-          <a:xfrm>
-            <a:off x="2816352" y="3749039"/>
-            <a:ext cx="64008" cy="64008"/>
-          </a:xfrm>
-          <a:prstGeom prst="rect">
-            <a:avLst/>
-          </a:prstGeom>
-          <a:solidFill>
-            <a:srgbClr val="0091C9"/>
-          </a:solidFill>
-          <a:ln>
-            <a:solidFill>
-              <a:srgbClr val="FFFFFF"/>
-            </a:solidFill>
-          </a:ln>
-        </p:spPr>
-        <p:style>
-          <a:lnRef idx="1">
-            <a:schemeClr val="accent1"/>
-          </a:lnRef>
-          <a:fillRef idx="3">
-            <a:schemeClr val="accent1"/>
-          </a:fillRef>
-          <a:effectRef idx="2">
-            <a:schemeClr val="accent1"/>
-          </a:effectRef>
-          <a:fontRef idx="minor">
-            <a:schemeClr val="lt1"/>
-          </a:fontRef>
-        </p:style>
-        <p:txBody>
-          <a:bodyPr rtlCol="0" anchor="ctr"/>
-          <a:lstStyle/>
-          <a:p>
-            <a:pPr algn="ctr"/>
-          </a:p>
-        </p:txBody>
-      </p:sp>
-      <p:sp>
-        <p:nvSpPr>
-          <p:cNvPr id="29" name="TextBox 28"/>
-          <p:cNvSpPr txBox="1"/>
-          <p:nvPr/>
-        </p:nvSpPr>
-        <p:spPr>
-          <a:xfrm>
-            <a:off x="2971800" y="3538728"/>
-            <a:ext cx="1645920" cy="475488"/>
-          </a:xfrm>
-          <a:prstGeom prst="rect">
-            <a:avLst/>
-          </a:prstGeom>
-          <a:noFill/>
-        </p:spPr>
-        <p:txBody>
-          <a:bodyPr wrap="square" anchor="ctr">
-            <a:noAutofit/>
-          </a:bodyPr>
-          <a:lstStyle/>
-          <a:p>
-            <a:pPr algn="l"/>
-            <a:r>
-              <a:rPr sz="800" b="0" i="0">
-                <a:solidFill>
-                  <a:srgbClr val="1B2A38"/>
-                </a:solidFill>
-                <a:latin typeface="Poppins"/>
-              </a:rPr>
-              <a:t>Build one custom automation each month</a:t>
-            </a:r>
-          </a:p>
-        </p:txBody>
-      </p:sp>
-      <p:sp>
-        <p:nvSpPr>
-          <p:cNvPr id="30" name="Rectangle 29"/>
-          <p:cNvSpPr/>
-          <p:nvPr/>
-        </p:nvSpPr>
-        <p:spPr>
-          <a:xfrm>
-            <a:off x="2670048" y="4078224"/>
-            <a:ext cx="2066543" cy="512064"/>
-          </a:xfrm>
-          <a:prstGeom prst="rect">
-            <a:avLst/>
-          </a:prstGeom>
-          <a:solidFill>
-            <a:srgbClr val="ECF5FA"/>
-          </a:solidFill>
-          <a:ln>
-            <a:solidFill>
-              <a:srgbClr val="FFFFFF"/>
-            </a:solidFill>
-          </a:ln>
-        </p:spPr>
-        <p:style>
-          <a:lnRef idx="1">
-            <a:schemeClr val="accent1"/>
-          </a:lnRef>
-          <a:fillRef idx="3">
-            <a:schemeClr val="accent1"/>
-          </a:fillRef>
-          <a:effectRef idx="2">
-            <a:schemeClr val="accent1"/>
-          </a:effectRef>
-          <a:fontRef idx="minor">
-            <a:schemeClr val="lt1"/>
-          </a:fontRef>
-        </p:style>
-        <p:txBody>
-          <a:bodyPr rtlCol="0" anchor="ctr"/>
-          <a:lstStyle/>
-          <a:p>
-            <a:pPr algn="ctr"/>
-          </a:p>
-        </p:txBody>
-      </p:sp>
-      <p:sp>
-        <p:nvSpPr>
-          <p:cNvPr id="31" name="Rectangle 30"/>
-          <p:cNvSpPr/>
-          <p:nvPr/>
-        </p:nvSpPr>
-        <p:spPr>
-          <a:xfrm>
-            <a:off x="2816352" y="4306824"/>
-            <a:ext cx="64008" cy="64008"/>
-          </a:xfrm>
-          <a:prstGeom prst="rect">
-            <a:avLst/>
-          </a:prstGeom>
-          <a:solidFill>
-            <a:srgbClr val="0091C9"/>
-          </a:solidFill>
-          <a:ln>
-            <a:solidFill>
-              <a:srgbClr val="FFFFFF"/>
-            </a:solidFill>
-          </a:ln>
-        </p:spPr>
-        <p:style>
-          <a:lnRef idx="1">
-            <a:schemeClr val="accent1"/>
-          </a:lnRef>
-          <a:fillRef idx="3">
-            <a:schemeClr val="accent1"/>
-          </a:fillRef>
-          <a:effectRef idx="2">
-            <a:schemeClr val="accent1"/>
-          </a:effectRef>
-          <a:fontRef idx="minor">
-            <a:schemeClr val="lt1"/>
-          </a:fontRef>
-        </p:style>
-        <p:txBody>
-          <a:bodyPr rtlCol="0" anchor="ctr"/>
-          <a:lstStyle/>
-          <a:p>
-            <a:pPr algn="ctr"/>
-          </a:p>
-        </p:txBody>
-      </p:sp>
-      <p:sp>
-        <p:nvSpPr>
-          <p:cNvPr id="32" name="TextBox 31"/>
-          <p:cNvSpPr txBox="1"/>
-          <p:nvPr/>
-        </p:nvSpPr>
-        <p:spPr>
-          <a:xfrm>
-            <a:off x="2971800" y="4096511"/>
-            <a:ext cx="1645920" cy="475488"/>
-          </a:xfrm>
-          <a:prstGeom prst="rect">
-            <a:avLst/>
-          </a:prstGeom>
-          <a:noFill/>
-        </p:spPr>
-        <p:txBody>
-          <a:bodyPr wrap="square" anchor="ctr">
-            <a:noAutofit/>
-          </a:bodyPr>
-          <a:lstStyle/>
-          <a:p>
-            <a:pPr algn="l"/>
-            <a:r>
-              <a:rPr sz="750" b="0" i="0">
-                <a:solidFill>
-                  <a:srgbClr val="1B2A38"/>
-                </a:solidFill>
-                <a:latin typeface="Poppins"/>
-              </a:rPr>
-              <a:t>Free attorney hours for athletes, coaches, and teams</a:t>
-            </a:r>
-          </a:p>
-        </p:txBody>
-      </p:sp>
-      <p:sp>
-        <p:nvSpPr>
-          <p:cNvPr id="33" name="Rectangle 32"/>
-          <p:cNvSpPr/>
-          <p:nvPr/>
-        </p:nvSpPr>
-        <p:spPr>
-          <a:xfrm>
-            <a:off x="4846320" y="1005840"/>
-            <a:ext cx="2066543" cy="841248"/>
-          </a:xfrm>
-          <a:prstGeom prst="rect">
-            <a:avLst/>
-          </a:prstGeom>
-          <a:solidFill>
-            <a:srgbClr val="69CD2B"/>
-          </a:solidFill>
-          <a:ln>
-            <a:solidFill>
-              <a:srgbClr val="FFFFFF"/>
-            </a:solidFill>
-          </a:ln>
-        </p:spPr>
-        <p:style>
-          <a:lnRef idx="1">
-            <a:schemeClr val="accent1"/>
-          </a:lnRef>
-          <a:fillRef idx="3">
-            <a:schemeClr val="accent1"/>
-          </a:fillRef>
-          <a:effectRef idx="2">
-            <a:schemeClr val="accent1"/>
-          </a:effectRef>
-          <a:fontRef idx="minor">
-            <a:schemeClr val="lt1"/>
-          </a:fontRef>
-        </p:style>
-        <p:txBody>
-          <a:bodyPr rtlCol="0" anchor="ctr"/>
-          <a:lstStyle/>
-          <a:p>
-            <a:pPr algn="ctr"/>
-          </a:p>
-        </p:txBody>
-      </p:sp>
-      <p:sp>
-        <p:nvSpPr>
-          <p:cNvPr id="34" name="TextBox 33"/>
-          <p:cNvSpPr txBox="1"/>
-          <p:nvPr/>
-        </p:nvSpPr>
-        <p:spPr>
-          <a:xfrm>
-            <a:off x="5010912" y="1097280"/>
-            <a:ext cx="457200" cy="219456"/>
+            <a:off x="6272783" y="2029968"/>
+            <a:ext cx="2468880" cy="2505456"/>
           </a:xfrm>
           <a:prstGeom prst="rect">
             <a:avLst/>
@@ -8006,724 +7701,119 @@
           </a:bodyPr>
           <a:lstStyle/>
           <a:p>
-            <a:pPr algn="l"/>
-            <a:r>
-              <a:rPr sz="1300" b="1" i="0">
-                <a:solidFill>
-                  <a:srgbClr val="143306"/>
+            <a:pPr marL="146304" indent="-146304">
+              <a:buClr>
+                <a:srgbClr val="003A59"/>
+              </a:buClr>
+              <a:buFont typeface="Arial"/>
+              <a:buChar char="•"/>
+            </a:pPr>
+            <a:r>
+              <a:rPr sz="1100">
+                <a:solidFill>
+                  <a:srgbClr val="1B2A38"/>
                 </a:solidFill>
                 <a:latin typeface="Poppins"/>
               </a:rPr>
-              <a:t>02</a:t>
-            </a:r>
-          </a:p>
-        </p:txBody>
-      </p:sp>
-      <p:sp>
-        <p:nvSpPr>
-          <p:cNvPr id="35" name="TextBox 34"/>
-          <p:cNvSpPr txBox="1"/>
-          <p:nvPr/>
-        </p:nvSpPr>
-        <p:spPr>
-          <a:xfrm>
-            <a:off x="5010912" y="1316736"/>
-            <a:ext cx="1828800" cy="219456"/>
-          </a:xfrm>
-          <a:prstGeom prst="rect">
-            <a:avLst/>
-          </a:prstGeom>
-          <a:noFill/>
-        </p:spPr>
-        <p:txBody>
-          <a:bodyPr wrap="square">
-            <a:noAutofit/>
-          </a:bodyPr>
-          <a:lstStyle/>
-          <a:p>
-            <a:pPr algn="l"/>
-            <a:r>
-              <a:rPr sz="1400" b="1" i="0">
-                <a:solidFill>
-                  <a:srgbClr val="143306"/>
+              <a:t>Set a weekly operating rhythm with your FCOO</a:t>
+            </a:r>
+          </a:p>
+          <a:p>
+            <a:pPr marL="146304" indent="-146304">
+              <a:spcBef>
+                <a:spcPts val="600"/>
+              </a:spcBef>
+              <a:buClr>
+                <a:srgbClr val="003A59"/>
+              </a:buClr>
+              <a:buFont typeface="Arial"/>
+              <a:buChar char="•"/>
+            </a:pPr>
+            <a:r>
+              <a:rPr sz="1100">
+                <a:solidFill>
+                  <a:srgbClr val="1B2A38"/>
                 </a:solidFill>
                 <a:latin typeface="Poppins"/>
               </a:rPr>
-              <a:t>Fix Intake &amp;</a:t>
-            </a:r>
-          </a:p>
-        </p:txBody>
-      </p:sp>
-      <p:sp>
-        <p:nvSpPr>
-          <p:cNvPr id="36" name="TextBox 35"/>
-          <p:cNvSpPr txBox="1"/>
-          <p:nvPr/>
-        </p:nvSpPr>
-        <p:spPr>
-          <a:xfrm>
-            <a:off x="5010912" y="1536192"/>
-            <a:ext cx="1828800" cy="219456"/>
-          </a:xfrm>
-          <a:prstGeom prst="rect">
-            <a:avLst/>
-          </a:prstGeom>
-          <a:noFill/>
-        </p:spPr>
-        <p:txBody>
-          <a:bodyPr wrap="square">
-            <a:noAutofit/>
-          </a:bodyPr>
-          <a:lstStyle/>
-          <a:p>
-            <a:pPr algn="l"/>
-            <a:r>
-              <a:rPr sz="1350" b="1" i="0">
-                <a:solidFill>
-                  <a:srgbClr val="143306"/>
+              <a:t>Give every role clear goals and accountability</a:t>
+            </a:r>
+          </a:p>
+          <a:p>
+            <a:pPr marL="146304" indent="-146304">
+              <a:spcBef>
+                <a:spcPts val="600"/>
+              </a:spcBef>
+              <a:buClr>
+                <a:srgbClr val="003A59"/>
+              </a:buClr>
+              <a:buFont typeface="Arial"/>
+              <a:buChar char="•"/>
+            </a:pPr>
+            <a:r>
+              <a:rPr sz="1100">
+                <a:solidFill>
+                  <a:srgbClr val="1B2A38"/>
                 </a:solidFill>
                 <a:latin typeface="Poppins"/>
               </a:rPr>
-              <a:t>Stop Losing Cases</a:t>
-            </a:r>
-          </a:p>
-        </p:txBody>
-      </p:sp>
-      <p:sp>
-        <p:nvSpPr>
-          <p:cNvPr id="37" name="Rectangle 36"/>
-          <p:cNvSpPr/>
-          <p:nvPr/>
-        </p:nvSpPr>
-        <p:spPr>
-          <a:xfrm>
-            <a:off x="4846320" y="1865376"/>
-            <a:ext cx="2066543" cy="512064"/>
-          </a:xfrm>
-          <a:prstGeom prst="rect">
-            <a:avLst/>
-          </a:prstGeom>
-          <a:solidFill>
-            <a:srgbClr val="ECF7E4"/>
-          </a:solidFill>
-          <a:ln>
-            <a:solidFill>
-              <a:srgbClr val="FFFFFF"/>
-            </a:solidFill>
-          </a:ln>
-        </p:spPr>
-        <p:style>
-          <a:lnRef idx="1">
-            <a:schemeClr val="accent1"/>
-          </a:lnRef>
-          <a:fillRef idx="3">
-            <a:schemeClr val="accent1"/>
-          </a:fillRef>
-          <a:effectRef idx="2">
-            <a:schemeClr val="accent1"/>
-          </a:effectRef>
-          <a:fontRef idx="minor">
-            <a:schemeClr val="lt1"/>
-          </a:fontRef>
-        </p:style>
-        <p:txBody>
-          <a:bodyPr rtlCol="0" anchor="ctr"/>
-          <a:lstStyle/>
-          <a:p>
-            <a:pPr algn="ctr"/>
-          </a:p>
-        </p:txBody>
-      </p:sp>
-      <p:sp>
-        <p:nvSpPr>
-          <p:cNvPr id="38" name="Rectangle 37"/>
-          <p:cNvSpPr/>
-          <p:nvPr/>
-        </p:nvSpPr>
-        <p:spPr>
-          <a:xfrm>
-            <a:off x="4992624" y="2093976"/>
-            <a:ext cx="64008" cy="64008"/>
-          </a:xfrm>
-          <a:prstGeom prst="rect">
-            <a:avLst/>
-          </a:prstGeom>
-          <a:solidFill>
-            <a:srgbClr val="69CD2B"/>
-          </a:solidFill>
-          <a:ln>
-            <a:solidFill>
-              <a:srgbClr val="FFFFFF"/>
-            </a:solidFill>
-          </a:ln>
-        </p:spPr>
-        <p:style>
-          <a:lnRef idx="1">
-            <a:schemeClr val="accent1"/>
-          </a:lnRef>
-          <a:fillRef idx="3">
-            <a:schemeClr val="accent1"/>
-          </a:fillRef>
-          <a:effectRef idx="2">
-            <a:schemeClr val="accent1"/>
-          </a:effectRef>
-          <a:fontRef idx="minor">
-            <a:schemeClr val="lt1"/>
-          </a:fontRef>
-        </p:style>
-        <p:txBody>
-          <a:bodyPr rtlCol="0" anchor="ctr"/>
-          <a:lstStyle/>
-          <a:p>
-            <a:pPr algn="ctr"/>
-          </a:p>
-        </p:txBody>
-      </p:sp>
-      <p:sp>
-        <p:nvSpPr>
-          <p:cNvPr id="39" name="TextBox 38"/>
-          <p:cNvSpPr txBox="1"/>
-          <p:nvPr/>
-        </p:nvSpPr>
-        <p:spPr>
-          <a:xfrm>
-            <a:off x="5148072" y="1883664"/>
-            <a:ext cx="1645920" cy="475488"/>
-          </a:xfrm>
-          <a:prstGeom prst="rect">
-            <a:avLst/>
-          </a:prstGeom>
-          <a:noFill/>
-        </p:spPr>
-        <p:txBody>
-          <a:bodyPr wrap="square" anchor="ctr">
-            <a:noAutofit/>
-          </a:bodyPr>
-          <a:lstStyle/>
-          <a:p>
-            <a:pPr algn="l"/>
-            <a:r>
-              <a:rPr sz="800" b="0" i="0">
+              <a:t>Build a monthly profit snapshot by matter type</a:t>
+            </a:r>
+          </a:p>
+          <a:p>
+            <a:pPr marL="146304" indent="-146304">
+              <a:spcBef>
+                <a:spcPts val="600"/>
+              </a:spcBef>
+              <a:buClr>
+                <a:srgbClr val="003A59"/>
+              </a:buClr>
+              <a:buFont typeface="Arial"/>
+              <a:buChar char="•"/>
+            </a:pPr>
+            <a:r>
+              <a:rPr sz="1100">
                 <a:solidFill>
                   <a:srgbClr val="1B2A38"/>
                 </a:solidFill>
                 <a:latin typeface="Poppins"/>
               </a:rPr>
-              <a:t>Add a clear consultation button above the fold</a:t>
-            </a:r>
-          </a:p>
-        </p:txBody>
-      </p:sp>
-      <p:sp>
-        <p:nvSpPr>
-          <p:cNvPr id="40" name="Rectangle 39"/>
-          <p:cNvSpPr/>
-          <p:nvPr/>
-        </p:nvSpPr>
-        <p:spPr>
-          <a:xfrm>
-            <a:off x="4846320" y="2423160"/>
-            <a:ext cx="2066543" cy="512064"/>
-          </a:xfrm>
-          <a:prstGeom prst="rect">
-            <a:avLst/>
-          </a:prstGeom>
-          <a:solidFill>
-            <a:srgbClr val="FFFFFF"/>
-          </a:solidFill>
-          <a:ln>
-            <a:solidFill>
-              <a:srgbClr val="FFFFFF"/>
-            </a:solidFill>
-          </a:ln>
-        </p:spPr>
-        <p:style>
-          <a:lnRef idx="1">
-            <a:schemeClr val="accent1"/>
-          </a:lnRef>
-          <a:fillRef idx="3">
-            <a:schemeClr val="accent1"/>
-          </a:fillRef>
-          <a:effectRef idx="2">
-            <a:schemeClr val="accent1"/>
-          </a:effectRef>
-          <a:fontRef idx="minor">
-            <a:schemeClr val="lt1"/>
-          </a:fontRef>
-        </p:style>
-        <p:txBody>
-          <a:bodyPr rtlCol="0" anchor="ctr"/>
-          <a:lstStyle/>
-          <a:p>
-            <a:pPr algn="ctr"/>
-          </a:p>
-        </p:txBody>
-      </p:sp>
-      <p:sp>
-        <p:nvSpPr>
-          <p:cNvPr id="41" name="Rectangle 40"/>
-          <p:cNvSpPr/>
-          <p:nvPr/>
-        </p:nvSpPr>
-        <p:spPr>
-          <a:xfrm>
-            <a:off x="4992624" y="2651760"/>
-            <a:ext cx="64008" cy="64008"/>
-          </a:xfrm>
-          <a:prstGeom prst="rect">
-            <a:avLst/>
-          </a:prstGeom>
-          <a:solidFill>
-            <a:srgbClr val="69CD2B"/>
-          </a:solidFill>
-          <a:ln>
-            <a:solidFill>
-              <a:srgbClr val="FFFFFF"/>
-            </a:solidFill>
-          </a:ln>
-        </p:spPr>
-        <p:style>
-          <a:lnRef idx="1">
-            <a:schemeClr val="accent1"/>
-          </a:lnRef>
-          <a:fillRef idx="3">
-            <a:schemeClr val="accent1"/>
-          </a:fillRef>
-          <a:effectRef idx="2">
-            <a:schemeClr val="accent1"/>
-          </a:effectRef>
-          <a:fontRef idx="minor">
-            <a:schemeClr val="lt1"/>
-          </a:fontRef>
-        </p:style>
-        <p:txBody>
-          <a:bodyPr rtlCol="0" anchor="ctr"/>
-          <a:lstStyle/>
-          <a:p>
-            <a:pPr algn="ctr"/>
-          </a:p>
-        </p:txBody>
-      </p:sp>
-      <p:sp>
-        <p:nvSpPr>
-          <p:cNvPr id="42" name="TextBox 41"/>
-          <p:cNvSpPr txBox="1"/>
-          <p:nvPr/>
-        </p:nvSpPr>
-        <p:spPr>
-          <a:xfrm>
-            <a:off x="5148072" y="2441448"/>
-            <a:ext cx="1645920" cy="475488"/>
-          </a:xfrm>
-          <a:prstGeom prst="rect">
-            <a:avLst/>
-          </a:prstGeom>
-          <a:noFill/>
-        </p:spPr>
-        <p:txBody>
-          <a:bodyPr wrap="square" anchor="ctr">
-            <a:noAutofit/>
-          </a:bodyPr>
-          <a:lstStyle/>
-          <a:p>
-            <a:pPr algn="l"/>
-            <a:r>
-              <a:rPr sz="800" b="0" i="0">
+              <a:t>Let decisions happen without waiting on you</a:t>
+            </a:r>
+          </a:p>
+          <a:p>
+            <a:pPr marL="146304" indent="-146304">
+              <a:spcBef>
+                <a:spcPts val="600"/>
+              </a:spcBef>
+              <a:buClr>
+                <a:srgbClr val="003A59"/>
+              </a:buClr>
+              <a:buFont typeface="Arial"/>
+              <a:buChar char="•"/>
+            </a:pPr>
+            <a:r>
+              <a:rPr sz="1100">
                 <a:solidFill>
                   <a:srgbClr val="1B2A38"/>
                 </a:solidFill>
                 <a:latin typeface="Poppins"/>
               </a:rPr>
-              <a:t>Embed the intake form right on the homepage</a:t>
-            </a:r>
-          </a:p>
-        </p:txBody>
-      </p:sp>
-      <p:sp>
-        <p:nvSpPr>
-          <p:cNvPr id="43" name="Rectangle 42"/>
+              <a:t>Join weekly coaching and law-firm masterminds</a:t>
+            </a:r>
+          </a:p>
+        </p:txBody>
+      </p:sp>
+      <p:sp>
+        <p:nvSpPr>
+          <p:cNvPr id="24" name="Rectangle 23"/>
           <p:cNvSpPr/>
           <p:nvPr/>
         </p:nvSpPr>
         <p:spPr>
           <a:xfrm>
-            <a:off x="4846320" y="2971800"/>
-            <a:ext cx="2066543" cy="512064"/>
-          </a:xfrm>
-          <a:prstGeom prst="rect">
-            <a:avLst/>
-          </a:prstGeom>
-          <a:solidFill>
-            <a:srgbClr val="ECF7E4"/>
-          </a:solidFill>
-          <a:ln>
-            <a:solidFill>
-              <a:srgbClr val="FFFFFF"/>
-            </a:solidFill>
-          </a:ln>
-        </p:spPr>
-        <p:style>
-          <a:lnRef idx="1">
-            <a:schemeClr val="accent1"/>
-          </a:lnRef>
-          <a:fillRef idx="3">
-            <a:schemeClr val="accent1"/>
-          </a:fillRef>
-          <a:effectRef idx="2">
-            <a:schemeClr val="accent1"/>
-          </a:effectRef>
-          <a:fontRef idx="minor">
-            <a:schemeClr val="lt1"/>
-          </a:fontRef>
-        </p:style>
-        <p:txBody>
-          <a:bodyPr rtlCol="0" anchor="ctr"/>
-          <a:lstStyle/>
-          <a:p>
-            <a:pPr algn="ctr"/>
-          </a:p>
-        </p:txBody>
-      </p:sp>
-      <p:sp>
-        <p:nvSpPr>
-          <p:cNvPr id="44" name="Rectangle 43"/>
-          <p:cNvSpPr/>
-          <p:nvPr/>
-        </p:nvSpPr>
-        <p:spPr>
-          <a:xfrm>
-            <a:off x="4992624" y="3200400"/>
-            <a:ext cx="64008" cy="64008"/>
-          </a:xfrm>
-          <a:prstGeom prst="rect">
-            <a:avLst/>
-          </a:prstGeom>
-          <a:solidFill>
-            <a:srgbClr val="69CD2B"/>
-          </a:solidFill>
-          <a:ln>
-            <a:solidFill>
-              <a:srgbClr val="FFFFFF"/>
-            </a:solidFill>
-          </a:ln>
-        </p:spPr>
-        <p:style>
-          <a:lnRef idx="1">
-            <a:schemeClr val="accent1"/>
-          </a:lnRef>
-          <a:fillRef idx="3">
-            <a:schemeClr val="accent1"/>
-          </a:fillRef>
-          <a:effectRef idx="2">
-            <a:schemeClr val="accent1"/>
-          </a:effectRef>
-          <a:fontRef idx="minor">
-            <a:schemeClr val="lt1"/>
-          </a:fontRef>
-        </p:style>
-        <p:txBody>
-          <a:bodyPr rtlCol="0" anchor="ctr"/>
-          <a:lstStyle/>
-          <a:p>
-            <a:pPr algn="ctr"/>
-          </a:p>
-        </p:txBody>
-      </p:sp>
-      <p:sp>
-        <p:nvSpPr>
-          <p:cNvPr id="45" name="TextBox 44"/>
-          <p:cNvSpPr txBox="1"/>
-          <p:nvPr/>
-        </p:nvSpPr>
-        <p:spPr>
-          <a:xfrm>
-            <a:off x="5148072" y="2990088"/>
-            <a:ext cx="1645920" cy="475488"/>
-          </a:xfrm>
-          <a:prstGeom prst="rect">
-            <a:avLst/>
-          </a:prstGeom>
-          <a:noFill/>
-        </p:spPr>
-        <p:txBody>
-          <a:bodyPr wrap="square" anchor="ctr">
-            <a:noAutofit/>
-          </a:bodyPr>
-          <a:lstStyle/>
-          <a:p>
-            <a:pPr algn="l"/>
-            <a:r>
-              <a:rPr sz="800" b="0" i="0">
-                <a:solidFill>
-                  <a:srgbClr val="1B2A38"/>
-                </a:solidFill>
-                <a:latin typeface="Poppins"/>
-              </a:rPr>
-              <a:t>Speed up the mobile site from 28/100</a:t>
-            </a:r>
-          </a:p>
-        </p:txBody>
-      </p:sp>
-      <p:sp>
-        <p:nvSpPr>
-          <p:cNvPr id="46" name="Rectangle 45"/>
-          <p:cNvSpPr/>
-          <p:nvPr/>
-        </p:nvSpPr>
-        <p:spPr>
-          <a:xfrm>
-            <a:off x="4846320" y="3520440"/>
-            <a:ext cx="2066543" cy="512064"/>
-          </a:xfrm>
-          <a:prstGeom prst="rect">
-            <a:avLst/>
-          </a:prstGeom>
-          <a:solidFill>
-            <a:srgbClr val="FFFFFF"/>
-          </a:solidFill>
-          <a:ln>
-            <a:solidFill>
-              <a:srgbClr val="FFFFFF"/>
-            </a:solidFill>
-          </a:ln>
-        </p:spPr>
-        <p:style>
-          <a:lnRef idx="1">
-            <a:schemeClr val="accent1"/>
-          </a:lnRef>
-          <a:fillRef idx="3">
-            <a:schemeClr val="accent1"/>
-          </a:fillRef>
-          <a:effectRef idx="2">
-            <a:schemeClr val="accent1"/>
-          </a:effectRef>
-          <a:fontRef idx="minor">
-            <a:schemeClr val="lt1"/>
-          </a:fontRef>
-        </p:style>
-        <p:txBody>
-          <a:bodyPr rtlCol="0" anchor="ctr"/>
-          <a:lstStyle/>
-          <a:p>
-            <a:pPr algn="ctr"/>
-          </a:p>
-        </p:txBody>
-      </p:sp>
-      <p:sp>
-        <p:nvSpPr>
-          <p:cNvPr id="47" name="Rectangle 46"/>
-          <p:cNvSpPr/>
-          <p:nvPr/>
-        </p:nvSpPr>
-        <p:spPr>
-          <a:xfrm>
-            <a:off x="4992624" y="3749039"/>
-            <a:ext cx="64008" cy="64008"/>
-          </a:xfrm>
-          <a:prstGeom prst="rect">
-            <a:avLst/>
-          </a:prstGeom>
-          <a:solidFill>
-            <a:srgbClr val="69CD2B"/>
-          </a:solidFill>
-          <a:ln>
-            <a:solidFill>
-              <a:srgbClr val="FFFFFF"/>
-            </a:solidFill>
-          </a:ln>
-        </p:spPr>
-        <p:style>
-          <a:lnRef idx="1">
-            <a:schemeClr val="accent1"/>
-          </a:lnRef>
-          <a:fillRef idx="3">
-            <a:schemeClr val="accent1"/>
-          </a:fillRef>
-          <a:effectRef idx="2">
-            <a:schemeClr val="accent1"/>
-          </a:effectRef>
-          <a:fontRef idx="minor">
-            <a:schemeClr val="lt1"/>
-          </a:fontRef>
-        </p:style>
-        <p:txBody>
-          <a:bodyPr rtlCol="0" anchor="ctr"/>
-          <a:lstStyle/>
-          <a:p>
-            <a:pPr algn="ctr"/>
-          </a:p>
-        </p:txBody>
-      </p:sp>
-      <p:sp>
-        <p:nvSpPr>
-          <p:cNvPr id="48" name="TextBox 47"/>
-          <p:cNvSpPr txBox="1"/>
-          <p:nvPr/>
-        </p:nvSpPr>
-        <p:spPr>
-          <a:xfrm>
-            <a:off x="5148072" y="3538728"/>
-            <a:ext cx="1645920" cy="475488"/>
-          </a:xfrm>
-          <a:prstGeom prst="rect">
-            <a:avLst/>
-          </a:prstGeom>
-          <a:noFill/>
-        </p:spPr>
-        <p:txBody>
-          <a:bodyPr wrap="square" anchor="ctr">
-            <a:noAutofit/>
-          </a:bodyPr>
-          <a:lstStyle/>
-          <a:p>
-            <a:pPr algn="l"/>
-            <a:r>
-              <a:rPr sz="750" b="0" i="0">
-                <a:solidFill>
-                  <a:srgbClr val="1B2A38"/>
-                </a:solidFill>
-                <a:latin typeface="Poppins"/>
-              </a:rPr>
-              <a:t>Set a response and follow-up standard for inquiries</a:t>
-            </a:r>
-          </a:p>
-        </p:txBody>
-      </p:sp>
-      <p:sp>
-        <p:nvSpPr>
-          <p:cNvPr id="49" name="Rectangle 48"/>
-          <p:cNvSpPr/>
-          <p:nvPr/>
-        </p:nvSpPr>
-        <p:spPr>
-          <a:xfrm>
-            <a:off x="4846320" y="4078224"/>
-            <a:ext cx="2066543" cy="512064"/>
-          </a:xfrm>
-          <a:prstGeom prst="rect">
-            <a:avLst/>
-          </a:prstGeom>
-          <a:solidFill>
-            <a:srgbClr val="ECF7E4"/>
-          </a:solidFill>
-          <a:ln>
-            <a:solidFill>
-              <a:srgbClr val="FFFFFF"/>
-            </a:solidFill>
-          </a:ln>
-        </p:spPr>
-        <p:style>
-          <a:lnRef idx="1">
-            <a:schemeClr val="accent1"/>
-          </a:lnRef>
-          <a:fillRef idx="3">
-            <a:schemeClr val="accent1"/>
-          </a:fillRef>
-          <a:effectRef idx="2">
-            <a:schemeClr val="accent1"/>
-          </a:effectRef>
-          <a:fontRef idx="minor">
-            <a:schemeClr val="lt1"/>
-          </a:fontRef>
-        </p:style>
-        <p:txBody>
-          <a:bodyPr rtlCol="0" anchor="ctr"/>
-          <a:lstStyle/>
-          <a:p>
-            <a:pPr algn="ctr"/>
-          </a:p>
-        </p:txBody>
-      </p:sp>
-      <p:sp>
-        <p:nvSpPr>
-          <p:cNvPr id="50" name="Rectangle 49"/>
-          <p:cNvSpPr/>
-          <p:nvPr/>
-        </p:nvSpPr>
-        <p:spPr>
-          <a:xfrm>
-            <a:off x="4992624" y="4306824"/>
-            <a:ext cx="64008" cy="64008"/>
-          </a:xfrm>
-          <a:prstGeom prst="rect">
-            <a:avLst/>
-          </a:prstGeom>
-          <a:solidFill>
-            <a:srgbClr val="69CD2B"/>
-          </a:solidFill>
-          <a:ln>
-            <a:solidFill>
-              <a:srgbClr val="FFFFFF"/>
-            </a:solidFill>
-          </a:ln>
-        </p:spPr>
-        <p:style>
-          <a:lnRef idx="1">
-            <a:schemeClr val="accent1"/>
-          </a:lnRef>
-          <a:fillRef idx="3">
-            <a:schemeClr val="accent1"/>
-          </a:fillRef>
-          <a:effectRef idx="2">
-            <a:schemeClr val="accent1"/>
-          </a:effectRef>
-          <a:fontRef idx="minor">
-            <a:schemeClr val="lt1"/>
-          </a:fontRef>
-        </p:style>
-        <p:txBody>
-          <a:bodyPr rtlCol="0" anchor="ctr"/>
-          <a:lstStyle/>
-          <a:p>
-            <a:pPr algn="ctr"/>
-          </a:p>
-        </p:txBody>
-      </p:sp>
-      <p:sp>
-        <p:nvSpPr>
-          <p:cNvPr id="51" name="TextBox 50"/>
-          <p:cNvSpPr txBox="1"/>
-          <p:nvPr/>
-        </p:nvSpPr>
-        <p:spPr>
-          <a:xfrm>
-            <a:off x="5148072" y="4096511"/>
-            <a:ext cx="1645920" cy="475488"/>
-          </a:xfrm>
-          <a:prstGeom prst="rect">
-            <a:avLst/>
-          </a:prstGeom>
-          <a:noFill/>
-        </p:spPr>
-        <p:txBody>
-          <a:bodyPr wrap="square" anchor="ctr">
-            <a:noAutofit/>
-          </a:bodyPr>
-          <a:lstStyle/>
-          <a:p>
-            <a:pPr algn="l"/>
-            <a:r>
-              <a:rPr sz="800" b="0" i="0">
-                <a:solidFill>
-                  <a:srgbClr val="1B2A38"/>
-                </a:solidFill>
-                <a:latin typeface="Poppins"/>
-              </a:rPr>
-              <a:t>Turn more of the visitors you earn into clients</a:t>
-            </a:r>
-          </a:p>
-        </p:txBody>
-      </p:sp>
-      <p:sp>
-        <p:nvSpPr>
-          <p:cNvPr id="52" name="Rectangle 51"/>
-          <p:cNvSpPr/>
-          <p:nvPr/>
-        </p:nvSpPr>
-        <p:spPr>
-          <a:xfrm>
-            <a:off x="7022592" y="1005840"/>
-            <a:ext cx="2066543" cy="841248"/>
+            <a:off x="0" y="4818888"/>
+            <a:ext cx="9144000" cy="320040"/>
           </a:xfrm>
           <a:prstGeom prst="rect">
             <a:avLst/>
@@ -8759,784 +7849,9 @@
           </a:p>
         </p:txBody>
       </p:sp>
-      <p:sp>
-        <p:nvSpPr>
-          <p:cNvPr id="53" name="TextBox 52"/>
-          <p:cNvSpPr txBox="1"/>
-          <p:nvPr/>
-        </p:nvSpPr>
-        <p:spPr>
-          <a:xfrm>
-            <a:off x="7187183" y="1097280"/>
-            <a:ext cx="457200" cy="219456"/>
-          </a:xfrm>
-          <a:prstGeom prst="rect">
-            <a:avLst/>
-          </a:prstGeom>
-          <a:noFill/>
-        </p:spPr>
-        <p:txBody>
-          <a:bodyPr wrap="square">
-            <a:noAutofit/>
-          </a:bodyPr>
-          <a:lstStyle/>
-          <a:p>
-            <a:pPr algn="l"/>
-            <a:r>
-              <a:rPr sz="1300" b="1" i="0">
-                <a:solidFill>
-                  <a:srgbClr val="FFFFFF"/>
-                </a:solidFill>
-                <a:latin typeface="Poppins"/>
-              </a:rPr>
-              <a:t>03</a:t>
-            </a:r>
-          </a:p>
-        </p:txBody>
-      </p:sp>
-      <p:sp>
-        <p:nvSpPr>
-          <p:cNvPr id="54" name="TextBox 53"/>
-          <p:cNvSpPr txBox="1"/>
-          <p:nvPr/>
-        </p:nvSpPr>
-        <p:spPr>
-          <a:xfrm>
-            <a:off x="7187183" y="1316736"/>
-            <a:ext cx="1828800" cy="219456"/>
-          </a:xfrm>
-          <a:prstGeom prst="rect">
-            <a:avLst/>
-          </a:prstGeom>
-          <a:noFill/>
-        </p:spPr>
-        <p:txBody>
-          <a:bodyPr wrap="square">
-            <a:noAutofit/>
-          </a:bodyPr>
-          <a:lstStyle/>
-          <a:p>
-            <a:pPr algn="l"/>
-            <a:r>
-              <a:rPr sz="1400" b="1" i="0">
-                <a:solidFill>
-                  <a:srgbClr val="FFFFFF"/>
-                </a:solidFill>
-                <a:latin typeface="Poppins"/>
-              </a:rPr>
-              <a:t>Install Team &amp;</a:t>
-            </a:r>
-          </a:p>
-        </p:txBody>
-      </p:sp>
-      <p:sp>
-        <p:nvSpPr>
-          <p:cNvPr id="55" name="TextBox 54"/>
-          <p:cNvSpPr txBox="1"/>
-          <p:nvPr/>
-        </p:nvSpPr>
-        <p:spPr>
-          <a:xfrm>
-            <a:off x="7187183" y="1536192"/>
-            <a:ext cx="1828800" cy="219456"/>
-          </a:xfrm>
-          <a:prstGeom prst="rect">
-            <a:avLst/>
-          </a:prstGeom>
-          <a:noFill/>
-        </p:spPr>
-        <p:txBody>
-          <a:bodyPr wrap="square">
-            <a:noAutofit/>
-          </a:bodyPr>
-          <a:lstStyle/>
-          <a:p>
-            <a:pPr algn="l"/>
-            <a:r>
-              <a:rPr sz="1400" b="1" i="0">
-                <a:solidFill>
-                  <a:srgbClr val="FFFFFF"/>
-                </a:solidFill>
-                <a:latin typeface="Poppins"/>
-              </a:rPr>
-              <a:t>Profit Systems</a:t>
-            </a:r>
-          </a:p>
-        </p:txBody>
-      </p:sp>
-      <p:sp>
-        <p:nvSpPr>
-          <p:cNvPr id="56" name="Rectangle 55"/>
-          <p:cNvSpPr/>
-          <p:nvPr/>
-        </p:nvSpPr>
-        <p:spPr>
-          <a:xfrm>
-            <a:off x="7022592" y="1865376"/>
-            <a:ext cx="2066543" cy="512064"/>
-          </a:xfrm>
-          <a:prstGeom prst="rect">
-            <a:avLst/>
-          </a:prstGeom>
-          <a:solidFill>
-            <a:srgbClr val="EEF2F5"/>
-          </a:solidFill>
-          <a:ln>
-            <a:solidFill>
-              <a:srgbClr val="FFFFFF"/>
-            </a:solidFill>
-          </a:ln>
-        </p:spPr>
-        <p:style>
-          <a:lnRef idx="1">
-            <a:schemeClr val="accent1"/>
-          </a:lnRef>
-          <a:fillRef idx="3">
-            <a:schemeClr val="accent1"/>
-          </a:fillRef>
-          <a:effectRef idx="2">
-            <a:schemeClr val="accent1"/>
-          </a:effectRef>
-          <a:fontRef idx="minor">
-            <a:schemeClr val="lt1"/>
-          </a:fontRef>
-        </p:style>
-        <p:txBody>
-          <a:bodyPr rtlCol="0" anchor="ctr"/>
-          <a:lstStyle/>
-          <a:p>
-            <a:pPr algn="ctr"/>
-          </a:p>
-        </p:txBody>
-      </p:sp>
-      <p:sp>
-        <p:nvSpPr>
-          <p:cNvPr id="57" name="Rectangle 56"/>
-          <p:cNvSpPr/>
-          <p:nvPr/>
-        </p:nvSpPr>
-        <p:spPr>
-          <a:xfrm>
-            <a:off x="7168896" y="2093976"/>
-            <a:ext cx="64008" cy="64008"/>
-          </a:xfrm>
-          <a:prstGeom prst="rect">
-            <a:avLst/>
-          </a:prstGeom>
-          <a:solidFill>
-            <a:srgbClr val="003A59"/>
-          </a:solidFill>
-          <a:ln>
-            <a:solidFill>
-              <a:srgbClr val="FFFFFF"/>
-            </a:solidFill>
-          </a:ln>
-        </p:spPr>
-        <p:style>
-          <a:lnRef idx="1">
-            <a:schemeClr val="accent1"/>
-          </a:lnRef>
-          <a:fillRef idx="3">
-            <a:schemeClr val="accent1"/>
-          </a:fillRef>
-          <a:effectRef idx="2">
-            <a:schemeClr val="accent1"/>
-          </a:effectRef>
-          <a:fontRef idx="minor">
-            <a:schemeClr val="lt1"/>
-          </a:fontRef>
-        </p:style>
-        <p:txBody>
-          <a:bodyPr rtlCol="0" anchor="ctr"/>
-          <a:lstStyle/>
-          <a:p>
-            <a:pPr algn="ctr"/>
-          </a:p>
-        </p:txBody>
-      </p:sp>
-      <p:sp>
-        <p:nvSpPr>
-          <p:cNvPr id="58" name="TextBox 57"/>
-          <p:cNvSpPr txBox="1"/>
-          <p:nvPr/>
-        </p:nvSpPr>
-        <p:spPr>
-          <a:xfrm>
-            <a:off x="7324344" y="1883664"/>
-            <a:ext cx="1645920" cy="475488"/>
-          </a:xfrm>
-          <a:prstGeom prst="rect">
-            <a:avLst/>
-          </a:prstGeom>
-          <a:noFill/>
-        </p:spPr>
-        <p:txBody>
-          <a:bodyPr wrap="square" anchor="ctr">
-            <a:noAutofit/>
-          </a:bodyPr>
-          <a:lstStyle/>
-          <a:p>
-            <a:pPr algn="l"/>
-            <a:r>
-              <a:rPr sz="800" b="0" i="0">
-                <a:solidFill>
-                  <a:srgbClr val="1B2A38"/>
-                </a:solidFill>
-                <a:latin typeface="Poppins"/>
-              </a:rPr>
-              <a:t>Set a weekly operating rhythm with your FCOO</a:t>
-            </a:r>
-          </a:p>
-        </p:txBody>
-      </p:sp>
-      <p:sp>
-        <p:nvSpPr>
-          <p:cNvPr id="59" name="Rectangle 58"/>
-          <p:cNvSpPr/>
-          <p:nvPr/>
-        </p:nvSpPr>
-        <p:spPr>
-          <a:xfrm>
-            <a:off x="7022592" y="2423160"/>
-            <a:ext cx="2066543" cy="512064"/>
-          </a:xfrm>
-          <a:prstGeom prst="rect">
-            <a:avLst/>
-          </a:prstGeom>
-          <a:solidFill>
-            <a:srgbClr val="FFFFFF"/>
-          </a:solidFill>
-          <a:ln>
-            <a:solidFill>
-              <a:srgbClr val="FFFFFF"/>
-            </a:solidFill>
-          </a:ln>
-        </p:spPr>
-        <p:style>
-          <a:lnRef idx="1">
-            <a:schemeClr val="accent1"/>
-          </a:lnRef>
-          <a:fillRef idx="3">
-            <a:schemeClr val="accent1"/>
-          </a:fillRef>
-          <a:effectRef idx="2">
-            <a:schemeClr val="accent1"/>
-          </a:effectRef>
-          <a:fontRef idx="minor">
-            <a:schemeClr val="lt1"/>
-          </a:fontRef>
-        </p:style>
-        <p:txBody>
-          <a:bodyPr rtlCol="0" anchor="ctr"/>
-          <a:lstStyle/>
-          <a:p>
-            <a:pPr algn="ctr"/>
-          </a:p>
-        </p:txBody>
-      </p:sp>
-      <p:sp>
-        <p:nvSpPr>
-          <p:cNvPr id="60" name="Rectangle 59"/>
-          <p:cNvSpPr/>
-          <p:nvPr/>
-        </p:nvSpPr>
-        <p:spPr>
-          <a:xfrm>
-            <a:off x="7168896" y="2651760"/>
-            <a:ext cx="64008" cy="64008"/>
-          </a:xfrm>
-          <a:prstGeom prst="rect">
-            <a:avLst/>
-          </a:prstGeom>
-          <a:solidFill>
-            <a:srgbClr val="003A59"/>
-          </a:solidFill>
-          <a:ln>
-            <a:solidFill>
-              <a:srgbClr val="FFFFFF"/>
-            </a:solidFill>
-          </a:ln>
-        </p:spPr>
-        <p:style>
-          <a:lnRef idx="1">
-            <a:schemeClr val="accent1"/>
-          </a:lnRef>
-          <a:fillRef idx="3">
-            <a:schemeClr val="accent1"/>
-          </a:fillRef>
-          <a:effectRef idx="2">
-            <a:schemeClr val="accent1"/>
-          </a:effectRef>
-          <a:fontRef idx="minor">
-            <a:schemeClr val="lt1"/>
-          </a:fontRef>
-        </p:style>
-        <p:txBody>
-          <a:bodyPr rtlCol="0" anchor="ctr"/>
-          <a:lstStyle/>
-          <a:p>
-            <a:pPr algn="ctr"/>
-          </a:p>
-        </p:txBody>
-      </p:sp>
-      <p:sp>
-        <p:nvSpPr>
-          <p:cNvPr id="61" name="TextBox 60"/>
-          <p:cNvSpPr txBox="1"/>
-          <p:nvPr/>
-        </p:nvSpPr>
-        <p:spPr>
-          <a:xfrm>
-            <a:off x="7324344" y="2441448"/>
-            <a:ext cx="1645920" cy="475488"/>
-          </a:xfrm>
-          <a:prstGeom prst="rect">
-            <a:avLst/>
-          </a:prstGeom>
-          <a:noFill/>
-        </p:spPr>
-        <p:txBody>
-          <a:bodyPr wrap="square" anchor="ctr">
-            <a:noAutofit/>
-          </a:bodyPr>
-          <a:lstStyle/>
-          <a:p>
-            <a:pPr algn="l"/>
-            <a:r>
-              <a:rPr sz="800" b="0" i="0">
-                <a:solidFill>
-                  <a:srgbClr val="1B2A38"/>
-                </a:solidFill>
-                <a:latin typeface="Poppins"/>
-              </a:rPr>
-              <a:t>Give every role clear goals and accountability</a:t>
-            </a:r>
-          </a:p>
-        </p:txBody>
-      </p:sp>
-      <p:sp>
-        <p:nvSpPr>
-          <p:cNvPr id="62" name="Rectangle 61"/>
-          <p:cNvSpPr/>
-          <p:nvPr/>
-        </p:nvSpPr>
-        <p:spPr>
-          <a:xfrm>
-            <a:off x="7022592" y="2971800"/>
-            <a:ext cx="2066543" cy="512064"/>
-          </a:xfrm>
-          <a:prstGeom prst="rect">
-            <a:avLst/>
-          </a:prstGeom>
-          <a:solidFill>
-            <a:srgbClr val="EEF2F5"/>
-          </a:solidFill>
-          <a:ln>
-            <a:solidFill>
-              <a:srgbClr val="FFFFFF"/>
-            </a:solidFill>
-          </a:ln>
-        </p:spPr>
-        <p:style>
-          <a:lnRef idx="1">
-            <a:schemeClr val="accent1"/>
-          </a:lnRef>
-          <a:fillRef idx="3">
-            <a:schemeClr val="accent1"/>
-          </a:fillRef>
-          <a:effectRef idx="2">
-            <a:schemeClr val="accent1"/>
-          </a:effectRef>
-          <a:fontRef idx="minor">
-            <a:schemeClr val="lt1"/>
-          </a:fontRef>
-        </p:style>
-        <p:txBody>
-          <a:bodyPr rtlCol="0" anchor="ctr"/>
-          <a:lstStyle/>
-          <a:p>
-            <a:pPr algn="ctr"/>
-          </a:p>
-        </p:txBody>
-      </p:sp>
-      <p:sp>
-        <p:nvSpPr>
-          <p:cNvPr id="63" name="Rectangle 62"/>
-          <p:cNvSpPr/>
-          <p:nvPr/>
-        </p:nvSpPr>
-        <p:spPr>
-          <a:xfrm>
-            <a:off x="7168896" y="3200400"/>
-            <a:ext cx="64008" cy="64008"/>
-          </a:xfrm>
-          <a:prstGeom prst="rect">
-            <a:avLst/>
-          </a:prstGeom>
-          <a:solidFill>
-            <a:srgbClr val="003A59"/>
-          </a:solidFill>
-          <a:ln>
-            <a:solidFill>
-              <a:srgbClr val="FFFFFF"/>
-            </a:solidFill>
-          </a:ln>
-        </p:spPr>
-        <p:style>
-          <a:lnRef idx="1">
-            <a:schemeClr val="accent1"/>
-          </a:lnRef>
-          <a:fillRef idx="3">
-            <a:schemeClr val="accent1"/>
-          </a:fillRef>
-          <a:effectRef idx="2">
-            <a:schemeClr val="accent1"/>
-          </a:effectRef>
-          <a:fontRef idx="minor">
-            <a:schemeClr val="lt1"/>
-          </a:fontRef>
-        </p:style>
-        <p:txBody>
-          <a:bodyPr rtlCol="0" anchor="ctr"/>
-          <a:lstStyle/>
-          <a:p>
-            <a:pPr algn="ctr"/>
-          </a:p>
-        </p:txBody>
-      </p:sp>
-      <p:sp>
-        <p:nvSpPr>
-          <p:cNvPr id="64" name="TextBox 63"/>
-          <p:cNvSpPr txBox="1"/>
-          <p:nvPr/>
-        </p:nvSpPr>
-        <p:spPr>
-          <a:xfrm>
-            <a:off x="7324344" y="2990088"/>
-            <a:ext cx="1645920" cy="475488"/>
-          </a:xfrm>
-          <a:prstGeom prst="rect">
-            <a:avLst/>
-          </a:prstGeom>
-          <a:noFill/>
-        </p:spPr>
-        <p:txBody>
-          <a:bodyPr wrap="square" anchor="ctr">
-            <a:noAutofit/>
-          </a:bodyPr>
-          <a:lstStyle/>
-          <a:p>
-            <a:pPr algn="l"/>
-            <a:r>
-              <a:rPr sz="800" b="0" i="0">
-                <a:solidFill>
-                  <a:srgbClr val="1B2A38"/>
-                </a:solidFill>
-                <a:latin typeface="Poppins"/>
-              </a:rPr>
-              <a:t>Build a monthly profit snapshot by matter type</a:t>
-            </a:r>
-          </a:p>
-        </p:txBody>
-      </p:sp>
-      <p:sp>
-        <p:nvSpPr>
-          <p:cNvPr id="65" name="Rectangle 64"/>
-          <p:cNvSpPr/>
-          <p:nvPr/>
-        </p:nvSpPr>
-        <p:spPr>
-          <a:xfrm>
-            <a:off x="7022592" y="3520440"/>
-            <a:ext cx="2066543" cy="512064"/>
-          </a:xfrm>
-          <a:prstGeom prst="rect">
-            <a:avLst/>
-          </a:prstGeom>
-          <a:solidFill>
-            <a:srgbClr val="FFFFFF"/>
-          </a:solidFill>
-          <a:ln>
-            <a:solidFill>
-              <a:srgbClr val="FFFFFF"/>
-            </a:solidFill>
-          </a:ln>
-        </p:spPr>
-        <p:style>
-          <a:lnRef idx="1">
-            <a:schemeClr val="accent1"/>
-          </a:lnRef>
-          <a:fillRef idx="3">
-            <a:schemeClr val="accent1"/>
-          </a:fillRef>
-          <a:effectRef idx="2">
-            <a:schemeClr val="accent1"/>
-          </a:effectRef>
-          <a:fontRef idx="minor">
-            <a:schemeClr val="lt1"/>
-          </a:fontRef>
-        </p:style>
-        <p:txBody>
-          <a:bodyPr rtlCol="0" anchor="ctr"/>
-          <a:lstStyle/>
-          <a:p>
-            <a:pPr algn="ctr"/>
-          </a:p>
-        </p:txBody>
-      </p:sp>
-      <p:sp>
-        <p:nvSpPr>
-          <p:cNvPr id="66" name="Rectangle 65"/>
-          <p:cNvSpPr/>
-          <p:nvPr/>
-        </p:nvSpPr>
-        <p:spPr>
-          <a:xfrm>
-            <a:off x="7168896" y="3749039"/>
-            <a:ext cx="64008" cy="64008"/>
-          </a:xfrm>
-          <a:prstGeom prst="rect">
-            <a:avLst/>
-          </a:prstGeom>
-          <a:solidFill>
-            <a:srgbClr val="003A59"/>
-          </a:solidFill>
-          <a:ln>
-            <a:solidFill>
-              <a:srgbClr val="FFFFFF"/>
-            </a:solidFill>
-          </a:ln>
-        </p:spPr>
-        <p:style>
-          <a:lnRef idx="1">
-            <a:schemeClr val="accent1"/>
-          </a:lnRef>
-          <a:fillRef idx="3">
-            <a:schemeClr val="accent1"/>
-          </a:fillRef>
-          <a:effectRef idx="2">
-            <a:schemeClr val="accent1"/>
-          </a:effectRef>
-          <a:fontRef idx="minor">
-            <a:schemeClr val="lt1"/>
-          </a:fontRef>
-        </p:style>
-        <p:txBody>
-          <a:bodyPr rtlCol="0" anchor="ctr"/>
-          <a:lstStyle/>
-          <a:p>
-            <a:pPr algn="ctr"/>
-          </a:p>
-        </p:txBody>
-      </p:sp>
-      <p:sp>
-        <p:nvSpPr>
-          <p:cNvPr id="67" name="TextBox 66"/>
-          <p:cNvSpPr txBox="1"/>
-          <p:nvPr/>
-        </p:nvSpPr>
-        <p:spPr>
-          <a:xfrm>
-            <a:off x="7324344" y="3538728"/>
-            <a:ext cx="1645920" cy="475488"/>
-          </a:xfrm>
-          <a:prstGeom prst="rect">
-            <a:avLst/>
-          </a:prstGeom>
-          <a:noFill/>
-        </p:spPr>
-        <p:txBody>
-          <a:bodyPr wrap="square" anchor="ctr">
-            <a:noAutofit/>
-          </a:bodyPr>
-          <a:lstStyle/>
-          <a:p>
-            <a:pPr algn="l"/>
-            <a:r>
-              <a:rPr sz="800" b="0" i="0">
-                <a:solidFill>
-                  <a:srgbClr val="1B2A38"/>
-                </a:solidFill>
-                <a:latin typeface="Poppins"/>
-              </a:rPr>
-              <a:t>Let decisions happen without waiting on you</a:t>
-            </a:r>
-          </a:p>
-        </p:txBody>
-      </p:sp>
-      <p:sp>
-        <p:nvSpPr>
-          <p:cNvPr id="68" name="Rectangle 67"/>
-          <p:cNvSpPr/>
-          <p:nvPr/>
-        </p:nvSpPr>
-        <p:spPr>
-          <a:xfrm>
-            <a:off x="7022592" y="4078224"/>
-            <a:ext cx="2066543" cy="512064"/>
-          </a:xfrm>
-          <a:prstGeom prst="rect">
-            <a:avLst/>
-          </a:prstGeom>
-          <a:solidFill>
-            <a:srgbClr val="EEF2F5"/>
-          </a:solidFill>
-          <a:ln>
-            <a:solidFill>
-              <a:srgbClr val="FFFFFF"/>
-            </a:solidFill>
-          </a:ln>
-        </p:spPr>
-        <p:style>
-          <a:lnRef idx="1">
-            <a:schemeClr val="accent1"/>
-          </a:lnRef>
-          <a:fillRef idx="3">
-            <a:schemeClr val="accent1"/>
-          </a:fillRef>
-          <a:effectRef idx="2">
-            <a:schemeClr val="accent1"/>
-          </a:effectRef>
-          <a:fontRef idx="minor">
-            <a:schemeClr val="lt1"/>
-          </a:fontRef>
-        </p:style>
-        <p:txBody>
-          <a:bodyPr rtlCol="0" anchor="ctr"/>
-          <a:lstStyle/>
-          <a:p>
-            <a:pPr algn="ctr"/>
-          </a:p>
-        </p:txBody>
-      </p:sp>
-      <p:sp>
-        <p:nvSpPr>
-          <p:cNvPr id="69" name="Rectangle 68"/>
-          <p:cNvSpPr/>
-          <p:nvPr/>
-        </p:nvSpPr>
-        <p:spPr>
-          <a:xfrm>
-            <a:off x="7168896" y="4306824"/>
-            <a:ext cx="64008" cy="64008"/>
-          </a:xfrm>
-          <a:prstGeom prst="rect">
-            <a:avLst/>
-          </a:prstGeom>
-          <a:solidFill>
-            <a:srgbClr val="003A59"/>
-          </a:solidFill>
-          <a:ln>
-            <a:solidFill>
-              <a:srgbClr val="FFFFFF"/>
-            </a:solidFill>
-          </a:ln>
-        </p:spPr>
-        <p:style>
-          <a:lnRef idx="1">
-            <a:schemeClr val="accent1"/>
-          </a:lnRef>
-          <a:fillRef idx="3">
-            <a:schemeClr val="accent1"/>
-          </a:fillRef>
-          <a:effectRef idx="2">
-            <a:schemeClr val="accent1"/>
-          </a:effectRef>
-          <a:fontRef idx="minor">
-            <a:schemeClr val="lt1"/>
-          </a:fontRef>
-        </p:style>
-        <p:txBody>
-          <a:bodyPr rtlCol="0" anchor="ctr"/>
-          <a:lstStyle/>
-          <a:p>
-            <a:pPr algn="ctr"/>
-          </a:p>
-        </p:txBody>
-      </p:sp>
-      <p:sp>
-        <p:nvSpPr>
-          <p:cNvPr id="70" name="TextBox 69"/>
-          <p:cNvSpPr txBox="1"/>
-          <p:nvPr/>
-        </p:nvSpPr>
-        <p:spPr>
-          <a:xfrm>
-            <a:off x="7324344" y="4096511"/>
-            <a:ext cx="1645920" cy="475488"/>
-          </a:xfrm>
-          <a:prstGeom prst="rect">
-            <a:avLst/>
-          </a:prstGeom>
-          <a:noFill/>
-        </p:spPr>
-        <p:txBody>
-          <a:bodyPr wrap="square" anchor="ctr">
-            <a:noAutofit/>
-          </a:bodyPr>
-          <a:lstStyle/>
-          <a:p>
-            <a:pPr algn="l"/>
-            <a:r>
-              <a:rPr sz="800" b="0" i="0">
-                <a:solidFill>
-                  <a:srgbClr val="1B2A38"/>
-                </a:solidFill>
-                <a:latin typeface="Poppins"/>
-              </a:rPr>
-              <a:t>Join weekly coaching and law-firm masterminds</a:t>
-            </a:r>
-          </a:p>
-        </p:txBody>
-      </p:sp>
-      <p:sp>
-        <p:nvSpPr>
-          <p:cNvPr id="71" name="Rectangle 70"/>
-          <p:cNvSpPr/>
-          <p:nvPr/>
-        </p:nvSpPr>
-        <p:spPr>
-          <a:xfrm>
-            <a:off x="0" y="4818888"/>
-            <a:ext cx="9144000" cy="320040"/>
-          </a:xfrm>
-          <a:prstGeom prst="rect">
-            <a:avLst/>
-          </a:prstGeom>
-          <a:solidFill>
-            <a:srgbClr val="003A59"/>
-          </a:solidFill>
-          <a:ln>
-            <a:solidFill>
-              <a:srgbClr val="FFFFFF"/>
-            </a:solidFill>
-          </a:ln>
-        </p:spPr>
-        <p:style>
-          <a:lnRef idx="1">
-            <a:schemeClr val="accent1"/>
-          </a:lnRef>
-          <a:fillRef idx="3">
-            <a:schemeClr val="accent1"/>
-          </a:fillRef>
-          <a:effectRef idx="2">
-            <a:schemeClr val="accent1"/>
-          </a:effectRef>
-          <a:fontRef idx="minor">
-            <a:schemeClr val="lt1"/>
-          </a:fontRef>
-        </p:style>
-        <p:txBody>
-          <a:bodyPr rtlCol="0" anchor="ctr"/>
-          <a:lstStyle/>
-          <a:p>
-            <a:pPr algn="ctr"/>
-          </a:p>
-        </p:txBody>
-      </p:sp>
       <p:pic>
         <p:nvPicPr>
-          <p:cNvPr id="72" name="Picture 71" descr="smb_team_logo.png"/>
+          <p:cNvPr id="25" name="Picture 24" descr="smb_team_logo.png"/>
           <p:cNvPicPr>
             <a:picLocks noChangeAspect="1"/>
           </p:cNvPicPr>
@@ -9560,7 +7875,7 @@
       </p:pic>
       <p:sp>
         <p:nvSpPr>
-          <p:cNvPr id="73" name="TextBox 72"/>
+          <p:cNvPr id="26" name="TextBox 25"/>
           <p:cNvSpPr txBox="1"/>
           <p:nvPr/>
         </p:nvSpPr>
@@ -9595,7 +7910,7 @@
       </p:sp>
       <p:sp>
         <p:nvSpPr>
-          <p:cNvPr id="74" name="TextBox 73"/>
+          <p:cNvPr id="27" name="TextBox 26"/>
           <p:cNvSpPr txBox="1"/>
           <p:nvPr/>
         </p:nvSpPr>

--- a/christine-brown-sports-law/Christine Brown Sports Law_October 22, 2026_Proposal.pptx
+++ b/christine-brown-sports-law/Christine Brown Sports Law_October 22, 2026_Proposal.pptx
@@ -3190,14 +3190,164 @@
       </p:sp>
       <p:sp>
         <p:nvSpPr>
-          <p:cNvPr id="4" name="Rectangle 3"/>
+          <p:cNvPr id="4" name="TextBox 3"/>
+          <p:cNvSpPr txBox="1"/>
+          <p:nvPr/>
+        </p:nvSpPr>
+        <p:spPr>
+          <a:xfrm>
+            <a:off x="292608" y="182880"/>
+            <a:ext cx="8503920" cy="164592"/>
+          </a:xfrm>
+          <a:prstGeom prst="rect">
+            <a:avLst/>
+          </a:prstGeom>
+          <a:noFill/>
+        </p:spPr>
+        <p:txBody>
+          <a:bodyPr wrap="square">
+            <a:noAutofit/>
+          </a:bodyPr>
+          <a:lstStyle/>
+          <a:p>
+            <a:pPr algn="l"/>
+            <a:r>
+              <a:rPr sz="750" b="1" i="0">
+                <a:solidFill>
+                  <a:srgbClr val="69CD2B"/>
+                </a:solidFill>
+                <a:latin typeface="Poppins"/>
+              </a:rPr>
+              <a:t>LAW FIRM GROWTH AUDIT  ·  CHRISTINE BROWN SPORTS LAW</a:t>
+            </a:r>
+          </a:p>
+        </p:txBody>
+      </p:sp>
+      <p:sp>
+        <p:nvSpPr>
+          <p:cNvPr id="5" name="TextBox 4"/>
+          <p:cNvSpPr txBox="1"/>
+          <p:nvPr/>
+        </p:nvSpPr>
+        <p:spPr>
+          <a:xfrm>
+            <a:off x="292608" y="384048"/>
+            <a:ext cx="8503920" cy="402336"/>
+          </a:xfrm>
+          <a:prstGeom prst="rect">
+            <a:avLst/>
+          </a:prstGeom>
+          <a:noFill/>
+        </p:spPr>
+        <p:txBody>
+          <a:bodyPr wrap="square" anchor="ctr">
+            <a:noAutofit/>
+          </a:bodyPr>
+          <a:lstStyle/>
+          <a:p>
+            <a:pPr algn="l"/>
+            <a:r>
+              <a:rPr sz="2000" b="1" i="0">
+                <a:solidFill>
+                  <a:srgbClr val="FFFFFF"/>
+                </a:solidFill>
+                <a:latin typeface="Poppins"/>
+              </a:rPr>
+              <a:t>Where Christine Brown Sports Law Stands Today</a:t>
+            </a:r>
+          </a:p>
+        </p:txBody>
+      </p:sp>
+      <p:sp>
+        <p:nvSpPr>
+          <p:cNvPr id="6" name="TextBox 5"/>
+          <p:cNvSpPr txBox="1"/>
+          <p:nvPr/>
+        </p:nvSpPr>
+        <p:spPr>
+          <a:xfrm>
+            <a:off x="274320" y="987552"/>
+            <a:ext cx="4572000" cy="182880"/>
+          </a:xfrm>
+          <a:prstGeom prst="rect">
+            <a:avLst/>
+          </a:prstGeom>
+          <a:noFill/>
+        </p:spPr>
+        <p:txBody>
+          <a:bodyPr wrap="square">
+            <a:noAutofit/>
+          </a:bodyPr>
+          <a:lstStyle/>
+          <a:p>
+            <a:pPr algn="l"/>
+            <a:r>
+              <a:rPr sz="750" b="1" i="0">
+                <a:solidFill>
+                  <a:srgbClr val="003A59"/>
+                </a:solidFill>
+                <a:latin typeface="Poppins"/>
+              </a:rPr>
+              <a:t>WHAT YOU TOLD US</a:t>
+            </a:r>
+          </a:p>
+        </p:txBody>
+      </p:sp>
+      <p:sp>
+        <p:nvSpPr>
+          <p:cNvPr id="7" name="Rectangle 6"/>
           <p:cNvSpPr/>
           <p:nvPr/>
         </p:nvSpPr>
         <p:spPr>
           <a:xfrm>
-            <a:off x="0" y="841248"/>
-            <a:ext cx="9144000" cy="36576"/>
+            <a:off x="274320" y="1207008"/>
+            <a:ext cx="4572000" cy="1883664"/>
+          </a:xfrm>
+          <a:prstGeom prst="rect">
+            <a:avLst/>
+          </a:prstGeom>
+          <a:solidFill>
+            <a:srgbClr val="FFFFFF"/>
+          </a:solidFill>
+          <a:ln>
+            <a:solidFill>
+              <a:srgbClr val="FFFFFF"/>
+            </a:solidFill>
+          </a:ln>
+        </p:spPr>
+        <p:style>
+          <a:lnRef idx="1">
+            <a:schemeClr val="accent1"/>
+          </a:lnRef>
+          <a:fillRef idx="3">
+            <a:schemeClr val="accent1"/>
+          </a:fillRef>
+          <a:effectRef idx="2">
+            <a:schemeClr val="accent1"/>
+          </a:effectRef>
+          <a:fontRef idx="minor">
+            <a:schemeClr val="lt1"/>
+          </a:fontRef>
+        </p:style>
+        <p:txBody>
+          <a:bodyPr rtlCol="0" anchor="ctr"/>
+          <a:lstStyle/>
+          <a:p>
+            <a:pPr algn="ctr"/>
+          </a:p>
+        </p:txBody>
+      </p:sp>
+      <p:sp>
+        <p:nvSpPr>
+          <p:cNvPr id="8" name="Rectangle 7"/>
+          <p:cNvSpPr/>
+          <p:nvPr/>
+        </p:nvSpPr>
+        <p:spPr>
+          <a:xfrm>
+            <a:off x="274320" y="1207008"/>
+            <a:ext cx="45720" cy="1883664"/>
           </a:xfrm>
           <a:prstGeom prst="rect">
             <a:avLst/>
@@ -3235,14 +3385,128 @@
       </p:sp>
       <p:sp>
         <p:nvSpPr>
-          <p:cNvPr id="5" name="TextBox 4"/>
+          <p:cNvPr id="9" name="TextBox 8"/>
           <p:cNvSpPr txBox="1"/>
           <p:nvPr/>
         </p:nvSpPr>
         <p:spPr>
           <a:xfrm>
-            <a:off x="292608" y="182880"/>
-            <a:ext cx="6309360" cy="164592"/>
+            <a:off x="457200" y="1280160"/>
+            <a:ext cx="4297680" cy="1755648"/>
+          </a:xfrm>
+          <a:prstGeom prst="rect">
+            <a:avLst/>
+          </a:prstGeom>
+          <a:noFill/>
+        </p:spPr>
+        <p:txBody>
+          <a:bodyPr wrap="square" anchor="ctr">
+            <a:noAutofit/>
+          </a:bodyPr>
+          <a:lstStyle/>
+          <a:p>
+            <a:r>
+              <a:rPr sz="650" b="1" i="0">
+                <a:solidFill>
+                  <a:srgbClr val="3F8F1A"/>
+                </a:solidFill>
+                <a:latin typeface="Poppins"/>
+              </a:rPr>
+              <a:t>YOU SAID:</a:t>
+            </a:r>
+          </a:p>
+          <a:p>
+            <a:pPr>
+              <a:spcBef>
+                <a:spcPts val="86"/>
+              </a:spcBef>
+            </a:pPr>
+            <a:r>
+              <a:rPr sz="950" b="0" i="1">
+                <a:solidFill>
+                  <a:srgbClr val="003A59"/>
+                </a:solidFill>
+                <a:latin typeface="Poppins"/>
+              </a:rPr>
+              <a:t>“I'm having to be on every inquiry in order for us to get the work.”</a:t>
+            </a:r>
+          </a:p>
+          <a:p>
+            <a:pPr>
+              <a:spcBef>
+                <a:spcPts val="777"/>
+              </a:spcBef>
+            </a:pPr>
+            <a:r>
+              <a:rPr sz="650" b="1" i="0">
+                <a:solidFill>
+                  <a:srgbClr val="3F8F1A"/>
+                </a:solidFill>
+                <a:latin typeface="Poppins"/>
+              </a:rPr>
+              <a:t>YOU SAID:</a:t>
+            </a:r>
+          </a:p>
+          <a:p>
+            <a:pPr>
+              <a:spcBef>
+                <a:spcPts val="86"/>
+              </a:spcBef>
+            </a:pPr>
+            <a:r>
+              <a:rPr sz="950" b="0" i="1">
+                <a:solidFill>
+                  <a:srgbClr val="003A59"/>
+                </a:solidFill>
+                <a:latin typeface="Poppins"/>
+              </a:rPr>
+              <a:t>“We might do four inquiries in a day, and that basically is four hours out of the day… it's just eating into our billable time.”</a:t>
+            </a:r>
+          </a:p>
+          <a:p>
+            <a:pPr>
+              <a:spcBef>
+                <a:spcPts val="777"/>
+              </a:spcBef>
+            </a:pPr>
+            <a:r>
+              <a:rPr sz="650" b="1" i="0">
+                <a:solidFill>
+                  <a:srgbClr val="3F8F1A"/>
+                </a:solidFill>
+                <a:latin typeface="Poppins"/>
+              </a:rPr>
+              <a:t>YOU SAID:</a:t>
+            </a:r>
+          </a:p>
+          <a:p>
+            <a:pPr>
+              <a:spcBef>
+                <a:spcPts val="86"/>
+              </a:spcBef>
+            </a:pPr>
+            <a:r>
+              <a:rPr sz="950" b="0" i="1">
+                <a:solidFill>
+                  <a:srgbClr val="003A59"/>
+                </a:solidFill>
+                <a:latin typeface="Poppins"/>
+              </a:rPr>
+              <a:t>“We've got the bones, but in terms of getting everybody to follow the processes or procedures… we haven't gotten there yet.”</a:t>
+            </a:r>
+          </a:p>
+        </p:txBody>
+      </p:sp>
+      <p:sp>
+        <p:nvSpPr>
+          <p:cNvPr id="10" name="TextBox 9"/>
+          <p:cNvSpPr txBox="1"/>
+          <p:nvPr/>
+        </p:nvSpPr>
+        <p:spPr>
+          <a:xfrm>
+            <a:off x="5029200" y="987552"/>
+            <a:ext cx="3840480" cy="182880"/>
           </a:xfrm>
           <a:prstGeom prst="rect">
             <a:avLst/>
@@ -3259,66 +3523,31 @@
             <a:r>
               <a:rPr sz="750" b="1" i="0">
                 <a:solidFill>
-                  <a:srgbClr val="69CD2B"/>
+                  <a:srgbClr val="003A59"/>
                 </a:solidFill>
                 <a:latin typeface="Poppins"/>
               </a:rPr>
-              <a:t>LAW FIRM GROWTH AUDIT  ·  CHRISTINE BROWN SPORTS LAW</a:t>
-            </a:r>
-          </a:p>
-        </p:txBody>
-      </p:sp>
-      <p:sp>
-        <p:nvSpPr>
-          <p:cNvPr id="6" name="TextBox 5"/>
-          <p:cNvSpPr txBox="1"/>
-          <p:nvPr/>
-        </p:nvSpPr>
-        <p:spPr>
-          <a:xfrm>
-            <a:off x="292608" y="384048"/>
-            <a:ext cx="6309360" cy="402336"/>
-          </a:xfrm>
-          <a:prstGeom prst="rect">
-            <a:avLst/>
-          </a:prstGeom>
-          <a:noFill/>
-        </p:spPr>
-        <p:txBody>
-          <a:bodyPr wrap="square" anchor="ctr">
-            <a:noAutofit/>
-          </a:bodyPr>
-          <a:lstStyle/>
-          <a:p>
-            <a:pPr algn="l"/>
-            <a:r>
-              <a:rPr sz="1850" b="1" i="0">
-                <a:solidFill>
-                  <a:srgbClr val="FFFFFF"/>
-                </a:solidFill>
-                <a:latin typeface="Poppins"/>
-              </a:rPr>
-              <a:t>Where Christine Brown Sports Law Stands Today</a:t>
-            </a:r>
-          </a:p>
-        </p:txBody>
-      </p:sp>
-      <p:sp>
-        <p:nvSpPr>
-          <p:cNvPr id="7" name="Rectangle 6"/>
+              <a:t>WHERE YOU ARE TODAY</a:t>
+            </a:r>
+          </a:p>
+        </p:txBody>
+      </p:sp>
+      <p:sp>
+        <p:nvSpPr>
+          <p:cNvPr id="11" name="Rectangle 10"/>
           <p:cNvSpPr/>
           <p:nvPr/>
         </p:nvSpPr>
         <p:spPr>
           <a:xfrm>
-            <a:off x="6784848" y="164592"/>
-            <a:ext cx="2066543" cy="512064"/>
+            <a:off x="5029200" y="1207008"/>
+            <a:ext cx="3840480" cy="1883664"/>
           </a:xfrm>
           <a:prstGeom prst="rect">
             <a:avLst/>
           </a:prstGeom>
           <a:solidFill>
-            <a:srgbClr val="0B4C6E"/>
+            <a:srgbClr val="003A59"/>
           </a:solidFill>
           <a:ln>
             <a:solidFill>
@@ -3350,14 +3579,14 @@
       </p:sp>
       <p:sp>
         <p:nvSpPr>
-          <p:cNvPr id="8" name="TextBox 7"/>
+          <p:cNvPr id="12" name="TextBox 11"/>
           <p:cNvSpPr txBox="1"/>
           <p:nvPr/>
         </p:nvSpPr>
         <p:spPr>
           <a:xfrm>
-            <a:off x="6931152" y="210312"/>
-            <a:ext cx="384048" cy="384048"/>
+            <a:off x="5212080" y="1316736"/>
+            <a:ext cx="1691640" cy="164592"/>
           </a:xfrm>
           <a:prstGeom prst="rect">
             <a:avLst/>
@@ -3370,11 +3599,350 @@
           </a:bodyPr>
           <a:lstStyle/>
           <a:p>
+            <a:pPr algn="l"/>
+            <a:r>
+              <a:rPr sz="750" b="1" i="0">
+                <a:solidFill>
+                  <a:srgbClr val="69CD2B"/>
+                </a:solidFill>
+                <a:latin typeface="Poppins"/>
+              </a:rPr>
+              <a:t>TODAY  ·  STAGE 4</a:t>
+            </a:r>
+          </a:p>
+        </p:txBody>
+      </p:sp>
+      <p:sp>
+        <p:nvSpPr>
+          <p:cNvPr id="13" name="TextBox 12"/>
+          <p:cNvSpPr txBox="1"/>
+          <p:nvPr/>
+        </p:nvSpPr>
+        <p:spPr>
+          <a:xfrm>
+            <a:off x="5212080" y="1463040"/>
+            <a:ext cx="1691640" cy="420624"/>
+          </a:xfrm>
+          <a:prstGeom prst="rect">
+            <a:avLst/>
+          </a:prstGeom>
+          <a:noFill/>
+        </p:spPr>
+        <p:txBody>
+          <a:bodyPr wrap="square">
+            <a:noAutofit/>
+          </a:bodyPr>
+          <a:lstStyle/>
+          <a:p>
+            <a:pPr algn="l"/>
+            <a:r>
+              <a:rPr sz="1000" b="1" i="0">
+                <a:solidFill>
+                  <a:srgbClr val="FFFFFF"/>
+                </a:solidFill>
+                <a:latin typeface="Poppins"/>
+              </a:rPr>
+              <a:t>Small Business Manager</a:t>
+            </a:r>
+          </a:p>
+        </p:txBody>
+      </p:sp>
+      <p:sp>
+        <p:nvSpPr>
+          <p:cNvPr id="14" name="TextBox 13"/>
+          <p:cNvSpPr txBox="1"/>
+          <p:nvPr/>
+        </p:nvSpPr>
+        <p:spPr>
+          <a:xfrm>
+            <a:off x="6995160" y="1316736"/>
+            <a:ext cx="1691640" cy="164592"/>
+          </a:xfrm>
+          <a:prstGeom prst="rect">
+            <a:avLst/>
+          </a:prstGeom>
+          <a:noFill/>
+        </p:spPr>
+        <p:txBody>
+          <a:bodyPr wrap="square">
+            <a:noAutofit/>
+          </a:bodyPr>
+          <a:lstStyle/>
+          <a:p>
+            <a:pPr algn="r"/>
+            <a:r>
+              <a:rPr sz="750" b="1" i="0">
+                <a:solidFill>
+                  <a:srgbClr val="69CD2B"/>
+                </a:solidFill>
+                <a:latin typeface="Poppins"/>
+              </a:rPr>
+              <a:t>GOAL  ·  STAGE 6</a:t>
+            </a:r>
+          </a:p>
+        </p:txBody>
+      </p:sp>
+      <p:sp>
+        <p:nvSpPr>
+          <p:cNvPr id="15" name="TextBox 14"/>
+          <p:cNvSpPr txBox="1"/>
+          <p:nvPr/>
+        </p:nvSpPr>
+        <p:spPr>
+          <a:xfrm>
+            <a:off x="6995160" y="1463040"/>
+            <a:ext cx="1691640" cy="420624"/>
+          </a:xfrm>
+          <a:prstGeom prst="rect">
+            <a:avLst/>
+          </a:prstGeom>
+          <a:noFill/>
+        </p:spPr>
+        <p:txBody>
+          <a:bodyPr wrap="square">
+            <a:noAutofit/>
+          </a:bodyPr>
+          <a:lstStyle/>
+          <a:p>
+            <a:pPr algn="r"/>
+            <a:r>
+              <a:rPr sz="1000" b="1" i="0">
+                <a:solidFill>
+                  <a:srgbClr val="FFFFFF"/>
+                </a:solidFill>
+                <a:latin typeface="Poppins"/>
+              </a:rPr>
+              <a:t>Law Firm Owner</a:t>
+            </a:r>
+          </a:p>
+        </p:txBody>
+      </p:sp>
+      <p:sp>
+        <p:nvSpPr>
+          <p:cNvPr id="16" name="Rectangle 15"/>
+          <p:cNvSpPr/>
+          <p:nvPr/>
+        </p:nvSpPr>
+        <p:spPr>
+          <a:xfrm>
+            <a:off x="5212080" y="2754172"/>
+            <a:ext cx="651052" cy="190195"/>
+          </a:xfrm>
+          <a:prstGeom prst="rect">
+            <a:avLst/>
+          </a:prstGeom>
+          <a:solidFill>
+            <a:srgbClr val="2F6B3A"/>
+          </a:solidFill>
+          <a:ln>
+            <a:noFill/>
+          </a:ln>
+        </p:spPr>
+        <p:style>
+          <a:lnRef idx="1">
+            <a:schemeClr val="accent1"/>
+          </a:lnRef>
+          <a:fillRef idx="3">
+            <a:schemeClr val="accent1"/>
+          </a:fillRef>
+          <a:effectRef idx="2">
+            <a:schemeClr val="accent1"/>
+          </a:effectRef>
+          <a:fontRef idx="minor">
+            <a:schemeClr val="lt1"/>
+          </a:fontRef>
+        </p:style>
+        <p:txBody>
+          <a:bodyPr rtlCol="0" anchor="ctr"/>
+          <a:lstStyle/>
+          <a:p>
             <a:pPr algn="ctr"/>
-            <a:r>
-              <a:rPr sz="2100" b="1" i="0">
-                <a:solidFill>
-                  <a:srgbClr val="FFFFFF"/>
+          </a:p>
+        </p:txBody>
+      </p:sp>
+      <p:sp>
+        <p:nvSpPr>
+          <p:cNvPr id="17" name="TextBox 16"/>
+          <p:cNvSpPr txBox="1"/>
+          <p:nvPr/>
+        </p:nvSpPr>
+        <p:spPr>
+          <a:xfrm>
+            <a:off x="5212080" y="2670048"/>
+            <a:ext cx="651052" cy="256032"/>
+          </a:xfrm>
+          <a:prstGeom prst="rect">
+            <a:avLst/>
+          </a:prstGeom>
+          <a:noFill/>
+        </p:spPr>
+        <p:txBody>
+          <a:bodyPr wrap="square">
+            <a:noAutofit/>
+          </a:bodyPr>
+          <a:lstStyle/>
+          <a:p>
+            <a:pPr algn="ctr"/>
+            <a:r>
+              <a:rPr sz="1000" b="1" i="0">
+                <a:solidFill>
+                  <a:srgbClr val="A9D68C"/>
+                </a:solidFill>
+                <a:latin typeface="Poppins"/>
+              </a:rPr>
+              <a:t>2</a:t>
+            </a:r>
+          </a:p>
+        </p:txBody>
+      </p:sp>
+      <p:sp>
+        <p:nvSpPr>
+          <p:cNvPr id="18" name="Rectangle 17"/>
+          <p:cNvSpPr/>
+          <p:nvPr/>
+        </p:nvSpPr>
+        <p:spPr>
+          <a:xfrm>
+            <a:off x="5917996" y="2563977"/>
+            <a:ext cx="651052" cy="380390"/>
+          </a:xfrm>
+          <a:prstGeom prst="rect">
+            <a:avLst/>
+          </a:prstGeom>
+          <a:solidFill>
+            <a:srgbClr val="2F6B3A"/>
+          </a:solidFill>
+          <a:ln>
+            <a:noFill/>
+          </a:ln>
+        </p:spPr>
+        <p:style>
+          <a:lnRef idx="1">
+            <a:schemeClr val="accent1"/>
+          </a:lnRef>
+          <a:fillRef idx="3">
+            <a:schemeClr val="accent1"/>
+          </a:fillRef>
+          <a:effectRef idx="2">
+            <a:schemeClr val="accent1"/>
+          </a:effectRef>
+          <a:fontRef idx="minor">
+            <a:schemeClr val="lt1"/>
+          </a:fontRef>
+        </p:style>
+        <p:txBody>
+          <a:bodyPr rtlCol="0" anchor="ctr"/>
+          <a:lstStyle/>
+          <a:p>
+            <a:pPr algn="ctr"/>
+          </a:p>
+        </p:txBody>
+      </p:sp>
+      <p:sp>
+        <p:nvSpPr>
+          <p:cNvPr id="19" name="TextBox 18"/>
+          <p:cNvSpPr txBox="1"/>
+          <p:nvPr/>
+        </p:nvSpPr>
+        <p:spPr>
+          <a:xfrm>
+            <a:off x="5917996" y="2670048"/>
+            <a:ext cx="651052" cy="256032"/>
+          </a:xfrm>
+          <a:prstGeom prst="rect">
+            <a:avLst/>
+          </a:prstGeom>
+          <a:noFill/>
+        </p:spPr>
+        <p:txBody>
+          <a:bodyPr wrap="square">
+            <a:noAutofit/>
+          </a:bodyPr>
+          <a:lstStyle/>
+          <a:p>
+            <a:pPr algn="ctr"/>
+            <a:r>
+              <a:rPr sz="1000" b="1" i="0">
+                <a:solidFill>
+                  <a:srgbClr val="A9D68C"/>
+                </a:solidFill>
+                <a:latin typeface="Poppins"/>
+              </a:rPr>
+              <a:t>3</a:t>
+            </a:r>
+          </a:p>
+        </p:txBody>
+      </p:sp>
+      <p:sp>
+        <p:nvSpPr>
+          <p:cNvPr id="20" name="Rectangle 19"/>
+          <p:cNvSpPr/>
+          <p:nvPr/>
+        </p:nvSpPr>
+        <p:spPr>
+          <a:xfrm>
+            <a:off x="6623913" y="2373782"/>
+            <a:ext cx="651052" cy="570585"/>
+          </a:xfrm>
+          <a:prstGeom prst="rect">
+            <a:avLst/>
+          </a:prstGeom>
+          <a:solidFill>
+            <a:srgbClr val="69CD2B"/>
+          </a:solidFill>
+          <a:ln>
+            <a:noFill/>
+          </a:ln>
+        </p:spPr>
+        <p:style>
+          <a:lnRef idx="1">
+            <a:schemeClr val="accent1"/>
+          </a:lnRef>
+          <a:fillRef idx="3">
+            <a:schemeClr val="accent1"/>
+          </a:fillRef>
+          <a:effectRef idx="2">
+            <a:schemeClr val="accent1"/>
+          </a:effectRef>
+          <a:fontRef idx="minor">
+            <a:schemeClr val="lt1"/>
+          </a:fontRef>
+        </p:style>
+        <p:txBody>
+          <a:bodyPr rtlCol="0" anchor="ctr"/>
+          <a:lstStyle/>
+          <a:p>
+            <a:pPr algn="ctr"/>
+          </a:p>
+        </p:txBody>
+      </p:sp>
+      <p:sp>
+        <p:nvSpPr>
+          <p:cNvPr id="21" name="TextBox 20"/>
+          <p:cNvSpPr txBox="1"/>
+          <p:nvPr/>
+        </p:nvSpPr>
+        <p:spPr>
+          <a:xfrm>
+            <a:off x="6623913" y="2670048"/>
+            <a:ext cx="651052" cy="256032"/>
+          </a:xfrm>
+          <a:prstGeom prst="rect">
+            <a:avLst/>
+          </a:prstGeom>
+          <a:noFill/>
+        </p:spPr>
+        <p:txBody>
+          <a:bodyPr wrap="square">
+            <a:noAutofit/>
+          </a:bodyPr>
+          <a:lstStyle/>
+          <a:p>
+            <a:pPr algn="ctr"/>
+            <a:r>
+              <a:rPr sz="1000" b="1" i="0">
+                <a:solidFill>
+                  <a:srgbClr val="143306"/>
                 </a:solidFill>
                 <a:latin typeface="Poppins"/>
               </a:rPr>
@@ -3385,14 +3953,57 @@
       </p:sp>
       <p:sp>
         <p:nvSpPr>
-          <p:cNvPr id="9" name="TextBox 8"/>
+          <p:cNvPr id="22" name="Rectangle 21"/>
+          <p:cNvSpPr/>
+          <p:nvPr/>
+        </p:nvSpPr>
+        <p:spPr>
+          <a:xfrm>
+            <a:off x="7329830" y="2183587"/>
+            <a:ext cx="651052" cy="760780"/>
+          </a:xfrm>
+          <a:prstGeom prst="rect">
+            <a:avLst/>
+          </a:prstGeom>
+          <a:solidFill>
+            <a:srgbClr val="0B4C6E"/>
+          </a:solidFill>
+          <a:ln>
+            <a:noFill/>
+          </a:ln>
+        </p:spPr>
+        <p:style>
+          <a:lnRef idx="1">
+            <a:schemeClr val="accent1"/>
+          </a:lnRef>
+          <a:fillRef idx="3">
+            <a:schemeClr val="accent1"/>
+          </a:fillRef>
+          <a:effectRef idx="2">
+            <a:schemeClr val="accent1"/>
+          </a:effectRef>
+          <a:fontRef idx="minor">
+            <a:schemeClr val="lt1"/>
+          </a:fontRef>
+        </p:style>
+        <p:txBody>
+          <a:bodyPr rtlCol="0" anchor="ctr"/>
+          <a:lstStyle/>
+          <a:p>
+            <a:pPr algn="ctr"/>
+          </a:p>
+        </p:txBody>
+      </p:sp>
+      <p:sp>
+        <p:nvSpPr>
+          <p:cNvPr id="23" name="TextBox 22"/>
           <p:cNvSpPr txBox="1"/>
           <p:nvPr/>
         </p:nvSpPr>
         <p:spPr>
           <a:xfrm>
-            <a:off x="7351775" y="274320"/>
-            <a:ext cx="1417320" cy="164592"/>
+            <a:off x="7329830" y="2670048"/>
+            <a:ext cx="651052" cy="256032"/>
           </a:xfrm>
           <a:prstGeom prst="rect">
             <a:avLst/>
@@ -3405,29 +4016,74 @@
           </a:bodyPr>
           <a:lstStyle/>
           <a:p>
-            <a:pPr algn="l"/>
-            <a:r>
-              <a:rPr sz="700" b="1" i="0">
-                <a:solidFill>
-                  <a:srgbClr val="69CD2B"/>
+            <a:pPr algn="ctr"/>
+            <a:r>
+              <a:rPr sz="1000" b="1" i="0">
+                <a:solidFill>
+                  <a:srgbClr val="9CC0D6"/>
                 </a:solidFill>
                 <a:latin typeface="Poppins"/>
               </a:rPr>
-              <a:t>COMPETITIVE URGENCY</a:t>
-            </a:r>
-          </a:p>
-        </p:txBody>
-      </p:sp>
-      <p:sp>
-        <p:nvSpPr>
-          <p:cNvPr id="10" name="TextBox 9"/>
+              <a:t>5</a:t>
+            </a:r>
+          </a:p>
+        </p:txBody>
+      </p:sp>
+      <p:sp>
+        <p:nvSpPr>
+          <p:cNvPr id="24" name="Rectangle 23"/>
+          <p:cNvSpPr/>
+          <p:nvPr/>
+        </p:nvSpPr>
+        <p:spPr>
+          <a:xfrm>
+            <a:off x="8035747" y="1993392"/>
+            <a:ext cx="651052" cy="950975"/>
+          </a:xfrm>
+          <a:prstGeom prst="rect">
+            <a:avLst/>
+          </a:prstGeom>
+          <a:solidFill>
+            <a:srgbClr val="003A59"/>
+          </a:solidFill>
+          <a:ln w="19050">
+            <a:solidFill>
+              <a:srgbClr val="69CD2B"/>
+            </a:solidFill>
+          </a:ln>
+        </p:spPr>
+        <p:style>
+          <a:lnRef idx="1">
+            <a:schemeClr val="accent1"/>
+          </a:lnRef>
+          <a:fillRef idx="3">
+            <a:schemeClr val="accent1"/>
+          </a:fillRef>
+          <a:effectRef idx="2">
+            <a:schemeClr val="accent1"/>
+          </a:effectRef>
+          <a:fontRef idx="minor">
+            <a:schemeClr val="lt1"/>
+          </a:fontRef>
+        </p:style>
+        <p:txBody>
+          <a:bodyPr rtlCol="0" anchor="ctr"/>
+          <a:lstStyle/>
+          <a:p>
+            <a:pPr algn="ctr"/>
+          </a:p>
+        </p:txBody>
+      </p:sp>
+      <p:sp>
+        <p:nvSpPr>
+          <p:cNvPr id="25" name="TextBox 24"/>
           <p:cNvSpPr txBox="1"/>
           <p:nvPr/>
         </p:nvSpPr>
         <p:spPr>
           <a:xfrm>
-            <a:off x="7351775" y="429768"/>
-            <a:ext cx="1417320" cy="164592"/>
+            <a:off x="8035747" y="2670048"/>
+            <a:ext cx="651052" cy="256032"/>
           </a:xfrm>
           <a:prstGeom prst="rect">
             <a:avLst/>
@@ -3440,29 +4096,64 @@
           </a:bodyPr>
           <a:lstStyle/>
           <a:p>
-            <a:pPr algn="l"/>
-            <a:r>
-              <a:rPr sz="700" b="0" i="0">
-                <a:solidFill>
-                  <a:srgbClr val="9CC0D6"/>
+            <a:pPr algn="ctr"/>
+            <a:r>
+              <a:rPr sz="1000" b="1" i="0">
+                <a:solidFill>
+                  <a:srgbClr val="69CD2B"/>
                 </a:solidFill>
                 <a:latin typeface="Poppins"/>
               </a:rPr>
-              <a:t>Score out of 10</a:t>
-            </a:r>
-          </a:p>
-        </p:txBody>
-      </p:sp>
-      <p:sp>
-        <p:nvSpPr>
-          <p:cNvPr id="11" name="Rectangle 10"/>
+              <a:t>6</a:t>
+            </a:r>
+          </a:p>
+        </p:txBody>
+      </p:sp>
+      <p:sp>
+        <p:nvSpPr>
+          <p:cNvPr id="26" name="TextBox 25"/>
+          <p:cNvSpPr txBox="1"/>
+          <p:nvPr/>
+        </p:nvSpPr>
+        <p:spPr>
+          <a:xfrm>
+            <a:off x="274320" y="3200400"/>
+            <a:ext cx="3657600" cy="182880"/>
+          </a:xfrm>
+          <a:prstGeom prst="rect">
+            <a:avLst/>
+          </a:prstGeom>
+          <a:noFill/>
+        </p:spPr>
+        <p:txBody>
+          <a:bodyPr wrap="square">
+            <a:noAutofit/>
+          </a:bodyPr>
+          <a:lstStyle/>
+          <a:p>
+            <a:pPr algn="l"/>
+            <a:r>
+              <a:rPr sz="750" b="1" i="0">
+                <a:solidFill>
+                  <a:srgbClr val="003A59"/>
+                </a:solidFill>
+                <a:latin typeface="Poppins"/>
+              </a:rPr>
+              <a:t>YOUR KEY GAPS</a:t>
+            </a:r>
+          </a:p>
+        </p:txBody>
+      </p:sp>
+      <p:sp>
+        <p:nvSpPr>
+          <p:cNvPr id="27" name="Rectangle 26"/>
           <p:cNvSpPr/>
           <p:nvPr/>
         </p:nvSpPr>
         <p:spPr>
           <a:xfrm>
-            <a:off x="274320" y="1005840"/>
-            <a:ext cx="2066543" cy="877824"/>
+            <a:off x="274320" y="3419856"/>
+            <a:ext cx="8595360" cy="1243584"/>
           </a:xfrm>
           <a:prstGeom prst="rect">
             <a:avLst/>
@@ -3500,1908 +4191,14 @@
       </p:sp>
       <p:sp>
         <p:nvSpPr>
-          <p:cNvPr id="12" name="Rectangle 11"/>
+          <p:cNvPr id="28" name="Rectangle 27"/>
           <p:cNvSpPr/>
           <p:nvPr/>
         </p:nvSpPr>
         <p:spPr>
           <a:xfrm>
-            <a:off x="274320" y="1005840"/>
-            <a:ext cx="2066543" cy="36576"/>
-          </a:xfrm>
-          <a:prstGeom prst="rect">
-            <a:avLst/>
-          </a:prstGeom>
-          <a:solidFill>
-            <a:srgbClr val="B5770B"/>
-          </a:solidFill>
-          <a:ln>
-            <a:solidFill>
-              <a:srgbClr val="FFFFFF"/>
-            </a:solidFill>
-          </a:ln>
-        </p:spPr>
-        <p:style>
-          <a:lnRef idx="1">
-            <a:schemeClr val="accent1"/>
-          </a:lnRef>
-          <a:fillRef idx="3">
-            <a:schemeClr val="accent1"/>
-          </a:fillRef>
-          <a:effectRef idx="2">
-            <a:schemeClr val="accent1"/>
-          </a:effectRef>
-          <a:fontRef idx="minor">
-            <a:schemeClr val="lt1"/>
-          </a:fontRef>
-        </p:style>
-        <p:txBody>
-          <a:bodyPr rtlCol="0" anchor="ctr"/>
-          <a:lstStyle/>
-          <a:p>
-            <a:pPr algn="ctr"/>
-          </a:p>
-        </p:txBody>
-      </p:sp>
-      <p:sp>
-        <p:nvSpPr>
-          <p:cNvPr id="13" name="TextBox 12"/>
-          <p:cNvSpPr txBox="1"/>
-          <p:nvPr/>
-        </p:nvSpPr>
-        <p:spPr>
-          <a:xfrm>
-            <a:off x="420623" y="1152144"/>
-            <a:ext cx="1773936" cy="219456"/>
-          </a:xfrm>
-          <a:prstGeom prst="rect">
-            <a:avLst/>
-          </a:prstGeom>
-          <a:noFill/>
-        </p:spPr>
-        <p:txBody>
-          <a:bodyPr wrap="square">
-            <a:noAutofit/>
-          </a:bodyPr>
-          <a:lstStyle/>
-          <a:p>
-            <a:pPr algn="l"/>
-            <a:r>
-              <a:rPr sz="1200" b="1" i="0">
-                <a:solidFill>
-                  <a:srgbClr val="1B2A38"/>
-                </a:solidFill>
-                <a:latin typeface="Poppins"/>
-              </a:rPr>
-              <a:t>Lead Generation</a:t>
-            </a:r>
-          </a:p>
-        </p:txBody>
-      </p:sp>
-      <p:sp>
-        <p:nvSpPr>
-          <p:cNvPr id="14" name="Rounded Rectangle 13"/>
-          <p:cNvSpPr/>
-          <p:nvPr/>
-        </p:nvSpPr>
-        <p:spPr>
-          <a:xfrm>
-            <a:off x="420623" y="1426464"/>
-            <a:ext cx="585216" cy="173736"/>
-          </a:xfrm>
-          <a:prstGeom prst="roundRect">
-            <a:avLst/>
-          </a:prstGeom>
-          <a:solidFill>
-            <a:srgbClr val="FDF4E3"/>
-          </a:solidFill>
-          <a:ln>
-            <a:noFill/>
-          </a:ln>
-        </p:spPr>
-        <p:style>
-          <a:lnRef idx="1">
-            <a:schemeClr val="accent1"/>
-          </a:lnRef>
-          <a:fillRef idx="3">
-            <a:schemeClr val="accent1"/>
-          </a:fillRef>
-          <a:effectRef idx="2">
-            <a:schemeClr val="accent1"/>
-          </a:effectRef>
-          <a:fontRef idx="minor">
-            <a:schemeClr val="lt1"/>
-          </a:fontRef>
-        </p:style>
-        <p:txBody>
-          <a:bodyPr rtlCol="0" anchor="ctr"/>
-          <a:lstStyle/>
-          <a:p>
-            <a:pPr algn="ctr"/>
-          </a:p>
-        </p:txBody>
-      </p:sp>
-      <p:sp>
-        <p:nvSpPr>
-          <p:cNvPr id="15" name="TextBox 14"/>
-          <p:cNvSpPr txBox="1"/>
-          <p:nvPr/>
-        </p:nvSpPr>
-        <p:spPr>
-          <a:xfrm>
-            <a:off x="420623" y="1426464"/>
-            <a:ext cx="585216" cy="173736"/>
-          </a:xfrm>
-          <a:prstGeom prst="rect">
-            <a:avLst/>
-          </a:prstGeom>
-          <a:noFill/>
-        </p:spPr>
-        <p:txBody>
-          <a:bodyPr wrap="square">
-            <a:noAutofit/>
-          </a:bodyPr>
-          <a:lstStyle/>
-          <a:p>
-            <a:pPr algn="ctr"/>
-            <a:r>
-              <a:rPr sz="750" b="1" i="0">
-                <a:solidFill>
-                  <a:srgbClr val="B5770B"/>
-                </a:solidFill>
-                <a:latin typeface="Poppins"/>
-              </a:rPr>
-              <a:t>AMBER</a:t>
-            </a:r>
-          </a:p>
-        </p:txBody>
-      </p:sp>
-      <p:sp>
-        <p:nvSpPr>
-          <p:cNvPr id="16" name="TextBox 15"/>
-          <p:cNvSpPr txBox="1"/>
-          <p:nvPr/>
-        </p:nvSpPr>
-        <p:spPr>
-          <a:xfrm>
-            <a:off x="420623" y="1664208"/>
-            <a:ext cx="1773936" cy="201168"/>
-          </a:xfrm>
-          <a:prstGeom prst="rect">
-            <a:avLst/>
-          </a:prstGeom>
-          <a:noFill/>
-        </p:spPr>
-        <p:txBody>
-          <a:bodyPr wrap="square">
-            <a:noAutofit/>
-          </a:bodyPr>
-          <a:lstStyle/>
-          <a:p>
-            <a:pPr algn="l"/>
-            <a:r>
-              <a:rPr sz="950" b="0" i="0">
-                <a:solidFill>
-                  <a:srgbClr val="7C8D9B"/>
-                </a:solidFill>
-                <a:latin typeface="Poppins"/>
-              </a:rPr>
-              <a:t>Content-led visibility</a:t>
-            </a:r>
-          </a:p>
-        </p:txBody>
-      </p:sp>
-      <p:sp>
-        <p:nvSpPr>
-          <p:cNvPr id="17" name="Rectangle 16"/>
-          <p:cNvSpPr/>
-          <p:nvPr/>
-        </p:nvSpPr>
-        <p:spPr>
-          <a:xfrm>
-            <a:off x="2450592" y="1005840"/>
-            <a:ext cx="2066543" cy="877824"/>
-          </a:xfrm>
-          <a:prstGeom prst="rect">
-            <a:avLst/>
-          </a:prstGeom>
-          <a:solidFill>
-            <a:srgbClr val="FFFFFF"/>
-          </a:solidFill>
-          <a:ln>
-            <a:solidFill>
-              <a:srgbClr val="FFFFFF"/>
-            </a:solidFill>
-          </a:ln>
-        </p:spPr>
-        <p:style>
-          <a:lnRef idx="1">
-            <a:schemeClr val="accent1"/>
-          </a:lnRef>
-          <a:fillRef idx="3">
-            <a:schemeClr val="accent1"/>
-          </a:fillRef>
-          <a:effectRef idx="2">
-            <a:schemeClr val="accent1"/>
-          </a:effectRef>
-          <a:fontRef idx="minor">
-            <a:schemeClr val="lt1"/>
-          </a:fontRef>
-        </p:style>
-        <p:txBody>
-          <a:bodyPr rtlCol="0" anchor="ctr"/>
-          <a:lstStyle/>
-          <a:p>
-            <a:pPr algn="ctr"/>
-          </a:p>
-        </p:txBody>
-      </p:sp>
-      <p:sp>
-        <p:nvSpPr>
-          <p:cNvPr id="18" name="Rectangle 17"/>
-          <p:cNvSpPr/>
-          <p:nvPr/>
-        </p:nvSpPr>
-        <p:spPr>
-          <a:xfrm>
-            <a:off x="2450592" y="1005840"/>
-            <a:ext cx="2066543" cy="36576"/>
-          </a:xfrm>
-          <a:prstGeom prst="rect">
-            <a:avLst/>
-          </a:prstGeom>
-          <a:solidFill>
-            <a:srgbClr val="B5770B"/>
-          </a:solidFill>
-          <a:ln>
-            <a:solidFill>
-              <a:srgbClr val="FFFFFF"/>
-            </a:solidFill>
-          </a:ln>
-        </p:spPr>
-        <p:style>
-          <a:lnRef idx="1">
-            <a:schemeClr val="accent1"/>
-          </a:lnRef>
-          <a:fillRef idx="3">
-            <a:schemeClr val="accent1"/>
-          </a:fillRef>
-          <a:effectRef idx="2">
-            <a:schemeClr val="accent1"/>
-          </a:effectRef>
-          <a:fontRef idx="minor">
-            <a:schemeClr val="lt1"/>
-          </a:fontRef>
-        </p:style>
-        <p:txBody>
-          <a:bodyPr rtlCol="0" anchor="ctr"/>
-          <a:lstStyle/>
-          <a:p>
-            <a:pPr algn="ctr"/>
-          </a:p>
-        </p:txBody>
-      </p:sp>
-      <p:sp>
-        <p:nvSpPr>
-          <p:cNvPr id="19" name="TextBox 18"/>
-          <p:cNvSpPr txBox="1"/>
-          <p:nvPr/>
-        </p:nvSpPr>
-        <p:spPr>
-          <a:xfrm>
-            <a:off x="2596896" y="1152144"/>
-            <a:ext cx="1773936" cy="219456"/>
-          </a:xfrm>
-          <a:prstGeom prst="rect">
-            <a:avLst/>
-          </a:prstGeom>
-          <a:noFill/>
-        </p:spPr>
-        <p:txBody>
-          <a:bodyPr wrap="square">
-            <a:noAutofit/>
-          </a:bodyPr>
-          <a:lstStyle/>
-          <a:p>
-            <a:pPr algn="l"/>
-            <a:r>
-              <a:rPr sz="1200" b="1" i="0">
-                <a:solidFill>
-                  <a:srgbClr val="1B2A38"/>
-                </a:solidFill>
-                <a:latin typeface="Poppins"/>
-              </a:rPr>
-              <a:t>Intake</a:t>
-            </a:r>
-          </a:p>
-        </p:txBody>
-      </p:sp>
-      <p:sp>
-        <p:nvSpPr>
-          <p:cNvPr id="20" name="Rounded Rectangle 19"/>
-          <p:cNvSpPr/>
-          <p:nvPr/>
-        </p:nvSpPr>
-        <p:spPr>
-          <a:xfrm>
-            <a:off x="2596896" y="1426464"/>
-            <a:ext cx="585216" cy="173736"/>
-          </a:xfrm>
-          <a:prstGeom prst="roundRect">
-            <a:avLst/>
-          </a:prstGeom>
-          <a:solidFill>
-            <a:srgbClr val="FDF4E3"/>
-          </a:solidFill>
-          <a:ln>
-            <a:noFill/>
-          </a:ln>
-        </p:spPr>
-        <p:style>
-          <a:lnRef idx="1">
-            <a:schemeClr val="accent1"/>
-          </a:lnRef>
-          <a:fillRef idx="3">
-            <a:schemeClr val="accent1"/>
-          </a:fillRef>
-          <a:effectRef idx="2">
-            <a:schemeClr val="accent1"/>
-          </a:effectRef>
-          <a:fontRef idx="minor">
-            <a:schemeClr val="lt1"/>
-          </a:fontRef>
-        </p:style>
-        <p:txBody>
-          <a:bodyPr rtlCol="0" anchor="ctr"/>
-          <a:lstStyle/>
-          <a:p>
-            <a:pPr algn="ctr"/>
-          </a:p>
-        </p:txBody>
-      </p:sp>
-      <p:sp>
-        <p:nvSpPr>
-          <p:cNvPr id="21" name="TextBox 20"/>
-          <p:cNvSpPr txBox="1"/>
-          <p:nvPr/>
-        </p:nvSpPr>
-        <p:spPr>
-          <a:xfrm>
-            <a:off x="2596896" y="1426464"/>
-            <a:ext cx="585216" cy="173736"/>
-          </a:xfrm>
-          <a:prstGeom prst="rect">
-            <a:avLst/>
-          </a:prstGeom>
-          <a:noFill/>
-        </p:spPr>
-        <p:txBody>
-          <a:bodyPr wrap="square">
-            <a:noAutofit/>
-          </a:bodyPr>
-          <a:lstStyle/>
-          <a:p>
-            <a:pPr algn="ctr"/>
-            <a:r>
-              <a:rPr sz="750" b="1" i="0">
-                <a:solidFill>
-                  <a:srgbClr val="B5770B"/>
-                </a:solidFill>
-                <a:latin typeface="Poppins"/>
-              </a:rPr>
-              <a:t>AMBER</a:t>
-            </a:r>
-          </a:p>
-        </p:txBody>
-      </p:sp>
-      <p:sp>
-        <p:nvSpPr>
-          <p:cNvPr id="22" name="TextBox 21"/>
-          <p:cNvSpPr txBox="1"/>
-          <p:nvPr/>
-        </p:nvSpPr>
-        <p:spPr>
-          <a:xfrm>
-            <a:off x="2596896" y="1664208"/>
-            <a:ext cx="1773936" cy="201168"/>
-          </a:xfrm>
-          <a:prstGeom prst="rect">
-            <a:avLst/>
-          </a:prstGeom>
-          <a:noFill/>
-        </p:spPr>
-        <p:txBody>
-          <a:bodyPr wrap="square">
-            <a:noAutofit/>
-          </a:bodyPr>
-          <a:lstStyle/>
-          <a:p>
-            <a:pPr algn="l"/>
-            <a:r>
-              <a:rPr sz="950" b="0" i="0">
-                <a:solidFill>
-                  <a:srgbClr val="7C8D9B"/>
-                </a:solidFill>
-                <a:latin typeface="Poppins"/>
-              </a:rPr>
-              <a:t>Form linked off-page</a:t>
-            </a:r>
-          </a:p>
-        </p:txBody>
-      </p:sp>
-      <p:sp>
-        <p:nvSpPr>
-          <p:cNvPr id="23" name="Rectangle 22"/>
-          <p:cNvSpPr/>
-          <p:nvPr/>
-        </p:nvSpPr>
-        <p:spPr>
-          <a:xfrm>
-            <a:off x="4636008" y="1005840"/>
-            <a:ext cx="2066543" cy="877824"/>
-          </a:xfrm>
-          <a:prstGeom prst="rect">
-            <a:avLst/>
-          </a:prstGeom>
-          <a:solidFill>
-            <a:srgbClr val="FFFFFF"/>
-          </a:solidFill>
-          <a:ln>
-            <a:solidFill>
-              <a:srgbClr val="FFFFFF"/>
-            </a:solidFill>
-          </a:ln>
-        </p:spPr>
-        <p:style>
-          <a:lnRef idx="1">
-            <a:schemeClr val="accent1"/>
-          </a:lnRef>
-          <a:fillRef idx="3">
-            <a:schemeClr val="accent1"/>
-          </a:fillRef>
-          <a:effectRef idx="2">
-            <a:schemeClr val="accent1"/>
-          </a:effectRef>
-          <a:fontRef idx="minor">
-            <a:schemeClr val="lt1"/>
-          </a:fontRef>
-        </p:style>
-        <p:txBody>
-          <a:bodyPr rtlCol="0" anchor="ctr"/>
-          <a:lstStyle/>
-          <a:p>
-            <a:pPr algn="ctr"/>
-          </a:p>
-        </p:txBody>
-      </p:sp>
-      <p:sp>
-        <p:nvSpPr>
-          <p:cNvPr id="24" name="Rectangle 23"/>
-          <p:cNvSpPr/>
-          <p:nvPr/>
-        </p:nvSpPr>
-        <p:spPr>
-          <a:xfrm>
-            <a:off x="4636008" y="1005840"/>
-            <a:ext cx="2066543" cy="36576"/>
-          </a:xfrm>
-          <a:prstGeom prst="rect">
-            <a:avLst/>
-          </a:prstGeom>
-          <a:solidFill>
-            <a:srgbClr val="B5770B"/>
-          </a:solidFill>
-          <a:ln>
-            <a:solidFill>
-              <a:srgbClr val="FFFFFF"/>
-            </a:solidFill>
-          </a:ln>
-        </p:spPr>
-        <p:style>
-          <a:lnRef idx="1">
-            <a:schemeClr val="accent1"/>
-          </a:lnRef>
-          <a:fillRef idx="3">
-            <a:schemeClr val="accent1"/>
-          </a:fillRef>
-          <a:effectRef idx="2">
-            <a:schemeClr val="accent1"/>
-          </a:effectRef>
-          <a:fontRef idx="minor">
-            <a:schemeClr val="lt1"/>
-          </a:fontRef>
-        </p:style>
-        <p:txBody>
-          <a:bodyPr rtlCol="0" anchor="ctr"/>
-          <a:lstStyle/>
-          <a:p>
-            <a:pPr algn="ctr"/>
-          </a:p>
-        </p:txBody>
-      </p:sp>
-      <p:sp>
-        <p:nvSpPr>
-          <p:cNvPr id="25" name="TextBox 24"/>
-          <p:cNvSpPr txBox="1"/>
-          <p:nvPr/>
-        </p:nvSpPr>
-        <p:spPr>
-          <a:xfrm>
-            <a:off x="4782312" y="1152144"/>
-            <a:ext cx="1773936" cy="219456"/>
-          </a:xfrm>
-          <a:prstGeom prst="rect">
-            <a:avLst/>
-          </a:prstGeom>
-          <a:noFill/>
-        </p:spPr>
-        <p:txBody>
-          <a:bodyPr wrap="square">
-            <a:noAutofit/>
-          </a:bodyPr>
-          <a:lstStyle/>
-          <a:p>
-            <a:pPr algn="l"/>
-            <a:r>
-              <a:rPr sz="1200" b="1" i="0">
-                <a:solidFill>
-                  <a:srgbClr val="1B2A38"/>
-                </a:solidFill>
-                <a:latin typeface="Poppins"/>
-              </a:rPr>
-              <a:t>Team</a:t>
-            </a:r>
-          </a:p>
-        </p:txBody>
-      </p:sp>
-      <p:sp>
-        <p:nvSpPr>
-          <p:cNvPr id="26" name="Rounded Rectangle 25"/>
-          <p:cNvSpPr/>
-          <p:nvPr/>
-        </p:nvSpPr>
-        <p:spPr>
-          <a:xfrm>
-            <a:off x="4782312" y="1426464"/>
-            <a:ext cx="585216" cy="173736"/>
-          </a:xfrm>
-          <a:prstGeom prst="roundRect">
-            <a:avLst/>
-          </a:prstGeom>
-          <a:solidFill>
-            <a:srgbClr val="FDF4E3"/>
-          </a:solidFill>
-          <a:ln>
-            <a:noFill/>
-          </a:ln>
-        </p:spPr>
-        <p:style>
-          <a:lnRef idx="1">
-            <a:schemeClr val="accent1"/>
-          </a:lnRef>
-          <a:fillRef idx="3">
-            <a:schemeClr val="accent1"/>
-          </a:fillRef>
-          <a:effectRef idx="2">
-            <a:schemeClr val="accent1"/>
-          </a:effectRef>
-          <a:fontRef idx="minor">
-            <a:schemeClr val="lt1"/>
-          </a:fontRef>
-        </p:style>
-        <p:txBody>
-          <a:bodyPr rtlCol="0" anchor="ctr"/>
-          <a:lstStyle/>
-          <a:p>
-            <a:pPr algn="ctr"/>
-          </a:p>
-        </p:txBody>
-      </p:sp>
-      <p:sp>
-        <p:nvSpPr>
-          <p:cNvPr id="27" name="TextBox 26"/>
-          <p:cNvSpPr txBox="1"/>
-          <p:nvPr/>
-        </p:nvSpPr>
-        <p:spPr>
-          <a:xfrm>
-            <a:off x="4782312" y="1426464"/>
-            <a:ext cx="585216" cy="173736"/>
-          </a:xfrm>
-          <a:prstGeom prst="rect">
-            <a:avLst/>
-          </a:prstGeom>
-          <a:noFill/>
-        </p:spPr>
-        <p:txBody>
-          <a:bodyPr wrap="square">
-            <a:noAutofit/>
-          </a:bodyPr>
-          <a:lstStyle/>
-          <a:p>
-            <a:pPr algn="ctr"/>
-            <a:r>
-              <a:rPr sz="750" b="1" i="0">
-                <a:solidFill>
-                  <a:srgbClr val="B5770B"/>
-                </a:solidFill>
-                <a:latin typeface="Poppins"/>
-              </a:rPr>
-              <a:t>AMBER</a:t>
-            </a:r>
-          </a:p>
-        </p:txBody>
-      </p:sp>
-      <p:sp>
-        <p:nvSpPr>
-          <p:cNvPr id="28" name="TextBox 27"/>
-          <p:cNvSpPr txBox="1"/>
-          <p:nvPr/>
-        </p:nvSpPr>
-        <p:spPr>
-          <a:xfrm>
-            <a:off x="4782312" y="1664208"/>
-            <a:ext cx="1773936" cy="201168"/>
-          </a:xfrm>
-          <a:prstGeom prst="rect">
-            <a:avLst/>
-          </a:prstGeom>
-          <a:noFill/>
-        </p:spPr>
-        <p:txBody>
-          <a:bodyPr wrap="square">
-            <a:noAutofit/>
-          </a:bodyPr>
-          <a:lstStyle/>
-          <a:p>
-            <a:pPr algn="l"/>
-            <a:r>
-              <a:rPr sz="950" b="0" i="0">
-                <a:solidFill>
-                  <a:srgbClr val="7C8D9B"/>
-                </a:solidFill>
-                <a:latin typeface="Poppins"/>
-              </a:rPr>
-              <a:t>Roles clearly defined</a:t>
-            </a:r>
-          </a:p>
-        </p:txBody>
-      </p:sp>
-      <p:sp>
-        <p:nvSpPr>
-          <p:cNvPr id="29" name="Rectangle 28"/>
-          <p:cNvSpPr/>
-          <p:nvPr/>
-        </p:nvSpPr>
-        <p:spPr>
-          <a:xfrm>
-            <a:off x="6812280" y="1005840"/>
-            <a:ext cx="2066543" cy="877824"/>
-          </a:xfrm>
-          <a:prstGeom prst="rect">
-            <a:avLst/>
-          </a:prstGeom>
-          <a:solidFill>
-            <a:srgbClr val="FFFFFF"/>
-          </a:solidFill>
-          <a:ln>
-            <a:solidFill>
-              <a:srgbClr val="FFFFFF"/>
-            </a:solidFill>
-          </a:ln>
-        </p:spPr>
-        <p:style>
-          <a:lnRef idx="1">
-            <a:schemeClr val="accent1"/>
-          </a:lnRef>
-          <a:fillRef idx="3">
-            <a:schemeClr val="accent1"/>
-          </a:fillRef>
-          <a:effectRef idx="2">
-            <a:schemeClr val="accent1"/>
-          </a:effectRef>
-          <a:fontRef idx="minor">
-            <a:schemeClr val="lt1"/>
-          </a:fontRef>
-        </p:style>
-        <p:txBody>
-          <a:bodyPr rtlCol="0" anchor="ctr"/>
-          <a:lstStyle/>
-          <a:p>
-            <a:pPr algn="ctr"/>
-          </a:p>
-        </p:txBody>
-      </p:sp>
-      <p:sp>
-        <p:nvSpPr>
-          <p:cNvPr id="30" name="Rectangle 29"/>
-          <p:cNvSpPr/>
-          <p:nvPr/>
-        </p:nvSpPr>
-        <p:spPr>
-          <a:xfrm>
-            <a:off x="6812280" y="1005840"/>
-            <a:ext cx="2066543" cy="36576"/>
-          </a:xfrm>
-          <a:prstGeom prst="rect">
-            <a:avLst/>
-          </a:prstGeom>
-          <a:solidFill>
-            <a:srgbClr val="B5770B"/>
-          </a:solidFill>
-          <a:ln>
-            <a:solidFill>
-              <a:srgbClr val="FFFFFF"/>
-            </a:solidFill>
-          </a:ln>
-        </p:spPr>
-        <p:style>
-          <a:lnRef idx="1">
-            <a:schemeClr val="accent1"/>
-          </a:lnRef>
-          <a:fillRef idx="3">
-            <a:schemeClr val="accent1"/>
-          </a:fillRef>
-          <a:effectRef idx="2">
-            <a:schemeClr val="accent1"/>
-          </a:effectRef>
-          <a:fontRef idx="minor">
-            <a:schemeClr val="lt1"/>
-          </a:fontRef>
-        </p:style>
-        <p:txBody>
-          <a:bodyPr rtlCol="0" anchor="ctr"/>
-          <a:lstStyle/>
-          <a:p>
-            <a:pPr algn="ctr"/>
-          </a:p>
-        </p:txBody>
-      </p:sp>
-      <p:sp>
-        <p:nvSpPr>
-          <p:cNvPr id="31" name="TextBox 30"/>
-          <p:cNvSpPr txBox="1"/>
-          <p:nvPr/>
-        </p:nvSpPr>
-        <p:spPr>
-          <a:xfrm>
-            <a:off x="6958584" y="1152144"/>
-            <a:ext cx="1773936" cy="219456"/>
-          </a:xfrm>
-          <a:prstGeom prst="rect">
-            <a:avLst/>
-          </a:prstGeom>
-          <a:noFill/>
-        </p:spPr>
-        <p:txBody>
-          <a:bodyPr wrap="square">
-            <a:noAutofit/>
-          </a:bodyPr>
-          <a:lstStyle/>
-          <a:p>
-            <a:pPr algn="l"/>
-            <a:r>
-              <a:rPr sz="1200" b="1" i="0">
-                <a:solidFill>
-                  <a:srgbClr val="1B2A38"/>
-                </a:solidFill>
-                <a:latin typeface="Poppins"/>
-              </a:rPr>
-              <a:t>Profit Plan</a:t>
-            </a:r>
-          </a:p>
-        </p:txBody>
-      </p:sp>
-      <p:sp>
-        <p:nvSpPr>
-          <p:cNvPr id="32" name="Rounded Rectangle 31"/>
-          <p:cNvSpPr/>
-          <p:nvPr/>
-        </p:nvSpPr>
-        <p:spPr>
-          <a:xfrm>
-            <a:off x="6958584" y="1426464"/>
-            <a:ext cx="585216" cy="173736"/>
-          </a:xfrm>
-          <a:prstGeom prst="roundRect">
-            <a:avLst/>
-          </a:prstGeom>
-          <a:solidFill>
-            <a:srgbClr val="FDF4E3"/>
-          </a:solidFill>
-          <a:ln>
-            <a:noFill/>
-          </a:ln>
-        </p:spPr>
-        <p:style>
-          <a:lnRef idx="1">
-            <a:schemeClr val="accent1"/>
-          </a:lnRef>
-          <a:fillRef idx="3">
-            <a:schemeClr val="accent1"/>
-          </a:fillRef>
-          <a:effectRef idx="2">
-            <a:schemeClr val="accent1"/>
-          </a:effectRef>
-          <a:fontRef idx="minor">
-            <a:schemeClr val="lt1"/>
-          </a:fontRef>
-        </p:style>
-        <p:txBody>
-          <a:bodyPr rtlCol="0" anchor="ctr"/>
-          <a:lstStyle/>
-          <a:p>
-            <a:pPr algn="ctr"/>
-          </a:p>
-        </p:txBody>
-      </p:sp>
-      <p:sp>
-        <p:nvSpPr>
-          <p:cNvPr id="33" name="TextBox 32"/>
-          <p:cNvSpPr txBox="1"/>
-          <p:nvPr/>
-        </p:nvSpPr>
-        <p:spPr>
-          <a:xfrm>
-            <a:off x="6958584" y="1426464"/>
-            <a:ext cx="585216" cy="173736"/>
-          </a:xfrm>
-          <a:prstGeom prst="rect">
-            <a:avLst/>
-          </a:prstGeom>
-          <a:noFill/>
-        </p:spPr>
-        <p:txBody>
-          <a:bodyPr wrap="square">
-            <a:noAutofit/>
-          </a:bodyPr>
-          <a:lstStyle/>
-          <a:p>
-            <a:pPr algn="ctr"/>
-            <a:r>
-              <a:rPr sz="750" b="1" i="0">
-                <a:solidFill>
-                  <a:srgbClr val="B5770B"/>
-                </a:solidFill>
-                <a:latin typeface="Poppins"/>
-              </a:rPr>
-              <a:t>AMBER</a:t>
-            </a:r>
-          </a:p>
-        </p:txBody>
-      </p:sp>
-      <p:sp>
-        <p:nvSpPr>
-          <p:cNvPr id="34" name="TextBox 33"/>
-          <p:cNvSpPr txBox="1"/>
-          <p:nvPr/>
-        </p:nvSpPr>
-        <p:spPr>
-          <a:xfrm>
-            <a:off x="6958584" y="1664208"/>
-            <a:ext cx="1773936" cy="201168"/>
-          </a:xfrm>
-          <a:prstGeom prst="rect">
-            <a:avLst/>
-          </a:prstGeom>
-          <a:noFill/>
-        </p:spPr>
-        <p:txBody>
-          <a:bodyPr wrap="square">
-            <a:noAutofit/>
-          </a:bodyPr>
-          <a:lstStyle/>
-          <a:p>
-            <a:pPr algn="l"/>
-            <a:r>
-              <a:rPr sz="950" b="0" i="0">
-                <a:solidFill>
-                  <a:srgbClr val="7C8D9B"/>
-                </a:solidFill>
-                <a:latin typeface="Poppins"/>
-              </a:rPr>
-              <a:t>Baseline not visible</a:t>
-            </a:r>
-          </a:p>
-        </p:txBody>
-      </p:sp>
-      <p:sp>
-        <p:nvSpPr>
-          <p:cNvPr id="35" name="TextBox 34"/>
-          <p:cNvSpPr txBox="1"/>
-          <p:nvPr/>
-        </p:nvSpPr>
-        <p:spPr>
-          <a:xfrm>
-            <a:off x="274320" y="2011680"/>
-            <a:ext cx="4297680" cy="164592"/>
-          </a:xfrm>
-          <a:prstGeom prst="rect">
-            <a:avLst/>
-          </a:prstGeom>
-          <a:noFill/>
-        </p:spPr>
-        <p:txBody>
-          <a:bodyPr wrap="square">
-            <a:noAutofit/>
-          </a:bodyPr>
-          <a:lstStyle/>
-          <a:p>
-            <a:pPr algn="l"/>
-            <a:r>
-              <a:rPr sz="750" b="1" i="0">
-                <a:solidFill>
-                  <a:srgbClr val="003A59"/>
-                </a:solidFill>
-                <a:latin typeface="Poppins"/>
-              </a:rPr>
-              <a:t>KEY FINDINGS</a:t>
-            </a:r>
-          </a:p>
-        </p:txBody>
-      </p:sp>
-      <p:sp>
-        <p:nvSpPr>
-          <p:cNvPr id="36" name="Rectangle 35"/>
-          <p:cNvSpPr/>
-          <p:nvPr/>
-        </p:nvSpPr>
-        <p:spPr>
-          <a:xfrm>
-            <a:off x="274320" y="2267712"/>
-            <a:ext cx="4315968" cy="557784"/>
-          </a:xfrm>
-          <a:prstGeom prst="rect">
-            <a:avLst/>
-          </a:prstGeom>
-          <a:solidFill>
-            <a:srgbClr val="FFFFFF"/>
-          </a:solidFill>
-          <a:ln>
-            <a:solidFill>
-              <a:srgbClr val="FFFFFF"/>
-            </a:solidFill>
-          </a:ln>
-        </p:spPr>
-        <p:style>
-          <a:lnRef idx="1">
-            <a:schemeClr val="accent1"/>
-          </a:lnRef>
-          <a:fillRef idx="3">
-            <a:schemeClr val="accent1"/>
-          </a:fillRef>
-          <a:effectRef idx="2">
-            <a:schemeClr val="accent1"/>
-          </a:effectRef>
-          <a:fontRef idx="minor">
-            <a:schemeClr val="lt1"/>
-          </a:fontRef>
-        </p:style>
-        <p:txBody>
-          <a:bodyPr rtlCol="0" anchor="ctr"/>
-          <a:lstStyle/>
-          <a:p>
-            <a:pPr algn="ctr"/>
-          </a:p>
-        </p:txBody>
-      </p:sp>
-      <p:sp>
-        <p:nvSpPr>
-          <p:cNvPr id="37" name="Rectangle 36"/>
-          <p:cNvSpPr/>
-          <p:nvPr/>
-        </p:nvSpPr>
-        <p:spPr>
-          <a:xfrm>
-            <a:off x="274320" y="2267712"/>
-            <a:ext cx="36576" cy="557784"/>
-          </a:xfrm>
-          <a:prstGeom prst="rect">
-            <a:avLst/>
-          </a:prstGeom>
-          <a:solidFill>
-            <a:srgbClr val="B32D2D"/>
-          </a:solidFill>
-          <a:ln>
-            <a:solidFill>
-              <a:srgbClr val="FFFFFF"/>
-            </a:solidFill>
-          </a:ln>
-        </p:spPr>
-        <p:style>
-          <a:lnRef idx="1">
-            <a:schemeClr val="accent1"/>
-          </a:lnRef>
-          <a:fillRef idx="3">
-            <a:schemeClr val="accent1"/>
-          </a:fillRef>
-          <a:effectRef idx="2">
-            <a:schemeClr val="accent1"/>
-          </a:effectRef>
-          <a:fontRef idx="minor">
-            <a:schemeClr val="lt1"/>
-          </a:fontRef>
-        </p:style>
-        <p:txBody>
-          <a:bodyPr rtlCol="0" anchor="ctr"/>
-          <a:lstStyle/>
-          <a:p>
-            <a:pPr algn="ctr"/>
-          </a:p>
-        </p:txBody>
-      </p:sp>
-      <p:sp>
-        <p:nvSpPr>
-          <p:cNvPr id="38" name="Rounded Rectangle 37"/>
-          <p:cNvSpPr/>
-          <p:nvPr/>
-        </p:nvSpPr>
-        <p:spPr>
-          <a:xfrm>
-            <a:off x="429768" y="2459736"/>
-            <a:ext cx="164592" cy="164592"/>
-          </a:xfrm>
-          <a:prstGeom prst="roundRect">
-            <a:avLst/>
-          </a:prstGeom>
-          <a:solidFill>
-            <a:srgbClr val="B32D2D"/>
-          </a:solidFill>
-          <a:ln>
-            <a:noFill/>
-          </a:ln>
-        </p:spPr>
-        <p:style>
-          <a:lnRef idx="1">
-            <a:schemeClr val="accent1"/>
-          </a:lnRef>
-          <a:fillRef idx="3">
-            <a:schemeClr val="accent1"/>
-          </a:fillRef>
-          <a:effectRef idx="2">
-            <a:schemeClr val="accent1"/>
-          </a:effectRef>
-          <a:fontRef idx="minor">
-            <a:schemeClr val="lt1"/>
-          </a:fontRef>
-        </p:style>
-        <p:txBody>
-          <a:bodyPr rtlCol="0" anchor="ctr"/>
-          <a:lstStyle/>
-          <a:p>
-            <a:pPr algn="ctr"/>
-          </a:p>
-        </p:txBody>
-      </p:sp>
-      <p:cxnSp>
-        <p:nvCxnSpPr>
-          <p:cNvPr id="39" name="Connector 38"/>
-          <p:cNvCxnSpPr/>
-          <p:nvPr/>
-        </p:nvCxnSpPr>
-        <p:spPr>
-          <a:xfrm>
-            <a:off x="469270" y="2499238"/>
-            <a:ext cx="85587" cy="85587"/>
-          </a:xfrm>
-          <a:prstGeom prst="line">
-            <a:avLst/>
-          </a:prstGeom>
-          <a:ln w="22225">
-            <a:solidFill>
-              <a:srgbClr val="FFFFFF"/>
-            </a:solidFill>
-          </a:ln>
-        </p:spPr>
-        <p:style>
-          <a:lnRef idx="2">
-            <a:schemeClr val="accent1"/>
-          </a:lnRef>
-          <a:fillRef idx="0">
-            <a:schemeClr val="accent1"/>
-          </a:fillRef>
-          <a:effectRef idx="1">
-            <a:schemeClr val="accent1"/>
-          </a:effectRef>
-          <a:fontRef idx="minor">
-            <a:schemeClr val="tx1"/>
-          </a:fontRef>
-        </p:style>
-      </p:cxnSp>
-      <p:cxnSp>
-        <p:nvCxnSpPr>
-          <p:cNvPr id="40" name="Connector 39"/>
-          <p:cNvCxnSpPr/>
-          <p:nvPr/>
-        </p:nvCxnSpPr>
-        <p:spPr>
-          <a:xfrm flipV="1">
-            <a:off x="469270" y="2499238"/>
-            <a:ext cx="85587" cy="85587"/>
-          </a:xfrm>
-          <a:prstGeom prst="line">
-            <a:avLst/>
-          </a:prstGeom>
-          <a:ln w="22225">
-            <a:solidFill>
-              <a:srgbClr val="FFFFFF"/>
-            </a:solidFill>
-          </a:ln>
-        </p:spPr>
-        <p:style>
-          <a:lnRef idx="2">
-            <a:schemeClr val="accent1"/>
-          </a:lnRef>
-          <a:fillRef idx="0">
-            <a:schemeClr val="accent1"/>
-          </a:fillRef>
-          <a:effectRef idx="1">
-            <a:schemeClr val="accent1"/>
-          </a:effectRef>
-          <a:fontRef idx="minor">
-            <a:schemeClr val="tx1"/>
-          </a:fontRef>
-        </p:style>
-      </p:cxnSp>
-      <p:sp>
-        <p:nvSpPr>
-          <p:cNvPr id="41" name="TextBox 40"/>
-          <p:cNvSpPr txBox="1"/>
-          <p:nvPr/>
-        </p:nvSpPr>
-        <p:spPr>
-          <a:xfrm>
-            <a:off x="685800" y="2386584"/>
-            <a:ext cx="3447288" cy="374904"/>
-          </a:xfrm>
-          <a:prstGeom prst="rect">
-            <a:avLst/>
-          </a:prstGeom>
-          <a:noFill/>
-        </p:spPr>
-        <p:txBody>
-          <a:bodyPr wrap="square">
-            <a:noAutofit/>
-          </a:bodyPr>
-          <a:lstStyle/>
-          <a:p>
-            <a:pPr algn="l"/>
-            <a:r>
-              <a:rPr sz="850" b="0" i="0">
-                <a:solidFill>
-                  <a:srgbClr val="4A5C6B"/>
-                </a:solidFill>
-                <a:latin typeface="Poppins"/>
-              </a:rPr>
-              <a:t>Phone visitors likely leave before the site loads: mobile performance is 28/100.</a:t>
-            </a:r>
-          </a:p>
-        </p:txBody>
-      </p:sp>
-      <p:sp>
-        <p:nvSpPr>
-          <p:cNvPr id="42" name="Rectangle 41"/>
-          <p:cNvSpPr/>
-          <p:nvPr/>
-        </p:nvSpPr>
-        <p:spPr>
-          <a:xfrm>
-            <a:off x="274320" y="2889504"/>
-            <a:ext cx="4315968" cy="557784"/>
-          </a:xfrm>
-          <a:prstGeom prst="rect">
-            <a:avLst/>
-          </a:prstGeom>
-          <a:solidFill>
-            <a:srgbClr val="FFFFFF"/>
-          </a:solidFill>
-          <a:ln>
-            <a:solidFill>
-              <a:srgbClr val="FFFFFF"/>
-            </a:solidFill>
-          </a:ln>
-        </p:spPr>
-        <p:style>
-          <a:lnRef idx="1">
-            <a:schemeClr val="accent1"/>
-          </a:lnRef>
-          <a:fillRef idx="3">
-            <a:schemeClr val="accent1"/>
-          </a:fillRef>
-          <a:effectRef idx="2">
-            <a:schemeClr val="accent1"/>
-          </a:effectRef>
-          <a:fontRef idx="minor">
-            <a:schemeClr val="lt1"/>
-          </a:fontRef>
-        </p:style>
-        <p:txBody>
-          <a:bodyPr rtlCol="0" anchor="ctr"/>
-          <a:lstStyle/>
-          <a:p>
-            <a:pPr algn="ctr"/>
-          </a:p>
-        </p:txBody>
-      </p:sp>
-      <p:sp>
-        <p:nvSpPr>
-          <p:cNvPr id="43" name="Rectangle 42"/>
-          <p:cNvSpPr/>
-          <p:nvPr/>
-        </p:nvSpPr>
-        <p:spPr>
-          <a:xfrm>
-            <a:off x="274320" y="2889504"/>
-            <a:ext cx="36576" cy="557784"/>
-          </a:xfrm>
-          <a:prstGeom prst="rect">
-            <a:avLst/>
-          </a:prstGeom>
-          <a:solidFill>
-            <a:srgbClr val="B32D2D"/>
-          </a:solidFill>
-          <a:ln>
-            <a:solidFill>
-              <a:srgbClr val="FFFFFF"/>
-            </a:solidFill>
-          </a:ln>
-        </p:spPr>
-        <p:style>
-          <a:lnRef idx="1">
-            <a:schemeClr val="accent1"/>
-          </a:lnRef>
-          <a:fillRef idx="3">
-            <a:schemeClr val="accent1"/>
-          </a:fillRef>
-          <a:effectRef idx="2">
-            <a:schemeClr val="accent1"/>
-          </a:effectRef>
-          <a:fontRef idx="minor">
-            <a:schemeClr val="lt1"/>
-          </a:fontRef>
-        </p:style>
-        <p:txBody>
-          <a:bodyPr rtlCol="0" anchor="ctr"/>
-          <a:lstStyle/>
-          <a:p>
-            <a:pPr algn="ctr"/>
-          </a:p>
-        </p:txBody>
-      </p:sp>
-      <p:sp>
-        <p:nvSpPr>
-          <p:cNvPr id="44" name="Rounded Rectangle 43"/>
-          <p:cNvSpPr/>
-          <p:nvPr/>
-        </p:nvSpPr>
-        <p:spPr>
-          <a:xfrm>
-            <a:off x="429768" y="3081528"/>
-            <a:ext cx="164592" cy="164592"/>
-          </a:xfrm>
-          <a:prstGeom prst="roundRect">
-            <a:avLst/>
-          </a:prstGeom>
-          <a:solidFill>
-            <a:srgbClr val="B32D2D"/>
-          </a:solidFill>
-          <a:ln>
-            <a:noFill/>
-          </a:ln>
-        </p:spPr>
-        <p:style>
-          <a:lnRef idx="1">
-            <a:schemeClr val="accent1"/>
-          </a:lnRef>
-          <a:fillRef idx="3">
-            <a:schemeClr val="accent1"/>
-          </a:fillRef>
-          <a:effectRef idx="2">
-            <a:schemeClr val="accent1"/>
-          </a:effectRef>
-          <a:fontRef idx="minor">
-            <a:schemeClr val="lt1"/>
-          </a:fontRef>
-        </p:style>
-        <p:txBody>
-          <a:bodyPr rtlCol="0" anchor="ctr"/>
-          <a:lstStyle/>
-          <a:p>
-            <a:pPr algn="ctr"/>
-          </a:p>
-        </p:txBody>
-      </p:sp>
-      <p:cxnSp>
-        <p:nvCxnSpPr>
-          <p:cNvPr id="45" name="Connector 44"/>
-          <p:cNvCxnSpPr/>
-          <p:nvPr/>
-        </p:nvCxnSpPr>
-        <p:spPr>
-          <a:xfrm>
-            <a:off x="469270" y="3121030"/>
-            <a:ext cx="85587" cy="85587"/>
-          </a:xfrm>
-          <a:prstGeom prst="line">
-            <a:avLst/>
-          </a:prstGeom>
-          <a:ln w="22225">
-            <a:solidFill>
-              <a:srgbClr val="FFFFFF"/>
-            </a:solidFill>
-          </a:ln>
-        </p:spPr>
-        <p:style>
-          <a:lnRef idx="2">
-            <a:schemeClr val="accent1"/>
-          </a:lnRef>
-          <a:fillRef idx="0">
-            <a:schemeClr val="accent1"/>
-          </a:fillRef>
-          <a:effectRef idx="1">
-            <a:schemeClr val="accent1"/>
-          </a:effectRef>
-          <a:fontRef idx="minor">
-            <a:schemeClr val="tx1"/>
-          </a:fontRef>
-        </p:style>
-      </p:cxnSp>
-      <p:cxnSp>
-        <p:nvCxnSpPr>
-          <p:cNvPr id="46" name="Connector 45"/>
-          <p:cNvCxnSpPr/>
-          <p:nvPr/>
-        </p:nvCxnSpPr>
-        <p:spPr>
-          <a:xfrm flipV="1">
-            <a:off x="469270" y="3121030"/>
-            <a:ext cx="85587" cy="85587"/>
-          </a:xfrm>
-          <a:prstGeom prst="line">
-            <a:avLst/>
-          </a:prstGeom>
-          <a:ln w="22225">
-            <a:solidFill>
-              <a:srgbClr val="FFFFFF"/>
-            </a:solidFill>
-          </a:ln>
-        </p:spPr>
-        <p:style>
-          <a:lnRef idx="2">
-            <a:schemeClr val="accent1"/>
-          </a:lnRef>
-          <a:fillRef idx="0">
-            <a:schemeClr val="accent1"/>
-          </a:fillRef>
-          <a:effectRef idx="1">
-            <a:schemeClr val="accent1"/>
-          </a:effectRef>
-          <a:fontRef idx="minor">
-            <a:schemeClr val="tx1"/>
-          </a:fontRef>
-        </p:style>
-      </p:cxnSp>
-      <p:sp>
-        <p:nvSpPr>
-          <p:cNvPr id="47" name="TextBox 46"/>
-          <p:cNvSpPr txBox="1"/>
-          <p:nvPr/>
-        </p:nvSpPr>
-        <p:spPr>
-          <a:xfrm>
-            <a:off x="685800" y="3008376"/>
-            <a:ext cx="3447288" cy="374904"/>
-          </a:xfrm>
-          <a:prstGeom prst="rect">
-            <a:avLst/>
-          </a:prstGeom>
-          <a:noFill/>
-        </p:spPr>
-        <p:txBody>
-          <a:bodyPr wrap="square">
-            <a:noAutofit/>
-          </a:bodyPr>
-          <a:lstStyle/>
-          <a:p>
-            <a:pPr algn="l"/>
-            <a:r>
-              <a:rPr sz="850" b="0" i="0">
-                <a:solidFill>
-                  <a:srgbClr val="4A5C6B"/>
-                </a:solidFill>
-                <a:latin typeface="Poppins"/>
-              </a:rPr>
-              <a:t>No clear consultation button, and the intake form is linked off the homepage.</a:t>
-            </a:r>
-          </a:p>
-        </p:txBody>
-      </p:sp>
-      <p:sp>
-        <p:nvSpPr>
-          <p:cNvPr id="48" name="Rectangle 47"/>
-          <p:cNvSpPr/>
-          <p:nvPr/>
-        </p:nvSpPr>
-        <p:spPr>
-          <a:xfrm>
-            <a:off x="274320" y="3511296"/>
-            <a:ext cx="4315968" cy="557784"/>
-          </a:xfrm>
-          <a:prstGeom prst="rect">
-            <a:avLst/>
-          </a:prstGeom>
-          <a:solidFill>
-            <a:srgbClr val="FFFFFF"/>
-          </a:solidFill>
-          <a:ln>
-            <a:solidFill>
-              <a:srgbClr val="FFFFFF"/>
-            </a:solidFill>
-          </a:ln>
-        </p:spPr>
-        <p:style>
-          <a:lnRef idx="1">
-            <a:schemeClr val="accent1"/>
-          </a:lnRef>
-          <a:fillRef idx="3">
-            <a:schemeClr val="accent1"/>
-          </a:fillRef>
-          <a:effectRef idx="2">
-            <a:schemeClr val="accent1"/>
-          </a:effectRef>
-          <a:fontRef idx="minor">
-            <a:schemeClr val="lt1"/>
-          </a:fontRef>
-        </p:style>
-        <p:txBody>
-          <a:bodyPr rtlCol="0" anchor="ctr"/>
-          <a:lstStyle/>
-          <a:p>
-            <a:pPr algn="ctr"/>
-          </a:p>
-        </p:txBody>
-      </p:sp>
-      <p:sp>
-        <p:nvSpPr>
-          <p:cNvPr id="49" name="Rectangle 48"/>
-          <p:cNvSpPr/>
-          <p:nvPr/>
-        </p:nvSpPr>
-        <p:spPr>
-          <a:xfrm>
-            <a:off x="274320" y="3511296"/>
-            <a:ext cx="36576" cy="557784"/>
-          </a:xfrm>
-          <a:prstGeom prst="rect">
-            <a:avLst/>
-          </a:prstGeom>
-          <a:solidFill>
-            <a:srgbClr val="B32D2D"/>
-          </a:solidFill>
-          <a:ln>
-            <a:solidFill>
-              <a:srgbClr val="FFFFFF"/>
-            </a:solidFill>
-          </a:ln>
-        </p:spPr>
-        <p:style>
-          <a:lnRef idx="1">
-            <a:schemeClr val="accent1"/>
-          </a:lnRef>
-          <a:fillRef idx="3">
-            <a:schemeClr val="accent1"/>
-          </a:fillRef>
-          <a:effectRef idx="2">
-            <a:schemeClr val="accent1"/>
-          </a:effectRef>
-          <a:fontRef idx="minor">
-            <a:schemeClr val="lt1"/>
-          </a:fontRef>
-        </p:style>
-        <p:txBody>
-          <a:bodyPr rtlCol="0" anchor="ctr"/>
-          <a:lstStyle/>
-          <a:p>
-            <a:pPr algn="ctr"/>
-          </a:p>
-        </p:txBody>
-      </p:sp>
-      <p:sp>
-        <p:nvSpPr>
-          <p:cNvPr id="50" name="Rounded Rectangle 49"/>
-          <p:cNvSpPr/>
-          <p:nvPr/>
-        </p:nvSpPr>
-        <p:spPr>
-          <a:xfrm>
-            <a:off x="429768" y="3703320"/>
-            <a:ext cx="164592" cy="164592"/>
-          </a:xfrm>
-          <a:prstGeom prst="roundRect">
-            <a:avLst/>
-          </a:prstGeom>
-          <a:solidFill>
-            <a:srgbClr val="B32D2D"/>
-          </a:solidFill>
-          <a:ln>
-            <a:noFill/>
-          </a:ln>
-        </p:spPr>
-        <p:style>
-          <a:lnRef idx="1">
-            <a:schemeClr val="accent1"/>
-          </a:lnRef>
-          <a:fillRef idx="3">
-            <a:schemeClr val="accent1"/>
-          </a:fillRef>
-          <a:effectRef idx="2">
-            <a:schemeClr val="accent1"/>
-          </a:effectRef>
-          <a:fontRef idx="minor">
-            <a:schemeClr val="lt1"/>
-          </a:fontRef>
-        </p:style>
-        <p:txBody>
-          <a:bodyPr rtlCol="0" anchor="ctr"/>
-          <a:lstStyle/>
-          <a:p>
-            <a:pPr algn="ctr"/>
-          </a:p>
-        </p:txBody>
-      </p:sp>
-      <p:cxnSp>
-        <p:nvCxnSpPr>
-          <p:cNvPr id="51" name="Connector 50"/>
-          <p:cNvCxnSpPr/>
-          <p:nvPr/>
-        </p:nvCxnSpPr>
-        <p:spPr>
-          <a:xfrm>
-            <a:off x="469270" y="3742822"/>
-            <a:ext cx="85587" cy="85587"/>
-          </a:xfrm>
-          <a:prstGeom prst="line">
-            <a:avLst/>
-          </a:prstGeom>
-          <a:ln w="22225">
-            <a:solidFill>
-              <a:srgbClr val="FFFFFF"/>
-            </a:solidFill>
-          </a:ln>
-        </p:spPr>
-        <p:style>
-          <a:lnRef idx="2">
-            <a:schemeClr val="accent1"/>
-          </a:lnRef>
-          <a:fillRef idx="0">
-            <a:schemeClr val="accent1"/>
-          </a:fillRef>
-          <a:effectRef idx="1">
-            <a:schemeClr val="accent1"/>
-          </a:effectRef>
-          <a:fontRef idx="minor">
-            <a:schemeClr val="tx1"/>
-          </a:fontRef>
-        </p:style>
-      </p:cxnSp>
-      <p:cxnSp>
-        <p:nvCxnSpPr>
-          <p:cNvPr id="52" name="Connector 51"/>
-          <p:cNvCxnSpPr/>
-          <p:nvPr/>
-        </p:nvCxnSpPr>
-        <p:spPr>
-          <a:xfrm flipV="1">
-            <a:off x="469270" y="3742822"/>
-            <a:ext cx="85587" cy="85587"/>
-          </a:xfrm>
-          <a:prstGeom prst="line">
-            <a:avLst/>
-          </a:prstGeom>
-          <a:ln w="22225">
-            <a:solidFill>
-              <a:srgbClr val="FFFFFF"/>
-            </a:solidFill>
-          </a:ln>
-        </p:spPr>
-        <p:style>
-          <a:lnRef idx="2">
-            <a:schemeClr val="accent1"/>
-          </a:lnRef>
-          <a:fillRef idx="0">
-            <a:schemeClr val="accent1"/>
-          </a:fillRef>
-          <a:effectRef idx="1">
-            <a:schemeClr val="accent1"/>
-          </a:effectRef>
-          <a:fontRef idx="minor">
-            <a:schemeClr val="tx1"/>
-          </a:fontRef>
-        </p:style>
-      </p:cxnSp>
-      <p:sp>
-        <p:nvSpPr>
-          <p:cNvPr id="53" name="TextBox 52"/>
-          <p:cNvSpPr txBox="1"/>
-          <p:nvPr/>
-        </p:nvSpPr>
-        <p:spPr>
-          <a:xfrm>
-            <a:off x="685800" y="3630168"/>
-            <a:ext cx="3447288" cy="374904"/>
-          </a:xfrm>
-          <a:prstGeom prst="rect">
-            <a:avLst/>
-          </a:prstGeom>
-          <a:noFill/>
-        </p:spPr>
-        <p:txBody>
-          <a:bodyPr wrap="square">
-            <a:noAutofit/>
-          </a:bodyPr>
-          <a:lstStyle/>
-          <a:p>
-            <a:pPr algn="l"/>
-            <a:r>
-              <a:rPr sz="850" b="0" i="0">
-                <a:solidFill>
-                  <a:srgbClr val="4A5C6B"/>
-                </a:solidFill>
-                <a:latin typeface="Poppins"/>
-              </a:rPr>
-              <a:t>Growth keeps landing on Christine until AI workflows and an operating rhythm carry the repeatable work.</a:t>
-            </a:r>
-          </a:p>
-        </p:txBody>
-      </p:sp>
-      <p:sp>
-        <p:nvSpPr>
-          <p:cNvPr id="54" name="Rectangle 53"/>
-          <p:cNvSpPr/>
-          <p:nvPr/>
-        </p:nvSpPr>
-        <p:spPr>
-          <a:xfrm>
-            <a:off x="274320" y="4133087"/>
-            <a:ext cx="4315968" cy="557784"/>
-          </a:xfrm>
-          <a:prstGeom prst="rect">
-            <a:avLst/>
-          </a:prstGeom>
-          <a:solidFill>
-            <a:srgbClr val="FFFFFF"/>
-          </a:solidFill>
-          <a:ln>
-            <a:solidFill>
-              <a:srgbClr val="FFFFFF"/>
-            </a:solidFill>
-          </a:ln>
-        </p:spPr>
-        <p:style>
-          <a:lnRef idx="1">
-            <a:schemeClr val="accent1"/>
-          </a:lnRef>
-          <a:fillRef idx="3">
-            <a:schemeClr val="accent1"/>
-          </a:fillRef>
-          <a:effectRef idx="2">
-            <a:schemeClr val="accent1"/>
-          </a:effectRef>
-          <a:fontRef idx="minor">
-            <a:schemeClr val="lt1"/>
-          </a:fontRef>
-        </p:style>
-        <p:txBody>
-          <a:bodyPr rtlCol="0" anchor="ctr"/>
-          <a:lstStyle/>
-          <a:p>
-            <a:pPr algn="ctr"/>
-          </a:p>
-        </p:txBody>
-      </p:sp>
-      <p:sp>
-        <p:nvSpPr>
-          <p:cNvPr id="55" name="Rectangle 54"/>
-          <p:cNvSpPr/>
-          <p:nvPr/>
-        </p:nvSpPr>
-        <p:spPr>
-          <a:xfrm>
-            <a:off x="274320" y="4133087"/>
-            <a:ext cx="36576" cy="557784"/>
-          </a:xfrm>
-          <a:prstGeom prst="rect">
-            <a:avLst/>
-          </a:prstGeom>
-          <a:solidFill>
-            <a:srgbClr val="3F8F1A"/>
-          </a:solidFill>
-          <a:ln>
-            <a:solidFill>
-              <a:srgbClr val="FFFFFF"/>
-            </a:solidFill>
-          </a:ln>
-        </p:spPr>
-        <p:style>
-          <a:lnRef idx="1">
-            <a:schemeClr val="accent1"/>
-          </a:lnRef>
-          <a:fillRef idx="3">
-            <a:schemeClr val="accent1"/>
-          </a:fillRef>
-          <a:effectRef idx="2">
-            <a:schemeClr val="accent1"/>
-          </a:effectRef>
-          <a:fontRef idx="minor">
-            <a:schemeClr val="lt1"/>
-          </a:fontRef>
-        </p:style>
-        <p:txBody>
-          <a:bodyPr rtlCol="0" anchor="ctr"/>
-          <a:lstStyle/>
-          <a:p>
-            <a:pPr algn="ctr"/>
-          </a:p>
-        </p:txBody>
-      </p:sp>
-      <p:sp>
-        <p:nvSpPr>
-          <p:cNvPr id="56" name="Rounded Rectangle 55"/>
-          <p:cNvSpPr/>
-          <p:nvPr/>
-        </p:nvSpPr>
-        <p:spPr>
-          <a:xfrm>
-            <a:off x="429768" y="4325112"/>
-            <a:ext cx="164592" cy="164592"/>
-          </a:xfrm>
-          <a:prstGeom prst="roundRect">
-            <a:avLst/>
-          </a:prstGeom>
-          <a:solidFill>
-            <a:srgbClr val="3F8F1A"/>
-          </a:solidFill>
-          <a:ln>
-            <a:noFill/>
-          </a:ln>
-        </p:spPr>
-        <p:style>
-          <a:lnRef idx="1">
-            <a:schemeClr val="accent1"/>
-          </a:lnRef>
-          <a:fillRef idx="3">
-            <a:schemeClr val="accent1"/>
-          </a:fillRef>
-          <a:effectRef idx="2">
-            <a:schemeClr val="accent1"/>
-          </a:effectRef>
-          <a:fontRef idx="minor">
-            <a:schemeClr val="lt1"/>
-          </a:fontRef>
-        </p:style>
-        <p:txBody>
-          <a:bodyPr rtlCol="0" anchor="ctr"/>
-          <a:lstStyle/>
-          <a:p>
-            <a:pPr algn="ctr"/>
-          </a:p>
-        </p:txBody>
-      </p:sp>
-      <p:cxnSp>
-        <p:nvCxnSpPr>
-          <p:cNvPr id="57" name="Connector 56"/>
-          <p:cNvCxnSpPr/>
-          <p:nvPr/>
-        </p:nvCxnSpPr>
-        <p:spPr>
-          <a:xfrm>
-            <a:off x="465978" y="4415637"/>
-            <a:ext cx="32918" cy="31273"/>
-          </a:xfrm>
-          <a:prstGeom prst="line">
-            <a:avLst/>
-          </a:prstGeom>
-          <a:ln w="22225">
-            <a:solidFill>
-              <a:srgbClr val="FFFFFF"/>
-            </a:solidFill>
-          </a:ln>
-        </p:spPr>
-        <p:style>
-          <a:lnRef idx="2">
-            <a:schemeClr val="accent1"/>
-          </a:lnRef>
-          <a:fillRef idx="0">
-            <a:schemeClr val="accent1"/>
-          </a:fillRef>
-          <a:effectRef idx="1">
-            <a:schemeClr val="accent1"/>
-          </a:effectRef>
-          <a:fontRef idx="minor">
-            <a:schemeClr val="tx1"/>
-          </a:fontRef>
-        </p:style>
-      </p:cxnSp>
-      <p:cxnSp>
-        <p:nvCxnSpPr>
-          <p:cNvPr id="58" name="Connector 57"/>
-          <p:cNvCxnSpPr/>
-          <p:nvPr/>
-        </p:nvCxnSpPr>
-        <p:spPr>
-          <a:xfrm flipV="1">
-            <a:off x="498896" y="4367905"/>
-            <a:ext cx="62545" cy="79005"/>
-          </a:xfrm>
-          <a:prstGeom prst="line">
-            <a:avLst/>
-          </a:prstGeom>
-          <a:ln w="22225">
-            <a:solidFill>
-              <a:srgbClr val="FFFFFF"/>
-            </a:solidFill>
-          </a:ln>
-        </p:spPr>
-        <p:style>
-          <a:lnRef idx="2">
-            <a:schemeClr val="accent1"/>
-          </a:lnRef>
-          <a:fillRef idx="0">
-            <a:schemeClr val="accent1"/>
-          </a:fillRef>
-          <a:effectRef idx="1">
-            <a:schemeClr val="accent1"/>
-          </a:effectRef>
-          <a:fontRef idx="minor">
-            <a:schemeClr val="tx1"/>
-          </a:fontRef>
-        </p:style>
-      </p:cxnSp>
-      <p:sp>
-        <p:nvSpPr>
-          <p:cNvPr id="59" name="TextBox 58"/>
-          <p:cNvSpPr txBox="1"/>
-          <p:nvPr/>
-        </p:nvSpPr>
-        <p:spPr>
-          <a:xfrm>
-            <a:off x="685800" y="4251959"/>
-            <a:ext cx="3447288" cy="374904"/>
-          </a:xfrm>
-          <a:prstGeom prst="rect">
-            <a:avLst/>
-          </a:prstGeom>
-          <a:noFill/>
-        </p:spPr>
-        <p:txBody>
-          <a:bodyPr wrap="square">
-            <a:noAutofit/>
-          </a:bodyPr>
-          <a:lstStyle/>
-          <a:p>
-            <a:pPr algn="l"/>
-            <a:r>
-              <a:rPr sz="850" b="0" i="0">
-                <a:solidFill>
-                  <a:srgbClr val="4A5C6B"/>
-                </a:solidFill>
-                <a:latin typeface="Poppins"/>
-              </a:rPr>
-              <a:t>About 30 years of experience, a defined team, and active press coverage are strong foundations.</a:t>
-            </a:r>
-          </a:p>
-        </p:txBody>
-      </p:sp>
-      <p:sp>
-        <p:nvSpPr>
-          <p:cNvPr id="60" name="Rectangle 59"/>
-          <p:cNvSpPr/>
-          <p:nvPr/>
-        </p:nvSpPr>
-        <p:spPr>
-          <a:xfrm>
-            <a:off x="4828032" y="2011680"/>
-            <a:ext cx="4041648" cy="749808"/>
+            <a:off x="493776" y="3602736"/>
+            <a:ext cx="256032" cy="36576"/>
           </a:xfrm>
           <a:prstGeom prst="rect">
             <a:avLst/>
@@ -5439,14 +4236,119 @@
       </p:sp>
       <p:sp>
         <p:nvSpPr>
-          <p:cNvPr id="61" name="Rectangle 60"/>
+          <p:cNvPr id="29" name="TextBox 28"/>
+          <p:cNvSpPr txBox="1"/>
+          <p:nvPr/>
+        </p:nvSpPr>
+        <p:spPr>
+          <a:xfrm>
+            <a:off x="438912" y="3675887"/>
+            <a:ext cx="2535936" cy="201168"/>
+          </a:xfrm>
+          <a:prstGeom prst="rect">
+            <a:avLst/>
+          </a:prstGeom>
+          <a:noFill/>
+        </p:spPr>
+        <p:txBody>
+          <a:bodyPr wrap="square">
+            <a:noAutofit/>
+          </a:bodyPr>
+          <a:lstStyle/>
+          <a:p>
+            <a:pPr algn="l"/>
+            <a:r>
+              <a:rPr sz="800" b="1" i="0">
+                <a:solidFill>
+                  <a:srgbClr val="003A59"/>
+                </a:solidFill>
+                <a:latin typeface="Poppins"/>
+              </a:rPr>
+              <a:t>INTAKE</a:t>
+            </a:r>
+          </a:p>
+        </p:txBody>
+      </p:sp>
+      <p:sp>
+        <p:nvSpPr>
+          <p:cNvPr id="30" name="TextBox 29"/>
+          <p:cNvSpPr txBox="1"/>
+          <p:nvPr/>
+        </p:nvSpPr>
+        <p:spPr>
+          <a:xfrm>
+            <a:off x="438912" y="3895344"/>
+            <a:ext cx="2535936" cy="694944"/>
+          </a:xfrm>
+          <a:prstGeom prst="rect">
+            <a:avLst/>
+          </a:prstGeom>
+          <a:noFill/>
+        </p:spPr>
+        <p:txBody>
+          <a:bodyPr wrap="square">
+            <a:noAutofit/>
+          </a:bodyPr>
+          <a:lstStyle/>
+          <a:p>
+            <a:pPr algn="l"/>
+            <a:r>
+              <a:rPr sz="1050" b="0" i="0">
+                <a:solidFill>
+                  <a:srgbClr val="4A5C6B"/>
+                </a:solidFill>
+                <a:latin typeface="Poppins"/>
+              </a:rPr>
+              <a:t>No clear consultation button, and the intake form is linked off the homepage.</a:t>
+            </a:r>
+          </a:p>
+        </p:txBody>
+      </p:sp>
+      <p:cxnSp>
+        <p:nvCxnSpPr>
+          <p:cNvPr id="31" name="Connector 30"/>
+          <p:cNvCxnSpPr/>
+          <p:nvPr/>
+        </p:nvCxnSpPr>
+        <p:spPr>
+          <a:xfrm>
+            <a:off x="3139440" y="3584448"/>
+            <a:ext cx="0" cy="932688"/>
+          </a:xfrm>
+          <a:prstGeom prst="line">
+            <a:avLst/>
+          </a:prstGeom>
+          <a:ln w="9525">
+            <a:solidFill>
+              <a:srgbClr val="D9E2E8"/>
+            </a:solidFill>
+          </a:ln>
+        </p:spPr>
+        <p:style>
+          <a:lnRef idx="2">
+            <a:schemeClr val="accent1"/>
+          </a:lnRef>
+          <a:fillRef idx="0">
+            <a:schemeClr val="accent1"/>
+          </a:fillRef>
+          <a:effectRef idx="1">
+            <a:schemeClr val="accent1"/>
+          </a:effectRef>
+          <a:fontRef idx="minor">
+            <a:schemeClr val="tx1"/>
+          </a:fontRef>
+        </p:style>
+      </p:cxnSp>
+      <p:sp>
+        <p:nvSpPr>
+          <p:cNvPr id="32" name="Rectangle 31"/>
           <p:cNvSpPr/>
           <p:nvPr/>
         </p:nvSpPr>
         <p:spPr>
           <a:xfrm>
-            <a:off x="4828032" y="2011680"/>
-            <a:ext cx="36576" cy="749808"/>
+            <a:off x="3358895" y="3602736"/>
+            <a:ext cx="256032" cy="36576"/>
           </a:xfrm>
           <a:prstGeom prst="rect">
             <a:avLst/>
@@ -5484,14 +4386,14 @@
       </p:sp>
       <p:sp>
         <p:nvSpPr>
-          <p:cNvPr id="62" name="TextBox 61"/>
+          <p:cNvPr id="33" name="TextBox 32"/>
           <p:cNvSpPr txBox="1"/>
           <p:nvPr/>
         </p:nvSpPr>
         <p:spPr>
           <a:xfrm>
-            <a:off x="5010912" y="2103120"/>
-            <a:ext cx="2578607" cy="164592"/>
+            <a:off x="3304032" y="3675887"/>
+            <a:ext cx="2535936" cy="201168"/>
           </a:xfrm>
           <a:prstGeom prst="rect">
             <a:avLst/>
@@ -5506,27 +4408,27 @@
           <a:p>
             <a:pPr algn="l"/>
             <a:r>
-              <a:rPr sz="750" b="1" i="0">
-                <a:solidFill>
-                  <a:srgbClr val="69CD2B"/>
+              <a:rPr sz="800" b="1" i="0">
+                <a:solidFill>
+                  <a:srgbClr val="003A59"/>
                 </a:solidFill>
                 <a:latin typeface="Poppins"/>
               </a:rPr>
-              <a:t>YOU ARE HERE</a:t>
-            </a:r>
-          </a:p>
-        </p:txBody>
-      </p:sp>
-      <p:sp>
-        <p:nvSpPr>
-          <p:cNvPr id="63" name="TextBox 62"/>
+              <a:t>TEAM</a:t>
+            </a:r>
+          </a:p>
+        </p:txBody>
+      </p:sp>
+      <p:sp>
+        <p:nvSpPr>
+          <p:cNvPr id="34" name="TextBox 33"/>
           <p:cNvSpPr txBox="1"/>
           <p:nvPr/>
         </p:nvSpPr>
         <p:spPr>
           <a:xfrm>
-            <a:off x="5010912" y="2258568"/>
-            <a:ext cx="2578607" cy="274320"/>
+            <a:off x="3304032" y="3895344"/>
+            <a:ext cx="2535936" cy="694944"/>
           </a:xfrm>
           <a:prstGeom prst="rect">
             <a:avLst/>
@@ -5541,1002 +4443,62 @@
           <a:p>
             <a:pPr algn="l"/>
             <a:r>
-              <a:rPr sz="1050" b="1" i="0">
-                <a:solidFill>
-                  <a:srgbClr val="FFFFFF"/>
+              <a:rPr sz="1050" b="0" i="0">
+                <a:solidFill>
+                  <a:srgbClr val="4A5C6B"/>
                 </a:solidFill>
                 <a:latin typeface="Poppins"/>
               </a:rPr>
-              <a:t>Stage 4: Small Business Manager</a:t>
-            </a:r>
-          </a:p>
-        </p:txBody>
-      </p:sp>
-      <p:sp>
-        <p:nvSpPr>
-          <p:cNvPr id="64" name="TextBox 63"/>
-          <p:cNvSpPr txBox="1"/>
-          <p:nvPr/>
-        </p:nvSpPr>
-        <p:spPr>
-          <a:xfrm>
-            <a:off x="5010912" y="2496312"/>
-            <a:ext cx="2578607" cy="201168"/>
-          </a:xfrm>
-          <a:prstGeom prst="rect">
-            <a:avLst/>
-          </a:prstGeom>
-          <a:noFill/>
-        </p:spPr>
-        <p:txBody>
-          <a:bodyPr wrap="square">
-            <a:noAutofit/>
-          </a:bodyPr>
-          <a:lstStyle/>
-          <a:p>
-            <a:pPr algn="l"/>
-            <a:r>
-              <a:rPr sz="850" b="0" i="0">
-                <a:solidFill>
-                  <a:srgbClr val="B8CDDD"/>
-                </a:solidFill>
-                <a:latin typeface="Poppins"/>
-              </a:rPr>
-              <a:t>→  Goal: Stage 6, Law Firm Owner</a:t>
-            </a:r>
-          </a:p>
-        </p:txBody>
-      </p:sp>
-      <p:sp>
-        <p:nvSpPr>
-          <p:cNvPr id="65" name="Rectangle 64"/>
-          <p:cNvSpPr/>
-          <p:nvPr/>
-        </p:nvSpPr>
-        <p:spPr>
-          <a:xfrm>
-            <a:off x="7744968" y="2560320"/>
-            <a:ext cx="118872" cy="73152"/>
-          </a:xfrm>
-          <a:prstGeom prst="rect">
-            <a:avLst/>
-          </a:prstGeom>
-          <a:solidFill>
-            <a:srgbClr val="4F8F2A"/>
-          </a:solidFill>
-          <a:ln>
-            <a:noFill/>
+              <a:t>Growth keeps landing on Christine until workflows carry the repeatable work.</a:t>
+            </a:r>
+          </a:p>
+        </p:txBody>
+      </p:sp>
+      <p:cxnSp>
+        <p:nvCxnSpPr>
+          <p:cNvPr id="35" name="Connector 34"/>
+          <p:cNvCxnSpPr/>
+          <p:nvPr/>
+        </p:nvCxnSpPr>
+        <p:spPr>
+          <a:xfrm>
+            <a:off x="6004560" y="3584448"/>
+            <a:ext cx="0" cy="932688"/>
+          </a:xfrm>
+          <a:prstGeom prst="line">
+            <a:avLst/>
+          </a:prstGeom>
+          <a:ln w="9525">
+            <a:solidFill>
+              <a:srgbClr val="D9E2E8"/>
+            </a:solidFill>
           </a:ln>
         </p:spPr>
         <p:style>
-          <a:lnRef idx="1">
+          <a:lnRef idx="2">
             <a:schemeClr val="accent1"/>
           </a:lnRef>
-          <a:fillRef idx="3">
+          <a:fillRef idx="0">
             <a:schemeClr val="accent1"/>
           </a:fillRef>
-          <a:effectRef idx="2">
+          <a:effectRef idx="1">
             <a:schemeClr val="accent1"/>
           </a:effectRef>
           <a:fontRef idx="minor">
-            <a:schemeClr val="lt1"/>
+            <a:schemeClr val="tx1"/>
           </a:fontRef>
         </p:style>
-        <p:txBody>
-          <a:bodyPr rtlCol="0" anchor="ctr"/>
-          <a:lstStyle/>
-          <a:p>
-            <a:pPr algn="ctr"/>
-          </a:p>
-        </p:txBody>
-      </p:sp>
-      <p:sp>
-        <p:nvSpPr>
-          <p:cNvPr id="66" name="Rectangle 65"/>
+      </p:cxnSp>
+      <p:sp>
+        <p:nvSpPr>
+          <p:cNvPr id="36" name="Rectangle 35"/>
           <p:cNvSpPr/>
           <p:nvPr/>
         </p:nvSpPr>
         <p:spPr>
           <a:xfrm>
-            <a:off x="7909560" y="2487168"/>
-            <a:ext cx="118872" cy="146304"/>
-          </a:xfrm>
-          <a:prstGeom prst="rect">
-            <a:avLst/>
-          </a:prstGeom>
-          <a:solidFill>
-            <a:srgbClr val="4F8F2A"/>
-          </a:solidFill>
-          <a:ln>
-            <a:noFill/>
-          </a:ln>
-        </p:spPr>
-        <p:style>
-          <a:lnRef idx="1">
-            <a:schemeClr val="accent1"/>
-          </a:lnRef>
-          <a:fillRef idx="3">
-            <a:schemeClr val="accent1"/>
-          </a:fillRef>
-          <a:effectRef idx="2">
-            <a:schemeClr val="accent1"/>
-          </a:effectRef>
-          <a:fontRef idx="minor">
-            <a:schemeClr val="lt1"/>
-          </a:fontRef>
-        </p:style>
-        <p:txBody>
-          <a:bodyPr rtlCol="0" anchor="ctr"/>
-          <a:lstStyle/>
-          <a:p>
-            <a:pPr algn="ctr"/>
-          </a:p>
-        </p:txBody>
-      </p:sp>
-      <p:sp>
-        <p:nvSpPr>
-          <p:cNvPr id="67" name="Rectangle 66"/>
-          <p:cNvSpPr/>
-          <p:nvPr/>
-        </p:nvSpPr>
-        <p:spPr>
-          <a:xfrm>
-            <a:off x="8074152" y="2414015"/>
-            <a:ext cx="118872" cy="219456"/>
-          </a:xfrm>
-          <a:prstGeom prst="rect">
-            <a:avLst/>
-          </a:prstGeom>
-          <a:solidFill>
-            <a:srgbClr val="4F8F2A"/>
-          </a:solidFill>
-          <a:ln>
-            <a:noFill/>
-          </a:ln>
-        </p:spPr>
-        <p:style>
-          <a:lnRef idx="1">
-            <a:schemeClr val="accent1"/>
-          </a:lnRef>
-          <a:fillRef idx="3">
-            <a:schemeClr val="accent1"/>
-          </a:fillRef>
-          <a:effectRef idx="2">
-            <a:schemeClr val="accent1"/>
-          </a:effectRef>
-          <a:fontRef idx="minor">
-            <a:schemeClr val="lt1"/>
-          </a:fontRef>
-        </p:style>
-        <p:txBody>
-          <a:bodyPr rtlCol="0" anchor="ctr"/>
-          <a:lstStyle/>
-          <a:p>
-            <a:pPr algn="ctr"/>
-          </a:p>
-        </p:txBody>
-      </p:sp>
-      <p:sp>
-        <p:nvSpPr>
-          <p:cNvPr id="68" name="Rectangle 67"/>
-          <p:cNvSpPr/>
-          <p:nvPr/>
-        </p:nvSpPr>
-        <p:spPr>
-          <a:xfrm>
-            <a:off x="8238744" y="2340864"/>
-            <a:ext cx="118872" cy="292608"/>
-          </a:xfrm>
-          <a:prstGeom prst="rect">
-            <a:avLst/>
-          </a:prstGeom>
-          <a:solidFill>
-            <a:srgbClr val="69CD2B"/>
-          </a:solidFill>
-          <a:ln>
-            <a:noFill/>
-          </a:ln>
-        </p:spPr>
-        <p:style>
-          <a:lnRef idx="1">
-            <a:schemeClr val="accent1"/>
-          </a:lnRef>
-          <a:fillRef idx="3">
-            <a:schemeClr val="accent1"/>
-          </a:fillRef>
-          <a:effectRef idx="2">
-            <a:schemeClr val="accent1"/>
-          </a:effectRef>
-          <a:fontRef idx="minor">
-            <a:schemeClr val="lt1"/>
-          </a:fontRef>
-        </p:style>
-        <p:txBody>
-          <a:bodyPr rtlCol="0" anchor="ctr"/>
-          <a:lstStyle/>
-          <a:p>
-            <a:pPr algn="ctr"/>
-          </a:p>
-        </p:txBody>
-      </p:sp>
-      <p:sp>
-        <p:nvSpPr>
-          <p:cNvPr id="69" name="Rectangle 68"/>
-          <p:cNvSpPr/>
-          <p:nvPr/>
-        </p:nvSpPr>
-        <p:spPr>
-          <a:xfrm>
-            <a:off x="8403336" y="2267712"/>
-            <a:ext cx="118872" cy="365760"/>
-          </a:xfrm>
-          <a:prstGeom prst="rect">
-            <a:avLst/>
-          </a:prstGeom>
-          <a:solidFill>
-            <a:srgbClr val="0B4C6E"/>
-          </a:solidFill>
-          <a:ln>
-            <a:noFill/>
-          </a:ln>
-        </p:spPr>
-        <p:style>
-          <a:lnRef idx="1">
-            <a:schemeClr val="accent1"/>
-          </a:lnRef>
-          <a:fillRef idx="3">
-            <a:schemeClr val="accent1"/>
-          </a:fillRef>
-          <a:effectRef idx="2">
-            <a:schemeClr val="accent1"/>
-          </a:effectRef>
-          <a:fontRef idx="minor">
-            <a:schemeClr val="lt1"/>
-          </a:fontRef>
-        </p:style>
-        <p:txBody>
-          <a:bodyPr rtlCol="0" anchor="ctr"/>
-          <a:lstStyle/>
-          <a:p>
-            <a:pPr algn="ctr"/>
-          </a:p>
-        </p:txBody>
-      </p:sp>
-      <p:sp>
-        <p:nvSpPr>
-          <p:cNvPr id="70" name="Rectangle 69"/>
-          <p:cNvSpPr/>
-          <p:nvPr/>
-        </p:nvSpPr>
-        <p:spPr>
-          <a:xfrm>
-            <a:off x="8567928" y="2194560"/>
-            <a:ext cx="118872" cy="438912"/>
-          </a:xfrm>
-          <a:prstGeom prst="rect">
-            <a:avLst/>
-          </a:prstGeom>
-          <a:solidFill>
-            <a:srgbClr val="003A59"/>
-          </a:solidFill>
-          <a:ln w="12700">
-            <a:solidFill>
-              <a:srgbClr val="69CD2B"/>
-            </a:solidFill>
-          </a:ln>
-        </p:spPr>
-        <p:style>
-          <a:lnRef idx="1">
-            <a:schemeClr val="accent1"/>
-          </a:lnRef>
-          <a:fillRef idx="3">
-            <a:schemeClr val="accent1"/>
-          </a:fillRef>
-          <a:effectRef idx="2">
-            <a:schemeClr val="accent1"/>
-          </a:effectRef>
-          <a:fontRef idx="minor">
-            <a:schemeClr val="lt1"/>
-          </a:fontRef>
-        </p:style>
-        <p:txBody>
-          <a:bodyPr rtlCol="0" anchor="ctr"/>
-          <a:lstStyle/>
-          <a:p>
-            <a:pPr algn="ctr"/>
-          </a:p>
-        </p:txBody>
-      </p:sp>
-      <p:sp>
-        <p:nvSpPr>
-          <p:cNvPr id="71" name="TextBox 70"/>
-          <p:cNvSpPr txBox="1"/>
-          <p:nvPr/>
-        </p:nvSpPr>
-        <p:spPr>
-          <a:xfrm>
-            <a:off x="4828032" y="2871216"/>
-            <a:ext cx="4041648" cy="164592"/>
-          </a:xfrm>
-          <a:prstGeom prst="rect">
-            <a:avLst/>
-          </a:prstGeom>
-          <a:noFill/>
-        </p:spPr>
-        <p:txBody>
-          <a:bodyPr wrap="square">
-            <a:noAutofit/>
-          </a:bodyPr>
-          <a:lstStyle/>
-          <a:p>
-            <a:pPr algn="l"/>
-            <a:r>
-              <a:rPr sz="750" b="1" i="0">
-                <a:solidFill>
-                  <a:srgbClr val="003A59"/>
-                </a:solidFill>
-                <a:latin typeface="Poppins"/>
-              </a:rPr>
-              <a:t>COMPETITOR LANDSCAPE</a:t>
-            </a:r>
-          </a:p>
-        </p:txBody>
-      </p:sp>
-      <p:sp>
-        <p:nvSpPr>
-          <p:cNvPr id="72" name="Rectangle 71"/>
-          <p:cNvSpPr/>
-          <p:nvPr/>
-        </p:nvSpPr>
-        <p:spPr>
-          <a:xfrm>
-            <a:off x="4828032" y="3127248"/>
-            <a:ext cx="4041648" cy="356616"/>
-          </a:xfrm>
-          <a:prstGeom prst="rect">
-            <a:avLst/>
-          </a:prstGeom>
-          <a:solidFill>
-            <a:srgbClr val="FFFFFF"/>
-          </a:solidFill>
-          <a:ln>
-            <a:solidFill>
-              <a:srgbClr val="FFFFFF"/>
-            </a:solidFill>
-          </a:ln>
-        </p:spPr>
-        <p:style>
-          <a:lnRef idx="1">
-            <a:schemeClr val="accent1"/>
-          </a:lnRef>
-          <a:fillRef idx="3">
-            <a:schemeClr val="accent1"/>
-          </a:fillRef>
-          <a:effectRef idx="2">
-            <a:schemeClr val="accent1"/>
-          </a:effectRef>
-          <a:fontRef idx="minor">
-            <a:schemeClr val="lt1"/>
-          </a:fontRef>
-        </p:style>
-        <p:txBody>
-          <a:bodyPr rtlCol="0" anchor="ctr"/>
-          <a:lstStyle/>
-          <a:p>
-            <a:pPr algn="ctr"/>
-          </a:p>
-        </p:txBody>
-      </p:sp>
-      <p:sp>
-        <p:nvSpPr>
-          <p:cNvPr id="73" name="TextBox 72"/>
-          <p:cNvSpPr txBox="1"/>
-          <p:nvPr/>
-        </p:nvSpPr>
-        <p:spPr>
-          <a:xfrm>
-            <a:off x="4937760" y="3127248"/>
-            <a:ext cx="1645920" cy="356616"/>
-          </a:xfrm>
-          <a:prstGeom prst="rect">
-            <a:avLst/>
-          </a:prstGeom>
-          <a:noFill/>
-        </p:spPr>
-        <p:txBody>
-          <a:bodyPr wrap="square" anchor="ctr">
-            <a:noAutofit/>
-          </a:bodyPr>
-          <a:lstStyle/>
-          <a:p>
-            <a:pPr algn="l"/>
-            <a:r>
-              <a:rPr sz="850" b="0" i="0">
-                <a:solidFill>
-                  <a:srgbClr val="1B2A38"/>
-                </a:solidFill>
-                <a:latin typeface="Poppins"/>
-              </a:rPr>
-              <a:t>Duffy Law, LLC</a:t>
-            </a:r>
-          </a:p>
-        </p:txBody>
-      </p:sp>
-      <p:sp>
-        <p:nvSpPr>
-          <p:cNvPr id="74" name="TextBox 73"/>
-          <p:cNvSpPr txBox="1"/>
-          <p:nvPr/>
-        </p:nvSpPr>
-        <p:spPr>
-          <a:xfrm>
-            <a:off x="6583680" y="3127248"/>
-            <a:ext cx="896112" cy="356616"/>
-          </a:xfrm>
-          <a:prstGeom prst="rect">
-            <a:avLst/>
-          </a:prstGeom>
-          <a:noFill/>
-        </p:spPr>
-        <p:txBody>
-          <a:bodyPr wrap="square" anchor="ctr">
-            <a:noAutofit/>
-          </a:bodyPr>
-          <a:lstStyle/>
-          <a:p>
-            <a:pPr algn="l"/>
-            <a:r>
-              <a:rPr sz="800" b="0" i="0">
-                <a:solidFill>
-                  <a:srgbClr val="3F8F1A"/>
-                </a:solidFill>
-                <a:latin typeface="Poppins"/>
-              </a:rPr>
-              <a:t>Not verified</a:t>
-            </a:r>
-          </a:p>
-        </p:txBody>
-      </p:sp>
-      <p:sp>
-        <p:nvSpPr>
-          <p:cNvPr id="75" name="TextBox 74"/>
-          <p:cNvSpPr txBox="1"/>
-          <p:nvPr/>
-        </p:nvSpPr>
-        <p:spPr>
-          <a:xfrm>
-            <a:off x="7479792" y="3127248"/>
-            <a:ext cx="1335024" cy="356616"/>
-          </a:xfrm>
-          <a:prstGeom prst="rect">
-            <a:avLst/>
-          </a:prstGeom>
-          <a:noFill/>
-        </p:spPr>
-        <p:txBody>
-          <a:bodyPr wrap="square" anchor="ctr">
-            <a:noAutofit/>
-          </a:bodyPr>
-          <a:lstStyle/>
-          <a:p>
-            <a:pPr algn="l"/>
-            <a:r>
-              <a:rPr sz="700" b="0" i="0">
-                <a:solidFill>
-                  <a:srgbClr val="7C8D9B"/>
-                </a:solidFill>
-                <a:latin typeface="Poppins"/>
-              </a:rPr>
-              <a:t>New Haven · Title IX since 2015</a:t>
-            </a:r>
-          </a:p>
-        </p:txBody>
-      </p:sp>
-      <p:sp>
-        <p:nvSpPr>
-          <p:cNvPr id="76" name="Rectangle 75"/>
-          <p:cNvSpPr/>
-          <p:nvPr/>
-        </p:nvSpPr>
-        <p:spPr>
-          <a:xfrm>
-            <a:off x="4828032" y="3529584"/>
-            <a:ext cx="4041648" cy="356616"/>
-          </a:xfrm>
-          <a:prstGeom prst="rect">
-            <a:avLst/>
-          </a:prstGeom>
-          <a:solidFill>
-            <a:srgbClr val="FFFFFF"/>
-          </a:solidFill>
-          <a:ln>
-            <a:solidFill>
-              <a:srgbClr val="FFFFFF"/>
-            </a:solidFill>
-          </a:ln>
-        </p:spPr>
-        <p:style>
-          <a:lnRef idx="1">
-            <a:schemeClr val="accent1"/>
-          </a:lnRef>
-          <a:fillRef idx="3">
-            <a:schemeClr val="accent1"/>
-          </a:fillRef>
-          <a:effectRef idx="2">
-            <a:schemeClr val="accent1"/>
-          </a:effectRef>
-          <a:fontRef idx="minor">
-            <a:schemeClr val="lt1"/>
-          </a:fontRef>
-        </p:style>
-        <p:txBody>
-          <a:bodyPr rtlCol="0" anchor="ctr"/>
-          <a:lstStyle/>
-          <a:p>
-            <a:pPr algn="ctr"/>
-          </a:p>
-        </p:txBody>
-      </p:sp>
-      <p:sp>
-        <p:nvSpPr>
-          <p:cNvPr id="77" name="TextBox 76"/>
-          <p:cNvSpPr txBox="1"/>
-          <p:nvPr/>
-        </p:nvSpPr>
-        <p:spPr>
-          <a:xfrm>
-            <a:off x="4937760" y="3529584"/>
-            <a:ext cx="1645920" cy="356616"/>
-          </a:xfrm>
-          <a:prstGeom prst="rect">
-            <a:avLst/>
-          </a:prstGeom>
-          <a:noFill/>
-        </p:spPr>
-        <p:txBody>
-          <a:bodyPr wrap="square" anchor="ctr">
-            <a:noAutofit/>
-          </a:bodyPr>
-          <a:lstStyle/>
-          <a:p>
-            <a:pPr algn="l"/>
-            <a:r>
-              <a:rPr sz="850" b="0" i="0">
-                <a:solidFill>
-                  <a:srgbClr val="1B2A38"/>
-                </a:solidFill>
-                <a:latin typeface="Poppins"/>
-              </a:rPr>
-              <a:t>Barry, Taylor &amp; Levesque</a:t>
-            </a:r>
-          </a:p>
-        </p:txBody>
-      </p:sp>
-      <p:sp>
-        <p:nvSpPr>
-          <p:cNvPr id="78" name="TextBox 77"/>
-          <p:cNvSpPr txBox="1"/>
-          <p:nvPr/>
-        </p:nvSpPr>
-        <p:spPr>
-          <a:xfrm>
-            <a:off x="6583680" y="3529584"/>
-            <a:ext cx="896112" cy="356616"/>
-          </a:xfrm>
-          <a:prstGeom prst="rect">
-            <a:avLst/>
-          </a:prstGeom>
-          <a:noFill/>
-        </p:spPr>
-        <p:txBody>
-          <a:bodyPr wrap="square" anchor="ctr">
-            <a:noAutofit/>
-          </a:bodyPr>
-          <a:lstStyle/>
-          <a:p>
-            <a:pPr algn="l"/>
-            <a:r>
-              <a:rPr sz="800" b="0" i="0">
-                <a:solidFill>
-                  <a:srgbClr val="3F8F1A"/>
-                </a:solidFill>
-                <a:latin typeface="Poppins"/>
-              </a:rPr>
-              <a:t>Not verified</a:t>
-            </a:r>
-          </a:p>
-        </p:txBody>
-      </p:sp>
-      <p:sp>
-        <p:nvSpPr>
-          <p:cNvPr id="79" name="TextBox 78"/>
-          <p:cNvSpPr txBox="1"/>
-          <p:nvPr/>
-        </p:nvSpPr>
-        <p:spPr>
-          <a:xfrm>
-            <a:off x="7479792" y="3529584"/>
-            <a:ext cx="1335024" cy="356616"/>
-          </a:xfrm>
-          <a:prstGeom prst="rect">
-            <a:avLst/>
-          </a:prstGeom>
-          <a:noFill/>
-        </p:spPr>
-        <p:txBody>
-          <a:bodyPr wrap="square" anchor="ctr">
-            <a:noAutofit/>
-          </a:bodyPr>
-          <a:lstStyle/>
-          <a:p>
-            <a:pPr algn="l"/>
-            <a:r>
-              <a:rPr sz="700" b="0" i="0">
-                <a:solidFill>
-                  <a:srgbClr val="7C8D9B"/>
-                </a:solidFill>
-                <a:latin typeface="Poppins"/>
-              </a:rPr>
-              <a:t>Hartford · NCAA infractions pages</a:t>
-            </a:r>
-          </a:p>
-        </p:txBody>
-      </p:sp>
-      <p:sp>
-        <p:nvSpPr>
-          <p:cNvPr id="80" name="Rectangle 79"/>
-          <p:cNvSpPr/>
-          <p:nvPr/>
-        </p:nvSpPr>
-        <p:spPr>
-          <a:xfrm>
-            <a:off x="4828032" y="3931920"/>
-            <a:ext cx="4041648" cy="356616"/>
-          </a:xfrm>
-          <a:prstGeom prst="rect">
-            <a:avLst/>
-          </a:prstGeom>
-          <a:solidFill>
-            <a:srgbClr val="FFFFFF"/>
-          </a:solidFill>
-          <a:ln>
-            <a:solidFill>
-              <a:srgbClr val="FFFFFF"/>
-            </a:solidFill>
-          </a:ln>
-        </p:spPr>
-        <p:style>
-          <a:lnRef idx="1">
-            <a:schemeClr val="accent1"/>
-          </a:lnRef>
-          <a:fillRef idx="3">
-            <a:schemeClr val="accent1"/>
-          </a:fillRef>
-          <a:effectRef idx="2">
-            <a:schemeClr val="accent1"/>
-          </a:effectRef>
-          <a:fontRef idx="minor">
-            <a:schemeClr val="lt1"/>
-          </a:fontRef>
-        </p:style>
-        <p:txBody>
-          <a:bodyPr rtlCol="0" anchor="ctr"/>
-          <a:lstStyle/>
-          <a:p>
-            <a:pPr algn="ctr"/>
-          </a:p>
-        </p:txBody>
-      </p:sp>
-      <p:sp>
-        <p:nvSpPr>
-          <p:cNvPr id="81" name="TextBox 80"/>
-          <p:cNvSpPr txBox="1"/>
-          <p:nvPr/>
-        </p:nvSpPr>
-        <p:spPr>
-          <a:xfrm>
-            <a:off x="4937760" y="3931920"/>
-            <a:ext cx="1645920" cy="356616"/>
-          </a:xfrm>
-          <a:prstGeom prst="rect">
-            <a:avLst/>
-          </a:prstGeom>
-          <a:noFill/>
-        </p:spPr>
-        <p:txBody>
-          <a:bodyPr wrap="square" anchor="ctr">
-            <a:noAutofit/>
-          </a:bodyPr>
-          <a:lstStyle/>
-          <a:p>
-            <a:pPr algn="l"/>
-            <a:r>
-              <a:rPr sz="850" b="0" i="0">
-                <a:solidFill>
-                  <a:srgbClr val="1B2A38"/>
-                </a:solidFill>
-                <a:latin typeface="Poppins"/>
-              </a:rPr>
-              <a:t>Athlete Defender</a:t>
-            </a:r>
-          </a:p>
-        </p:txBody>
-      </p:sp>
-      <p:sp>
-        <p:nvSpPr>
-          <p:cNvPr id="82" name="TextBox 81"/>
-          <p:cNvSpPr txBox="1"/>
-          <p:nvPr/>
-        </p:nvSpPr>
-        <p:spPr>
-          <a:xfrm>
-            <a:off x="6583680" y="3931920"/>
-            <a:ext cx="896112" cy="356616"/>
-          </a:xfrm>
-          <a:prstGeom prst="rect">
-            <a:avLst/>
-          </a:prstGeom>
-          <a:noFill/>
-        </p:spPr>
-        <p:txBody>
-          <a:bodyPr wrap="square" anchor="ctr">
-            <a:noAutofit/>
-          </a:bodyPr>
-          <a:lstStyle/>
-          <a:p>
-            <a:pPr algn="l"/>
-            <a:r>
-              <a:rPr sz="800" b="0" i="0">
-                <a:solidFill>
-                  <a:srgbClr val="3F8F1A"/>
-                </a:solidFill>
-                <a:latin typeface="Poppins"/>
-              </a:rPr>
-              <a:t>Not verified</a:t>
-            </a:r>
-          </a:p>
-        </p:txBody>
-      </p:sp>
-      <p:sp>
-        <p:nvSpPr>
-          <p:cNvPr id="83" name="TextBox 82"/>
-          <p:cNvSpPr txBox="1"/>
-          <p:nvPr/>
-        </p:nvSpPr>
-        <p:spPr>
-          <a:xfrm>
-            <a:off x="7479792" y="3931920"/>
-            <a:ext cx="1335024" cy="356616"/>
-          </a:xfrm>
-          <a:prstGeom prst="rect">
-            <a:avLst/>
-          </a:prstGeom>
-          <a:noFill/>
-        </p:spPr>
-        <p:txBody>
-          <a:bodyPr wrap="square" anchor="ctr">
-            <a:noAutofit/>
-          </a:bodyPr>
-          <a:lstStyle/>
-          <a:p>
-            <a:pPr algn="l"/>
-            <a:r>
-              <a:rPr sz="700" b="0" i="0">
-                <a:solidFill>
-                  <a:srgbClr val="7C8D9B"/>
-                </a:solidFill>
-                <a:latin typeface="Poppins"/>
-              </a:rPr>
-              <a:t>25+ yrs · many keyword pages</a:t>
-            </a:r>
-          </a:p>
-        </p:txBody>
-      </p:sp>
-      <p:sp>
-        <p:nvSpPr>
-          <p:cNvPr id="84" name="Rectangle 83"/>
-          <p:cNvSpPr/>
-          <p:nvPr/>
-        </p:nvSpPr>
-        <p:spPr>
-          <a:xfrm>
-            <a:off x="4828032" y="4334256"/>
-            <a:ext cx="4041648" cy="356616"/>
-          </a:xfrm>
-          <a:prstGeom prst="rect">
-            <a:avLst/>
-          </a:prstGeom>
-          <a:solidFill>
-            <a:srgbClr val="FBEEEE"/>
-          </a:solidFill>
-          <a:ln>
-            <a:solidFill>
-              <a:srgbClr val="FFFFFF"/>
-            </a:solidFill>
-          </a:ln>
-        </p:spPr>
-        <p:style>
-          <a:lnRef idx="1">
-            <a:schemeClr val="accent1"/>
-          </a:lnRef>
-          <a:fillRef idx="3">
-            <a:schemeClr val="accent1"/>
-          </a:fillRef>
-          <a:effectRef idx="2">
-            <a:schemeClr val="accent1"/>
-          </a:effectRef>
-          <a:fontRef idx="minor">
-            <a:schemeClr val="lt1"/>
-          </a:fontRef>
-        </p:style>
-        <p:txBody>
-          <a:bodyPr rtlCol="0" anchor="ctr"/>
-          <a:lstStyle/>
-          <a:p>
-            <a:pPr algn="ctr"/>
-          </a:p>
-        </p:txBody>
-      </p:sp>
-      <p:sp>
-        <p:nvSpPr>
-          <p:cNvPr id="85" name="Rectangle 84"/>
-          <p:cNvSpPr/>
-          <p:nvPr/>
-        </p:nvSpPr>
-        <p:spPr>
-          <a:xfrm>
-            <a:off x="4828032" y="4334256"/>
-            <a:ext cx="36576" cy="356616"/>
-          </a:xfrm>
-          <a:prstGeom prst="rect">
-            <a:avLst/>
-          </a:prstGeom>
-          <a:solidFill>
-            <a:srgbClr val="B32D2D"/>
-          </a:solidFill>
-          <a:ln>
-            <a:solidFill>
-              <a:srgbClr val="FFFFFF"/>
-            </a:solidFill>
-          </a:ln>
-        </p:spPr>
-        <p:style>
-          <a:lnRef idx="1">
-            <a:schemeClr val="accent1"/>
-          </a:lnRef>
-          <a:fillRef idx="3">
-            <a:schemeClr val="accent1"/>
-          </a:fillRef>
-          <a:effectRef idx="2">
-            <a:schemeClr val="accent1"/>
-          </a:effectRef>
-          <a:fontRef idx="minor">
-            <a:schemeClr val="lt1"/>
-          </a:fontRef>
-        </p:style>
-        <p:txBody>
-          <a:bodyPr rtlCol="0" anchor="ctr"/>
-          <a:lstStyle/>
-          <a:p>
-            <a:pPr algn="ctr"/>
-          </a:p>
-        </p:txBody>
-      </p:sp>
-      <p:sp>
-        <p:nvSpPr>
-          <p:cNvPr id="86" name="TextBox 85"/>
-          <p:cNvSpPr txBox="1"/>
-          <p:nvPr/>
-        </p:nvSpPr>
-        <p:spPr>
-          <a:xfrm>
-            <a:off x="4937760" y="4334256"/>
-            <a:ext cx="1645920" cy="356616"/>
-          </a:xfrm>
-          <a:prstGeom prst="rect">
-            <a:avLst/>
-          </a:prstGeom>
-          <a:noFill/>
-        </p:spPr>
-        <p:txBody>
-          <a:bodyPr wrap="square" anchor="ctr">
-            <a:noAutofit/>
-          </a:bodyPr>
-          <a:lstStyle/>
-          <a:p>
-            <a:pPr algn="l"/>
-            <a:r>
-              <a:rPr sz="800" b="1" i="0">
-                <a:solidFill>
-                  <a:srgbClr val="B32D2D"/>
-                </a:solidFill>
-                <a:latin typeface="Poppins"/>
-              </a:rPr>
-              <a:t>Christine Brown Sports Law</a:t>
-            </a:r>
-          </a:p>
-        </p:txBody>
-      </p:sp>
-      <p:sp>
-        <p:nvSpPr>
-          <p:cNvPr id="87" name="TextBox 86"/>
-          <p:cNvSpPr txBox="1"/>
-          <p:nvPr/>
-        </p:nvSpPr>
-        <p:spPr>
-          <a:xfrm>
-            <a:off x="6583680" y="4334256"/>
-            <a:ext cx="896112" cy="356616"/>
-          </a:xfrm>
-          <a:prstGeom prst="rect">
-            <a:avLst/>
-          </a:prstGeom>
-          <a:noFill/>
-        </p:spPr>
-        <p:txBody>
-          <a:bodyPr wrap="square" anchor="ctr">
-            <a:noAutofit/>
-          </a:bodyPr>
-          <a:lstStyle/>
-          <a:p>
-            <a:pPr algn="l"/>
-            <a:r>
-              <a:rPr sz="800" b="1" i="0">
-                <a:solidFill>
-                  <a:srgbClr val="B32D2D"/>
-                </a:solidFill>
-                <a:latin typeface="Poppins"/>
-              </a:rPr>
-              <a:t>Not verified</a:t>
-            </a:r>
-          </a:p>
-        </p:txBody>
-      </p:sp>
-      <p:sp>
-        <p:nvSpPr>
-          <p:cNvPr id="88" name="TextBox 87"/>
-          <p:cNvSpPr txBox="1"/>
-          <p:nvPr/>
-        </p:nvSpPr>
-        <p:spPr>
-          <a:xfrm>
-            <a:off x="7479792" y="4334256"/>
-            <a:ext cx="1335024" cy="356616"/>
-          </a:xfrm>
-          <a:prstGeom prst="rect">
-            <a:avLst/>
-          </a:prstGeom>
-          <a:noFill/>
-        </p:spPr>
-        <p:txBody>
-          <a:bodyPr wrap="square" anchor="ctr">
-            <a:noAutofit/>
-          </a:bodyPr>
-          <a:lstStyle/>
-          <a:p>
-            <a:pPr algn="l"/>
-            <a:r>
-              <a:rPr sz="700" b="0" i="0">
-                <a:solidFill>
-                  <a:srgbClr val="7C8D9B"/>
-                </a:solidFill>
-                <a:latin typeface="Poppins"/>
-              </a:rPr>
-              <a:t>← You are here</a:t>
-            </a:r>
-          </a:p>
-        </p:txBody>
-      </p:sp>
-      <p:sp>
-        <p:nvSpPr>
-          <p:cNvPr id="89" name="Rectangle 88"/>
-          <p:cNvSpPr/>
-          <p:nvPr/>
-        </p:nvSpPr>
-        <p:spPr>
-          <a:xfrm>
-            <a:off x="0" y="4818888"/>
-            <a:ext cx="9144000" cy="320040"/>
+            <a:off x="6224016" y="3602736"/>
+            <a:ext cx="256032" cy="36576"/>
           </a:xfrm>
           <a:prstGeom prst="rect">
             <a:avLst/>
@@ -6572,9 +4534,124 @@
           </a:p>
         </p:txBody>
       </p:sp>
+      <p:sp>
+        <p:nvSpPr>
+          <p:cNvPr id="37" name="TextBox 36"/>
+          <p:cNvSpPr txBox="1"/>
+          <p:nvPr/>
+        </p:nvSpPr>
+        <p:spPr>
+          <a:xfrm>
+            <a:off x="6169151" y="3675887"/>
+            <a:ext cx="2535936" cy="201168"/>
+          </a:xfrm>
+          <a:prstGeom prst="rect">
+            <a:avLst/>
+          </a:prstGeom>
+          <a:noFill/>
+        </p:spPr>
+        <p:txBody>
+          <a:bodyPr wrap="square">
+            <a:noAutofit/>
+          </a:bodyPr>
+          <a:lstStyle/>
+          <a:p>
+            <a:pPr algn="l"/>
+            <a:r>
+              <a:rPr sz="800" b="1" i="0">
+                <a:solidFill>
+                  <a:srgbClr val="003A59"/>
+                </a:solidFill>
+                <a:latin typeface="Poppins"/>
+              </a:rPr>
+              <a:t>LEAD GENERATION</a:t>
+            </a:r>
+          </a:p>
+        </p:txBody>
+      </p:sp>
+      <p:sp>
+        <p:nvSpPr>
+          <p:cNvPr id="38" name="TextBox 37"/>
+          <p:cNvSpPr txBox="1"/>
+          <p:nvPr/>
+        </p:nvSpPr>
+        <p:spPr>
+          <a:xfrm>
+            <a:off x="6169151" y="3895344"/>
+            <a:ext cx="2535936" cy="694944"/>
+          </a:xfrm>
+          <a:prstGeom prst="rect">
+            <a:avLst/>
+          </a:prstGeom>
+          <a:noFill/>
+        </p:spPr>
+        <p:txBody>
+          <a:bodyPr wrap="square">
+            <a:noAutofit/>
+          </a:bodyPr>
+          <a:lstStyle/>
+          <a:p>
+            <a:pPr algn="l"/>
+            <a:r>
+              <a:rPr sz="1050" b="0" i="0">
+                <a:solidFill>
+                  <a:srgbClr val="4A5C6B"/>
+                </a:solidFill>
+                <a:latin typeface="Poppins"/>
+              </a:rPr>
+              <a:t>Phone visitors likely leave before the site loads: mobile performance is 28/100.</a:t>
+            </a:r>
+          </a:p>
+        </p:txBody>
+      </p:sp>
+      <p:sp>
+        <p:nvSpPr>
+          <p:cNvPr id="39" name="Rectangle 38"/>
+          <p:cNvSpPr/>
+          <p:nvPr/>
+        </p:nvSpPr>
+        <p:spPr>
+          <a:xfrm>
+            <a:off x="0" y="4818888"/>
+            <a:ext cx="9144000" cy="320040"/>
+          </a:xfrm>
+          <a:prstGeom prst="rect">
+            <a:avLst/>
+          </a:prstGeom>
+          <a:solidFill>
+            <a:srgbClr val="003A59"/>
+          </a:solidFill>
+          <a:ln>
+            <a:solidFill>
+              <a:srgbClr val="FFFFFF"/>
+            </a:solidFill>
+          </a:ln>
+        </p:spPr>
+        <p:style>
+          <a:lnRef idx="1">
+            <a:schemeClr val="accent1"/>
+          </a:lnRef>
+          <a:fillRef idx="3">
+            <a:schemeClr val="accent1"/>
+          </a:fillRef>
+          <a:effectRef idx="2">
+            <a:schemeClr val="accent1"/>
+          </a:effectRef>
+          <a:fontRef idx="minor">
+            <a:schemeClr val="lt1"/>
+          </a:fontRef>
+        </p:style>
+        <p:txBody>
+          <a:bodyPr rtlCol="0" anchor="ctr"/>
+          <a:lstStyle/>
+          <a:p>
+            <a:pPr algn="ctr"/>
+          </a:p>
+        </p:txBody>
+      </p:sp>
       <p:pic>
         <p:nvPicPr>
-          <p:cNvPr id="90" name="Picture 89" descr="smb_team_logo.png"/>
+          <p:cNvPr id="40" name="Picture 39" descr="smb_team_logo.png"/>
           <p:cNvPicPr>
             <a:picLocks noChangeAspect="1"/>
           </p:cNvPicPr>
@@ -6598,7 +4675,7 @@
       </p:pic>
       <p:sp>
         <p:nvSpPr>
-          <p:cNvPr id="91" name="TextBox 90"/>
+          <p:cNvPr id="41" name="TextBox 40"/>
           <p:cNvSpPr txBox="1"/>
           <p:nvPr/>
         </p:nvSpPr>
@@ -6633,7 +4710,7 @@
       </p:sp>
       <p:sp>
         <p:nvSpPr>
-          <p:cNvPr id="92" name="TextBox 91"/>
+          <p:cNvPr id="42" name="TextBox 41"/>
           <p:cNvSpPr txBox="1"/>
           <p:nvPr/>
         </p:nvSpPr>
@@ -6783,7 +4860,7 @@
         <p:spPr>
           <a:xfrm>
             <a:off x="292608" y="182880"/>
-            <a:ext cx="6309360" cy="164592"/>
+            <a:ext cx="8503920" cy="164592"/>
           </a:xfrm>
           <a:prstGeom prst="rect">
             <a:avLst/>
@@ -8053,14 +6130,659 @@
       </p:sp>
       <p:sp>
         <p:nvSpPr>
-          <p:cNvPr id="4" name="Rectangle 3"/>
+          <p:cNvPr id="4" name="TextBox 3"/>
+          <p:cNvSpPr txBox="1"/>
+          <p:nvPr/>
+        </p:nvSpPr>
+        <p:spPr>
+          <a:xfrm>
+            <a:off x="292608" y="182880"/>
+            <a:ext cx="8503920" cy="164592"/>
+          </a:xfrm>
+          <a:prstGeom prst="rect">
+            <a:avLst/>
+          </a:prstGeom>
+          <a:noFill/>
+        </p:spPr>
+        <p:txBody>
+          <a:bodyPr wrap="square">
+            <a:noAutofit/>
+          </a:bodyPr>
+          <a:lstStyle/>
+          <a:p>
+            <a:pPr algn="l"/>
+            <a:r>
+              <a:rPr sz="750" b="1" i="0">
+                <a:solidFill>
+                  <a:srgbClr val="69CD2B"/>
+                </a:solidFill>
+                <a:latin typeface="Poppins"/>
+              </a:rPr>
+              <a:t>LAW FIRM GROWTH AUDIT  ·  CHRISTINE BROWN SPORTS LAW</a:t>
+            </a:r>
+          </a:p>
+        </p:txBody>
+      </p:sp>
+      <p:sp>
+        <p:nvSpPr>
+          <p:cNvPr id="5" name="TextBox 4"/>
+          <p:cNvSpPr txBox="1"/>
+          <p:nvPr/>
+        </p:nvSpPr>
+        <p:spPr>
+          <a:xfrm>
+            <a:off x="292608" y="384048"/>
+            <a:ext cx="8503920" cy="402336"/>
+          </a:xfrm>
+          <a:prstGeom prst="rect">
+            <a:avLst/>
+          </a:prstGeom>
+          <a:noFill/>
+        </p:spPr>
+        <p:txBody>
+          <a:bodyPr wrap="square" anchor="ctr">
+            <a:noAutofit/>
+          </a:bodyPr>
+          <a:lstStyle/>
+          <a:p>
+            <a:pPr algn="l"/>
+            <a:r>
+              <a:rPr sz="2000" b="1" i="0">
+                <a:solidFill>
+                  <a:srgbClr val="FFFFFF"/>
+                </a:solidFill>
+                <a:latin typeface="Poppins"/>
+              </a:rPr>
+              <a:t>Your Investment &amp; What Happens Next</a:t>
+            </a:r>
+          </a:p>
+        </p:txBody>
+      </p:sp>
+      <p:sp>
+        <p:nvSpPr>
+          <p:cNvPr id="6" name="Rectangle 5"/>
           <p:cNvSpPr/>
           <p:nvPr/>
         </p:nvSpPr>
         <p:spPr>
           <a:xfrm>
-            <a:off x="0" y="841248"/>
-            <a:ext cx="9144000" cy="36576"/>
+            <a:off x="274320" y="1005840"/>
+            <a:ext cx="4041648" cy="960120"/>
+          </a:xfrm>
+          <a:prstGeom prst="rect">
+            <a:avLst/>
+          </a:prstGeom>
+          <a:solidFill>
+            <a:srgbClr val="FFFFFF"/>
+          </a:solidFill>
+          <a:ln>
+            <a:solidFill>
+              <a:srgbClr val="FFFFFF"/>
+            </a:solidFill>
+          </a:ln>
+        </p:spPr>
+        <p:style>
+          <a:lnRef idx="1">
+            <a:schemeClr val="accent1"/>
+          </a:lnRef>
+          <a:fillRef idx="3">
+            <a:schemeClr val="accent1"/>
+          </a:fillRef>
+          <a:effectRef idx="2">
+            <a:schemeClr val="accent1"/>
+          </a:effectRef>
+          <a:fontRef idx="minor">
+            <a:schemeClr val="lt1"/>
+          </a:fontRef>
+        </p:style>
+        <p:txBody>
+          <a:bodyPr rtlCol="0" anchor="ctr"/>
+          <a:lstStyle/>
+          <a:p>
+            <a:pPr algn="ctr"/>
+          </a:p>
+        </p:txBody>
+      </p:sp>
+      <p:sp>
+        <p:nvSpPr>
+          <p:cNvPr id="7" name="Rectangle 6"/>
+          <p:cNvSpPr/>
+          <p:nvPr/>
+        </p:nvSpPr>
+        <p:spPr>
+          <a:xfrm>
+            <a:off x="274320" y="1005840"/>
+            <a:ext cx="36576" cy="960120"/>
+          </a:xfrm>
+          <a:prstGeom prst="rect">
+            <a:avLst/>
+          </a:prstGeom>
+          <a:solidFill>
+            <a:srgbClr val="0091C9"/>
+          </a:solidFill>
+          <a:ln>
+            <a:solidFill>
+              <a:srgbClr val="FFFFFF"/>
+            </a:solidFill>
+          </a:ln>
+        </p:spPr>
+        <p:style>
+          <a:lnRef idx="1">
+            <a:schemeClr val="accent1"/>
+          </a:lnRef>
+          <a:fillRef idx="3">
+            <a:schemeClr val="accent1"/>
+          </a:fillRef>
+          <a:effectRef idx="2">
+            <a:schemeClr val="accent1"/>
+          </a:effectRef>
+          <a:fontRef idx="minor">
+            <a:schemeClr val="lt1"/>
+          </a:fontRef>
+        </p:style>
+        <p:txBody>
+          <a:bodyPr rtlCol="0" anchor="ctr"/>
+          <a:lstStyle/>
+          <a:p>
+            <a:pPr algn="ctr"/>
+          </a:p>
+        </p:txBody>
+      </p:sp>
+      <p:sp>
+        <p:nvSpPr>
+          <p:cNvPr id="8" name="TextBox 7"/>
+          <p:cNvSpPr txBox="1"/>
+          <p:nvPr/>
+        </p:nvSpPr>
+        <p:spPr>
+          <a:xfrm>
+            <a:off x="512064" y="1115568"/>
+            <a:ext cx="3621024" cy="182880"/>
+          </a:xfrm>
+          <a:prstGeom prst="rect">
+            <a:avLst/>
+          </a:prstGeom>
+          <a:noFill/>
+        </p:spPr>
+        <p:txBody>
+          <a:bodyPr wrap="square">
+            <a:noAutofit/>
+          </a:bodyPr>
+          <a:lstStyle/>
+          <a:p>
+            <a:pPr algn="l"/>
+            <a:r>
+              <a:rPr sz="750" b="1" i="0">
+                <a:solidFill>
+                  <a:srgbClr val="0091C9"/>
+                </a:solidFill>
+                <a:latin typeface="Poppins"/>
+              </a:rPr>
+              <a:t>LEGAL AI WORKFORCE — FCTO L1 + AI WORKFORCE PRO</a:t>
+            </a:r>
+          </a:p>
+        </p:txBody>
+      </p:sp>
+      <p:sp>
+        <p:nvSpPr>
+          <p:cNvPr id="9" name="TextBox 8"/>
+          <p:cNvSpPr txBox="1"/>
+          <p:nvPr/>
+        </p:nvSpPr>
+        <p:spPr>
+          <a:xfrm>
+            <a:off x="512064" y="1252728"/>
+            <a:ext cx="2377440" cy="530352"/>
+          </a:xfrm>
+          <a:prstGeom prst="rect">
+            <a:avLst/>
+          </a:prstGeom>
+          <a:noFill/>
+        </p:spPr>
+        <p:txBody>
+          <a:bodyPr wrap="square">
+            <a:noAutofit/>
+          </a:bodyPr>
+          <a:lstStyle/>
+          <a:p>
+            <a:pPr algn="l"/>
+            <a:r>
+              <a:rPr sz="3000" b="1" i="0">
+                <a:solidFill>
+                  <a:srgbClr val="003A59"/>
+                </a:solidFill>
+                <a:latin typeface="Poppins"/>
+              </a:rPr>
+              <a:t>$5,734</a:t>
+            </a:r>
+          </a:p>
+        </p:txBody>
+      </p:sp>
+      <p:sp>
+        <p:nvSpPr>
+          <p:cNvPr id="10" name="TextBox 9"/>
+          <p:cNvSpPr txBox="1"/>
+          <p:nvPr/>
+        </p:nvSpPr>
+        <p:spPr>
+          <a:xfrm>
+            <a:off x="1848611" y="1519428"/>
+            <a:ext cx="457200" cy="219456"/>
+          </a:xfrm>
+          <a:prstGeom prst="rect">
+            <a:avLst/>
+          </a:prstGeom>
+          <a:noFill/>
+        </p:spPr>
+        <p:txBody>
+          <a:bodyPr wrap="none">
+            <a:noAutofit/>
+          </a:bodyPr>
+          <a:lstStyle/>
+          <a:p>
+            <a:pPr algn="l"/>
+            <a:r>
+              <a:rPr sz="1000" b="0" i="0">
+                <a:solidFill>
+                  <a:srgbClr val="7C8D9B"/>
+                </a:solidFill>
+                <a:latin typeface="Poppins"/>
+              </a:rPr>
+              <a:t>/mo</a:t>
+            </a:r>
+          </a:p>
+        </p:txBody>
+      </p:sp>
+      <p:sp>
+        <p:nvSpPr>
+          <p:cNvPr id="11" name="TextBox 10"/>
+          <p:cNvSpPr txBox="1"/>
+          <p:nvPr/>
+        </p:nvSpPr>
+        <p:spPr>
+          <a:xfrm>
+            <a:off x="2358898" y="1519428"/>
+            <a:ext cx="1865630" cy="219456"/>
+          </a:xfrm>
+          <a:prstGeom prst="rect">
+            <a:avLst/>
+          </a:prstGeom>
+          <a:noFill/>
+        </p:spPr>
+        <p:txBody>
+          <a:bodyPr wrap="square">
+            <a:noAutofit/>
+          </a:bodyPr>
+          <a:lstStyle/>
+          <a:p>
+            <a:pPr algn="r"/>
+            <a:r>
+              <a:rPr sz="1000" b="0" i="0">
+                <a:solidFill>
+                  <a:srgbClr val="7C8D9B"/>
+                </a:solidFill>
+                <a:latin typeface="Poppins"/>
+              </a:rPr>
+              <a:t>FCTO $3,797/mo</a:t>
+            </a:r>
+          </a:p>
+        </p:txBody>
+      </p:sp>
+      <p:sp>
+        <p:nvSpPr>
+          <p:cNvPr id="12" name="TextBox 11"/>
+          <p:cNvSpPr txBox="1"/>
+          <p:nvPr/>
+        </p:nvSpPr>
+        <p:spPr>
+          <a:xfrm>
+            <a:off x="512064" y="1737360"/>
+            <a:ext cx="3621024" cy="201168"/>
+          </a:xfrm>
+          <a:prstGeom prst="rect">
+            <a:avLst/>
+          </a:prstGeom>
+          <a:noFill/>
+        </p:spPr>
+        <p:txBody>
+          <a:bodyPr wrap="square">
+            <a:noAutofit/>
+          </a:bodyPr>
+          <a:lstStyle/>
+          <a:p>
+            <a:pPr algn="l"/>
+            <a:r>
+              <a:rPr sz="850" b="0" i="0">
+                <a:solidFill>
+                  <a:srgbClr val="7C8D9B"/>
+                </a:solidFill>
+                <a:latin typeface="Poppins"/>
+              </a:rPr>
+              <a:t>Monthly fCTO session · AI skills · automations · 12 seats</a:t>
+            </a:r>
+          </a:p>
+        </p:txBody>
+      </p:sp>
+      <p:sp>
+        <p:nvSpPr>
+          <p:cNvPr id="13" name="Rectangle 12"/>
+          <p:cNvSpPr/>
+          <p:nvPr/>
+        </p:nvSpPr>
+        <p:spPr>
+          <a:xfrm>
+            <a:off x="274320" y="2057400"/>
+            <a:ext cx="4041648" cy="960120"/>
+          </a:xfrm>
+          <a:prstGeom prst="rect">
+            <a:avLst/>
+          </a:prstGeom>
+          <a:solidFill>
+            <a:srgbClr val="FFFFFF"/>
+          </a:solidFill>
+          <a:ln>
+            <a:solidFill>
+              <a:srgbClr val="FFFFFF"/>
+            </a:solidFill>
+          </a:ln>
+        </p:spPr>
+        <p:style>
+          <a:lnRef idx="1">
+            <a:schemeClr val="accent1"/>
+          </a:lnRef>
+          <a:fillRef idx="3">
+            <a:schemeClr val="accent1"/>
+          </a:fillRef>
+          <a:effectRef idx="2">
+            <a:schemeClr val="accent1"/>
+          </a:effectRef>
+          <a:fontRef idx="minor">
+            <a:schemeClr val="lt1"/>
+          </a:fontRef>
+        </p:style>
+        <p:txBody>
+          <a:bodyPr rtlCol="0" anchor="ctr"/>
+          <a:lstStyle/>
+          <a:p>
+            <a:pPr algn="ctr"/>
+          </a:p>
+        </p:txBody>
+      </p:sp>
+      <p:sp>
+        <p:nvSpPr>
+          <p:cNvPr id="14" name="Rectangle 13"/>
+          <p:cNvSpPr/>
+          <p:nvPr/>
+        </p:nvSpPr>
+        <p:spPr>
+          <a:xfrm>
+            <a:off x="274320" y="2057400"/>
+            <a:ext cx="36576" cy="960120"/>
+          </a:xfrm>
+          <a:prstGeom prst="rect">
+            <a:avLst/>
+          </a:prstGeom>
+          <a:solidFill>
+            <a:srgbClr val="003A59"/>
+          </a:solidFill>
+          <a:ln>
+            <a:solidFill>
+              <a:srgbClr val="FFFFFF"/>
+            </a:solidFill>
+          </a:ln>
+        </p:spPr>
+        <p:style>
+          <a:lnRef idx="1">
+            <a:schemeClr val="accent1"/>
+          </a:lnRef>
+          <a:fillRef idx="3">
+            <a:schemeClr val="accent1"/>
+          </a:fillRef>
+          <a:effectRef idx="2">
+            <a:schemeClr val="accent1"/>
+          </a:effectRef>
+          <a:fontRef idx="minor">
+            <a:schemeClr val="lt1"/>
+          </a:fontRef>
+        </p:style>
+        <p:txBody>
+          <a:bodyPr rtlCol="0" anchor="ctr"/>
+          <a:lstStyle/>
+          <a:p>
+            <a:pPr algn="ctr"/>
+          </a:p>
+        </p:txBody>
+      </p:sp>
+      <p:sp>
+        <p:nvSpPr>
+          <p:cNvPr id="15" name="TextBox 14"/>
+          <p:cNvSpPr txBox="1"/>
+          <p:nvPr/>
+        </p:nvSpPr>
+        <p:spPr>
+          <a:xfrm>
+            <a:off x="512064" y="2167128"/>
+            <a:ext cx="3621024" cy="182880"/>
+          </a:xfrm>
+          <a:prstGeom prst="rect">
+            <a:avLst/>
+          </a:prstGeom>
+          <a:noFill/>
+        </p:spPr>
+        <p:txBody>
+          <a:bodyPr wrap="square">
+            <a:noAutofit/>
+          </a:bodyPr>
+          <a:lstStyle/>
+          <a:p>
+            <a:pPr algn="l"/>
+            <a:r>
+              <a:rPr sz="750" b="1" i="0">
+                <a:solidFill>
+                  <a:srgbClr val="003A59"/>
+                </a:solidFill>
+                <a:latin typeface="Poppins"/>
+              </a:rPr>
+              <a:t>FCOO ADVISOR</a:t>
+            </a:r>
+          </a:p>
+        </p:txBody>
+      </p:sp>
+      <p:sp>
+        <p:nvSpPr>
+          <p:cNvPr id="16" name="TextBox 15"/>
+          <p:cNvSpPr txBox="1"/>
+          <p:nvPr/>
+        </p:nvSpPr>
+        <p:spPr>
+          <a:xfrm>
+            <a:off x="512064" y="2304288"/>
+            <a:ext cx="2377440" cy="530352"/>
+          </a:xfrm>
+          <a:prstGeom prst="rect">
+            <a:avLst/>
+          </a:prstGeom>
+          <a:noFill/>
+        </p:spPr>
+        <p:txBody>
+          <a:bodyPr wrap="square">
+            <a:noAutofit/>
+          </a:bodyPr>
+          <a:lstStyle/>
+          <a:p>
+            <a:pPr algn="l"/>
+            <a:r>
+              <a:rPr sz="3000" b="1" i="0">
+                <a:solidFill>
+                  <a:srgbClr val="003A59"/>
+                </a:solidFill>
+                <a:latin typeface="Poppins"/>
+              </a:rPr>
+              <a:t>$3,297</a:t>
+            </a:r>
+          </a:p>
+        </p:txBody>
+      </p:sp>
+      <p:sp>
+        <p:nvSpPr>
+          <p:cNvPr id="17" name="TextBox 16"/>
+          <p:cNvSpPr txBox="1"/>
+          <p:nvPr/>
+        </p:nvSpPr>
+        <p:spPr>
+          <a:xfrm>
+            <a:off x="1794891" y="2570988"/>
+            <a:ext cx="457200" cy="219456"/>
+          </a:xfrm>
+          <a:prstGeom prst="rect">
+            <a:avLst/>
+          </a:prstGeom>
+          <a:noFill/>
+        </p:spPr>
+        <p:txBody>
+          <a:bodyPr wrap="none">
+            <a:noAutofit/>
+          </a:bodyPr>
+          <a:lstStyle/>
+          <a:p>
+            <a:pPr algn="l"/>
+            <a:r>
+              <a:rPr sz="1000" b="0" i="0">
+                <a:solidFill>
+                  <a:srgbClr val="7C8D9B"/>
+                </a:solidFill>
+                <a:latin typeface="Poppins"/>
+              </a:rPr>
+              <a:t>/mo</a:t>
+            </a:r>
+          </a:p>
+        </p:txBody>
+      </p:sp>
+      <p:sp>
+        <p:nvSpPr>
+          <p:cNvPr id="18" name="TextBox 17"/>
+          <p:cNvSpPr txBox="1"/>
+          <p:nvPr/>
+        </p:nvSpPr>
+        <p:spPr>
+          <a:xfrm>
+            <a:off x="2305177" y="2570988"/>
+            <a:ext cx="1919351" cy="219456"/>
+          </a:xfrm>
+          <a:prstGeom prst="rect">
+            <a:avLst/>
+          </a:prstGeom>
+          <a:noFill/>
+        </p:spPr>
+        <p:txBody>
+          <a:bodyPr wrap="square">
+            <a:noAutofit/>
+          </a:bodyPr>
+          <a:lstStyle/>
+          <a:p>
+            <a:pPr algn="r"/>
+            <a:r>
+              <a:rPr sz="1000" b="0" i="0">
+                <a:solidFill>
+                  <a:srgbClr val="7C8D9B"/>
+                </a:solidFill>
+                <a:latin typeface="Poppins"/>
+              </a:rPr>
+              <a:t>$3,797/mo</a:t>
+            </a:r>
+          </a:p>
+        </p:txBody>
+      </p:sp>
+      <p:sp>
+        <p:nvSpPr>
+          <p:cNvPr id="19" name="TextBox 18"/>
+          <p:cNvSpPr txBox="1"/>
+          <p:nvPr/>
+        </p:nvSpPr>
+        <p:spPr>
+          <a:xfrm>
+            <a:off x="512064" y="2788920"/>
+            <a:ext cx="3621024" cy="201168"/>
+          </a:xfrm>
+          <a:prstGeom prst="rect">
+            <a:avLst/>
+          </a:prstGeom>
+          <a:noFill/>
+        </p:spPr>
+        <p:txBody>
+          <a:bodyPr wrap="square">
+            <a:noAutofit/>
+          </a:bodyPr>
+          <a:lstStyle/>
+          <a:p>
+            <a:pPr algn="l"/>
+            <a:r>
+              <a:rPr sz="850" b="0" i="0">
+                <a:solidFill>
+                  <a:srgbClr val="7C8D9B"/>
+                </a:solidFill>
+                <a:latin typeface="Poppins"/>
+              </a:rPr>
+              <a:t>Ops leadership · Weekly group coaching · Workshops</a:t>
+            </a:r>
+          </a:p>
+        </p:txBody>
+      </p:sp>
+      <p:sp>
+        <p:nvSpPr>
+          <p:cNvPr id="20" name="Rectangle 19"/>
+          <p:cNvSpPr/>
+          <p:nvPr/>
+        </p:nvSpPr>
+        <p:spPr>
+          <a:xfrm>
+            <a:off x="274320" y="3108960"/>
+            <a:ext cx="4041648" cy="658368"/>
+          </a:xfrm>
+          <a:prstGeom prst="rect">
+            <a:avLst/>
+          </a:prstGeom>
+          <a:solidFill>
+            <a:srgbClr val="003A59"/>
+          </a:solidFill>
+          <a:ln>
+            <a:solidFill>
+              <a:srgbClr val="FFFFFF"/>
+            </a:solidFill>
+          </a:ln>
+        </p:spPr>
+        <p:style>
+          <a:lnRef idx="1">
+            <a:schemeClr val="accent1"/>
+          </a:lnRef>
+          <a:fillRef idx="3">
+            <a:schemeClr val="accent1"/>
+          </a:fillRef>
+          <a:effectRef idx="2">
+            <a:schemeClr val="accent1"/>
+          </a:effectRef>
+          <a:fontRef idx="minor">
+            <a:schemeClr val="lt1"/>
+          </a:fontRef>
+        </p:style>
+        <p:txBody>
+          <a:bodyPr rtlCol="0" anchor="ctr"/>
+          <a:lstStyle/>
+          <a:p>
+            <a:pPr algn="ctr"/>
+          </a:p>
+        </p:txBody>
+      </p:sp>
+      <p:sp>
+        <p:nvSpPr>
+          <p:cNvPr id="21" name="Rectangle 20"/>
+          <p:cNvSpPr/>
+          <p:nvPr/>
+        </p:nvSpPr>
+        <p:spPr>
+          <a:xfrm>
+            <a:off x="274320" y="3108960"/>
+            <a:ext cx="36576" cy="658368"/>
           </a:xfrm>
           <a:prstGeom prst="rect">
             <a:avLst/>
@@ -8098,14 +6820,14 @@
       </p:sp>
       <p:sp>
         <p:nvSpPr>
-          <p:cNvPr id="5" name="TextBox 4"/>
+          <p:cNvPr id="22" name="TextBox 21"/>
           <p:cNvSpPr txBox="1"/>
           <p:nvPr/>
         </p:nvSpPr>
         <p:spPr>
           <a:xfrm>
-            <a:off x="292608" y="182880"/>
-            <a:ext cx="6309360" cy="164592"/>
+            <a:off x="512064" y="3200400"/>
+            <a:ext cx="1554480" cy="164592"/>
           </a:xfrm>
           <a:prstGeom prst="rect">
             <a:avLst/>
@@ -8126,21 +6848,216 @@
                 </a:solidFill>
                 <a:latin typeface="Poppins"/>
               </a:rPr>
-              <a:t>LAW FIRM GROWTH AUDIT  ·  CHRISTINE BROWN SPORTS LAW</a:t>
-            </a:r>
-          </a:p>
-        </p:txBody>
-      </p:sp>
-      <p:sp>
-        <p:nvSpPr>
-          <p:cNvPr id="6" name="TextBox 5"/>
+              <a:t>BUNDLE TOTAL</a:t>
+            </a:r>
+          </a:p>
+        </p:txBody>
+      </p:sp>
+      <p:sp>
+        <p:nvSpPr>
+          <p:cNvPr id="23" name="TextBox 22"/>
           <p:cNvSpPr txBox="1"/>
           <p:nvPr/>
         </p:nvSpPr>
         <p:spPr>
           <a:xfrm>
-            <a:off x="292608" y="384048"/>
-            <a:ext cx="8503920" cy="402336"/>
+            <a:off x="512064" y="3346704"/>
+            <a:ext cx="2194560" cy="365760"/>
+          </a:xfrm>
+          <a:prstGeom prst="rect">
+            <a:avLst/>
+          </a:prstGeom>
+          <a:noFill/>
+        </p:spPr>
+        <p:txBody>
+          <a:bodyPr wrap="square">
+            <a:noAutofit/>
+          </a:bodyPr>
+          <a:lstStyle/>
+          <a:p>
+            <a:pPr algn="l"/>
+            <a:r>
+              <a:rPr sz="1700" b="1" i="0">
+                <a:solidFill>
+                  <a:srgbClr val="FFFFFF"/>
+                </a:solidFill>
+                <a:latin typeface="Poppins"/>
+              </a:rPr>
+              <a:t>$9,031 / mo</a:t>
+            </a:r>
+          </a:p>
+        </p:txBody>
+      </p:sp>
+      <p:sp>
+        <p:nvSpPr>
+          <p:cNvPr id="24" name="TextBox 23"/>
+          <p:cNvSpPr txBox="1"/>
+          <p:nvPr/>
+        </p:nvSpPr>
+        <p:spPr>
+          <a:xfrm>
+            <a:off x="1939823" y="3460051"/>
+            <a:ext cx="2284704" cy="201168"/>
+          </a:xfrm>
+          <a:prstGeom prst="rect">
+            <a:avLst/>
+          </a:prstGeom>
+          <a:noFill/>
+        </p:spPr>
+        <p:txBody>
+          <a:bodyPr wrap="square">
+            <a:noAutofit/>
+          </a:bodyPr>
+          <a:lstStyle/>
+          <a:p>
+            <a:pPr algn="r"/>
+            <a:r>
+              <a:rPr sz="850" b="0" i="0">
+                <a:solidFill>
+                  <a:srgbClr val="A9D68C"/>
+                </a:solidFill>
+                <a:latin typeface="Poppins"/>
+              </a:rPr>
+              <a:t>Save $1,000/mo by bundling</a:t>
+            </a:r>
+          </a:p>
+        </p:txBody>
+      </p:sp>
+      <p:sp>
+        <p:nvSpPr>
+          <p:cNvPr id="25" name="TextBox 24"/>
+          <p:cNvSpPr txBox="1"/>
+          <p:nvPr/>
+        </p:nvSpPr>
+        <p:spPr>
+          <a:xfrm>
+            <a:off x="4572000" y="1005840"/>
+            <a:ext cx="4297680" cy="164592"/>
+          </a:xfrm>
+          <a:prstGeom prst="rect">
+            <a:avLst/>
+          </a:prstGeom>
+          <a:noFill/>
+        </p:spPr>
+        <p:txBody>
+          <a:bodyPr wrap="square">
+            <a:noAutofit/>
+          </a:bodyPr>
+          <a:lstStyle/>
+          <a:p>
+            <a:pPr algn="l"/>
+            <a:r>
+              <a:rPr sz="750" b="1" i="0">
+                <a:solidFill>
+                  <a:srgbClr val="003A59"/>
+                </a:solidFill>
+                <a:latin typeface="Poppins"/>
+              </a:rPr>
+              <a:t>HOW THIS PLAN ADDRESSES IT</a:t>
+            </a:r>
+          </a:p>
+        </p:txBody>
+      </p:sp>
+      <p:sp>
+        <p:nvSpPr>
+          <p:cNvPr id="26" name="Rectangle 25"/>
+          <p:cNvSpPr/>
+          <p:nvPr/>
+        </p:nvSpPr>
+        <p:spPr>
+          <a:xfrm>
+            <a:off x="4572000" y="1335024"/>
+            <a:ext cx="4297680" cy="265176"/>
+          </a:xfrm>
+          <a:prstGeom prst="rect">
+            <a:avLst/>
+          </a:prstGeom>
+          <a:solidFill>
+            <a:srgbClr val="EEF2F5"/>
+          </a:solidFill>
+          <a:ln>
+            <a:solidFill>
+              <a:srgbClr val="FFFFFF"/>
+            </a:solidFill>
+          </a:ln>
+        </p:spPr>
+        <p:style>
+          <a:lnRef idx="1">
+            <a:schemeClr val="accent1"/>
+          </a:lnRef>
+          <a:fillRef idx="3">
+            <a:schemeClr val="accent1"/>
+          </a:fillRef>
+          <a:effectRef idx="2">
+            <a:schemeClr val="accent1"/>
+          </a:effectRef>
+          <a:fontRef idx="minor">
+            <a:schemeClr val="lt1"/>
+          </a:fontRef>
+        </p:style>
+        <p:txBody>
+          <a:bodyPr rtlCol="0" anchor="ctr"/>
+          <a:lstStyle/>
+          <a:p>
+            <a:pPr algn="ctr"/>
+          </a:p>
+        </p:txBody>
+      </p:sp>
+      <p:sp>
+        <p:nvSpPr>
+          <p:cNvPr id="27" name="Rectangle 26"/>
+          <p:cNvSpPr/>
+          <p:nvPr/>
+        </p:nvSpPr>
+        <p:spPr>
+          <a:xfrm>
+            <a:off x="4700016" y="1417320"/>
+            <a:ext cx="91440" cy="91440"/>
+          </a:xfrm>
+          <a:prstGeom prst="rect">
+            <a:avLst/>
+          </a:prstGeom>
+          <a:solidFill>
+            <a:srgbClr val="69CD2B"/>
+          </a:solidFill>
+          <a:ln>
+            <a:solidFill>
+              <a:srgbClr val="FFFFFF"/>
+            </a:solidFill>
+          </a:ln>
+        </p:spPr>
+        <p:style>
+          <a:lnRef idx="1">
+            <a:schemeClr val="accent1"/>
+          </a:lnRef>
+          <a:fillRef idx="3">
+            <a:schemeClr val="accent1"/>
+          </a:fillRef>
+          <a:effectRef idx="2">
+            <a:schemeClr val="accent1"/>
+          </a:effectRef>
+          <a:fontRef idx="minor">
+            <a:schemeClr val="lt1"/>
+          </a:fontRef>
+        </p:style>
+        <p:txBody>
+          <a:bodyPr rtlCol="0" anchor="ctr"/>
+          <a:lstStyle/>
+          <a:p>
+            <a:pPr algn="ctr"/>
+          </a:p>
+        </p:txBody>
+      </p:sp>
+      <p:sp>
+        <p:nvSpPr>
+          <p:cNvPr id="28" name="TextBox 27"/>
+          <p:cNvSpPr txBox="1"/>
+          <p:nvPr/>
+        </p:nvSpPr>
+        <p:spPr>
+          <a:xfrm>
+            <a:off x="4846320" y="1335024"/>
+            <a:ext cx="1143000" cy="265176"/>
           </a:xfrm>
           <a:prstGeom prst="rect">
             <a:avLst/>
@@ -8155,27 +7072,62 @@
           <a:p>
             <a:pPr algn="l"/>
             <a:r>
-              <a:rPr sz="2000" b="1" i="0">
-                <a:solidFill>
-                  <a:srgbClr val="FFFFFF"/>
+              <a:rPr sz="800" b="1" i="0">
+                <a:solidFill>
+                  <a:srgbClr val="003A59"/>
                 </a:solidFill>
                 <a:latin typeface="Poppins"/>
               </a:rPr>
-              <a:t>Your Investment &amp; What Happens Next</a:t>
-            </a:r>
-          </a:p>
-        </p:txBody>
-      </p:sp>
-      <p:sp>
-        <p:nvSpPr>
-          <p:cNvPr id="7" name="Rectangle 6"/>
+              <a:t>Repetitive work</a:t>
+            </a:r>
+          </a:p>
+        </p:txBody>
+      </p:sp>
+      <p:sp>
+        <p:nvSpPr>
+          <p:cNvPr id="29" name="TextBox 28"/>
+          <p:cNvSpPr txBox="1"/>
+          <p:nvPr/>
+        </p:nvSpPr>
+        <p:spPr>
+          <a:xfrm>
+            <a:off x="5943600" y="1335024"/>
+            <a:ext cx="2926080" cy="265176"/>
+          </a:xfrm>
+          <a:prstGeom prst="rect">
+            <a:avLst/>
+          </a:prstGeom>
+          <a:noFill/>
+        </p:spPr>
+        <p:txBody>
+          <a:bodyPr wrap="square" anchor="ctr">
+            <a:noAutofit/>
+          </a:bodyPr>
+          <a:lstStyle/>
+          <a:p>
+            <a:pPr algn="l"/>
+            <a:r>
+              <a:rPr sz="800" b="0" i="0">
+                <a:solidFill>
+                  <a:srgbClr val="4A5C6B"/>
+                </a:solidFill>
+                <a:latin typeface="Poppins"/>
+              </a:rPr>
+              <a:t>Monthly AI skills, rolled out to all 12 users</a:t>
+            </a:r>
+          </a:p>
+        </p:txBody>
+      </p:sp>
+      <p:sp>
+        <p:nvSpPr>
+          <p:cNvPr id="30" name="Rectangle 29"/>
           <p:cNvSpPr/>
           <p:nvPr/>
         </p:nvSpPr>
         <p:spPr>
           <a:xfrm>
-            <a:off x="274320" y="1005840"/>
-            <a:ext cx="4041648" cy="960120"/>
+            <a:off x="4572000" y="1883664"/>
+            <a:ext cx="4297680" cy="265176"/>
           </a:xfrm>
           <a:prstGeom prst="rect">
             <a:avLst/>
@@ -8213,14 +7165,14 @@
       </p:sp>
       <p:sp>
         <p:nvSpPr>
-          <p:cNvPr id="8" name="Rectangle 7"/>
+          <p:cNvPr id="31" name="Rectangle 30"/>
           <p:cNvSpPr/>
           <p:nvPr/>
         </p:nvSpPr>
         <p:spPr>
           <a:xfrm>
-            <a:off x="274320" y="1005840"/>
-            <a:ext cx="36576" cy="960120"/>
+            <a:off x="4700016" y="1965960"/>
+            <a:ext cx="91440" cy="91440"/>
           </a:xfrm>
           <a:prstGeom prst="rect">
             <a:avLst/>
@@ -8258,14 +7210,14 @@
       </p:sp>
       <p:sp>
         <p:nvSpPr>
-          <p:cNvPr id="9" name="TextBox 8"/>
+          <p:cNvPr id="32" name="TextBox 31"/>
           <p:cNvSpPr txBox="1"/>
           <p:nvPr/>
         </p:nvSpPr>
         <p:spPr>
           <a:xfrm>
-            <a:off x="512064" y="1115568"/>
-            <a:ext cx="3621024" cy="182880"/>
+            <a:off x="4846320" y="1883664"/>
+            <a:ext cx="1143000" cy="265176"/>
           </a:xfrm>
           <a:prstGeom prst="rect">
             <a:avLst/>
@@ -8273,34 +7225,34 @@
           <a:noFill/>
         </p:spPr>
         <p:txBody>
-          <a:bodyPr wrap="square">
+          <a:bodyPr wrap="square" anchor="ctr">
             <a:noAutofit/>
           </a:bodyPr>
           <a:lstStyle/>
           <a:p>
             <a:pPr algn="l"/>
             <a:r>
-              <a:rPr sz="750" b="1" i="0">
-                <a:solidFill>
-                  <a:srgbClr val="0091C9"/>
+              <a:rPr sz="800" b="1" i="0">
+                <a:solidFill>
+                  <a:srgbClr val="003A59"/>
                 </a:solidFill>
                 <a:latin typeface="Poppins"/>
               </a:rPr>
-              <a:t>LEGAL AI WORKFORCE — FCTO L1 + AI WORKFORCE PRO</a:t>
-            </a:r>
-          </a:p>
-        </p:txBody>
-      </p:sp>
-      <p:sp>
-        <p:nvSpPr>
-          <p:cNvPr id="10" name="TextBox 9"/>
+              <a:t>Escalations</a:t>
+            </a:r>
+          </a:p>
+        </p:txBody>
+      </p:sp>
+      <p:sp>
+        <p:nvSpPr>
+          <p:cNvPr id="33" name="TextBox 32"/>
           <p:cNvSpPr txBox="1"/>
           <p:nvPr/>
         </p:nvSpPr>
         <p:spPr>
           <a:xfrm>
-            <a:off x="512064" y="1252728"/>
-            <a:ext cx="2377440" cy="530352"/>
+            <a:off x="5943600" y="1883664"/>
+            <a:ext cx="2926080" cy="265176"/>
           </a:xfrm>
           <a:prstGeom prst="rect">
             <a:avLst/>
@@ -8308,145 +7260,40 @@
           <a:noFill/>
         </p:spPr>
         <p:txBody>
-          <a:bodyPr wrap="square">
+          <a:bodyPr wrap="square" anchor="ctr">
             <a:noAutofit/>
           </a:bodyPr>
           <a:lstStyle/>
           <a:p>
             <a:pPr algn="l"/>
             <a:r>
-              <a:rPr sz="3000" b="1" i="0">
-                <a:solidFill>
-                  <a:srgbClr val="003A59"/>
+              <a:rPr sz="800" b="0" i="0">
+                <a:solidFill>
+                  <a:srgbClr val="4A5C6B"/>
                 </a:solidFill>
                 <a:latin typeface="Poppins"/>
               </a:rPr>
-              <a:t>$5,734</a:t>
-            </a:r>
-          </a:p>
-        </p:txBody>
-      </p:sp>
-      <p:sp>
-        <p:nvSpPr>
-          <p:cNvPr id="11" name="TextBox 10"/>
-          <p:cNvSpPr txBox="1"/>
-          <p:nvPr/>
-        </p:nvSpPr>
-        <p:spPr>
-          <a:xfrm>
-            <a:off x="1848611" y="1519428"/>
-            <a:ext cx="457200" cy="219456"/>
-          </a:xfrm>
-          <a:prstGeom prst="rect">
-            <a:avLst/>
-          </a:prstGeom>
-          <a:noFill/>
-        </p:spPr>
-        <p:txBody>
-          <a:bodyPr wrap="none">
-            <a:noAutofit/>
-          </a:bodyPr>
-          <a:lstStyle/>
-          <a:p>
-            <a:pPr algn="l"/>
-            <a:r>
-              <a:rPr sz="1000" b="0" i="0">
-                <a:solidFill>
-                  <a:srgbClr val="7C8D9B"/>
-                </a:solidFill>
-                <a:latin typeface="Poppins"/>
-              </a:rPr>
-              <a:t>/mo</a:t>
-            </a:r>
-          </a:p>
-        </p:txBody>
-      </p:sp>
-      <p:sp>
-        <p:nvSpPr>
-          <p:cNvPr id="12" name="TextBox 11"/>
-          <p:cNvSpPr txBox="1"/>
-          <p:nvPr/>
-        </p:nvSpPr>
-        <p:spPr>
-          <a:xfrm>
-            <a:off x="2358898" y="1519428"/>
-            <a:ext cx="1865630" cy="219456"/>
-          </a:xfrm>
-          <a:prstGeom prst="rect">
-            <a:avLst/>
-          </a:prstGeom>
-          <a:noFill/>
-        </p:spPr>
-        <p:txBody>
-          <a:bodyPr wrap="square">
-            <a:noAutofit/>
-          </a:bodyPr>
-          <a:lstStyle/>
-          <a:p>
-            <a:pPr algn="r"/>
-            <a:r>
-              <a:rPr sz="1000" b="0" i="0">
-                <a:solidFill>
-                  <a:srgbClr val="7C8D9B"/>
-                </a:solidFill>
-                <a:latin typeface="Poppins"/>
-              </a:rPr>
-              <a:t>FCTO $3,797/mo</a:t>
-            </a:r>
-          </a:p>
-        </p:txBody>
-      </p:sp>
-      <p:sp>
-        <p:nvSpPr>
-          <p:cNvPr id="13" name="TextBox 12"/>
-          <p:cNvSpPr txBox="1"/>
-          <p:nvPr/>
-        </p:nvSpPr>
-        <p:spPr>
-          <a:xfrm>
-            <a:off x="512064" y="1737360"/>
-            <a:ext cx="3621024" cy="201168"/>
-          </a:xfrm>
-          <a:prstGeom prst="rect">
-            <a:avLst/>
-          </a:prstGeom>
-          <a:noFill/>
-        </p:spPr>
-        <p:txBody>
-          <a:bodyPr wrap="square">
-            <a:noAutofit/>
-          </a:bodyPr>
-          <a:lstStyle/>
-          <a:p>
-            <a:pPr algn="l"/>
-            <a:r>
-              <a:rPr sz="850" b="0" i="0">
-                <a:solidFill>
-                  <a:srgbClr val="7C8D9B"/>
-                </a:solidFill>
-                <a:latin typeface="Poppins"/>
-              </a:rPr>
-              <a:t>Monthly fCTO session · AI skills · automations · 12 seats</a:t>
-            </a:r>
-          </a:p>
-        </p:txBody>
-      </p:sp>
-      <p:sp>
-        <p:nvSpPr>
-          <p:cNvPr id="14" name="Rectangle 13"/>
+              <a:t>FCOO builds rhythm + role-level accountability</a:t>
+            </a:r>
+          </a:p>
+        </p:txBody>
+      </p:sp>
+      <p:sp>
+        <p:nvSpPr>
+          <p:cNvPr id="34" name="Rectangle 33"/>
           <p:cNvSpPr/>
           <p:nvPr/>
         </p:nvSpPr>
         <p:spPr>
           <a:xfrm>
-            <a:off x="274320" y="2057400"/>
-            <a:ext cx="4041648" cy="960120"/>
+            <a:off x="4572000" y="2432304"/>
+            <a:ext cx="4297680" cy="265176"/>
           </a:xfrm>
           <a:prstGeom prst="rect">
             <a:avLst/>
           </a:prstGeom>
           <a:solidFill>
-            <a:srgbClr val="FFFFFF"/>
+            <a:srgbClr val="EEF2F5"/>
           </a:solidFill>
           <a:ln>
             <a:solidFill>
@@ -8478,14 +7325,254 @@
       </p:sp>
       <p:sp>
         <p:nvSpPr>
-          <p:cNvPr id="15" name="Rectangle 14"/>
+          <p:cNvPr id="35" name="Rectangle 34"/>
           <p:cNvSpPr/>
           <p:nvPr/>
         </p:nvSpPr>
         <p:spPr>
           <a:xfrm>
-            <a:off x="274320" y="2057400"/>
-            <a:ext cx="36576" cy="960120"/>
+            <a:off x="4700016" y="2514600"/>
+            <a:ext cx="91440" cy="91440"/>
+          </a:xfrm>
+          <a:prstGeom prst="rect">
+            <a:avLst/>
+          </a:prstGeom>
+          <a:solidFill>
+            <a:srgbClr val="0091C9"/>
+          </a:solidFill>
+          <a:ln>
+            <a:solidFill>
+              <a:srgbClr val="FFFFFF"/>
+            </a:solidFill>
+          </a:ln>
+        </p:spPr>
+        <p:style>
+          <a:lnRef idx="1">
+            <a:schemeClr val="accent1"/>
+          </a:lnRef>
+          <a:fillRef idx="3">
+            <a:schemeClr val="accent1"/>
+          </a:fillRef>
+          <a:effectRef idx="2">
+            <a:schemeClr val="accent1"/>
+          </a:effectRef>
+          <a:fontRef idx="minor">
+            <a:schemeClr val="lt1"/>
+          </a:fontRef>
+        </p:style>
+        <p:txBody>
+          <a:bodyPr rtlCol="0" anchor="ctr"/>
+          <a:lstStyle/>
+          <a:p>
+            <a:pPr algn="ctr"/>
+          </a:p>
+        </p:txBody>
+      </p:sp>
+      <p:sp>
+        <p:nvSpPr>
+          <p:cNvPr id="36" name="TextBox 35"/>
+          <p:cNvSpPr txBox="1"/>
+          <p:nvPr/>
+        </p:nvSpPr>
+        <p:spPr>
+          <a:xfrm>
+            <a:off x="4846320" y="2432304"/>
+            <a:ext cx="1143000" cy="265176"/>
+          </a:xfrm>
+          <a:prstGeom prst="rect">
+            <a:avLst/>
+          </a:prstGeom>
+          <a:noFill/>
+        </p:spPr>
+        <p:txBody>
+          <a:bodyPr wrap="square" anchor="ctr">
+            <a:noAutofit/>
+          </a:bodyPr>
+          <a:lstStyle/>
+          <a:p>
+            <a:pPr algn="l"/>
+            <a:r>
+              <a:rPr sz="800" b="1" i="0">
+                <a:solidFill>
+                  <a:srgbClr val="003A59"/>
+                </a:solidFill>
+                <a:latin typeface="Poppins"/>
+              </a:rPr>
+              <a:t>Follow-up gaps</a:t>
+            </a:r>
+          </a:p>
+        </p:txBody>
+      </p:sp>
+      <p:sp>
+        <p:nvSpPr>
+          <p:cNvPr id="37" name="TextBox 36"/>
+          <p:cNvSpPr txBox="1"/>
+          <p:nvPr/>
+        </p:nvSpPr>
+        <p:spPr>
+          <a:xfrm>
+            <a:off x="5943600" y="2432304"/>
+            <a:ext cx="2926080" cy="265176"/>
+          </a:xfrm>
+          <a:prstGeom prst="rect">
+            <a:avLst/>
+          </a:prstGeom>
+          <a:noFill/>
+        </p:spPr>
+        <p:txBody>
+          <a:bodyPr wrap="square" anchor="ctr">
+            <a:noAutofit/>
+          </a:bodyPr>
+          <a:lstStyle/>
+          <a:p>
+            <a:pPr algn="l"/>
+            <a:r>
+              <a:rPr sz="800" b="0" i="0">
+                <a:solidFill>
+                  <a:srgbClr val="4A5C6B"/>
+                </a:solidFill>
+                <a:latin typeface="Poppins"/>
+              </a:rPr>
+              <a:t>Defined inquiry process, built as an automation</a:t>
+            </a:r>
+          </a:p>
+        </p:txBody>
+      </p:sp>
+      <p:sp>
+        <p:nvSpPr>
+          <p:cNvPr id="38" name="Rectangle 37"/>
+          <p:cNvSpPr/>
+          <p:nvPr/>
+        </p:nvSpPr>
+        <p:spPr>
+          <a:xfrm>
+            <a:off x="0" y="4261104"/>
+            <a:ext cx="9144000" cy="557784"/>
+          </a:xfrm>
+          <a:prstGeom prst="rect">
+            <a:avLst/>
+          </a:prstGeom>
+          <a:solidFill>
+            <a:srgbClr val="002A41"/>
+          </a:solidFill>
+          <a:ln>
+            <a:solidFill>
+              <a:srgbClr val="FFFFFF"/>
+            </a:solidFill>
+          </a:ln>
+        </p:spPr>
+        <p:style>
+          <a:lnRef idx="1">
+            <a:schemeClr val="accent1"/>
+          </a:lnRef>
+          <a:fillRef idx="3">
+            <a:schemeClr val="accent1"/>
+          </a:fillRef>
+          <a:effectRef idx="2">
+            <a:schemeClr val="accent1"/>
+          </a:effectRef>
+          <a:fontRef idx="minor">
+            <a:schemeClr val="lt1"/>
+          </a:fontRef>
+        </p:style>
+        <p:txBody>
+          <a:bodyPr rtlCol="0" anchor="ctr"/>
+          <a:lstStyle/>
+          <a:p>
+            <a:pPr algn="ctr"/>
+          </a:p>
+        </p:txBody>
+      </p:sp>
+      <p:sp>
+        <p:nvSpPr>
+          <p:cNvPr id="39" name="Rectangle 38"/>
+          <p:cNvSpPr/>
+          <p:nvPr/>
+        </p:nvSpPr>
+        <p:spPr>
+          <a:xfrm>
+            <a:off x="0" y="4261104"/>
+            <a:ext cx="9144000" cy="18288"/>
+          </a:xfrm>
+          <a:prstGeom prst="rect">
+            <a:avLst/>
+          </a:prstGeom>
+          <a:solidFill>
+            <a:srgbClr val="69CD2B"/>
+          </a:solidFill>
+          <a:ln>
+            <a:solidFill>
+              <a:srgbClr val="FFFFFF"/>
+            </a:solidFill>
+          </a:ln>
+        </p:spPr>
+        <p:style>
+          <a:lnRef idx="1">
+            <a:schemeClr val="accent1"/>
+          </a:lnRef>
+          <a:fillRef idx="3">
+            <a:schemeClr val="accent1"/>
+          </a:fillRef>
+          <a:effectRef idx="2">
+            <a:schemeClr val="accent1"/>
+          </a:effectRef>
+          <a:fontRef idx="minor">
+            <a:schemeClr val="lt1"/>
+          </a:fontRef>
+        </p:style>
+        <p:txBody>
+          <a:bodyPr rtlCol="0" anchor="ctr"/>
+          <a:lstStyle/>
+          <a:p>
+            <a:pPr algn="ctr"/>
+          </a:p>
+        </p:txBody>
+      </p:sp>
+      <p:sp>
+        <p:nvSpPr>
+          <p:cNvPr id="40" name="TextBox 39"/>
+          <p:cNvSpPr txBox="1"/>
+          <p:nvPr/>
+        </p:nvSpPr>
+        <p:spPr>
+          <a:xfrm>
+            <a:off x="640080" y="4297680"/>
+            <a:ext cx="7863840" cy="493776"/>
+          </a:xfrm>
+          <a:prstGeom prst="rect">
+            <a:avLst/>
+          </a:prstGeom>
+          <a:noFill/>
+        </p:spPr>
+        <p:txBody>
+          <a:bodyPr wrap="square" anchor="ctr">
+            <a:noAutofit/>
+          </a:bodyPr>
+          <a:lstStyle/>
+          <a:p>
+            <a:pPr algn="ctr"/>
+            <a:r>
+              <a:rPr sz="950" b="0" i="0">
+                <a:solidFill>
+                  <a:srgbClr val="C2D8E6"/>
+                </a:solidFill>
+                <a:latin typeface="Poppins"/>
+              </a:rPr>
+              <a:t>"The credentials, the team, and the reputation are already in place — what is missing is the system that lets the firm run on them instead of on Christine alone."</a:t>
+            </a:r>
+          </a:p>
+        </p:txBody>
+      </p:sp>
+      <p:sp>
+        <p:nvSpPr>
+          <p:cNvPr id="41" name="Rectangle 40"/>
+          <p:cNvSpPr/>
+          <p:nvPr/>
+        </p:nvSpPr>
+        <p:spPr>
+          <a:xfrm>
+            <a:off x="0" y="4818888"/>
+            <a:ext cx="9144000" cy="320040"/>
           </a:xfrm>
           <a:prstGeom prst="rect">
             <a:avLst/>
@@ -8521,1064 +7608,9 @@
           </a:p>
         </p:txBody>
       </p:sp>
-      <p:sp>
-        <p:nvSpPr>
-          <p:cNvPr id="16" name="TextBox 15"/>
-          <p:cNvSpPr txBox="1"/>
-          <p:nvPr/>
-        </p:nvSpPr>
-        <p:spPr>
-          <a:xfrm>
-            <a:off x="512064" y="2167128"/>
-            <a:ext cx="3621024" cy="182880"/>
-          </a:xfrm>
-          <a:prstGeom prst="rect">
-            <a:avLst/>
-          </a:prstGeom>
-          <a:noFill/>
-        </p:spPr>
-        <p:txBody>
-          <a:bodyPr wrap="square">
-            <a:noAutofit/>
-          </a:bodyPr>
-          <a:lstStyle/>
-          <a:p>
-            <a:pPr algn="l"/>
-            <a:r>
-              <a:rPr sz="750" b="1" i="0">
-                <a:solidFill>
-                  <a:srgbClr val="003A59"/>
-                </a:solidFill>
-                <a:latin typeface="Poppins"/>
-              </a:rPr>
-              <a:t>FCOO ADVISOR</a:t>
-            </a:r>
-          </a:p>
-        </p:txBody>
-      </p:sp>
-      <p:sp>
-        <p:nvSpPr>
-          <p:cNvPr id="17" name="TextBox 16"/>
-          <p:cNvSpPr txBox="1"/>
-          <p:nvPr/>
-        </p:nvSpPr>
-        <p:spPr>
-          <a:xfrm>
-            <a:off x="512064" y="2304288"/>
-            <a:ext cx="2377440" cy="530352"/>
-          </a:xfrm>
-          <a:prstGeom prst="rect">
-            <a:avLst/>
-          </a:prstGeom>
-          <a:noFill/>
-        </p:spPr>
-        <p:txBody>
-          <a:bodyPr wrap="square">
-            <a:noAutofit/>
-          </a:bodyPr>
-          <a:lstStyle/>
-          <a:p>
-            <a:pPr algn="l"/>
-            <a:r>
-              <a:rPr sz="3000" b="1" i="0">
-                <a:solidFill>
-                  <a:srgbClr val="003A59"/>
-                </a:solidFill>
-                <a:latin typeface="Poppins"/>
-              </a:rPr>
-              <a:t>$3,297</a:t>
-            </a:r>
-          </a:p>
-        </p:txBody>
-      </p:sp>
-      <p:sp>
-        <p:nvSpPr>
-          <p:cNvPr id="18" name="TextBox 17"/>
-          <p:cNvSpPr txBox="1"/>
-          <p:nvPr/>
-        </p:nvSpPr>
-        <p:spPr>
-          <a:xfrm>
-            <a:off x="1794891" y="2570988"/>
-            <a:ext cx="457200" cy="219456"/>
-          </a:xfrm>
-          <a:prstGeom prst="rect">
-            <a:avLst/>
-          </a:prstGeom>
-          <a:noFill/>
-        </p:spPr>
-        <p:txBody>
-          <a:bodyPr wrap="none">
-            <a:noAutofit/>
-          </a:bodyPr>
-          <a:lstStyle/>
-          <a:p>
-            <a:pPr algn="l"/>
-            <a:r>
-              <a:rPr sz="1000" b="0" i="0">
-                <a:solidFill>
-                  <a:srgbClr val="7C8D9B"/>
-                </a:solidFill>
-                <a:latin typeface="Poppins"/>
-              </a:rPr>
-              <a:t>/mo</a:t>
-            </a:r>
-          </a:p>
-        </p:txBody>
-      </p:sp>
-      <p:sp>
-        <p:nvSpPr>
-          <p:cNvPr id="19" name="TextBox 18"/>
-          <p:cNvSpPr txBox="1"/>
-          <p:nvPr/>
-        </p:nvSpPr>
-        <p:spPr>
-          <a:xfrm>
-            <a:off x="2305177" y="2570988"/>
-            <a:ext cx="1919351" cy="219456"/>
-          </a:xfrm>
-          <a:prstGeom prst="rect">
-            <a:avLst/>
-          </a:prstGeom>
-          <a:noFill/>
-        </p:spPr>
-        <p:txBody>
-          <a:bodyPr wrap="square">
-            <a:noAutofit/>
-          </a:bodyPr>
-          <a:lstStyle/>
-          <a:p>
-            <a:pPr algn="r"/>
-            <a:r>
-              <a:rPr sz="1000" b="0" i="0">
-                <a:solidFill>
-                  <a:srgbClr val="7C8D9B"/>
-                </a:solidFill>
-                <a:latin typeface="Poppins"/>
-              </a:rPr>
-              <a:t>$3,797/mo</a:t>
-            </a:r>
-          </a:p>
-        </p:txBody>
-      </p:sp>
-      <p:sp>
-        <p:nvSpPr>
-          <p:cNvPr id="20" name="TextBox 19"/>
-          <p:cNvSpPr txBox="1"/>
-          <p:nvPr/>
-        </p:nvSpPr>
-        <p:spPr>
-          <a:xfrm>
-            <a:off x="512064" y="2788920"/>
-            <a:ext cx="3621024" cy="201168"/>
-          </a:xfrm>
-          <a:prstGeom prst="rect">
-            <a:avLst/>
-          </a:prstGeom>
-          <a:noFill/>
-        </p:spPr>
-        <p:txBody>
-          <a:bodyPr wrap="square">
-            <a:noAutofit/>
-          </a:bodyPr>
-          <a:lstStyle/>
-          <a:p>
-            <a:pPr algn="l"/>
-            <a:r>
-              <a:rPr sz="850" b="0" i="0">
-                <a:solidFill>
-                  <a:srgbClr val="7C8D9B"/>
-                </a:solidFill>
-                <a:latin typeface="Poppins"/>
-              </a:rPr>
-              <a:t>Ops leadership · Weekly group coaching · Workshops</a:t>
-            </a:r>
-          </a:p>
-        </p:txBody>
-      </p:sp>
-      <p:sp>
-        <p:nvSpPr>
-          <p:cNvPr id="21" name="Rectangle 20"/>
-          <p:cNvSpPr/>
-          <p:nvPr/>
-        </p:nvSpPr>
-        <p:spPr>
-          <a:xfrm>
-            <a:off x="274320" y="3108960"/>
-            <a:ext cx="4041648" cy="658368"/>
-          </a:xfrm>
-          <a:prstGeom prst="rect">
-            <a:avLst/>
-          </a:prstGeom>
-          <a:solidFill>
-            <a:srgbClr val="003A59"/>
-          </a:solidFill>
-          <a:ln>
-            <a:solidFill>
-              <a:srgbClr val="FFFFFF"/>
-            </a:solidFill>
-          </a:ln>
-        </p:spPr>
-        <p:style>
-          <a:lnRef idx="1">
-            <a:schemeClr val="accent1"/>
-          </a:lnRef>
-          <a:fillRef idx="3">
-            <a:schemeClr val="accent1"/>
-          </a:fillRef>
-          <a:effectRef idx="2">
-            <a:schemeClr val="accent1"/>
-          </a:effectRef>
-          <a:fontRef idx="minor">
-            <a:schemeClr val="lt1"/>
-          </a:fontRef>
-        </p:style>
-        <p:txBody>
-          <a:bodyPr rtlCol="0" anchor="ctr"/>
-          <a:lstStyle/>
-          <a:p>
-            <a:pPr algn="ctr"/>
-          </a:p>
-        </p:txBody>
-      </p:sp>
-      <p:sp>
-        <p:nvSpPr>
-          <p:cNvPr id="22" name="Rectangle 21"/>
-          <p:cNvSpPr/>
-          <p:nvPr/>
-        </p:nvSpPr>
-        <p:spPr>
-          <a:xfrm>
-            <a:off x="274320" y="3108960"/>
-            <a:ext cx="36576" cy="658368"/>
-          </a:xfrm>
-          <a:prstGeom prst="rect">
-            <a:avLst/>
-          </a:prstGeom>
-          <a:solidFill>
-            <a:srgbClr val="69CD2B"/>
-          </a:solidFill>
-          <a:ln>
-            <a:solidFill>
-              <a:srgbClr val="FFFFFF"/>
-            </a:solidFill>
-          </a:ln>
-        </p:spPr>
-        <p:style>
-          <a:lnRef idx="1">
-            <a:schemeClr val="accent1"/>
-          </a:lnRef>
-          <a:fillRef idx="3">
-            <a:schemeClr val="accent1"/>
-          </a:fillRef>
-          <a:effectRef idx="2">
-            <a:schemeClr val="accent1"/>
-          </a:effectRef>
-          <a:fontRef idx="minor">
-            <a:schemeClr val="lt1"/>
-          </a:fontRef>
-        </p:style>
-        <p:txBody>
-          <a:bodyPr rtlCol="0" anchor="ctr"/>
-          <a:lstStyle/>
-          <a:p>
-            <a:pPr algn="ctr"/>
-          </a:p>
-        </p:txBody>
-      </p:sp>
-      <p:sp>
-        <p:nvSpPr>
-          <p:cNvPr id="23" name="TextBox 22"/>
-          <p:cNvSpPr txBox="1"/>
-          <p:nvPr/>
-        </p:nvSpPr>
-        <p:spPr>
-          <a:xfrm>
-            <a:off x="512064" y="3200400"/>
-            <a:ext cx="1554480" cy="164592"/>
-          </a:xfrm>
-          <a:prstGeom prst="rect">
-            <a:avLst/>
-          </a:prstGeom>
-          <a:noFill/>
-        </p:spPr>
-        <p:txBody>
-          <a:bodyPr wrap="square">
-            <a:noAutofit/>
-          </a:bodyPr>
-          <a:lstStyle/>
-          <a:p>
-            <a:pPr algn="l"/>
-            <a:r>
-              <a:rPr sz="750" b="1" i="0">
-                <a:solidFill>
-                  <a:srgbClr val="69CD2B"/>
-                </a:solidFill>
-                <a:latin typeface="Poppins"/>
-              </a:rPr>
-              <a:t>BUNDLE TOTAL</a:t>
-            </a:r>
-          </a:p>
-        </p:txBody>
-      </p:sp>
-      <p:sp>
-        <p:nvSpPr>
-          <p:cNvPr id="24" name="TextBox 23"/>
-          <p:cNvSpPr txBox="1"/>
-          <p:nvPr/>
-        </p:nvSpPr>
-        <p:spPr>
-          <a:xfrm>
-            <a:off x="512064" y="3346704"/>
-            <a:ext cx="2194560" cy="365760"/>
-          </a:xfrm>
-          <a:prstGeom prst="rect">
-            <a:avLst/>
-          </a:prstGeom>
-          <a:noFill/>
-        </p:spPr>
-        <p:txBody>
-          <a:bodyPr wrap="square">
-            <a:noAutofit/>
-          </a:bodyPr>
-          <a:lstStyle/>
-          <a:p>
-            <a:pPr algn="l"/>
-            <a:r>
-              <a:rPr sz="1700" b="1" i="0">
-                <a:solidFill>
-                  <a:srgbClr val="FFFFFF"/>
-                </a:solidFill>
-                <a:latin typeface="Poppins"/>
-              </a:rPr>
-              <a:t>$9,031 / mo</a:t>
-            </a:r>
-          </a:p>
-        </p:txBody>
-      </p:sp>
-      <p:sp>
-        <p:nvSpPr>
-          <p:cNvPr id="25" name="TextBox 24"/>
-          <p:cNvSpPr txBox="1"/>
-          <p:nvPr/>
-        </p:nvSpPr>
-        <p:spPr>
-          <a:xfrm>
-            <a:off x="1939823" y="3460051"/>
-            <a:ext cx="2284704" cy="201168"/>
-          </a:xfrm>
-          <a:prstGeom prst="rect">
-            <a:avLst/>
-          </a:prstGeom>
-          <a:noFill/>
-        </p:spPr>
-        <p:txBody>
-          <a:bodyPr wrap="square">
-            <a:noAutofit/>
-          </a:bodyPr>
-          <a:lstStyle/>
-          <a:p>
-            <a:pPr algn="r"/>
-            <a:r>
-              <a:rPr sz="850" b="0" i="0">
-                <a:solidFill>
-                  <a:srgbClr val="A9D68C"/>
-                </a:solidFill>
-                <a:latin typeface="Poppins"/>
-              </a:rPr>
-              <a:t>Save $1,000/mo by bundling</a:t>
-            </a:r>
-          </a:p>
-        </p:txBody>
-      </p:sp>
-      <p:sp>
-        <p:nvSpPr>
-          <p:cNvPr id="26" name="TextBox 25"/>
-          <p:cNvSpPr txBox="1"/>
-          <p:nvPr/>
-        </p:nvSpPr>
-        <p:spPr>
-          <a:xfrm>
-            <a:off x="4572000" y="1005840"/>
-            <a:ext cx="4297680" cy="164592"/>
-          </a:xfrm>
-          <a:prstGeom prst="rect">
-            <a:avLst/>
-          </a:prstGeom>
-          <a:noFill/>
-        </p:spPr>
-        <p:txBody>
-          <a:bodyPr wrap="square">
-            <a:noAutofit/>
-          </a:bodyPr>
-          <a:lstStyle/>
-          <a:p>
-            <a:pPr algn="l"/>
-            <a:r>
-              <a:rPr sz="750" b="1" i="0">
-                <a:solidFill>
-                  <a:srgbClr val="003A59"/>
-                </a:solidFill>
-                <a:latin typeface="Poppins"/>
-              </a:rPr>
-              <a:t>WHAT WE FOUND</a:t>
-            </a:r>
-          </a:p>
-        </p:txBody>
-      </p:sp>
-      <p:sp>
-        <p:nvSpPr>
-          <p:cNvPr id="27" name="Rectangle 26"/>
-          <p:cNvSpPr/>
-          <p:nvPr/>
-        </p:nvSpPr>
-        <p:spPr>
-          <a:xfrm>
-            <a:off x="4572000" y="1335024"/>
-            <a:ext cx="4297680" cy="265176"/>
-          </a:xfrm>
-          <a:prstGeom prst="rect">
-            <a:avLst/>
-          </a:prstGeom>
-          <a:solidFill>
-            <a:srgbClr val="EEF2F5"/>
-          </a:solidFill>
-          <a:ln>
-            <a:solidFill>
-              <a:srgbClr val="FFFFFF"/>
-            </a:solidFill>
-          </a:ln>
-        </p:spPr>
-        <p:style>
-          <a:lnRef idx="1">
-            <a:schemeClr val="accent1"/>
-          </a:lnRef>
-          <a:fillRef idx="3">
-            <a:schemeClr val="accent1"/>
-          </a:fillRef>
-          <a:effectRef idx="2">
-            <a:schemeClr val="accent1"/>
-          </a:effectRef>
-          <a:fontRef idx="minor">
-            <a:schemeClr val="lt1"/>
-          </a:fontRef>
-        </p:style>
-        <p:txBody>
-          <a:bodyPr rtlCol="0" anchor="ctr"/>
-          <a:lstStyle/>
-          <a:p>
-            <a:pPr algn="ctr"/>
-          </a:p>
-        </p:txBody>
-      </p:sp>
-      <p:sp>
-        <p:nvSpPr>
-          <p:cNvPr id="28" name="Rectangle 27"/>
-          <p:cNvSpPr/>
-          <p:nvPr/>
-        </p:nvSpPr>
-        <p:spPr>
-          <a:xfrm>
-            <a:off x="4700016" y="1417320"/>
-            <a:ext cx="91440" cy="91440"/>
-          </a:xfrm>
-          <a:prstGeom prst="rect">
-            <a:avLst/>
-          </a:prstGeom>
-          <a:solidFill>
-            <a:srgbClr val="69CD2B"/>
-          </a:solidFill>
-          <a:ln>
-            <a:solidFill>
-              <a:srgbClr val="FFFFFF"/>
-            </a:solidFill>
-          </a:ln>
-        </p:spPr>
-        <p:style>
-          <a:lnRef idx="1">
-            <a:schemeClr val="accent1"/>
-          </a:lnRef>
-          <a:fillRef idx="3">
-            <a:schemeClr val="accent1"/>
-          </a:fillRef>
-          <a:effectRef idx="2">
-            <a:schemeClr val="accent1"/>
-          </a:effectRef>
-          <a:fontRef idx="minor">
-            <a:schemeClr val="lt1"/>
-          </a:fontRef>
-        </p:style>
-        <p:txBody>
-          <a:bodyPr rtlCol="0" anchor="ctr"/>
-          <a:lstStyle/>
-          <a:p>
-            <a:pPr algn="ctr"/>
-          </a:p>
-        </p:txBody>
-      </p:sp>
-      <p:sp>
-        <p:nvSpPr>
-          <p:cNvPr id="29" name="TextBox 28"/>
-          <p:cNvSpPr txBox="1"/>
-          <p:nvPr/>
-        </p:nvSpPr>
-        <p:spPr>
-          <a:xfrm>
-            <a:off x="4846320" y="1335024"/>
-            <a:ext cx="1143000" cy="265176"/>
-          </a:xfrm>
-          <a:prstGeom prst="rect">
-            <a:avLst/>
-          </a:prstGeom>
-          <a:noFill/>
-        </p:spPr>
-        <p:txBody>
-          <a:bodyPr wrap="square" anchor="ctr">
-            <a:noAutofit/>
-          </a:bodyPr>
-          <a:lstStyle/>
-          <a:p>
-            <a:pPr algn="l"/>
-            <a:r>
-              <a:rPr sz="800" b="1" i="0">
-                <a:solidFill>
-                  <a:srgbClr val="003A59"/>
-                </a:solidFill>
-                <a:latin typeface="Poppins"/>
-              </a:rPr>
-              <a:t>Repetitive work</a:t>
-            </a:r>
-          </a:p>
-        </p:txBody>
-      </p:sp>
-      <p:sp>
-        <p:nvSpPr>
-          <p:cNvPr id="30" name="TextBox 29"/>
-          <p:cNvSpPr txBox="1"/>
-          <p:nvPr/>
-        </p:nvSpPr>
-        <p:spPr>
-          <a:xfrm>
-            <a:off x="5943600" y="1335024"/>
-            <a:ext cx="2926080" cy="265176"/>
-          </a:xfrm>
-          <a:prstGeom prst="rect">
-            <a:avLst/>
-          </a:prstGeom>
-          <a:noFill/>
-        </p:spPr>
-        <p:txBody>
-          <a:bodyPr wrap="square" anchor="ctr">
-            <a:noAutofit/>
-          </a:bodyPr>
-          <a:lstStyle/>
-          <a:p>
-            <a:pPr algn="l"/>
-            <a:r>
-              <a:rPr sz="800" b="0" i="0">
-                <a:solidFill>
-                  <a:srgbClr val="4A5C6B"/>
-                </a:solidFill>
-                <a:latin typeface="Poppins"/>
-              </a:rPr>
-              <a:t>Monthly AI skills, rolled out to all 12 users</a:t>
-            </a:r>
-          </a:p>
-        </p:txBody>
-      </p:sp>
-      <p:sp>
-        <p:nvSpPr>
-          <p:cNvPr id="31" name="Rectangle 30"/>
-          <p:cNvSpPr/>
-          <p:nvPr/>
-        </p:nvSpPr>
-        <p:spPr>
-          <a:xfrm>
-            <a:off x="4572000" y="1883664"/>
-            <a:ext cx="4297680" cy="265176"/>
-          </a:xfrm>
-          <a:prstGeom prst="rect">
-            <a:avLst/>
-          </a:prstGeom>
-          <a:solidFill>
-            <a:srgbClr val="FFFFFF"/>
-          </a:solidFill>
-          <a:ln>
-            <a:solidFill>
-              <a:srgbClr val="FFFFFF"/>
-            </a:solidFill>
-          </a:ln>
-        </p:spPr>
-        <p:style>
-          <a:lnRef idx="1">
-            <a:schemeClr val="accent1"/>
-          </a:lnRef>
-          <a:fillRef idx="3">
-            <a:schemeClr val="accent1"/>
-          </a:fillRef>
-          <a:effectRef idx="2">
-            <a:schemeClr val="accent1"/>
-          </a:effectRef>
-          <a:fontRef idx="minor">
-            <a:schemeClr val="lt1"/>
-          </a:fontRef>
-        </p:style>
-        <p:txBody>
-          <a:bodyPr rtlCol="0" anchor="ctr"/>
-          <a:lstStyle/>
-          <a:p>
-            <a:pPr algn="ctr"/>
-          </a:p>
-        </p:txBody>
-      </p:sp>
-      <p:sp>
-        <p:nvSpPr>
-          <p:cNvPr id="32" name="Rectangle 31"/>
-          <p:cNvSpPr/>
-          <p:nvPr/>
-        </p:nvSpPr>
-        <p:spPr>
-          <a:xfrm>
-            <a:off x="4700016" y="1965960"/>
-            <a:ext cx="91440" cy="91440"/>
-          </a:xfrm>
-          <a:prstGeom prst="rect">
-            <a:avLst/>
-          </a:prstGeom>
-          <a:solidFill>
-            <a:srgbClr val="0091C9"/>
-          </a:solidFill>
-          <a:ln>
-            <a:solidFill>
-              <a:srgbClr val="FFFFFF"/>
-            </a:solidFill>
-          </a:ln>
-        </p:spPr>
-        <p:style>
-          <a:lnRef idx="1">
-            <a:schemeClr val="accent1"/>
-          </a:lnRef>
-          <a:fillRef idx="3">
-            <a:schemeClr val="accent1"/>
-          </a:fillRef>
-          <a:effectRef idx="2">
-            <a:schemeClr val="accent1"/>
-          </a:effectRef>
-          <a:fontRef idx="minor">
-            <a:schemeClr val="lt1"/>
-          </a:fontRef>
-        </p:style>
-        <p:txBody>
-          <a:bodyPr rtlCol="0" anchor="ctr"/>
-          <a:lstStyle/>
-          <a:p>
-            <a:pPr algn="ctr"/>
-          </a:p>
-        </p:txBody>
-      </p:sp>
-      <p:sp>
-        <p:nvSpPr>
-          <p:cNvPr id="33" name="TextBox 32"/>
-          <p:cNvSpPr txBox="1"/>
-          <p:nvPr/>
-        </p:nvSpPr>
-        <p:spPr>
-          <a:xfrm>
-            <a:off x="4846320" y="1883664"/>
-            <a:ext cx="1143000" cy="265176"/>
-          </a:xfrm>
-          <a:prstGeom prst="rect">
-            <a:avLst/>
-          </a:prstGeom>
-          <a:noFill/>
-        </p:spPr>
-        <p:txBody>
-          <a:bodyPr wrap="square" anchor="ctr">
-            <a:noAutofit/>
-          </a:bodyPr>
-          <a:lstStyle/>
-          <a:p>
-            <a:pPr algn="l"/>
-            <a:r>
-              <a:rPr sz="800" b="1" i="0">
-                <a:solidFill>
-                  <a:srgbClr val="003A59"/>
-                </a:solidFill>
-                <a:latin typeface="Poppins"/>
-              </a:rPr>
-              <a:t>Escalations</a:t>
-            </a:r>
-          </a:p>
-        </p:txBody>
-      </p:sp>
-      <p:sp>
-        <p:nvSpPr>
-          <p:cNvPr id="34" name="TextBox 33"/>
-          <p:cNvSpPr txBox="1"/>
-          <p:nvPr/>
-        </p:nvSpPr>
-        <p:spPr>
-          <a:xfrm>
-            <a:off x="5943600" y="1883664"/>
-            <a:ext cx="2926080" cy="265176"/>
-          </a:xfrm>
-          <a:prstGeom prst="rect">
-            <a:avLst/>
-          </a:prstGeom>
-          <a:noFill/>
-        </p:spPr>
-        <p:txBody>
-          <a:bodyPr wrap="square" anchor="ctr">
-            <a:noAutofit/>
-          </a:bodyPr>
-          <a:lstStyle/>
-          <a:p>
-            <a:pPr algn="l"/>
-            <a:r>
-              <a:rPr sz="800" b="0" i="0">
-                <a:solidFill>
-                  <a:srgbClr val="4A5C6B"/>
-                </a:solidFill>
-                <a:latin typeface="Poppins"/>
-              </a:rPr>
-              <a:t>FCOO builds rhythm + role-level accountability</a:t>
-            </a:r>
-          </a:p>
-        </p:txBody>
-      </p:sp>
-      <p:sp>
-        <p:nvSpPr>
-          <p:cNvPr id="35" name="Rectangle 34"/>
-          <p:cNvSpPr/>
-          <p:nvPr/>
-        </p:nvSpPr>
-        <p:spPr>
-          <a:xfrm>
-            <a:off x="4572000" y="2432304"/>
-            <a:ext cx="4297680" cy="265176"/>
-          </a:xfrm>
-          <a:prstGeom prst="rect">
-            <a:avLst/>
-          </a:prstGeom>
-          <a:solidFill>
-            <a:srgbClr val="EEF2F5"/>
-          </a:solidFill>
-          <a:ln>
-            <a:solidFill>
-              <a:srgbClr val="FFFFFF"/>
-            </a:solidFill>
-          </a:ln>
-        </p:spPr>
-        <p:style>
-          <a:lnRef idx="1">
-            <a:schemeClr val="accent1"/>
-          </a:lnRef>
-          <a:fillRef idx="3">
-            <a:schemeClr val="accent1"/>
-          </a:fillRef>
-          <a:effectRef idx="2">
-            <a:schemeClr val="accent1"/>
-          </a:effectRef>
-          <a:fontRef idx="minor">
-            <a:schemeClr val="lt1"/>
-          </a:fontRef>
-        </p:style>
-        <p:txBody>
-          <a:bodyPr rtlCol="0" anchor="ctr"/>
-          <a:lstStyle/>
-          <a:p>
-            <a:pPr algn="ctr"/>
-          </a:p>
-        </p:txBody>
-      </p:sp>
-      <p:sp>
-        <p:nvSpPr>
-          <p:cNvPr id="36" name="Rectangle 35"/>
-          <p:cNvSpPr/>
-          <p:nvPr/>
-        </p:nvSpPr>
-        <p:spPr>
-          <a:xfrm>
-            <a:off x="4700016" y="2514600"/>
-            <a:ext cx="91440" cy="91440"/>
-          </a:xfrm>
-          <a:prstGeom prst="rect">
-            <a:avLst/>
-          </a:prstGeom>
-          <a:solidFill>
-            <a:srgbClr val="0091C9"/>
-          </a:solidFill>
-          <a:ln>
-            <a:solidFill>
-              <a:srgbClr val="FFFFFF"/>
-            </a:solidFill>
-          </a:ln>
-        </p:spPr>
-        <p:style>
-          <a:lnRef idx="1">
-            <a:schemeClr val="accent1"/>
-          </a:lnRef>
-          <a:fillRef idx="3">
-            <a:schemeClr val="accent1"/>
-          </a:fillRef>
-          <a:effectRef idx="2">
-            <a:schemeClr val="accent1"/>
-          </a:effectRef>
-          <a:fontRef idx="minor">
-            <a:schemeClr val="lt1"/>
-          </a:fontRef>
-        </p:style>
-        <p:txBody>
-          <a:bodyPr rtlCol="0" anchor="ctr"/>
-          <a:lstStyle/>
-          <a:p>
-            <a:pPr algn="ctr"/>
-          </a:p>
-        </p:txBody>
-      </p:sp>
-      <p:sp>
-        <p:nvSpPr>
-          <p:cNvPr id="37" name="TextBox 36"/>
-          <p:cNvSpPr txBox="1"/>
-          <p:nvPr/>
-        </p:nvSpPr>
-        <p:spPr>
-          <a:xfrm>
-            <a:off x="4846320" y="2432304"/>
-            <a:ext cx="1143000" cy="265176"/>
-          </a:xfrm>
-          <a:prstGeom prst="rect">
-            <a:avLst/>
-          </a:prstGeom>
-          <a:noFill/>
-        </p:spPr>
-        <p:txBody>
-          <a:bodyPr wrap="square" anchor="ctr">
-            <a:noAutofit/>
-          </a:bodyPr>
-          <a:lstStyle/>
-          <a:p>
-            <a:pPr algn="l"/>
-            <a:r>
-              <a:rPr sz="800" b="1" i="0">
-                <a:solidFill>
-                  <a:srgbClr val="003A59"/>
-                </a:solidFill>
-                <a:latin typeface="Poppins"/>
-              </a:rPr>
-              <a:t>Follow-up gaps</a:t>
-            </a:r>
-          </a:p>
-        </p:txBody>
-      </p:sp>
-      <p:sp>
-        <p:nvSpPr>
-          <p:cNvPr id="38" name="TextBox 37"/>
-          <p:cNvSpPr txBox="1"/>
-          <p:nvPr/>
-        </p:nvSpPr>
-        <p:spPr>
-          <a:xfrm>
-            <a:off x="5943600" y="2432304"/>
-            <a:ext cx="2926080" cy="265176"/>
-          </a:xfrm>
-          <a:prstGeom prst="rect">
-            <a:avLst/>
-          </a:prstGeom>
-          <a:noFill/>
-        </p:spPr>
-        <p:txBody>
-          <a:bodyPr wrap="square" anchor="ctr">
-            <a:noAutofit/>
-          </a:bodyPr>
-          <a:lstStyle/>
-          <a:p>
-            <a:pPr algn="l"/>
-            <a:r>
-              <a:rPr sz="800" b="0" i="0">
-                <a:solidFill>
-                  <a:srgbClr val="4A5C6B"/>
-                </a:solidFill>
-                <a:latin typeface="Poppins"/>
-              </a:rPr>
-              <a:t>Defined inquiry process, built as an automation</a:t>
-            </a:r>
-          </a:p>
-        </p:txBody>
-      </p:sp>
-      <p:sp>
-        <p:nvSpPr>
-          <p:cNvPr id="39" name="Rectangle 38"/>
-          <p:cNvSpPr/>
-          <p:nvPr/>
-        </p:nvSpPr>
-        <p:spPr>
-          <a:xfrm>
-            <a:off x="0" y="4261104"/>
-            <a:ext cx="9144000" cy="557784"/>
-          </a:xfrm>
-          <a:prstGeom prst="rect">
-            <a:avLst/>
-          </a:prstGeom>
-          <a:solidFill>
-            <a:srgbClr val="002A41"/>
-          </a:solidFill>
-          <a:ln>
-            <a:solidFill>
-              <a:srgbClr val="FFFFFF"/>
-            </a:solidFill>
-          </a:ln>
-        </p:spPr>
-        <p:style>
-          <a:lnRef idx="1">
-            <a:schemeClr val="accent1"/>
-          </a:lnRef>
-          <a:fillRef idx="3">
-            <a:schemeClr val="accent1"/>
-          </a:fillRef>
-          <a:effectRef idx="2">
-            <a:schemeClr val="accent1"/>
-          </a:effectRef>
-          <a:fontRef idx="minor">
-            <a:schemeClr val="lt1"/>
-          </a:fontRef>
-        </p:style>
-        <p:txBody>
-          <a:bodyPr rtlCol="0" anchor="ctr"/>
-          <a:lstStyle/>
-          <a:p>
-            <a:pPr algn="ctr"/>
-          </a:p>
-        </p:txBody>
-      </p:sp>
-      <p:sp>
-        <p:nvSpPr>
-          <p:cNvPr id="40" name="Rectangle 39"/>
-          <p:cNvSpPr/>
-          <p:nvPr/>
-        </p:nvSpPr>
-        <p:spPr>
-          <a:xfrm>
-            <a:off x="0" y="4261104"/>
-            <a:ext cx="9144000" cy="18288"/>
-          </a:xfrm>
-          <a:prstGeom prst="rect">
-            <a:avLst/>
-          </a:prstGeom>
-          <a:solidFill>
-            <a:srgbClr val="69CD2B"/>
-          </a:solidFill>
-          <a:ln>
-            <a:solidFill>
-              <a:srgbClr val="FFFFFF"/>
-            </a:solidFill>
-          </a:ln>
-        </p:spPr>
-        <p:style>
-          <a:lnRef idx="1">
-            <a:schemeClr val="accent1"/>
-          </a:lnRef>
-          <a:fillRef idx="3">
-            <a:schemeClr val="accent1"/>
-          </a:fillRef>
-          <a:effectRef idx="2">
-            <a:schemeClr val="accent1"/>
-          </a:effectRef>
-          <a:fontRef idx="minor">
-            <a:schemeClr val="lt1"/>
-          </a:fontRef>
-        </p:style>
-        <p:txBody>
-          <a:bodyPr rtlCol="0" anchor="ctr"/>
-          <a:lstStyle/>
-          <a:p>
-            <a:pPr algn="ctr"/>
-          </a:p>
-        </p:txBody>
-      </p:sp>
-      <p:sp>
-        <p:nvSpPr>
-          <p:cNvPr id="41" name="TextBox 40"/>
-          <p:cNvSpPr txBox="1"/>
-          <p:nvPr/>
-        </p:nvSpPr>
-        <p:spPr>
-          <a:xfrm>
-            <a:off x="640080" y="4297680"/>
-            <a:ext cx="7863840" cy="493776"/>
-          </a:xfrm>
-          <a:prstGeom prst="rect">
-            <a:avLst/>
-          </a:prstGeom>
-          <a:noFill/>
-        </p:spPr>
-        <p:txBody>
-          <a:bodyPr wrap="square" anchor="ctr">
-            <a:noAutofit/>
-          </a:bodyPr>
-          <a:lstStyle/>
-          <a:p>
-            <a:pPr algn="ctr"/>
-            <a:r>
-              <a:rPr sz="950" b="0" i="0">
-                <a:solidFill>
-                  <a:srgbClr val="C2D8E6"/>
-                </a:solidFill>
-                <a:latin typeface="Poppins"/>
-              </a:rPr>
-              <a:t>"The credentials, the team, and the reputation are already in place — what is missing is the system that lets the firm run on them instead of on Christine alone."</a:t>
-            </a:r>
-          </a:p>
-        </p:txBody>
-      </p:sp>
-      <p:sp>
-        <p:nvSpPr>
-          <p:cNvPr id="42" name="Rectangle 41"/>
-          <p:cNvSpPr/>
-          <p:nvPr/>
-        </p:nvSpPr>
-        <p:spPr>
-          <a:xfrm>
-            <a:off x="0" y="4818888"/>
-            <a:ext cx="9144000" cy="320040"/>
-          </a:xfrm>
-          <a:prstGeom prst="rect">
-            <a:avLst/>
-          </a:prstGeom>
-          <a:solidFill>
-            <a:srgbClr val="003A59"/>
-          </a:solidFill>
-          <a:ln>
-            <a:solidFill>
-              <a:srgbClr val="FFFFFF"/>
-            </a:solidFill>
-          </a:ln>
-        </p:spPr>
-        <p:style>
-          <a:lnRef idx="1">
-            <a:schemeClr val="accent1"/>
-          </a:lnRef>
-          <a:fillRef idx="3">
-            <a:schemeClr val="accent1"/>
-          </a:fillRef>
-          <a:effectRef idx="2">
-            <a:schemeClr val="accent1"/>
-          </a:effectRef>
-          <a:fontRef idx="minor">
-            <a:schemeClr val="lt1"/>
-          </a:fontRef>
-        </p:style>
-        <p:txBody>
-          <a:bodyPr rtlCol="0" anchor="ctr"/>
-          <a:lstStyle/>
-          <a:p>
-            <a:pPr algn="ctr"/>
-          </a:p>
-        </p:txBody>
-      </p:sp>
       <p:pic>
         <p:nvPicPr>
-          <p:cNvPr id="43" name="Picture 42" descr="smb_team_logo.png"/>
+          <p:cNvPr id="42" name="Picture 41" descr="smb_team_logo.png"/>
           <p:cNvPicPr>
             <a:picLocks noChangeAspect="1"/>
           </p:cNvPicPr>
@@ -9602,7 +7634,7 @@
       </p:pic>
       <p:sp>
         <p:nvSpPr>
-          <p:cNvPr id="44" name="TextBox 43"/>
+          <p:cNvPr id="43" name="TextBox 42"/>
           <p:cNvSpPr txBox="1"/>
           <p:nvPr/>
         </p:nvSpPr>
@@ -9637,7 +7669,7 @@
       </p:sp>
       <p:sp>
         <p:nvSpPr>
-          <p:cNvPr id="45" name="TextBox 44"/>
+          <p:cNvPr id="44" name="TextBox 43"/>
           <p:cNvSpPr txBox="1"/>
           <p:nvPr/>
         </p:nvSpPr>
